--- a/El Eterno Retorno/El-Eterno-Retorno.pptx
+++ b/El Eterno Retorno/El-Eterno-Retorno.pptx
@@ -2,21 +2,21 @@
 <file path=ppt/presentation.xml><?xml version="1.0" encoding="utf-8"?>
 <p:presentation xmlns:p="http://schemas.openxmlformats.org/presentationml/2006/main">
   <p:sldMasterIdLst>
-    <p:sldMasterId xmlns:r="http://schemas.openxmlformats.org/officeDocument/2006/relationships" id="2147483648" r:id="R490d150a1f764ad8"/>
+    <p:sldMasterId xmlns:r="http://schemas.openxmlformats.org/officeDocument/2006/relationships" id="2147483648" r:id="Re8aa14443c214660"/>
   </p:sldMasterIdLst>
   <p:notesMasterIdLst>
-    <p:notesMasterId xmlns:r="http://schemas.openxmlformats.org/officeDocument/2006/relationships" r:id="R9ee8b25b9c5c45d9"/>
+    <p:notesMasterId xmlns:r="http://schemas.openxmlformats.org/officeDocument/2006/relationships" r:id="R1739b050b23f4ca7"/>
   </p:notesMasterIdLst>
   <p:sldIdLst>
-    <p:sldId xmlns:r="http://schemas.openxmlformats.org/officeDocument/2006/relationships" id="256" r:id="R4affa9f617d844ef"/>
-    <p:sldId xmlns:r="http://schemas.openxmlformats.org/officeDocument/2006/relationships" id="257" r:id="Rda192a43509b42f1"/>
-    <p:sldId xmlns:r="http://schemas.openxmlformats.org/officeDocument/2006/relationships" id="258" r:id="Ra57084ab626542c7"/>
-    <p:sldId xmlns:r="http://schemas.openxmlformats.org/officeDocument/2006/relationships" id="259" r:id="Ra13c23d5f0144eea"/>
-    <p:sldId xmlns:r="http://schemas.openxmlformats.org/officeDocument/2006/relationships" id="260" r:id="R58783af45504455e"/>
-    <p:sldId xmlns:r="http://schemas.openxmlformats.org/officeDocument/2006/relationships" id="261" r:id="R29d289775c9443ee"/>
-    <p:sldId xmlns:r="http://schemas.openxmlformats.org/officeDocument/2006/relationships" id="262" r:id="R6aa5dc17a54045d9"/>
-    <p:sldId xmlns:r="http://schemas.openxmlformats.org/officeDocument/2006/relationships" id="263" r:id="R0dc367718a3b4cc0"/>
-    <p:sldId xmlns:r="http://schemas.openxmlformats.org/officeDocument/2006/relationships" id="264" r:id="R17e64d3831f2411a"/>
+    <p:sldId xmlns:r="http://schemas.openxmlformats.org/officeDocument/2006/relationships" id="256" r:id="R799bcf3d911d4f03"/>
+    <p:sldId xmlns:r="http://schemas.openxmlformats.org/officeDocument/2006/relationships" id="257" r:id="R1a62dc4f6fb5459e"/>
+    <p:sldId xmlns:r="http://schemas.openxmlformats.org/officeDocument/2006/relationships" id="258" r:id="R8c3d5631c95b4148"/>
+    <p:sldId xmlns:r="http://schemas.openxmlformats.org/officeDocument/2006/relationships" id="259" r:id="Rb0a15ed87cc34233"/>
+    <p:sldId xmlns:r="http://schemas.openxmlformats.org/officeDocument/2006/relationships" id="260" r:id="Rf937326cf2ca4c92"/>
+    <p:sldId xmlns:r="http://schemas.openxmlformats.org/officeDocument/2006/relationships" id="261" r:id="R20df1cd6fef34f48"/>
+    <p:sldId xmlns:r="http://schemas.openxmlformats.org/officeDocument/2006/relationships" id="262" r:id="Rb564721663e54edc"/>
+    <p:sldId xmlns:r="http://schemas.openxmlformats.org/officeDocument/2006/relationships" id="263" r:id="Rb424520c057e49df"/>
+    <p:sldId xmlns:r="http://schemas.openxmlformats.org/officeDocument/2006/relationships" id="264" r:id="R4f7b7e90936047b9"/>
   </p:sldIdLst>
   <p:sldSz cx="12192000" cy="6858000"/>
   <p:notesSz cx="6858000" cy="9144000"/>
@@ -1091,7 +1091,7 @@
   </p:cSld>
   <p:clrMap bg1="lt1" tx1="dk1" bg2="lt2" tx2="dk2" accent1="accent1" accent2="accent2" accent3="accent3" accent4="accent4" accent5="accent5" accent6="accent6" hlink="hlink" folHlink="folHlink"/>
   <p:sldLayoutIdLst>
-    <p:sldLayoutId xmlns:r="http://schemas.openxmlformats.org/officeDocument/2006/relationships" id="2147483649" r:id="R48516d58204747f5"/>
+    <p:sldLayoutId xmlns:r="http://schemas.openxmlformats.org/officeDocument/2006/relationships" id="2147483649" r:id="R8ca3e369624a4f08"/>
   </p:sldLayoutIdLst>
   <p:txStyles>
     <p:titleStyle>
@@ -1589,7 +1589,7 @@
           <p:cNvPr id="1" name="">
             <a:extLst xmlns:a="http://schemas.openxmlformats.org/drawingml/2006/main">
               <a:ext uri="{FF2B5EF4-FFF2-40B4-BE49-F238E27FC236}">
-                <a16:creationId xmlns:a16="http://schemas.microsoft.com/office/drawing/2014/main" id="{00850F93-F979-4FF8-BA67-786D03ECA48F}"/>
+                <a16:creationId xmlns:a16="http://schemas.microsoft.com/office/drawing/2014/main" id="{D6242897-9DC4-4F82-BF9F-A51D00E0C772}"/>
               </a:ext>
             </a:extLst>
           </p:cNvPr>
@@ -1622,7 +1622,7 @@
           <p:cNvPr id="2" name="">
             <a:extLst xmlns:a="http://schemas.openxmlformats.org/drawingml/2006/main">
               <a:ext uri="{FF2B5EF4-FFF2-40B4-BE49-F238E27FC236}">
-                <a16:creationId xmlns:a16="http://schemas.microsoft.com/office/drawing/2014/main" id="{88EEF9D1-1D19-4B1D-A70C-A82144DA4B4D}"/>
+                <a16:creationId xmlns:a16="http://schemas.microsoft.com/office/drawing/2014/main" id="{379691E5-A3ED-4895-8342-CD900AE99355}"/>
               </a:ext>
             </a:extLst>
           </p:cNvPr>
@@ -1655,7 +1655,7 @@
           <p:cNvPr id="3" name="">
             <a:extLst xmlns:a="http://schemas.openxmlformats.org/drawingml/2006/main">
               <a:ext uri="{FF2B5EF4-FFF2-40B4-BE49-F238E27FC236}">
-                <a16:creationId xmlns:a16="http://schemas.microsoft.com/office/drawing/2014/main" id="{FEA7F278-6E7F-4860-9ED0-5447A6D70993}"/>
+                <a16:creationId xmlns:a16="http://schemas.microsoft.com/office/drawing/2014/main" id="{0FF7AF21-59E7-4251-9B47-7EF3A6FF581B}"/>
               </a:ext>
             </a:extLst>
           </p:cNvPr>
@@ -1719,7 +1719,7 @@
           <p:cNvPr id="4" name="">
             <a:extLst xmlns:a="http://schemas.openxmlformats.org/drawingml/2006/main">
               <a:ext uri="{FF2B5EF4-FFF2-40B4-BE49-F238E27FC236}">
-                <a16:creationId xmlns:a16="http://schemas.microsoft.com/office/drawing/2014/main" id="{BCCB35A4-6932-4022-806B-544310A8CE6C}"/>
+                <a16:creationId xmlns:a16="http://schemas.microsoft.com/office/drawing/2014/main" id="{7D6D539A-F7FA-480E-9EBA-7DAF67AC9AC2}"/>
               </a:ext>
             </a:extLst>
           </p:cNvPr>
@@ -1829,7 +1829,7 @@
           <p:cNvPr id="5" name="">
             <a:extLst xmlns:a="http://schemas.openxmlformats.org/drawingml/2006/main">
               <a:ext uri="{FF2B5EF4-FFF2-40B4-BE49-F238E27FC236}">
-                <a16:creationId xmlns:a16="http://schemas.microsoft.com/office/drawing/2014/main" id="{223AB5E0-4B0D-42C4-9A81-6C5E226EC783}"/>
+                <a16:creationId xmlns:a16="http://schemas.microsoft.com/office/drawing/2014/main" id="{DDE4796A-6531-45B3-8B56-ECEBED0D5197}"/>
               </a:ext>
             </a:extLst>
           </p:cNvPr>
@@ -1893,7 +1893,7 @@
           <p:cNvPr id="6" name="">
             <a:extLst xmlns:a="http://schemas.openxmlformats.org/drawingml/2006/main">
               <a:ext uri="{FF2B5EF4-FFF2-40B4-BE49-F238E27FC236}">
-                <a16:creationId xmlns:a16="http://schemas.microsoft.com/office/drawing/2014/main" id="{097C8AE0-007B-4D86-AE81-6F11EDC421A7}"/>
+                <a16:creationId xmlns:a16="http://schemas.microsoft.com/office/drawing/2014/main" id="{E67F8AD2-6475-4B09-8848-F8CC53512D60}"/>
               </a:ext>
             </a:extLst>
           </p:cNvPr>
@@ -1926,7 +1926,7 @@
           <p:cNvPr id="7" name="">
             <a:extLst xmlns:a="http://schemas.openxmlformats.org/drawingml/2006/main">
               <a:ext uri="{FF2B5EF4-FFF2-40B4-BE49-F238E27FC236}">
-                <a16:creationId xmlns:a16="http://schemas.microsoft.com/office/drawing/2014/main" id="{FD0B0973-7C05-4725-9121-D0E95383BF57}"/>
+                <a16:creationId xmlns:a16="http://schemas.microsoft.com/office/drawing/2014/main" id="{9BA74BC5-B05A-4D92-9AEA-7CBEB607B7A1}"/>
               </a:ext>
             </a:extLst>
           </p:cNvPr>
@@ -1990,7 +1990,7 @@
           <p:cNvPr id="8" name="">
             <a:extLst xmlns:a="http://schemas.openxmlformats.org/drawingml/2006/main">
               <a:ext uri="{FF2B5EF4-FFF2-40B4-BE49-F238E27FC236}">
-                <a16:creationId xmlns:a16="http://schemas.microsoft.com/office/drawing/2014/main" id="{457BA492-986D-4312-BF11-18EAFDA8B74C}"/>
+                <a16:creationId xmlns:a16="http://schemas.microsoft.com/office/drawing/2014/main" id="{BF7B94A9-CF49-453F-8165-68770AB74D84}"/>
               </a:ext>
             </a:extLst>
           </p:cNvPr>
@@ -2054,7 +2054,7 @@
           <p:cNvPr id="9" name="">
             <a:extLst xmlns:a="http://schemas.openxmlformats.org/drawingml/2006/main">
               <a:ext uri="{FF2B5EF4-FFF2-40B4-BE49-F238E27FC236}">
-                <a16:creationId xmlns:a16="http://schemas.microsoft.com/office/drawing/2014/main" id="{1AC18177-E3DB-4995-AD0F-C30ED462461F}"/>
+                <a16:creationId xmlns:a16="http://schemas.microsoft.com/office/drawing/2014/main" id="{6BE1571A-D140-460B-AE0E-F2C98C8F3BF7}"/>
               </a:ext>
             </a:extLst>
           </p:cNvPr>
@@ -2118,7 +2118,7 @@
           <p:cNvPr id="10" name="">
             <a:extLst xmlns:a="http://schemas.openxmlformats.org/drawingml/2006/main">
               <a:ext uri="{FF2B5EF4-FFF2-40B4-BE49-F238E27FC236}">
-                <a16:creationId xmlns:a16="http://schemas.microsoft.com/office/drawing/2014/main" id="{7075ACF9-6870-4AAB-BD25-B459AB7B84A6}"/>
+                <a16:creationId xmlns:a16="http://schemas.microsoft.com/office/drawing/2014/main" id="{E38E491B-1035-4DE5-965B-C4C1EE9CDA55}"/>
               </a:ext>
             </a:extLst>
           </p:cNvPr>
@@ -2182,7 +2182,7 @@
           <p:cNvPr id="11" name="">
             <a:extLst xmlns:a="http://schemas.openxmlformats.org/drawingml/2006/main">
               <a:ext uri="{FF2B5EF4-FFF2-40B4-BE49-F238E27FC236}">
-                <a16:creationId xmlns:a16="http://schemas.microsoft.com/office/drawing/2014/main" id="{A96EFAF0-AE35-4413-B0AF-EF3BF2B2565A}"/>
+                <a16:creationId xmlns:a16="http://schemas.microsoft.com/office/drawing/2014/main" id="{6A25898E-DF0A-4641-9B03-F31AEFCE0FED}"/>
               </a:ext>
             </a:extLst>
           </p:cNvPr>
@@ -2246,7 +2246,7 @@
           <p:cNvPr id="12" name="">
             <a:extLst xmlns:a="http://schemas.openxmlformats.org/drawingml/2006/main">
               <a:ext uri="{FF2B5EF4-FFF2-40B4-BE49-F238E27FC236}">
-                <a16:creationId xmlns:a16="http://schemas.microsoft.com/office/drawing/2014/main" id="{C1171C51-CE9E-44D3-9683-88D2502840B2}"/>
+                <a16:creationId xmlns:a16="http://schemas.microsoft.com/office/drawing/2014/main" id="{6C41D989-796E-4099-AF4F-B12847DED10B}"/>
               </a:ext>
             </a:extLst>
           </p:cNvPr>
@@ -2310,7 +2310,7 @@
           <p:cNvPr id="13" name="">
             <a:extLst xmlns:a="http://schemas.openxmlformats.org/drawingml/2006/main">
               <a:ext uri="{FF2B5EF4-FFF2-40B4-BE49-F238E27FC236}">
-                <a16:creationId xmlns:a16="http://schemas.microsoft.com/office/drawing/2014/main" id="{3FA8B513-308B-4D5B-9EAA-536637BE1A9C}"/>
+                <a16:creationId xmlns:a16="http://schemas.microsoft.com/office/drawing/2014/main" id="{895555BB-7995-439F-828F-1B19FE2F8820}"/>
               </a:ext>
             </a:extLst>
           </p:cNvPr>
@@ -2374,7 +2374,7 @@
           <p:cNvPr id="14" name="">
             <a:extLst xmlns:a="http://schemas.openxmlformats.org/drawingml/2006/main">
               <a:ext uri="{FF2B5EF4-FFF2-40B4-BE49-F238E27FC236}">
-                <a16:creationId xmlns:a16="http://schemas.microsoft.com/office/drawing/2014/main" id="{0EA195C9-A48F-40CB-B77B-DFEEE29ED20D}"/>
+                <a16:creationId xmlns:a16="http://schemas.microsoft.com/office/drawing/2014/main" id="{0D5C1067-BD50-4E7A-A723-254C189BF9E6}"/>
               </a:ext>
             </a:extLst>
           </p:cNvPr>
@@ -2438,7 +2438,7 @@
           <p:cNvPr id="15" name="">
             <a:extLst xmlns:a="http://schemas.openxmlformats.org/drawingml/2006/main">
               <a:ext uri="{FF2B5EF4-FFF2-40B4-BE49-F238E27FC236}">
-                <a16:creationId xmlns:a16="http://schemas.microsoft.com/office/drawing/2014/main" id="{76D63935-D6DB-4F1F-94E4-77833C8B3702}"/>
+                <a16:creationId xmlns:a16="http://schemas.microsoft.com/office/drawing/2014/main" id="{EE0F0EB8-AF68-498B-8CFE-BB977B3AE8E5}"/>
               </a:ext>
             </a:extLst>
           </p:cNvPr>
@@ -2471,7 +2471,7 @@
           <p:cNvPr id="16" name="">
             <a:extLst xmlns:a="http://schemas.openxmlformats.org/drawingml/2006/main">
               <a:ext uri="{FF2B5EF4-FFF2-40B4-BE49-F238E27FC236}">
-                <a16:creationId xmlns:a16="http://schemas.microsoft.com/office/drawing/2014/main" id="{F32294A5-A925-4713-BECA-AAFC78399B87}"/>
+                <a16:creationId xmlns:a16="http://schemas.microsoft.com/office/drawing/2014/main" id="{4AE314F5-4CA7-4111-A7C1-9A58F1DDD5A8}"/>
               </a:ext>
             </a:extLst>
           </p:cNvPr>
@@ -2535,7 +2535,7 @@
           <p:cNvPr id="17" name="">
             <a:extLst xmlns:a="http://schemas.openxmlformats.org/drawingml/2006/main">
               <a:ext uri="{FF2B5EF4-FFF2-40B4-BE49-F238E27FC236}">
-                <a16:creationId xmlns:a16="http://schemas.microsoft.com/office/drawing/2014/main" id="{CA08FE3D-D81E-4505-AD83-F83953C4E377}"/>
+                <a16:creationId xmlns:a16="http://schemas.microsoft.com/office/drawing/2014/main" id="{340FE2E7-84E8-425D-A414-3F9440B6CA7D}"/>
               </a:ext>
             </a:extLst>
           </p:cNvPr>
@@ -2599,7 +2599,7 @@
           <p:cNvPr id="18" name="">
             <a:extLst xmlns:a="http://schemas.openxmlformats.org/drawingml/2006/main">
               <a:ext uri="{FF2B5EF4-FFF2-40B4-BE49-F238E27FC236}">
-                <a16:creationId xmlns:a16="http://schemas.microsoft.com/office/drawing/2014/main" id="{06FA3FEC-51BD-4700-AFDD-F10A91A23BD0}"/>
+                <a16:creationId xmlns:a16="http://schemas.microsoft.com/office/drawing/2014/main" id="{105625A6-A3A5-4931-98CA-07D28ABCC70F}"/>
               </a:ext>
             </a:extLst>
           </p:cNvPr>
@@ -2632,7 +2632,7 @@
           <p:cNvPr id="19" name="">
             <a:extLst xmlns:a="http://schemas.openxmlformats.org/drawingml/2006/main">
               <a:ext uri="{FF2B5EF4-FFF2-40B4-BE49-F238E27FC236}">
-                <a16:creationId xmlns:a16="http://schemas.microsoft.com/office/drawing/2014/main" id="{D46B5FC7-9952-4627-BCD8-58740C6EBD92}"/>
+                <a16:creationId xmlns:a16="http://schemas.microsoft.com/office/drawing/2014/main" id="{8377696A-FE9D-47C6-9B20-BAB10C6FA04A}"/>
               </a:ext>
             </a:extLst>
           </p:cNvPr>
@@ -2696,7 +2696,7 @@
           <p:cNvPr id="20" name="">
             <a:extLst xmlns:a="http://schemas.openxmlformats.org/drawingml/2006/main">
               <a:ext uri="{FF2B5EF4-FFF2-40B4-BE49-F238E27FC236}">
-                <a16:creationId xmlns:a16="http://schemas.microsoft.com/office/drawing/2014/main" id="{C41AF420-AB50-491E-BA44-A9C1E1E9A1F0}"/>
+                <a16:creationId xmlns:a16="http://schemas.microsoft.com/office/drawing/2014/main" id="{3224AD39-D9F1-4371-A2D0-253DB8178E47}"/>
               </a:ext>
             </a:extLst>
           </p:cNvPr>
@@ -2760,7 +2760,7 @@
           <p:cNvPr id="21" name="">
             <a:extLst xmlns:a="http://schemas.openxmlformats.org/drawingml/2006/main">
               <a:ext uri="{FF2B5EF4-FFF2-40B4-BE49-F238E27FC236}">
-                <a16:creationId xmlns:a16="http://schemas.microsoft.com/office/drawing/2014/main" id="{26248FF2-C270-482E-B753-D7467EF67895}"/>
+                <a16:creationId xmlns:a16="http://schemas.microsoft.com/office/drawing/2014/main" id="{C5ADDC54-0A2B-41B3-A1FF-78C7642369E5}"/>
               </a:ext>
             </a:extLst>
           </p:cNvPr>
@@ -2793,7 +2793,7 @@
           <p:cNvPr id="22" name="">
             <a:extLst xmlns:a="http://schemas.openxmlformats.org/drawingml/2006/main">
               <a:ext uri="{FF2B5EF4-FFF2-40B4-BE49-F238E27FC236}">
-                <a16:creationId xmlns:a16="http://schemas.microsoft.com/office/drawing/2014/main" id="{B0820DA7-A9BA-4F7B-92B4-B5FB65B34173}"/>
+                <a16:creationId xmlns:a16="http://schemas.microsoft.com/office/drawing/2014/main" id="{E38E6D87-41BD-470C-B2A9-6AAEA856BB46}"/>
               </a:ext>
             </a:extLst>
           </p:cNvPr>
@@ -2857,7 +2857,7 @@
           <p:cNvPr id="23" name="">
             <a:extLst xmlns:a="http://schemas.openxmlformats.org/drawingml/2006/main">
               <a:ext uri="{FF2B5EF4-FFF2-40B4-BE49-F238E27FC236}">
-                <a16:creationId xmlns:a16="http://schemas.microsoft.com/office/drawing/2014/main" id="{91774877-715D-4F85-8294-0ABE1630D454}"/>
+                <a16:creationId xmlns:a16="http://schemas.microsoft.com/office/drawing/2014/main" id="{9C28DBE7-B8FB-4DD8-B256-D685046DD966}"/>
               </a:ext>
             </a:extLst>
           </p:cNvPr>
@@ -2921,7 +2921,7 @@
           <p:cNvPr id="24" name="">
             <a:extLst xmlns:a="http://schemas.openxmlformats.org/drawingml/2006/main">
               <a:ext uri="{FF2B5EF4-FFF2-40B4-BE49-F238E27FC236}">
-                <a16:creationId xmlns:a16="http://schemas.microsoft.com/office/drawing/2014/main" id="{2AAE23B4-F904-418E-890B-1B2BC3186C1B}"/>
+                <a16:creationId xmlns:a16="http://schemas.microsoft.com/office/drawing/2014/main" id="{97A59B02-9A6D-4D10-84E3-2BAB0FDF8432}"/>
               </a:ext>
             </a:extLst>
           </p:cNvPr>
@@ -2954,7 +2954,7 @@
           <p:cNvPr id="25" name="">
             <a:extLst xmlns:a="http://schemas.openxmlformats.org/drawingml/2006/main">
               <a:ext uri="{FF2B5EF4-FFF2-40B4-BE49-F238E27FC236}">
-                <a16:creationId xmlns:a16="http://schemas.microsoft.com/office/drawing/2014/main" id="{B280D4B4-4286-4E9E-906A-DC31FAD61E04}"/>
+                <a16:creationId xmlns:a16="http://schemas.microsoft.com/office/drawing/2014/main" id="{BA76B028-1913-4D42-B347-89B4CE8AC154}"/>
               </a:ext>
             </a:extLst>
           </p:cNvPr>
@@ -3018,7 +3018,7 @@
           <p:cNvPr id="26" name="">
             <a:extLst xmlns:a="http://schemas.openxmlformats.org/drawingml/2006/main">
               <a:ext uri="{FF2B5EF4-FFF2-40B4-BE49-F238E27FC236}">
-                <a16:creationId xmlns:a16="http://schemas.microsoft.com/office/drawing/2014/main" id="{D3D8544C-1428-4226-83E2-4DC1B2CFE4FB}"/>
+                <a16:creationId xmlns:a16="http://schemas.microsoft.com/office/drawing/2014/main" id="{6840AE79-72FE-46F1-A808-4A07495B55DF}"/>
               </a:ext>
             </a:extLst>
           </p:cNvPr>
@@ -3082,7 +3082,7 @@
           <p:cNvPr id="27" name="">
             <a:extLst xmlns:a="http://schemas.openxmlformats.org/drawingml/2006/main">
               <a:ext uri="{FF2B5EF4-FFF2-40B4-BE49-F238E27FC236}">
-                <a16:creationId xmlns:a16="http://schemas.microsoft.com/office/drawing/2014/main" id="{538BAD40-7D5E-46B4-8321-F9FE58D4C895}"/>
+                <a16:creationId xmlns:a16="http://schemas.microsoft.com/office/drawing/2014/main" id="{FCB3309B-6035-43B1-9F70-603D948F815E}"/>
               </a:ext>
             </a:extLst>
           </p:cNvPr>
@@ -3146,7 +3146,7 @@
           <p:cNvPr id="28" name="">
             <a:extLst xmlns:a="http://schemas.openxmlformats.org/drawingml/2006/main">
               <a:ext uri="{FF2B5EF4-FFF2-40B4-BE49-F238E27FC236}">
-                <a16:creationId xmlns:a16="http://schemas.microsoft.com/office/drawing/2014/main" id="{AB68AE5A-BB24-4358-9DDC-7FEA9049775C}"/>
+                <a16:creationId xmlns:a16="http://schemas.microsoft.com/office/drawing/2014/main" id="{B4C56369-8345-4236-BB38-B4DF5A073942}"/>
               </a:ext>
             </a:extLst>
           </p:cNvPr>
@@ -3208,7 +3208,7 @@
     </p:spTree>
     <p:extLst>
       <p:ext uri="{BB962C8B-B14F-4D97-AF65-F5344CB8AC3E}">
-        <p14:creationId xmlns:p14="http://schemas.microsoft.com/office/powerpoint/2010/main" val="617954446"/>
+        <p14:creationId xmlns:p14="http://schemas.microsoft.com/office/powerpoint/2010/main" val="553231078"/>
       </p:ext>
     </p:extLst>
   </p:cSld>
@@ -3232,7 +3232,7 @@
           <p:cNvPr id="1" name="">
             <a:extLst xmlns:a="http://schemas.openxmlformats.org/drawingml/2006/main">
               <a:ext uri="{FF2B5EF4-FFF2-40B4-BE49-F238E27FC236}">
-                <a16:creationId xmlns:a16="http://schemas.microsoft.com/office/drawing/2014/main" id="{E1D5E27C-D31B-47B4-8745-E34BD9EF93DD}"/>
+                <a16:creationId xmlns:a16="http://schemas.microsoft.com/office/drawing/2014/main" id="{878002B8-1424-4613-BF3A-0DD45D36A723}"/>
               </a:ext>
             </a:extLst>
           </p:cNvPr>
@@ -3265,7 +3265,7 @@
           <p:cNvPr id="2" name="">
             <a:extLst xmlns:a="http://schemas.openxmlformats.org/drawingml/2006/main">
               <a:ext uri="{FF2B5EF4-FFF2-40B4-BE49-F238E27FC236}">
-                <a16:creationId xmlns:a16="http://schemas.microsoft.com/office/drawing/2014/main" id="{F08FB8F4-CD68-4365-A4B8-14BFC6A1BF53}"/>
+                <a16:creationId xmlns:a16="http://schemas.microsoft.com/office/drawing/2014/main" id="{1EAFB73E-A42C-4801-90A9-BBE574E9093A}"/>
               </a:ext>
             </a:extLst>
           </p:cNvPr>
@@ -3298,7 +3298,7 @@
           <p:cNvPr id="3" name="">
             <a:extLst xmlns:a="http://schemas.openxmlformats.org/drawingml/2006/main">
               <a:ext uri="{FF2B5EF4-FFF2-40B4-BE49-F238E27FC236}">
-                <a16:creationId xmlns:a16="http://schemas.microsoft.com/office/drawing/2014/main" id="{2AE4D256-DF52-420F-81B3-3FF6BDD62D88}"/>
+                <a16:creationId xmlns:a16="http://schemas.microsoft.com/office/drawing/2014/main" id="{C7D8CF90-1687-47A6-A283-98479B712C52}"/>
               </a:ext>
             </a:extLst>
           </p:cNvPr>
@@ -3362,7 +3362,7 @@
           <p:cNvPr id="4" name="">
             <a:extLst xmlns:a="http://schemas.openxmlformats.org/drawingml/2006/main">
               <a:ext uri="{FF2B5EF4-FFF2-40B4-BE49-F238E27FC236}">
-                <a16:creationId xmlns:a16="http://schemas.microsoft.com/office/drawing/2014/main" id="{168FC318-D163-4C75-AD74-AEB208D503CD}"/>
+                <a16:creationId xmlns:a16="http://schemas.microsoft.com/office/drawing/2014/main" id="{264F179E-1112-4FC7-9353-8DC7087F7E6A}"/>
               </a:ext>
             </a:extLst>
           </p:cNvPr>
@@ -3426,7 +3426,7 @@
           <p:cNvPr id="5" name="">
             <a:extLst xmlns:a="http://schemas.openxmlformats.org/drawingml/2006/main">
               <a:ext uri="{FF2B5EF4-FFF2-40B4-BE49-F238E27FC236}">
-                <a16:creationId xmlns:a16="http://schemas.microsoft.com/office/drawing/2014/main" id="{997E895B-0F9E-4F9C-9A08-EDC1B215CAFC}"/>
+                <a16:creationId xmlns:a16="http://schemas.microsoft.com/office/drawing/2014/main" id="{8381B516-DFE3-4A4A-B110-15F6CE35BA26}"/>
               </a:ext>
             </a:extLst>
           </p:cNvPr>
@@ -3459,7 +3459,7 @@
           <p:cNvPr id="6" name="">
             <a:extLst xmlns:a="http://schemas.openxmlformats.org/drawingml/2006/main">
               <a:ext uri="{FF2B5EF4-FFF2-40B4-BE49-F238E27FC236}">
-                <a16:creationId xmlns:a16="http://schemas.microsoft.com/office/drawing/2014/main" id="{4D4341A1-B0C0-45E9-9690-7A2A28741BD0}"/>
+                <a16:creationId xmlns:a16="http://schemas.microsoft.com/office/drawing/2014/main" id="{893CF7B2-3620-48BD-8A42-C3E392BD0733}"/>
               </a:ext>
             </a:extLst>
           </p:cNvPr>
@@ -3523,7 +3523,7 @@
           <p:cNvPr id="7" name="">
             <a:extLst xmlns:a="http://schemas.openxmlformats.org/drawingml/2006/main">
               <a:ext uri="{FF2B5EF4-FFF2-40B4-BE49-F238E27FC236}">
-                <a16:creationId xmlns:a16="http://schemas.microsoft.com/office/drawing/2014/main" id="{C5DBB805-A853-40A5-A1A3-7745941DEE32}"/>
+                <a16:creationId xmlns:a16="http://schemas.microsoft.com/office/drawing/2014/main" id="{F80194DB-DAAA-4B39-8DEE-4EB75BC9CBC7}"/>
               </a:ext>
             </a:extLst>
           </p:cNvPr>
@@ -3556,7 +3556,7 @@
           <p:cNvPr id="8" name="">
             <a:extLst xmlns:a="http://schemas.openxmlformats.org/drawingml/2006/main">
               <a:ext uri="{FF2B5EF4-FFF2-40B4-BE49-F238E27FC236}">
-                <a16:creationId xmlns:a16="http://schemas.microsoft.com/office/drawing/2014/main" id="{E3767638-8C5E-4D4F-B36F-1123E2306CFB}"/>
+                <a16:creationId xmlns:a16="http://schemas.microsoft.com/office/drawing/2014/main" id="{6EE75960-BC06-4ED2-AF5F-0EC95D72E403}"/>
               </a:ext>
             </a:extLst>
           </p:cNvPr>
@@ -3620,7 +3620,7 @@
           <p:cNvPr id="9" name="">
             <a:extLst xmlns:a="http://schemas.openxmlformats.org/drawingml/2006/main">
               <a:ext uri="{FF2B5EF4-FFF2-40B4-BE49-F238E27FC236}">
-                <a16:creationId xmlns:a16="http://schemas.microsoft.com/office/drawing/2014/main" id="{E6F12519-8F07-4813-940E-4A48E65A12D0}"/>
+                <a16:creationId xmlns:a16="http://schemas.microsoft.com/office/drawing/2014/main" id="{498B26ED-84AB-468D-9793-07B5F2BA263A}"/>
               </a:ext>
             </a:extLst>
           </p:cNvPr>
@@ -3653,7 +3653,7 @@
           <p:cNvPr id="10" name="">
             <a:extLst xmlns:a="http://schemas.openxmlformats.org/drawingml/2006/main">
               <a:ext uri="{FF2B5EF4-FFF2-40B4-BE49-F238E27FC236}">
-                <a16:creationId xmlns:a16="http://schemas.microsoft.com/office/drawing/2014/main" id="{DC3D4F73-ED25-4559-B949-E1844C540350}"/>
+                <a16:creationId xmlns:a16="http://schemas.microsoft.com/office/drawing/2014/main" id="{DD9E608C-3A5C-4DF6-B2D0-01F7237F2C28}"/>
               </a:ext>
             </a:extLst>
           </p:cNvPr>
@@ -3717,7 +3717,7 @@
           <p:cNvPr id="11" name="">
             <a:extLst xmlns:a="http://schemas.openxmlformats.org/drawingml/2006/main">
               <a:ext uri="{FF2B5EF4-FFF2-40B4-BE49-F238E27FC236}">
-                <a16:creationId xmlns:a16="http://schemas.microsoft.com/office/drawing/2014/main" id="{1886039A-E735-448F-82FB-29426882B726}"/>
+                <a16:creationId xmlns:a16="http://schemas.microsoft.com/office/drawing/2014/main" id="{726A416F-308C-4A6D-A855-06A513EA5164}"/>
               </a:ext>
             </a:extLst>
           </p:cNvPr>
@@ -3750,7 +3750,7 @@
           <p:cNvPr id="12" name="">
             <a:extLst xmlns:a="http://schemas.openxmlformats.org/drawingml/2006/main">
               <a:ext uri="{FF2B5EF4-FFF2-40B4-BE49-F238E27FC236}">
-                <a16:creationId xmlns:a16="http://schemas.microsoft.com/office/drawing/2014/main" id="{8550A7E2-E21C-4E5A-ABCC-A2D26E14AFCC}"/>
+                <a16:creationId xmlns:a16="http://schemas.microsoft.com/office/drawing/2014/main" id="{17B776A6-D8D2-4620-8F34-7EFBD7ED78CD}"/>
               </a:ext>
             </a:extLst>
           </p:cNvPr>
@@ -3814,7 +3814,7 @@
           <p:cNvPr id="13" name="">
             <a:extLst xmlns:a="http://schemas.openxmlformats.org/drawingml/2006/main">
               <a:ext uri="{FF2B5EF4-FFF2-40B4-BE49-F238E27FC236}">
-                <a16:creationId xmlns:a16="http://schemas.microsoft.com/office/drawing/2014/main" id="{5FC139BF-265F-4B76-B297-344DBA6D59F8}"/>
+                <a16:creationId xmlns:a16="http://schemas.microsoft.com/office/drawing/2014/main" id="{555DEB9A-CE19-450E-B30C-318C388C848A}"/>
               </a:ext>
             </a:extLst>
           </p:cNvPr>
@@ -3847,7 +3847,7 @@
           <p:cNvPr id="14" name="">
             <a:extLst xmlns:a="http://schemas.openxmlformats.org/drawingml/2006/main">
               <a:ext uri="{FF2B5EF4-FFF2-40B4-BE49-F238E27FC236}">
-                <a16:creationId xmlns:a16="http://schemas.microsoft.com/office/drawing/2014/main" id="{A4E96103-DE78-42A3-B017-0C0A31988BB8}"/>
+                <a16:creationId xmlns:a16="http://schemas.microsoft.com/office/drawing/2014/main" id="{B7D4E77D-CB70-4F88-800F-970E84C82552}"/>
               </a:ext>
             </a:extLst>
           </p:cNvPr>
@@ -3911,7 +3911,7 @@
           <p:cNvPr id="15" name="">
             <a:extLst xmlns:a="http://schemas.openxmlformats.org/drawingml/2006/main">
               <a:ext uri="{FF2B5EF4-FFF2-40B4-BE49-F238E27FC236}">
-                <a16:creationId xmlns:a16="http://schemas.microsoft.com/office/drawing/2014/main" id="{8956E7BA-3C9D-4DF8-8ACF-CCB9C1D53108}"/>
+                <a16:creationId xmlns:a16="http://schemas.microsoft.com/office/drawing/2014/main" id="{A91D7F8D-8E50-4D92-A7CC-BA01F5BFFFC5}"/>
               </a:ext>
             </a:extLst>
           </p:cNvPr>
@@ -3944,7 +3944,7 @@
           <p:cNvPr id="16" name="">
             <a:extLst xmlns:a="http://schemas.openxmlformats.org/drawingml/2006/main">
               <a:ext uri="{FF2B5EF4-FFF2-40B4-BE49-F238E27FC236}">
-                <a16:creationId xmlns:a16="http://schemas.microsoft.com/office/drawing/2014/main" id="{310B1263-2053-4F98-84CB-B8B75E2E0F34}"/>
+                <a16:creationId xmlns:a16="http://schemas.microsoft.com/office/drawing/2014/main" id="{BF268CF9-953D-49D8-93DD-C68E125028A8}"/>
               </a:ext>
             </a:extLst>
           </p:cNvPr>
@@ -4008,7 +4008,7 @@
           <p:cNvPr id="17" name="">
             <a:extLst xmlns:a="http://schemas.openxmlformats.org/drawingml/2006/main">
               <a:ext uri="{FF2B5EF4-FFF2-40B4-BE49-F238E27FC236}">
-                <a16:creationId xmlns:a16="http://schemas.microsoft.com/office/drawing/2014/main" id="{3D095576-2610-462A-8F41-A36F88CBC04F}"/>
+                <a16:creationId xmlns:a16="http://schemas.microsoft.com/office/drawing/2014/main" id="{5151D5A4-A7B7-4684-A393-D54ED3A55A80}"/>
               </a:ext>
             </a:extLst>
           </p:cNvPr>
@@ -4041,7 +4041,7 @@
           <p:cNvPr id="18" name="">
             <a:extLst xmlns:a="http://schemas.openxmlformats.org/drawingml/2006/main">
               <a:ext uri="{FF2B5EF4-FFF2-40B4-BE49-F238E27FC236}">
-                <a16:creationId xmlns:a16="http://schemas.microsoft.com/office/drawing/2014/main" id="{12A9646C-F906-4627-A979-3958E22B276D}"/>
+                <a16:creationId xmlns:a16="http://schemas.microsoft.com/office/drawing/2014/main" id="{7A26C314-39EE-4984-A3A9-9345DD676DAD}"/>
               </a:ext>
             </a:extLst>
           </p:cNvPr>
@@ -4105,7 +4105,7 @@
           <p:cNvPr id="19" name="">
             <a:extLst xmlns:a="http://schemas.openxmlformats.org/drawingml/2006/main">
               <a:ext uri="{FF2B5EF4-FFF2-40B4-BE49-F238E27FC236}">
-                <a16:creationId xmlns:a16="http://schemas.microsoft.com/office/drawing/2014/main" id="{BCB12ED7-E441-4214-8F80-911B7FD1009B}"/>
+                <a16:creationId xmlns:a16="http://schemas.microsoft.com/office/drawing/2014/main" id="{71C670DE-5722-4DCD-B40E-79ACF1E85109}"/>
               </a:ext>
             </a:extLst>
           </p:cNvPr>
@@ -4138,7 +4138,7 @@
           <p:cNvPr id="20" name="">
             <a:extLst xmlns:a="http://schemas.openxmlformats.org/drawingml/2006/main">
               <a:ext uri="{FF2B5EF4-FFF2-40B4-BE49-F238E27FC236}">
-                <a16:creationId xmlns:a16="http://schemas.microsoft.com/office/drawing/2014/main" id="{6AED07B2-19DB-4EF5-859A-0D67A0EF9BAE}"/>
+                <a16:creationId xmlns:a16="http://schemas.microsoft.com/office/drawing/2014/main" id="{A4FCC5A6-D4A6-4E37-83C4-16E2DD5C2F9C}"/>
               </a:ext>
             </a:extLst>
           </p:cNvPr>
@@ -4202,7 +4202,7 @@
           <p:cNvPr id="21" name="">
             <a:extLst xmlns:a="http://schemas.openxmlformats.org/drawingml/2006/main">
               <a:ext uri="{FF2B5EF4-FFF2-40B4-BE49-F238E27FC236}">
-                <a16:creationId xmlns:a16="http://schemas.microsoft.com/office/drawing/2014/main" id="{71541982-7DB8-488A-A6A4-FF2D360C88EF}"/>
+                <a16:creationId xmlns:a16="http://schemas.microsoft.com/office/drawing/2014/main" id="{650D92C1-9889-4C90-BC0D-F01407FC1A9A}"/>
               </a:ext>
             </a:extLst>
           </p:cNvPr>
@@ -4235,7 +4235,7 @@
           <p:cNvPr id="22" name="">
             <a:extLst xmlns:a="http://schemas.openxmlformats.org/drawingml/2006/main">
               <a:ext uri="{FF2B5EF4-FFF2-40B4-BE49-F238E27FC236}">
-                <a16:creationId xmlns:a16="http://schemas.microsoft.com/office/drawing/2014/main" id="{BA41BB7E-C3CB-439A-B4F5-D984EF964D2D}"/>
+                <a16:creationId xmlns:a16="http://schemas.microsoft.com/office/drawing/2014/main" id="{180AE352-8833-434D-9E20-CDB4C9070F16}"/>
               </a:ext>
             </a:extLst>
           </p:cNvPr>
@@ -4299,7 +4299,7 @@
           <p:cNvPr id="23" name="">
             <a:extLst xmlns:a="http://schemas.openxmlformats.org/drawingml/2006/main">
               <a:ext uri="{FF2B5EF4-FFF2-40B4-BE49-F238E27FC236}">
-                <a16:creationId xmlns:a16="http://schemas.microsoft.com/office/drawing/2014/main" id="{4814606C-C33C-4EE9-8871-40C99695CAEB}"/>
+                <a16:creationId xmlns:a16="http://schemas.microsoft.com/office/drawing/2014/main" id="{C6206334-C91E-41CB-B167-96BE3AC12A18}"/>
               </a:ext>
             </a:extLst>
           </p:cNvPr>
@@ -4332,7 +4332,7 @@
           <p:cNvPr id="24" name="">
             <a:extLst xmlns:a="http://schemas.openxmlformats.org/drawingml/2006/main">
               <a:ext uri="{FF2B5EF4-FFF2-40B4-BE49-F238E27FC236}">
-                <a16:creationId xmlns:a16="http://schemas.microsoft.com/office/drawing/2014/main" id="{1819E70B-F26D-48B2-9ABD-2849EA07834D}"/>
+                <a16:creationId xmlns:a16="http://schemas.microsoft.com/office/drawing/2014/main" id="{1EE07B55-1A24-47D3-9E4C-382F76137370}"/>
               </a:ext>
             </a:extLst>
           </p:cNvPr>
@@ -4396,7 +4396,7 @@
           <p:cNvPr id="25" name="">
             <a:extLst xmlns:a="http://schemas.openxmlformats.org/drawingml/2006/main">
               <a:ext uri="{FF2B5EF4-FFF2-40B4-BE49-F238E27FC236}">
-                <a16:creationId xmlns:a16="http://schemas.microsoft.com/office/drawing/2014/main" id="{3999605E-04A0-4E92-BE51-16CCE2F9D25B}"/>
+                <a16:creationId xmlns:a16="http://schemas.microsoft.com/office/drawing/2014/main" id="{543A514E-8166-4A7C-8FC5-466BC8BFAD88}"/>
               </a:ext>
             </a:extLst>
           </p:cNvPr>
@@ -4429,7 +4429,7 @@
           <p:cNvPr id="26" name="">
             <a:extLst xmlns:a="http://schemas.openxmlformats.org/drawingml/2006/main">
               <a:ext uri="{FF2B5EF4-FFF2-40B4-BE49-F238E27FC236}">
-                <a16:creationId xmlns:a16="http://schemas.microsoft.com/office/drawing/2014/main" id="{E1E657B6-2EB4-4322-A54A-8B308D3D9D98}"/>
+                <a16:creationId xmlns:a16="http://schemas.microsoft.com/office/drawing/2014/main" id="{9191C275-87DD-4AC2-8C54-01F3404FD9CC}"/>
               </a:ext>
             </a:extLst>
           </p:cNvPr>
@@ -4493,7 +4493,7 @@
           <p:cNvPr id="27" name="">
             <a:extLst xmlns:a="http://schemas.openxmlformats.org/drawingml/2006/main">
               <a:ext uri="{FF2B5EF4-FFF2-40B4-BE49-F238E27FC236}">
-                <a16:creationId xmlns:a16="http://schemas.microsoft.com/office/drawing/2014/main" id="{7738ABBC-A888-4E30-A199-72CB37CFC031}"/>
+                <a16:creationId xmlns:a16="http://schemas.microsoft.com/office/drawing/2014/main" id="{1C3B3053-5B28-4F46-85CE-99B020B425C1}"/>
               </a:ext>
             </a:extLst>
           </p:cNvPr>
@@ -4613,7 +4613,7 @@
           <p:cNvPr id="28" name="">
             <a:extLst xmlns:a="http://schemas.openxmlformats.org/drawingml/2006/main">
               <a:ext uri="{FF2B5EF4-FFF2-40B4-BE49-F238E27FC236}">
-                <a16:creationId xmlns:a16="http://schemas.microsoft.com/office/drawing/2014/main" id="{4C21DCE4-49E5-4568-A0E9-2C42C80D9509}"/>
+                <a16:creationId xmlns:a16="http://schemas.microsoft.com/office/drawing/2014/main" id="{9D1503BA-64C8-4C4B-B082-9F30008FD15E}"/>
               </a:ext>
             </a:extLst>
           </p:cNvPr>
@@ -4677,7 +4677,7 @@
           <p:cNvPr id="29" name="">
             <a:extLst xmlns:a="http://schemas.openxmlformats.org/drawingml/2006/main">
               <a:ext uri="{FF2B5EF4-FFF2-40B4-BE49-F238E27FC236}">
-                <a16:creationId xmlns:a16="http://schemas.microsoft.com/office/drawing/2014/main" id="{BA66D0C5-4E2D-44D3-86BA-E789B987FEE5}"/>
+                <a16:creationId xmlns:a16="http://schemas.microsoft.com/office/drawing/2014/main" id="{C7DF24D4-1CF3-4912-8574-D2D93F3CC50F}"/>
               </a:ext>
             </a:extLst>
           </p:cNvPr>
@@ -4739,7 +4739,7 @@
     </p:spTree>
     <p:extLst>
       <p:ext uri="{BB962C8B-B14F-4D97-AF65-F5344CB8AC3E}">
-        <p14:creationId xmlns:p14="http://schemas.microsoft.com/office/powerpoint/2010/main" val="1363263629"/>
+        <p14:creationId xmlns:p14="http://schemas.microsoft.com/office/powerpoint/2010/main" val="1914164728"/>
       </p:ext>
     </p:extLst>
   </p:cSld>
@@ -4763,7 +4763,7 @@
           <p:cNvPr id="1" name="">
             <a:extLst xmlns:a="http://schemas.openxmlformats.org/drawingml/2006/main">
               <a:ext uri="{FF2B5EF4-FFF2-40B4-BE49-F238E27FC236}">
-                <a16:creationId xmlns:a16="http://schemas.microsoft.com/office/drawing/2014/main" id="{D273C7B0-AC29-4AFD-A1F4-B687AB5589D2}"/>
+                <a16:creationId xmlns:a16="http://schemas.microsoft.com/office/drawing/2014/main" id="{CE59BF12-B185-4A2B-9AE9-65DB120B0FC3}"/>
               </a:ext>
             </a:extLst>
           </p:cNvPr>
@@ -4796,7 +4796,7 @@
           <p:cNvPr id="2" name="">
             <a:extLst xmlns:a="http://schemas.openxmlformats.org/drawingml/2006/main">
               <a:ext uri="{FF2B5EF4-FFF2-40B4-BE49-F238E27FC236}">
-                <a16:creationId xmlns:a16="http://schemas.microsoft.com/office/drawing/2014/main" id="{90CAE0D6-1D14-447E-BD41-AF0C0BEE42EF}"/>
+                <a16:creationId xmlns:a16="http://schemas.microsoft.com/office/drawing/2014/main" id="{EFB74879-4BF3-4495-83C7-A2DA489DA08F}"/>
               </a:ext>
             </a:extLst>
           </p:cNvPr>
@@ -4829,7 +4829,7 @@
           <p:cNvPr id="3" name="">
             <a:extLst xmlns:a="http://schemas.openxmlformats.org/drawingml/2006/main">
               <a:ext uri="{FF2B5EF4-FFF2-40B4-BE49-F238E27FC236}">
-                <a16:creationId xmlns:a16="http://schemas.microsoft.com/office/drawing/2014/main" id="{47081574-CA99-435B-A5D4-A4C98A90EEFB}"/>
+                <a16:creationId xmlns:a16="http://schemas.microsoft.com/office/drawing/2014/main" id="{3C298298-AD2D-43D2-8169-B19A6A67E66B}"/>
               </a:ext>
             </a:extLst>
           </p:cNvPr>
@@ -4893,7 +4893,7 @@
           <p:cNvPr id="4" name="">
             <a:extLst xmlns:a="http://schemas.openxmlformats.org/drawingml/2006/main">
               <a:ext uri="{FF2B5EF4-FFF2-40B4-BE49-F238E27FC236}">
-                <a16:creationId xmlns:a16="http://schemas.microsoft.com/office/drawing/2014/main" id="{CF078F6C-F7C9-4570-B199-67DEDEF4D66A}"/>
+                <a16:creationId xmlns:a16="http://schemas.microsoft.com/office/drawing/2014/main" id="{632C602F-39B2-48A7-94B8-6F065C58CEFB}"/>
               </a:ext>
             </a:extLst>
           </p:cNvPr>
@@ -4957,7 +4957,7 @@
           <p:cNvPr id="5" name="">
             <a:extLst xmlns:a="http://schemas.openxmlformats.org/drawingml/2006/main">
               <a:ext uri="{FF2B5EF4-FFF2-40B4-BE49-F238E27FC236}">
-                <a16:creationId xmlns:a16="http://schemas.microsoft.com/office/drawing/2014/main" id="{0E1C1F9C-4D93-446F-8443-8B7CF9845CE3}"/>
+                <a16:creationId xmlns:a16="http://schemas.microsoft.com/office/drawing/2014/main" id="{3A8591F7-C26F-4975-907D-109BBC034949}"/>
               </a:ext>
             </a:extLst>
           </p:cNvPr>
@@ -4990,7 +4990,7 @@
           <p:cNvPr id="6" name="">
             <a:extLst xmlns:a="http://schemas.openxmlformats.org/drawingml/2006/main">
               <a:ext uri="{FF2B5EF4-FFF2-40B4-BE49-F238E27FC236}">
-                <a16:creationId xmlns:a16="http://schemas.microsoft.com/office/drawing/2014/main" id="{24136CEB-CFF1-486A-A521-B8784C7CC78A}"/>
+                <a16:creationId xmlns:a16="http://schemas.microsoft.com/office/drawing/2014/main" id="{3E824FB0-2A17-4F80-A95B-01F117141427}"/>
               </a:ext>
             </a:extLst>
           </p:cNvPr>
@@ -5054,7 +5054,7 @@
           <p:cNvPr id="7" name="">
             <a:extLst xmlns:a="http://schemas.openxmlformats.org/drawingml/2006/main">
               <a:ext uri="{FF2B5EF4-FFF2-40B4-BE49-F238E27FC236}">
-                <a16:creationId xmlns:a16="http://schemas.microsoft.com/office/drawing/2014/main" id="{400614E3-78B5-4C24-841A-8382A12EEF55}"/>
+                <a16:creationId xmlns:a16="http://schemas.microsoft.com/office/drawing/2014/main" id="{CCCC53C9-FC58-4C5B-BD70-8B4CFFC50C4C}"/>
               </a:ext>
             </a:extLst>
           </p:cNvPr>
@@ -5118,7 +5118,7 @@
           <p:cNvPr id="8" name="">
             <a:extLst xmlns:a="http://schemas.openxmlformats.org/drawingml/2006/main">
               <a:ext uri="{FF2B5EF4-FFF2-40B4-BE49-F238E27FC236}">
-                <a16:creationId xmlns:a16="http://schemas.microsoft.com/office/drawing/2014/main" id="{A126235B-D757-41B9-BCA3-57A7DE2E3859}"/>
+                <a16:creationId xmlns:a16="http://schemas.microsoft.com/office/drawing/2014/main" id="{A0632227-DAE7-430F-8574-FEB9E2F9298F}"/>
               </a:ext>
             </a:extLst>
           </p:cNvPr>
@@ -5182,7 +5182,7 @@
           <p:cNvPr id="9" name="">
             <a:extLst xmlns:a="http://schemas.openxmlformats.org/drawingml/2006/main">
               <a:ext uri="{FF2B5EF4-FFF2-40B4-BE49-F238E27FC236}">
-                <a16:creationId xmlns:a16="http://schemas.microsoft.com/office/drawing/2014/main" id="{5F02C605-D1B5-476C-9A37-4321C87479B1}"/>
+                <a16:creationId xmlns:a16="http://schemas.microsoft.com/office/drawing/2014/main" id="{410C6ACA-D5BB-45A9-83ED-3C507F1BD3A0}"/>
               </a:ext>
             </a:extLst>
           </p:cNvPr>
@@ -5246,7 +5246,7 @@
           <p:cNvPr id="10" name="">
             <a:extLst xmlns:a="http://schemas.openxmlformats.org/drawingml/2006/main">
               <a:ext uri="{FF2B5EF4-FFF2-40B4-BE49-F238E27FC236}">
-                <a16:creationId xmlns:a16="http://schemas.microsoft.com/office/drawing/2014/main" id="{640BD0AB-297E-4924-94B1-B406B7042A35}"/>
+                <a16:creationId xmlns:a16="http://schemas.microsoft.com/office/drawing/2014/main" id="{EEFE552D-8D62-495F-AAE4-27CBFEC122EB}"/>
               </a:ext>
             </a:extLst>
           </p:cNvPr>
@@ -5310,7 +5310,7 @@
           <p:cNvPr id="11" name="">
             <a:extLst xmlns:a="http://schemas.openxmlformats.org/drawingml/2006/main">
               <a:ext uri="{FF2B5EF4-FFF2-40B4-BE49-F238E27FC236}">
-                <a16:creationId xmlns:a16="http://schemas.microsoft.com/office/drawing/2014/main" id="{DA563C72-E404-4658-A8FA-306C659DE488}"/>
+                <a16:creationId xmlns:a16="http://schemas.microsoft.com/office/drawing/2014/main" id="{D04832EC-772B-49EE-A8AB-5B3077B6842B}"/>
               </a:ext>
             </a:extLst>
           </p:cNvPr>
@@ -5343,7 +5343,7 @@
           <p:cNvPr id="12" name="">
             <a:extLst xmlns:a="http://schemas.openxmlformats.org/drawingml/2006/main">
               <a:ext uri="{FF2B5EF4-FFF2-40B4-BE49-F238E27FC236}">
-                <a16:creationId xmlns:a16="http://schemas.microsoft.com/office/drawing/2014/main" id="{E95AEF0E-A35B-4C45-B835-B5B965A99D03}"/>
+                <a16:creationId xmlns:a16="http://schemas.microsoft.com/office/drawing/2014/main" id="{543895DA-49CA-4B80-B4F7-AD58E02F1B05}"/>
               </a:ext>
             </a:extLst>
           </p:cNvPr>
@@ -5407,7 +5407,7 @@
           <p:cNvPr id="13" name="">
             <a:extLst xmlns:a="http://schemas.openxmlformats.org/drawingml/2006/main">
               <a:ext uri="{FF2B5EF4-FFF2-40B4-BE49-F238E27FC236}">
-                <a16:creationId xmlns:a16="http://schemas.microsoft.com/office/drawing/2014/main" id="{17474AE3-5BBF-4031-828F-08D03A087576}"/>
+                <a16:creationId xmlns:a16="http://schemas.microsoft.com/office/drawing/2014/main" id="{B0ABC8DE-F24A-4AE5-A2D8-1A23045C18E9}"/>
               </a:ext>
             </a:extLst>
           </p:cNvPr>
@@ -5471,7 +5471,7 @@
           <p:cNvPr id="14" name="">
             <a:extLst xmlns:a="http://schemas.openxmlformats.org/drawingml/2006/main">
               <a:ext uri="{FF2B5EF4-FFF2-40B4-BE49-F238E27FC236}">
-                <a16:creationId xmlns:a16="http://schemas.microsoft.com/office/drawing/2014/main" id="{82B52A89-EA63-47CE-92C4-DC68948C74E8}"/>
+                <a16:creationId xmlns:a16="http://schemas.microsoft.com/office/drawing/2014/main" id="{2DA71928-E29A-4432-BEA4-B7DB023B2FCB}"/>
               </a:ext>
             </a:extLst>
           </p:cNvPr>
@@ -5535,7 +5535,7 @@
           <p:cNvPr id="15" name="">
             <a:extLst xmlns:a="http://schemas.openxmlformats.org/drawingml/2006/main">
               <a:ext uri="{FF2B5EF4-FFF2-40B4-BE49-F238E27FC236}">
-                <a16:creationId xmlns:a16="http://schemas.microsoft.com/office/drawing/2014/main" id="{76443CB5-A23C-4BCB-B08D-A67D3B602B4D}"/>
+                <a16:creationId xmlns:a16="http://schemas.microsoft.com/office/drawing/2014/main" id="{FB589FE7-48D0-4F10-A5D6-1A119B9DF9C6}"/>
               </a:ext>
             </a:extLst>
           </p:cNvPr>
@@ -5599,7 +5599,7 @@
           <p:cNvPr id="16" name="">
             <a:extLst xmlns:a="http://schemas.openxmlformats.org/drawingml/2006/main">
               <a:ext uri="{FF2B5EF4-FFF2-40B4-BE49-F238E27FC236}">
-                <a16:creationId xmlns:a16="http://schemas.microsoft.com/office/drawing/2014/main" id="{5E60880D-1E57-4C8D-BC6A-5EE4F9C5BFF9}"/>
+                <a16:creationId xmlns:a16="http://schemas.microsoft.com/office/drawing/2014/main" id="{E76CCDFA-60F8-4A2D-82D1-EA6F04D10CF3}"/>
               </a:ext>
             </a:extLst>
           </p:cNvPr>
@@ -5663,7 +5663,7 @@
           <p:cNvPr id="17" name="">
             <a:extLst xmlns:a="http://schemas.openxmlformats.org/drawingml/2006/main">
               <a:ext uri="{FF2B5EF4-FFF2-40B4-BE49-F238E27FC236}">
-                <a16:creationId xmlns:a16="http://schemas.microsoft.com/office/drawing/2014/main" id="{F964B4B5-2381-4CA1-B873-450B92C586C6}"/>
+                <a16:creationId xmlns:a16="http://schemas.microsoft.com/office/drawing/2014/main" id="{202B5BD9-C037-4028-9E03-AE849CF05560}"/>
               </a:ext>
             </a:extLst>
           </p:cNvPr>
@@ -5727,7 +5727,7 @@
           <p:cNvPr id="18" name="">
             <a:extLst xmlns:a="http://schemas.openxmlformats.org/drawingml/2006/main">
               <a:ext uri="{FF2B5EF4-FFF2-40B4-BE49-F238E27FC236}">
-                <a16:creationId xmlns:a16="http://schemas.microsoft.com/office/drawing/2014/main" id="{2EA13802-296C-46E5-8455-FB00E7C05C13}"/>
+                <a16:creationId xmlns:a16="http://schemas.microsoft.com/office/drawing/2014/main" id="{343EBC73-70AC-45CD-A0F5-291BBEC216C3}"/>
               </a:ext>
             </a:extLst>
           </p:cNvPr>
@@ -5791,7 +5791,7 @@
           <p:cNvPr id="19" name="">
             <a:extLst xmlns:a="http://schemas.openxmlformats.org/drawingml/2006/main">
               <a:ext uri="{FF2B5EF4-FFF2-40B4-BE49-F238E27FC236}">
-                <a16:creationId xmlns:a16="http://schemas.microsoft.com/office/drawing/2014/main" id="{64B7014A-1F1E-4F37-891A-837D5F6E551D}"/>
+                <a16:creationId xmlns:a16="http://schemas.microsoft.com/office/drawing/2014/main" id="{EC7BBD21-1E3A-4651-A37D-92163D00B760}"/>
               </a:ext>
             </a:extLst>
           </p:cNvPr>
@@ -5855,7 +5855,7 @@
           <p:cNvPr id="20" name="">
             <a:extLst xmlns:a="http://schemas.openxmlformats.org/drawingml/2006/main">
               <a:ext uri="{FF2B5EF4-FFF2-40B4-BE49-F238E27FC236}">
-                <a16:creationId xmlns:a16="http://schemas.microsoft.com/office/drawing/2014/main" id="{EC34322A-31E9-4B54-AFEA-8C1F7C80E526}"/>
+                <a16:creationId xmlns:a16="http://schemas.microsoft.com/office/drawing/2014/main" id="{60D4B820-DA59-48B3-82EE-84638313A925}"/>
               </a:ext>
             </a:extLst>
           </p:cNvPr>
@@ -5888,7 +5888,7 @@
           <p:cNvPr id="21" name="">
             <a:extLst xmlns:a="http://schemas.openxmlformats.org/drawingml/2006/main">
               <a:ext uri="{FF2B5EF4-FFF2-40B4-BE49-F238E27FC236}">
-                <a16:creationId xmlns:a16="http://schemas.microsoft.com/office/drawing/2014/main" id="{164C72CB-DAED-4D06-95F7-CD0D30627AE5}"/>
+                <a16:creationId xmlns:a16="http://schemas.microsoft.com/office/drawing/2014/main" id="{88585A89-282C-410F-A229-02196FCF6F2A}"/>
               </a:ext>
             </a:extLst>
           </p:cNvPr>
@@ -5952,7 +5952,7 @@
           <p:cNvPr id="22" name="">
             <a:extLst xmlns:a="http://schemas.openxmlformats.org/drawingml/2006/main">
               <a:ext uri="{FF2B5EF4-FFF2-40B4-BE49-F238E27FC236}">
-                <a16:creationId xmlns:a16="http://schemas.microsoft.com/office/drawing/2014/main" id="{A3954DF5-6056-4561-964B-7029D87E95D9}"/>
+                <a16:creationId xmlns:a16="http://schemas.microsoft.com/office/drawing/2014/main" id="{75C761A2-D55F-4642-8CEC-778AE3F52E2A}"/>
               </a:ext>
             </a:extLst>
           </p:cNvPr>
@@ -6016,7 +6016,7 @@
           <p:cNvPr id="23" name="">
             <a:extLst xmlns:a="http://schemas.openxmlformats.org/drawingml/2006/main">
               <a:ext uri="{FF2B5EF4-FFF2-40B4-BE49-F238E27FC236}">
-                <a16:creationId xmlns:a16="http://schemas.microsoft.com/office/drawing/2014/main" id="{E11A2F1C-D3D4-44E9-920F-51EAC98ECB0C}"/>
+                <a16:creationId xmlns:a16="http://schemas.microsoft.com/office/drawing/2014/main" id="{B05564D8-4BA9-45B9-AA3B-E3C9A3E424DB}"/>
               </a:ext>
             </a:extLst>
           </p:cNvPr>
@@ -6080,7 +6080,7 @@
           <p:cNvPr id="24" name="">
             <a:extLst xmlns:a="http://schemas.openxmlformats.org/drawingml/2006/main">
               <a:ext uri="{FF2B5EF4-FFF2-40B4-BE49-F238E27FC236}">
-                <a16:creationId xmlns:a16="http://schemas.microsoft.com/office/drawing/2014/main" id="{3F0DD706-3B08-4314-B4E4-8B54A866C573}"/>
+                <a16:creationId xmlns:a16="http://schemas.microsoft.com/office/drawing/2014/main" id="{05D0CE60-BCC7-453B-A792-3F8DCC52A1AD}"/>
               </a:ext>
             </a:extLst>
           </p:cNvPr>
@@ -6144,7 +6144,7 @@
           <p:cNvPr id="25" name="">
             <a:extLst xmlns:a="http://schemas.openxmlformats.org/drawingml/2006/main">
               <a:ext uri="{FF2B5EF4-FFF2-40B4-BE49-F238E27FC236}">
-                <a16:creationId xmlns:a16="http://schemas.microsoft.com/office/drawing/2014/main" id="{F7ECAB5C-2365-410C-9DF8-D5A32D9993B9}"/>
+                <a16:creationId xmlns:a16="http://schemas.microsoft.com/office/drawing/2014/main" id="{10632914-22CB-490C-9926-E55AA6086143}"/>
               </a:ext>
             </a:extLst>
           </p:cNvPr>
@@ -6208,7 +6208,7 @@
           <p:cNvPr id="26" name="">
             <a:extLst xmlns:a="http://schemas.openxmlformats.org/drawingml/2006/main">
               <a:ext uri="{FF2B5EF4-FFF2-40B4-BE49-F238E27FC236}">
-                <a16:creationId xmlns:a16="http://schemas.microsoft.com/office/drawing/2014/main" id="{D7222D66-3CD3-417E-8F07-B782494A6439}"/>
+                <a16:creationId xmlns:a16="http://schemas.microsoft.com/office/drawing/2014/main" id="{30D82E72-173D-4A80-8D38-D69FE59BB9E8}"/>
               </a:ext>
             </a:extLst>
           </p:cNvPr>
@@ -6272,7 +6272,7 @@
           <p:cNvPr id="27" name="">
             <a:extLst xmlns:a="http://schemas.openxmlformats.org/drawingml/2006/main">
               <a:ext uri="{FF2B5EF4-FFF2-40B4-BE49-F238E27FC236}">
-                <a16:creationId xmlns:a16="http://schemas.microsoft.com/office/drawing/2014/main" id="{54B8C8B2-84D0-4E5E-9DD1-6D9641CE1DE6}"/>
+                <a16:creationId xmlns:a16="http://schemas.microsoft.com/office/drawing/2014/main" id="{9B0B65EC-E936-4D04-9FF5-F48B8AF13E1C}"/>
               </a:ext>
             </a:extLst>
           </p:cNvPr>
@@ -6336,7 +6336,7 @@
           <p:cNvPr id="28" name="">
             <a:extLst xmlns:a="http://schemas.openxmlformats.org/drawingml/2006/main">
               <a:ext uri="{FF2B5EF4-FFF2-40B4-BE49-F238E27FC236}">
-                <a16:creationId xmlns:a16="http://schemas.microsoft.com/office/drawing/2014/main" id="{EAAA8F4F-B933-4082-A0BE-256E5E0F4A7A}"/>
+                <a16:creationId xmlns:a16="http://schemas.microsoft.com/office/drawing/2014/main" id="{DAE8AC7B-5EE9-496A-BD6B-70F1384A8322}"/>
               </a:ext>
             </a:extLst>
           </p:cNvPr>
@@ -6400,7 +6400,7 @@
           <p:cNvPr id="29" name="">
             <a:extLst xmlns:a="http://schemas.openxmlformats.org/drawingml/2006/main">
               <a:ext uri="{FF2B5EF4-FFF2-40B4-BE49-F238E27FC236}">
-                <a16:creationId xmlns:a16="http://schemas.microsoft.com/office/drawing/2014/main" id="{1A34A7FA-F4D2-4F8F-A40B-F81CAE8DC986}"/>
+                <a16:creationId xmlns:a16="http://schemas.microsoft.com/office/drawing/2014/main" id="{C5A13194-F3C1-4191-8AE2-58E514CCF393}"/>
               </a:ext>
             </a:extLst>
           </p:cNvPr>
@@ -6433,7 +6433,7 @@
           <p:cNvPr id="30" name="">
             <a:extLst xmlns:a="http://schemas.openxmlformats.org/drawingml/2006/main">
               <a:ext uri="{FF2B5EF4-FFF2-40B4-BE49-F238E27FC236}">
-                <a16:creationId xmlns:a16="http://schemas.microsoft.com/office/drawing/2014/main" id="{9B8613EC-D6C9-45EF-B4F2-5D4618499C92}"/>
+                <a16:creationId xmlns:a16="http://schemas.microsoft.com/office/drawing/2014/main" id="{965030C9-B24F-428C-A519-F6CD957E606A}"/>
               </a:ext>
             </a:extLst>
           </p:cNvPr>
@@ -6497,7 +6497,7 @@
           <p:cNvPr id="31" name="">
             <a:extLst xmlns:a="http://schemas.openxmlformats.org/drawingml/2006/main">
               <a:ext uri="{FF2B5EF4-FFF2-40B4-BE49-F238E27FC236}">
-                <a16:creationId xmlns:a16="http://schemas.microsoft.com/office/drawing/2014/main" id="{6F99707F-CE2C-4DF7-9E7A-E04E8ACB97F4}"/>
+                <a16:creationId xmlns:a16="http://schemas.microsoft.com/office/drawing/2014/main" id="{98150460-C005-4EC4-B9FB-DC464C7D409B}"/>
               </a:ext>
             </a:extLst>
           </p:cNvPr>
@@ -6561,7 +6561,7 @@
           <p:cNvPr id="32" name="">
             <a:extLst xmlns:a="http://schemas.openxmlformats.org/drawingml/2006/main">
               <a:ext uri="{FF2B5EF4-FFF2-40B4-BE49-F238E27FC236}">
-                <a16:creationId xmlns:a16="http://schemas.microsoft.com/office/drawing/2014/main" id="{A8EB2E55-CF0C-4042-8888-3A80146032FC}"/>
+                <a16:creationId xmlns:a16="http://schemas.microsoft.com/office/drawing/2014/main" id="{8D79E99F-0E06-47FB-B0BA-79D7EC1D7F3C}"/>
               </a:ext>
             </a:extLst>
           </p:cNvPr>
@@ -6625,7 +6625,7 @@
           <p:cNvPr id="33" name="">
             <a:extLst xmlns:a="http://schemas.openxmlformats.org/drawingml/2006/main">
               <a:ext uri="{FF2B5EF4-FFF2-40B4-BE49-F238E27FC236}">
-                <a16:creationId xmlns:a16="http://schemas.microsoft.com/office/drawing/2014/main" id="{DB747F6A-0EF0-4AD4-B405-C2B8E96301BE}"/>
+                <a16:creationId xmlns:a16="http://schemas.microsoft.com/office/drawing/2014/main" id="{B874A14E-07FE-4A3E-A0D1-8441A7D86C25}"/>
               </a:ext>
             </a:extLst>
           </p:cNvPr>
@@ -6689,7 +6689,7 @@
           <p:cNvPr id="34" name="">
             <a:extLst xmlns:a="http://schemas.openxmlformats.org/drawingml/2006/main">
               <a:ext uri="{FF2B5EF4-FFF2-40B4-BE49-F238E27FC236}">
-                <a16:creationId xmlns:a16="http://schemas.microsoft.com/office/drawing/2014/main" id="{B0705296-352C-40A9-BD73-129FD994ECF0}"/>
+                <a16:creationId xmlns:a16="http://schemas.microsoft.com/office/drawing/2014/main" id="{D7D60689-FB02-4525-821D-2DF74EEC3267}"/>
               </a:ext>
             </a:extLst>
           </p:cNvPr>
@@ -6753,7 +6753,7 @@
           <p:cNvPr id="35" name="">
             <a:extLst xmlns:a="http://schemas.openxmlformats.org/drawingml/2006/main">
               <a:ext uri="{FF2B5EF4-FFF2-40B4-BE49-F238E27FC236}">
-                <a16:creationId xmlns:a16="http://schemas.microsoft.com/office/drawing/2014/main" id="{1F15117E-25D5-460C-80D4-0C21EB734FC3}"/>
+                <a16:creationId xmlns:a16="http://schemas.microsoft.com/office/drawing/2014/main" id="{F711E9FE-5C0E-46E3-9E39-0A6361DA599E}"/>
               </a:ext>
             </a:extLst>
           </p:cNvPr>
@@ -6817,7 +6817,7 @@
           <p:cNvPr id="36" name="">
             <a:extLst xmlns:a="http://schemas.openxmlformats.org/drawingml/2006/main">
               <a:ext uri="{FF2B5EF4-FFF2-40B4-BE49-F238E27FC236}">
-                <a16:creationId xmlns:a16="http://schemas.microsoft.com/office/drawing/2014/main" id="{1278002A-DDB3-4231-9868-E5CBC383D403}"/>
+                <a16:creationId xmlns:a16="http://schemas.microsoft.com/office/drawing/2014/main" id="{E268AF0C-B49D-4835-9EA3-9DAA45F6106C}"/>
               </a:ext>
             </a:extLst>
           </p:cNvPr>
@@ -6881,7 +6881,7 @@
           <p:cNvPr id="37" name="">
             <a:extLst xmlns:a="http://schemas.openxmlformats.org/drawingml/2006/main">
               <a:ext uri="{FF2B5EF4-FFF2-40B4-BE49-F238E27FC236}">
-                <a16:creationId xmlns:a16="http://schemas.microsoft.com/office/drawing/2014/main" id="{87A95698-22E7-499A-9DB9-DD8D4C82E335}"/>
+                <a16:creationId xmlns:a16="http://schemas.microsoft.com/office/drawing/2014/main" id="{D3987437-03C1-4D28-BFA5-0AEF5B6DD51E}"/>
               </a:ext>
             </a:extLst>
           </p:cNvPr>
@@ -6945,7 +6945,7 @@
           <p:cNvPr id="38" name="">
             <a:extLst xmlns:a="http://schemas.openxmlformats.org/drawingml/2006/main">
               <a:ext uri="{FF2B5EF4-FFF2-40B4-BE49-F238E27FC236}">
-                <a16:creationId xmlns:a16="http://schemas.microsoft.com/office/drawing/2014/main" id="{05BE8B21-F06B-437F-BF9F-7FCFDA96D7B5}"/>
+                <a16:creationId xmlns:a16="http://schemas.microsoft.com/office/drawing/2014/main" id="{1491C753-0F02-486C-86B2-4EF5E6767D31}"/>
               </a:ext>
             </a:extLst>
           </p:cNvPr>
@@ -7009,7 +7009,7 @@
           <p:cNvPr id="39" name="">
             <a:extLst xmlns:a="http://schemas.openxmlformats.org/drawingml/2006/main">
               <a:ext uri="{FF2B5EF4-FFF2-40B4-BE49-F238E27FC236}">
-                <a16:creationId xmlns:a16="http://schemas.microsoft.com/office/drawing/2014/main" id="{B74A947B-E328-43ED-94EB-1970DD49EAEB}"/>
+                <a16:creationId xmlns:a16="http://schemas.microsoft.com/office/drawing/2014/main" id="{DAABBE36-D2BE-4393-8C9A-0011FBE740B1}"/>
               </a:ext>
             </a:extLst>
           </p:cNvPr>
@@ -7073,7 +7073,7 @@
           <p:cNvPr id="40" name="">
             <a:extLst xmlns:a="http://schemas.openxmlformats.org/drawingml/2006/main">
               <a:ext uri="{FF2B5EF4-FFF2-40B4-BE49-F238E27FC236}">
-                <a16:creationId xmlns:a16="http://schemas.microsoft.com/office/drawing/2014/main" id="{B0387105-A549-4E96-8DE0-152211E75164}"/>
+                <a16:creationId xmlns:a16="http://schemas.microsoft.com/office/drawing/2014/main" id="{244FB5B6-ECE2-4FFB-940E-71B62300AC18}"/>
               </a:ext>
             </a:extLst>
           </p:cNvPr>
@@ -7137,7 +7137,7 @@
           <p:cNvPr id="41" name="">
             <a:extLst xmlns:a="http://schemas.openxmlformats.org/drawingml/2006/main">
               <a:ext uri="{FF2B5EF4-FFF2-40B4-BE49-F238E27FC236}">
-                <a16:creationId xmlns:a16="http://schemas.microsoft.com/office/drawing/2014/main" id="{CE57CC54-5C10-436F-A9A1-36B63A3E3155}"/>
+                <a16:creationId xmlns:a16="http://schemas.microsoft.com/office/drawing/2014/main" id="{1F680144-BA04-4D8F-9D1D-EEDBBE42FAF1}"/>
               </a:ext>
             </a:extLst>
           </p:cNvPr>
@@ -7199,7 +7199,7 @@
     </p:spTree>
     <p:extLst>
       <p:ext uri="{BB962C8B-B14F-4D97-AF65-F5344CB8AC3E}">
-        <p14:creationId xmlns:p14="http://schemas.microsoft.com/office/powerpoint/2010/main" val="1278608242"/>
+        <p14:creationId xmlns:p14="http://schemas.microsoft.com/office/powerpoint/2010/main" val="1242797617"/>
       </p:ext>
     </p:extLst>
   </p:cSld>
@@ -7223,7 +7223,7 @@
           <p:cNvPr id="1" name="">
             <a:extLst xmlns:a="http://schemas.openxmlformats.org/drawingml/2006/main">
               <a:ext uri="{FF2B5EF4-FFF2-40B4-BE49-F238E27FC236}">
-                <a16:creationId xmlns:a16="http://schemas.microsoft.com/office/drawing/2014/main" id="{989FE587-E02E-4474-ABA4-F3CD54E174BC}"/>
+                <a16:creationId xmlns:a16="http://schemas.microsoft.com/office/drawing/2014/main" id="{E340837A-DC47-4B63-84FC-1074FE93D61A}"/>
               </a:ext>
             </a:extLst>
           </p:cNvPr>
@@ -7256,7 +7256,7 @@
           <p:cNvPr id="2" name="">
             <a:extLst xmlns:a="http://schemas.openxmlformats.org/drawingml/2006/main">
               <a:ext uri="{FF2B5EF4-FFF2-40B4-BE49-F238E27FC236}">
-                <a16:creationId xmlns:a16="http://schemas.microsoft.com/office/drawing/2014/main" id="{B370C971-3424-405B-88D5-A17249178419}"/>
+                <a16:creationId xmlns:a16="http://schemas.microsoft.com/office/drawing/2014/main" id="{1DC84FF2-831A-4906-B03A-CC256F033C6E}"/>
               </a:ext>
             </a:extLst>
           </p:cNvPr>
@@ -7289,7 +7289,7 @@
           <p:cNvPr id="3" name="">
             <a:extLst xmlns:a="http://schemas.openxmlformats.org/drawingml/2006/main">
               <a:ext uri="{FF2B5EF4-FFF2-40B4-BE49-F238E27FC236}">
-                <a16:creationId xmlns:a16="http://schemas.microsoft.com/office/drawing/2014/main" id="{F3A52465-BE34-44ED-9FE3-813B4FAB6965}"/>
+                <a16:creationId xmlns:a16="http://schemas.microsoft.com/office/drawing/2014/main" id="{3E7BB1EA-B0EB-4647-8123-C148DB93FA27}"/>
               </a:ext>
             </a:extLst>
           </p:cNvPr>
@@ -7353,7 +7353,7 @@
           <p:cNvPr id="4" name="">
             <a:extLst xmlns:a="http://schemas.openxmlformats.org/drawingml/2006/main">
               <a:ext uri="{FF2B5EF4-FFF2-40B4-BE49-F238E27FC236}">
-                <a16:creationId xmlns:a16="http://schemas.microsoft.com/office/drawing/2014/main" id="{903B2B65-41B0-4F50-B941-F0EFAAD194D0}"/>
+                <a16:creationId xmlns:a16="http://schemas.microsoft.com/office/drawing/2014/main" id="{2F46B515-2CF1-4223-9E09-FDEFB0A7EDBA}"/>
               </a:ext>
             </a:extLst>
           </p:cNvPr>
@@ -7417,7 +7417,7 @@
           <p:cNvPr id="5" name="">
             <a:extLst xmlns:a="http://schemas.openxmlformats.org/drawingml/2006/main">
               <a:ext uri="{FF2B5EF4-FFF2-40B4-BE49-F238E27FC236}">
-                <a16:creationId xmlns:a16="http://schemas.microsoft.com/office/drawing/2014/main" id="{10171AC1-5481-40F2-A49B-375A6415E700}"/>
+                <a16:creationId xmlns:a16="http://schemas.microsoft.com/office/drawing/2014/main" id="{EF42ECF5-B049-4B84-A695-A5BD9406D1CC}"/>
               </a:ext>
             </a:extLst>
           </p:cNvPr>
@@ -7450,7 +7450,7 @@
           <p:cNvPr id="6" name="">
             <a:extLst xmlns:a="http://schemas.openxmlformats.org/drawingml/2006/main">
               <a:ext uri="{FF2B5EF4-FFF2-40B4-BE49-F238E27FC236}">
-                <a16:creationId xmlns:a16="http://schemas.microsoft.com/office/drawing/2014/main" id="{6825011B-3DE3-43D9-B9E4-C1244CD9E0AC}"/>
+                <a16:creationId xmlns:a16="http://schemas.microsoft.com/office/drawing/2014/main" id="{4CDA21AE-D713-49F1-B661-6E1FE5703BEC}"/>
               </a:ext>
             </a:extLst>
           </p:cNvPr>
@@ -7514,7 +7514,7 @@
           <p:cNvPr id="7" name="">
             <a:extLst xmlns:a="http://schemas.openxmlformats.org/drawingml/2006/main">
               <a:ext uri="{FF2B5EF4-FFF2-40B4-BE49-F238E27FC236}">
-                <a16:creationId xmlns:a16="http://schemas.microsoft.com/office/drawing/2014/main" id="{72097457-7C9E-4700-B351-A20EF31DE902}"/>
+                <a16:creationId xmlns:a16="http://schemas.microsoft.com/office/drawing/2014/main" id="{A66AB1AD-CB67-417F-8612-94FD7EBEA554}"/>
               </a:ext>
             </a:extLst>
           </p:cNvPr>
@@ -7578,7 +7578,7 @@
           <p:cNvPr id="8" name="">
             <a:extLst xmlns:a="http://schemas.openxmlformats.org/drawingml/2006/main">
               <a:ext uri="{FF2B5EF4-FFF2-40B4-BE49-F238E27FC236}">
-                <a16:creationId xmlns:a16="http://schemas.microsoft.com/office/drawing/2014/main" id="{94B91CF7-EAA9-45D3-949D-5D4629DB9E3A}"/>
+                <a16:creationId xmlns:a16="http://schemas.microsoft.com/office/drawing/2014/main" id="{E23462A4-F315-41CE-8889-D45A6A17EB57}"/>
               </a:ext>
             </a:extLst>
           </p:cNvPr>
@@ -7642,7 +7642,7 @@
           <p:cNvPr id="9" name="">
             <a:extLst xmlns:a="http://schemas.openxmlformats.org/drawingml/2006/main">
               <a:ext uri="{FF2B5EF4-FFF2-40B4-BE49-F238E27FC236}">
-                <a16:creationId xmlns:a16="http://schemas.microsoft.com/office/drawing/2014/main" id="{AB6EF13E-8073-45D3-9ADA-ED58A9066B76}"/>
+                <a16:creationId xmlns:a16="http://schemas.microsoft.com/office/drawing/2014/main" id="{8A5C6984-C78E-4C6F-98BB-BCA1834D8FD4}"/>
               </a:ext>
             </a:extLst>
           </p:cNvPr>
@@ -7675,7 +7675,7 @@
           <p:cNvPr id="10" name="">
             <a:extLst xmlns:a="http://schemas.openxmlformats.org/drawingml/2006/main">
               <a:ext uri="{FF2B5EF4-FFF2-40B4-BE49-F238E27FC236}">
-                <a16:creationId xmlns:a16="http://schemas.microsoft.com/office/drawing/2014/main" id="{1C394125-C417-4AF9-B26F-D7BA8856E09B}"/>
+                <a16:creationId xmlns:a16="http://schemas.microsoft.com/office/drawing/2014/main" id="{92ED5100-4AFD-49F9-BC9D-3339651370D9}"/>
               </a:ext>
             </a:extLst>
           </p:cNvPr>
@@ -7739,7 +7739,7 @@
           <p:cNvPr id="11" name="">
             <a:extLst xmlns:a="http://schemas.openxmlformats.org/drawingml/2006/main">
               <a:ext uri="{FF2B5EF4-FFF2-40B4-BE49-F238E27FC236}">
-                <a16:creationId xmlns:a16="http://schemas.microsoft.com/office/drawing/2014/main" id="{4044CCDF-E4B1-4564-9107-D5531BF79E75}"/>
+                <a16:creationId xmlns:a16="http://schemas.microsoft.com/office/drawing/2014/main" id="{561DD5A9-6384-4A4B-9A30-3A6DF2E249BC}"/>
               </a:ext>
             </a:extLst>
           </p:cNvPr>
@@ -7803,7 +7803,7 @@
           <p:cNvPr id="12" name="">
             <a:extLst xmlns:a="http://schemas.openxmlformats.org/drawingml/2006/main">
               <a:ext uri="{FF2B5EF4-FFF2-40B4-BE49-F238E27FC236}">
-                <a16:creationId xmlns:a16="http://schemas.microsoft.com/office/drawing/2014/main" id="{B3E5A0F1-5E1D-407D-924E-5F1A53A4C600}"/>
+                <a16:creationId xmlns:a16="http://schemas.microsoft.com/office/drawing/2014/main" id="{A4C58FED-BA20-4A81-A8BE-C4EBE50E979D}"/>
               </a:ext>
             </a:extLst>
           </p:cNvPr>
@@ -7867,7 +7867,7 @@
           <p:cNvPr id="13" name="">
             <a:extLst xmlns:a="http://schemas.openxmlformats.org/drawingml/2006/main">
               <a:ext uri="{FF2B5EF4-FFF2-40B4-BE49-F238E27FC236}">
-                <a16:creationId xmlns:a16="http://schemas.microsoft.com/office/drawing/2014/main" id="{55D3D8AF-6806-43DA-903C-FE959BBF1E4B}"/>
+                <a16:creationId xmlns:a16="http://schemas.microsoft.com/office/drawing/2014/main" id="{7C368A71-6D27-48A6-A1EC-3AD8FD48E611}"/>
               </a:ext>
             </a:extLst>
           </p:cNvPr>
@@ -7900,7 +7900,7 @@
           <p:cNvPr id="14" name="">
             <a:extLst xmlns:a="http://schemas.openxmlformats.org/drawingml/2006/main">
               <a:ext uri="{FF2B5EF4-FFF2-40B4-BE49-F238E27FC236}">
-                <a16:creationId xmlns:a16="http://schemas.microsoft.com/office/drawing/2014/main" id="{44BAD831-7910-45AD-BDA8-9F0078A6D3C8}"/>
+                <a16:creationId xmlns:a16="http://schemas.microsoft.com/office/drawing/2014/main" id="{9E939B0C-B920-495C-9BF8-68D2224E6DDC}"/>
               </a:ext>
             </a:extLst>
           </p:cNvPr>
@@ -7964,7 +7964,7 @@
           <p:cNvPr id="15" name="">
             <a:extLst xmlns:a="http://schemas.openxmlformats.org/drawingml/2006/main">
               <a:ext uri="{FF2B5EF4-FFF2-40B4-BE49-F238E27FC236}">
-                <a16:creationId xmlns:a16="http://schemas.microsoft.com/office/drawing/2014/main" id="{F4D1A444-B1D0-4EEF-BA5C-4D8FE3C6BDBA}"/>
+                <a16:creationId xmlns:a16="http://schemas.microsoft.com/office/drawing/2014/main" id="{608A0C8E-D217-4FDE-9B41-A17524E81441}"/>
               </a:ext>
             </a:extLst>
           </p:cNvPr>
@@ -8028,7 +8028,7 @@
           <p:cNvPr id="16" name="">
             <a:extLst xmlns:a="http://schemas.openxmlformats.org/drawingml/2006/main">
               <a:ext uri="{FF2B5EF4-FFF2-40B4-BE49-F238E27FC236}">
-                <a16:creationId xmlns:a16="http://schemas.microsoft.com/office/drawing/2014/main" id="{8F6E9E43-8319-4807-947C-6CC6DB856A5D}"/>
+                <a16:creationId xmlns:a16="http://schemas.microsoft.com/office/drawing/2014/main" id="{CE9E5CC8-ABD5-47EB-AEE5-94C2805717E0}"/>
               </a:ext>
             </a:extLst>
           </p:cNvPr>
@@ -8092,7 +8092,7 @@
           <p:cNvPr id="17" name="">
             <a:extLst xmlns:a="http://schemas.openxmlformats.org/drawingml/2006/main">
               <a:ext uri="{FF2B5EF4-FFF2-40B4-BE49-F238E27FC236}">
-                <a16:creationId xmlns:a16="http://schemas.microsoft.com/office/drawing/2014/main" id="{C903D0D0-E823-4B6B-97D0-BE717550EF3A}"/>
+                <a16:creationId xmlns:a16="http://schemas.microsoft.com/office/drawing/2014/main" id="{037245FB-30BB-4489-9061-5B8913BB8D35}"/>
               </a:ext>
             </a:extLst>
           </p:cNvPr>
@@ -8125,7 +8125,7 @@
           <p:cNvPr id="18" name="">
             <a:extLst xmlns:a="http://schemas.openxmlformats.org/drawingml/2006/main">
               <a:ext uri="{FF2B5EF4-FFF2-40B4-BE49-F238E27FC236}">
-                <a16:creationId xmlns:a16="http://schemas.microsoft.com/office/drawing/2014/main" id="{69B42597-2289-45F6-9E20-C2891CF8C7AA}"/>
+                <a16:creationId xmlns:a16="http://schemas.microsoft.com/office/drawing/2014/main" id="{B5BF7015-A196-4347-8A66-727595116A23}"/>
               </a:ext>
             </a:extLst>
           </p:cNvPr>
@@ -8189,7 +8189,7 @@
           <p:cNvPr id="19" name="">
             <a:extLst xmlns:a="http://schemas.openxmlformats.org/drawingml/2006/main">
               <a:ext uri="{FF2B5EF4-FFF2-40B4-BE49-F238E27FC236}">
-                <a16:creationId xmlns:a16="http://schemas.microsoft.com/office/drawing/2014/main" id="{7679D5A6-9B90-4FC7-AE15-C5BC0EDF7BB2}"/>
+                <a16:creationId xmlns:a16="http://schemas.microsoft.com/office/drawing/2014/main" id="{D8C7DC00-E280-4138-B226-18ECE4E1E9FB}"/>
               </a:ext>
             </a:extLst>
           </p:cNvPr>
@@ -8253,7 +8253,7 @@
           <p:cNvPr id="20" name="">
             <a:extLst xmlns:a="http://schemas.openxmlformats.org/drawingml/2006/main">
               <a:ext uri="{FF2B5EF4-FFF2-40B4-BE49-F238E27FC236}">
-                <a16:creationId xmlns:a16="http://schemas.microsoft.com/office/drawing/2014/main" id="{38AE3BD3-1679-44AC-B1AA-5B905C90C196}"/>
+                <a16:creationId xmlns:a16="http://schemas.microsoft.com/office/drawing/2014/main" id="{763F8528-A360-486C-AA60-DDA78A588031}"/>
               </a:ext>
             </a:extLst>
           </p:cNvPr>
@@ -8317,7 +8317,7 @@
           <p:cNvPr id="21" name="">
             <a:extLst xmlns:a="http://schemas.openxmlformats.org/drawingml/2006/main">
               <a:ext uri="{FF2B5EF4-FFF2-40B4-BE49-F238E27FC236}">
-                <a16:creationId xmlns:a16="http://schemas.microsoft.com/office/drawing/2014/main" id="{751A6DD5-95CD-4EC2-A1C5-7828EFA0F9CA}"/>
+                <a16:creationId xmlns:a16="http://schemas.microsoft.com/office/drawing/2014/main" id="{734B8D55-F061-4162-B337-8FBE5E5ECF69}"/>
               </a:ext>
             </a:extLst>
           </p:cNvPr>
@@ -8381,7 +8381,7 @@
           <p:cNvPr id="22" name="">
             <a:extLst xmlns:a="http://schemas.openxmlformats.org/drawingml/2006/main">
               <a:ext uri="{FF2B5EF4-FFF2-40B4-BE49-F238E27FC236}">
-                <a16:creationId xmlns:a16="http://schemas.microsoft.com/office/drawing/2014/main" id="{D541335E-CC5D-4ECF-954C-F3EF32107E8B}"/>
+                <a16:creationId xmlns:a16="http://schemas.microsoft.com/office/drawing/2014/main" id="{89BE4880-C8C0-4BF0-9623-B6DCDED9C937}"/>
               </a:ext>
             </a:extLst>
           </p:cNvPr>
@@ -8443,7 +8443,7 @@
     </p:spTree>
     <p:extLst>
       <p:ext uri="{BB962C8B-B14F-4D97-AF65-F5344CB8AC3E}">
-        <p14:creationId xmlns:p14="http://schemas.microsoft.com/office/powerpoint/2010/main" val="2099050687"/>
+        <p14:creationId xmlns:p14="http://schemas.microsoft.com/office/powerpoint/2010/main" val="2129688972"/>
       </p:ext>
     </p:extLst>
   </p:cSld>
@@ -8467,7 +8467,7 @@
           <p:cNvPr id="1" name="">
             <a:extLst xmlns:a="http://schemas.openxmlformats.org/drawingml/2006/main">
               <a:ext uri="{FF2B5EF4-FFF2-40B4-BE49-F238E27FC236}">
-                <a16:creationId xmlns:a16="http://schemas.microsoft.com/office/drawing/2014/main" id="{2857D5FE-BB59-40B0-BE71-17F52F9C1CA2}"/>
+                <a16:creationId xmlns:a16="http://schemas.microsoft.com/office/drawing/2014/main" id="{A1F3B9D8-EF29-48EB-88E0-1C9872C3C801}"/>
               </a:ext>
             </a:extLst>
           </p:cNvPr>
@@ -8500,7 +8500,7 @@
           <p:cNvPr id="2" name="">
             <a:extLst xmlns:a="http://schemas.openxmlformats.org/drawingml/2006/main">
               <a:ext uri="{FF2B5EF4-FFF2-40B4-BE49-F238E27FC236}">
-                <a16:creationId xmlns:a16="http://schemas.microsoft.com/office/drawing/2014/main" id="{388FCDBE-4048-48FA-8A2F-11FF04080B99}"/>
+                <a16:creationId xmlns:a16="http://schemas.microsoft.com/office/drawing/2014/main" id="{21C90DE0-C4AF-4DD2-AC95-0F50B2219869}"/>
               </a:ext>
             </a:extLst>
           </p:cNvPr>
@@ -8533,7 +8533,7 @@
           <p:cNvPr id="3" name="">
             <a:extLst xmlns:a="http://schemas.openxmlformats.org/drawingml/2006/main">
               <a:ext uri="{FF2B5EF4-FFF2-40B4-BE49-F238E27FC236}">
-                <a16:creationId xmlns:a16="http://schemas.microsoft.com/office/drawing/2014/main" id="{613AFA15-87F8-441D-A515-59D1B6846DD8}"/>
+                <a16:creationId xmlns:a16="http://schemas.microsoft.com/office/drawing/2014/main" id="{FC5F056C-70BC-4978-978B-75042B5B27ED}"/>
               </a:ext>
             </a:extLst>
           </p:cNvPr>
@@ -8597,7 +8597,7 @@
           <p:cNvPr id="4" name="">
             <a:extLst xmlns:a="http://schemas.openxmlformats.org/drawingml/2006/main">
               <a:ext uri="{FF2B5EF4-FFF2-40B4-BE49-F238E27FC236}">
-                <a16:creationId xmlns:a16="http://schemas.microsoft.com/office/drawing/2014/main" id="{6125C02F-8523-48BE-9051-716EA4C6B507}"/>
+                <a16:creationId xmlns:a16="http://schemas.microsoft.com/office/drawing/2014/main" id="{98CB08EC-AC75-4933-9FAB-617F7D94DF91}"/>
               </a:ext>
             </a:extLst>
           </p:cNvPr>
@@ -8661,7 +8661,7 @@
           <p:cNvPr id="5" name="">
             <a:extLst xmlns:a="http://schemas.openxmlformats.org/drawingml/2006/main">
               <a:ext uri="{FF2B5EF4-FFF2-40B4-BE49-F238E27FC236}">
-                <a16:creationId xmlns:a16="http://schemas.microsoft.com/office/drawing/2014/main" id="{0D94803D-83DB-48D0-AEBB-D0CE6AEEB4EF}"/>
+                <a16:creationId xmlns:a16="http://schemas.microsoft.com/office/drawing/2014/main" id="{431041A5-057F-4AC8-B7C5-53C60A25CEB0}"/>
               </a:ext>
             </a:extLst>
           </p:cNvPr>
@@ -8694,7 +8694,7 @@
           <p:cNvPr id="6" name="">
             <a:extLst xmlns:a="http://schemas.openxmlformats.org/drawingml/2006/main">
               <a:ext uri="{FF2B5EF4-FFF2-40B4-BE49-F238E27FC236}">
-                <a16:creationId xmlns:a16="http://schemas.microsoft.com/office/drawing/2014/main" id="{9DC93C6E-EF63-47CB-843A-65587D46217E}"/>
+                <a16:creationId xmlns:a16="http://schemas.microsoft.com/office/drawing/2014/main" id="{B054BA4D-0D18-45EF-9AF9-D0BCA199B5F8}"/>
               </a:ext>
             </a:extLst>
           </p:cNvPr>
@@ -8758,7 +8758,7 @@
           <p:cNvPr id="7" name="">
             <a:extLst xmlns:a="http://schemas.openxmlformats.org/drawingml/2006/main">
               <a:ext uri="{FF2B5EF4-FFF2-40B4-BE49-F238E27FC236}">
-                <a16:creationId xmlns:a16="http://schemas.microsoft.com/office/drawing/2014/main" id="{E53143D3-11B2-40BE-B76B-78197C96F053}"/>
+                <a16:creationId xmlns:a16="http://schemas.microsoft.com/office/drawing/2014/main" id="{BF1A93A8-000C-4404-849F-8F4B4307EC0B}"/>
               </a:ext>
             </a:extLst>
           </p:cNvPr>
@@ -8822,7 +8822,7 @@
           <p:cNvPr id="8" name="">
             <a:extLst xmlns:a="http://schemas.openxmlformats.org/drawingml/2006/main">
               <a:ext uri="{FF2B5EF4-FFF2-40B4-BE49-F238E27FC236}">
-                <a16:creationId xmlns:a16="http://schemas.microsoft.com/office/drawing/2014/main" id="{E95A5EF2-F582-4685-86BF-0205D2DEA37F}"/>
+                <a16:creationId xmlns:a16="http://schemas.microsoft.com/office/drawing/2014/main" id="{AC156085-3AE3-4D5A-8367-26F1096909AC}"/>
               </a:ext>
             </a:extLst>
           </p:cNvPr>
@@ -8886,7 +8886,7 @@
           <p:cNvPr id="9" name="">
             <a:extLst xmlns:a="http://schemas.openxmlformats.org/drawingml/2006/main">
               <a:ext uri="{FF2B5EF4-FFF2-40B4-BE49-F238E27FC236}">
-                <a16:creationId xmlns:a16="http://schemas.microsoft.com/office/drawing/2014/main" id="{5F27FBD6-7E80-4122-94E5-FFE6EEC60322}"/>
+                <a16:creationId xmlns:a16="http://schemas.microsoft.com/office/drawing/2014/main" id="{EB6DDD0E-9A17-4ED2-9C1A-8E2DE348D561}"/>
               </a:ext>
             </a:extLst>
           </p:cNvPr>
@@ -8950,7 +8950,7 @@
           <p:cNvPr id="10" name="">
             <a:extLst xmlns:a="http://schemas.openxmlformats.org/drawingml/2006/main">
               <a:ext uri="{FF2B5EF4-FFF2-40B4-BE49-F238E27FC236}">
-                <a16:creationId xmlns:a16="http://schemas.microsoft.com/office/drawing/2014/main" id="{E758FE83-1174-4506-A61B-1FBE41924BD7}"/>
+                <a16:creationId xmlns:a16="http://schemas.microsoft.com/office/drawing/2014/main" id="{7C78C464-0E4F-41F9-86E3-3F91A8E66241}"/>
               </a:ext>
             </a:extLst>
           </p:cNvPr>
@@ -9014,7 +9014,7 @@
           <p:cNvPr id="11" name="">
             <a:extLst xmlns:a="http://schemas.openxmlformats.org/drawingml/2006/main">
               <a:ext uri="{FF2B5EF4-FFF2-40B4-BE49-F238E27FC236}">
-                <a16:creationId xmlns:a16="http://schemas.microsoft.com/office/drawing/2014/main" id="{35389AF2-F330-42CF-9944-083CD3310037}"/>
+                <a16:creationId xmlns:a16="http://schemas.microsoft.com/office/drawing/2014/main" id="{B7D935E9-6D59-42B7-88BD-AB1CFEF39075}"/>
               </a:ext>
             </a:extLst>
           </p:cNvPr>
@@ -9078,7 +9078,7 @@
           <p:cNvPr id="12" name="">
             <a:extLst xmlns:a="http://schemas.openxmlformats.org/drawingml/2006/main">
               <a:ext uri="{FF2B5EF4-FFF2-40B4-BE49-F238E27FC236}">
-                <a16:creationId xmlns:a16="http://schemas.microsoft.com/office/drawing/2014/main" id="{7B7C654F-B91C-437C-BA04-23FC01106EDB}"/>
+                <a16:creationId xmlns:a16="http://schemas.microsoft.com/office/drawing/2014/main" id="{E1D55278-3F83-49B3-B491-22493C354630}"/>
               </a:ext>
             </a:extLst>
           </p:cNvPr>
@@ -9142,7 +9142,7 @@
           <p:cNvPr id="13" name="">
             <a:extLst xmlns:a="http://schemas.openxmlformats.org/drawingml/2006/main">
               <a:ext uri="{FF2B5EF4-FFF2-40B4-BE49-F238E27FC236}">
-                <a16:creationId xmlns:a16="http://schemas.microsoft.com/office/drawing/2014/main" id="{7B968308-C070-4C2E-BA12-36F831753A48}"/>
+                <a16:creationId xmlns:a16="http://schemas.microsoft.com/office/drawing/2014/main" id="{0D1B05E5-7A9D-4058-B3CE-84C796C2AE30}"/>
               </a:ext>
             </a:extLst>
           </p:cNvPr>
@@ -9234,7 +9234,7 @@
           <p:cNvPr id="14" name="">
             <a:extLst xmlns:a="http://schemas.openxmlformats.org/drawingml/2006/main">
               <a:ext uri="{FF2B5EF4-FFF2-40B4-BE49-F238E27FC236}">
-                <a16:creationId xmlns:a16="http://schemas.microsoft.com/office/drawing/2014/main" id="{F80BE795-1551-4A48-8CFB-E6A8360250FF}"/>
+                <a16:creationId xmlns:a16="http://schemas.microsoft.com/office/drawing/2014/main" id="{C5904239-2226-47AE-962D-5F6B67ECBE8D}"/>
               </a:ext>
             </a:extLst>
           </p:cNvPr>
@@ -9267,7 +9267,7 @@
           <p:cNvPr id="15" name="">
             <a:extLst xmlns:a="http://schemas.openxmlformats.org/drawingml/2006/main">
               <a:ext uri="{FF2B5EF4-FFF2-40B4-BE49-F238E27FC236}">
-                <a16:creationId xmlns:a16="http://schemas.microsoft.com/office/drawing/2014/main" id="{7271946D-94E2-4655-A0F6-C0DDA79CAFA5}"/>
+                <a16:creationId xmlns:a16="http://schemas.microsoft.com/office/drawing/2014/main" id="{1107A5AE-BE99-455D-9825-31702C728F10}"/>
               </a:ext>
             </a:extLst>
           </p:cNvPr>
@@ -9331,7 +9331,7 @@
           <p:cNvPr id="16" name="">
             <a:extLst xmlns:a="http://schemas.openxmlformats.org/drawingml/2006/main">
               <a:ext uri="{FF2B5EF4-FFF2-40B4-BE49-F238E27FC236}">
-                <a16:creationId xmlns:a16="http://schemas.microsoft.com/office/drawing/2014/main" id="{33468D9E-DCFA-4057-9EFD-AD9FC8F44A04}"/>
+                <a16:creationId xmlns:a16="http://schemas.microsoft.com/office/drawing/2014/main" id="{91446918-80A9-496A-9FCF-6ECC052BE2BB}"/>
               </a:ext>
             </a:extLst>
           </p:cNvPr>
@@ -9395,7 +9395,7 @@
           <p:cNvPr id="17" name="">
             <a:extLst xmlns:a="http://schemas.openxmlformats.org/drawingml/2006/main">
               <a:ext uri="{FF2B5EF4-FFF2-40B4-BE49-F238E27FC236}">
-                <a16:creationId xmlns:a16="http://schemas.microsoft.com/office/drawing/2014/main" id="{5CC505AD-B161-49A2-9313-9B577E73190D}"/>
+                <a16:creationId xmlns:a16="http://schemas.microsoft.com/office/drawing/2014/main" id="{6F2283AB-28B2-402B-B834-0E417D23FA6B}"/>
               </a:ext>
             </a:extLst>
           </p:cNvPr>
@@ -9459,7 +9459,7 @@
           <p:cNvPr id="18" name="">
             <a:extLst xmlns:a="http://schemas.openxmlformats.org/drawingml/2006/main">
               <a:ext uri="{FF2B5EF4-FFF2-40B4-BE49-F238E27FC236}">
-                <a16:creationId xmlns:a16="http://schemas.microsoft.com/office/drawing/2014/main" id="{AA31BEB6-FE9D-4B3F-8193-0B5F8AC4C49B}"/>
+                <a16:creationId xmlns:a16="http://schemas.microsoft.com/office/drawing/2014/main" id="{4837D973-E452-4538-907B-C9F3D3715184}"/>
               </a:ext>
             </a:extLst>
           </p:cNvPr>
@@ -9523,7 +9523,7 @@
           <p:cNvPr id="19" name="">
             <a:extLst xmlns:a="http://schemas.openxmlformats.org/drawingml/2006/main">
               <a:ext uri="{FF2B5EF4-FFF2-40B4-BE49-F238E27FC236}">
-                <a16:creationId xmlns:a16="http://schemas.microsoft.com/office/drawing/2014/main" id="{83D98EF9-AE14-4B35-850E-929DDABDEE2E}"/>
+                <a16:creationId xmlns:a16="http://schemas.microsoft.com/office/drawing/2014/main" id="{76842B50-B378-440F-B7AE-D6332C41D3E7}"/>
               </a:ext>
             </a:extLst>
           </p:cNvPr>
@@ -9587,7 +9587,7 @@
           <p:cNvPr id="20" name="">
             <a:extLst xmlns:a="http://schemas.openxmlformats.org/drawingml/2006/main">
               <a:ext uri="{FF2B5EF4-FFF2-40B4-BE49-F238E27FC236}">
-                <a16:creationId xmlns:a16="http://schemas.microsoft.com/office/drawing/2014/main" id="{D99F9318-8A2D-46E2-9B1C-B305F89EAD48}"/>
+                <a16:creationId xmlns:a16="http://schemas.microsoft.com/office/drawing/2014/main" id="{217E62A2-9E93-4175-B384-03B6FBE02332}"/>
               </a:ext>
             </a:extLst>
           </p:cNvPr>
@@ -9651,7 +9651,7 @@
           <p:cNvPr id="21" name="">
             <a:extLst xmlns:a="http://schemas.openxmlformats.org/drawingml/2006/main">
               <a:ext uri="{FF2B5EF4-FFF2-40B4-BE49-F238E27FC236}">
-                <a16:creationId xmlns:a16="http://schemas.microsoft.com/office/drawing/2014/main" id="{DDEF9C05-0643-452B-A7CA-6452DD72A917}"/>
+                <a16:creationId xmlns:a16="http://schemas.microsoft.com/office/drawing/2014/main" id="{7228343B-B590-4EBA-8DF6-4AD1266EF40D}"/>
               </a:ext>
             </a:extLst>
           </p:cNvPr>
@@ -9715,7 +9715,7 @@
           <p:cNvPr id="22" name="">
             <a:extLst xmlns:a="http://schemas.openxmlformats.org/drawingml/2006/main">
               <a:ext uri="{FF2B5EF4-FFF2-40B4-BE49-F238E27FC236}">
-                <a16:creationId xmlns:a16="http://schemas.microsoft.com/office/drawing/2014/main" id="{B2051ECF-9342-48E8-B4E0-9D238318DF0A}"/>
+                <a16:creationId xmlns:a16="http://schemas.microsoft.com/office/drawing/2014/main" id="{DD8C19E5-2C7F-4906-87F3-4B104A232EDF}"/>
               </a:ext>
             </a:extLst>
           </p:cNvPr>
@@ -9807,7 +9807,7 @@
           <p:cNvPr id="23" name="">
             <a:extLst xmlns:a="http://schemas.openxmlformats.org/drawingml/2006/main">
               <a:ext uri="{FF2B5EF4-FFF2-40B4-BE49-F238E27FC236}">
-                <a16:creationId xmlns:a16="http://schemas.microsoft.com/office/drawing/2014/main" id="{08020277-0A3D-4B52-9A47-A1EF8DD2287F}"/>
+                <a16:creationId xmlns:a16="http://schemas.microsoft.com/office/drawing/2014/main" id="{7582D3B2-D7C9-4E6E-81E7-9E14AE4FD4F6}"/>
               </a:ext>
             </a:extLst>
           </p:cNvPr>
@@ -9871,7 +9871,7 @@
           <p:cNvPr id="24" name="">
             <a:extLst xmlns:a="http://schemas.openxmlformats.org/drawingml/2006/main">
               <a:ext uri="{FF2B5EF4-FFF2-40B4-BE49-F238E27FC236}">
-                <a16:creationId xmlns:a16="http://schemas.microsoft.com/office/drawing/2014/main" id="{00428027-EE80-4139-ADAC-CF76DC1CCE4C}"/>
+                <a16:creationId xmlns:a16="http://schemas.microsoft.com/office/drawing/2014/main" id="{A50FD900-0AF6-4C22-8B1C-89A54C0B3C92}"/>
               </a:ext>
             </a:extLst>
           </p:cNvPr>
@@ -9933,7 +9933,7 @@
     </p:spTree>
     <p:extLst>
       <p:ext uri="{BB962C8B-B14F-4D97-AF65-F5344CB8AC3E}">
-        <p14:creationId xmlns:p14="http://schemas.microsoft.com/office/powerpoint/2010/main" val="153821807"/>
+        <p14:creationId xmlns:p14="http://schemas.microsoft.com/office/powerpoint/2010/main" val="133439590"/>
       </p:ext>
     </p:extLst>
   </p:cSld>
@@ -9957,7 +9957,7 @@
           <p:cNvPr id="1" name="">
             <a:extLst xmlns:a="http://schemas.openxmlformats.org/drawingml/2006/main">
               <a:ext uri="{FF2B5EF4-FFF2-40B4-BE49-F238E27FC236}">
-                <a16:creationId xmlns:a16="http://schemas.microsoft.com/office/drawing/2014/main" id="{9E6CB173-D785-4F46-97FE-2AACF8AA2F3E}"/>
+                <a16:creationId xmlns:a16="http://schemas.microsoft.com/office/drawing/2014/main" id="{4895A92C-7D5D-41E9-A6AA-A3E92B7D8877}"/>
               </a:ext>
             </a:extLst>
           </p:cNvPr>
@@ -9990,7 +9990,7 @@
           <p:cNvPr id="2" name="">
             <a:extLst xmlns:a="http://schemas.openxmlformats.org/drawingml/2006/main">
               <a:ext uri="{FF2B5EF4-FFF2-40B4-BE49-F238E27FC236}">
-                <a16:creationId xmlns:a16="http://schemas.microsoft.com/office/drawing/2014/main" id="{07C740DA-9E4C-4336-92BB-6C2F6D3AD5E1}"/>
+                <a16:creationId xmlns:a16="http://schemas.microsoft.com/office/drawing/2014/main" id="{270CE68F-1DD7-4ACB-8E23-72367BD899EE}"/>
               </a:ext>
             </a:extLst>
           </p:cNvPr>
@@ -10023,7 +10023,7 @@
           <p:cNvPr id="3" name="">
             <a:extLst xmlns:a="http://schemas.openxmlformats.org/drawingml/2006/main">
               <a:ext uri="{FF2B5EF4-FFF2-40B4-BE49-F238E27FC236}">
-                <a16:creationId xmlns:a16="http://schemas.microsoft.com/office/drawing/2014/main" id="{9912D231-AE23-47CC-A4E2-8FFE57091D79}"/>
+                <a16:creationId xmlns:a16="http://schemas.microsoft.com/office/drawing/2014/main" id="{DE654524-EE27-42EF-B475-371F36CA474F}"/>
               </a:ext>
             </a:extLst>
           </p:cNvPr>
@@ -10087,7 +10087,7 @@
           <p:cNvPr id="4" name="">
             <a:extLst xmlns:a="http://schemas.openxmlformats.org/drawingml/2006/main">
               <a:ext uri="{FF2B5EF4-FFF2-40B4-BE49-F238E27FC236}">
-                <a16:creationId xmlns:a16="http://schemas.microsoft.com/office/drawing/2014/main" id="{B1E52E43-74ED-4CD7-A776-31A0C23293BF}"/>
+                <a16:creationId xmlns:a16="http://schemas.microsoft.com/office/drawing/2014/main" id="{DF1F77A9-6D46-41F5-B81B-436965E7D398}"/>
               </a:ext>
             </a:extLst>
           </p:cNvPr>
@@ -10151,7 +10151,7 @@
           <p:cNvPr id="5" name="">
             <a:extLst xmlns:a="http://schemas.openxmlformats.org/drawingml/2006/main">
               <a:ext uri="{FF2B5EF4-FFF2-40B4-BE49-F238E27FC236}">
-                <a16:creationId xmlns:a16="http://schemas.microsoft.com/office/drawing/2014/main" id="{C0ED9021-B904-4668-9CCB-354C7762A2DB}"/>
+                <a16:creationId xmlns:a16="http://schemas.microsoft.com/office/drawing/2014/main" id="{2A3781AD-EE05-476B-B788-A1B5E7B93D7F}"/>
               </a:ext>
             </a:extLst>
           </p:cNvPr>
@@ -10184,7 +10184,7 @@
           <p:cNvPr id="6" name="">
             <a:extLst xmlns:a="http://schemas.openxmlformats.org/drawingml/2006/main">
               <a:ext uri="{FF2B5EF4-FFF2-40B4-BE49-F238E27FC236}">
-                <a16:creationId xmlns:a16="http://schemas.microsoft.com/office/drawing/2014/main" id="{54ED8963-828D-4DAA-9CAC-669BBE6E5ACC}"/>
+                <a16:creationId xmlns:a16="http://schemas.microsoft.com/office/drawing/2014/main" id="{C5F74263-0192-460C-9356-6A1BBE79B3F1}"/>
               </a:ext>
             </a:extLst>
           </p:cNvPr>
@@ -10248,7 +10248,7 @@
           <p:cNvPr id="7" name="">
             <a:extLst xmlns:a="http://schemas.openxmlformats.org/drawingml/2006/main">
               <a:ext uri="{FF2B5EF4-FFF2-40B4-BE49-F238E27FC236}">
-                <a16:creationId xmlns:a16="http://schemas.microsoft.com/office/drawing/2014/main" id="{42419A90-8D8E-4E47-902D-999311C759DB}"/>
+                <a16:creationId xmlns:a16="http://schemas.microsoft.com/office/drawing/2014/main" id="{0EA8C352-1806-4FE2-BB54-B96FAC9C9DF4}"/>
               </a:ext>
             </a:extLst>
           </p:cNvPr>
@@ -10281,7 +10281,7 @@
           <p:cNvPr id="8" name="">
             <a:extLst xmlns:a="http://schemas.openxmlformats.org/drawingml/2006/main">
               <a:ext uri="{FF2B5EF4-FFF2-40B4-BE49-F238E27FC236}">
-                <a16:creationId xmlns:a16="http://schemas.microsoft.com/office/drawing/2014/main" id="{6F90F845-F583-45E3-AFA3-EC6709790BEE}"/>
+                <a16:creationId xmlns:a16="http://schemas.microsoft.com/office/drawing/2014/main" id="{DF4778C3-9EBD-4098-A692-52594866A9B1}"/>
               </a:ext>
             </a:extLst>
           </p:cNvPr>
@@ -10345,7 +10345,7 @@
           <p:cNvPr id="9" name="">
             <a:extLst xmlns:a="http://schemas.openxmlformats.org/drawingml/2006/main">
               <a:ext uri="{FF2B5EF4-FFF2-40B4-BE49-F238E27FC236}">
-                <a16:creationId xmlns:a16="http://schemas.microsoft.com/office/drawing/2014/main" id="{0610D1ED-D3B2-42D7-9C5C-6934F2CF7D4D}"/>
+                <a16:creationId xmlns:a16="http://schemas.microsoft.com/office/drawing/2014/main" id="{4AA96ECC-2946-43E7-B652-1F23041115CF}"/>
               </a:ext>
             </a:extLst>
           </p:cNvPr>
@@ -10378,7 +10378,7 @@
           <p:cNvPr id="10" name="">
             <a:extLst xmlns:a="http://schemas.openxmlformats.org/drawingml/2006/main">
               <a:ext uri="{FF2B5EF4-FFF2-40B4-BE49-F238E27FC236}">
-                <a16:creationId xmlns:a16="http://schemas.microsoft.com/office/drawing/2014/main" id="{6A87DDA9-41A4-40AF-9BD4-B2E29C07773A}"/>
+                <a16:creationId xmlns:a16="http://schemas.microsoft.com/office/drawing/2014/main" id="{4DC6424B-8F44-437E-866C-99C8D70B457B}"/>
               </a:ext>
             </a:extLst>
           </p:cNvPr>
@@ -10442,7 +10442,7 @@
           <p:cNvPr id="11" name="">
             <a:extLst xmlns:a="http://schemas.openxmlformats.org/drawingml/2006/main">
               <a:ext uri="{FF2B5EF4-FFF2-40B4-BE49-F238E27FC236}">
-                <a16:creationId xmlns:a16="http://schemas.microsoft.com/office/drawing/2014/main" id="{334329E8-AE74-481A-97B4-D3BFA9011962}"/>
+                <a16:creationId xmlns:a16="http://schemas.microsoft.com/office/drawing/2014/main" id="{DBD366D5-E2E6-44EB-B893-574E8CD7B7A3}"/>
               </a:ext>
             </a:extLst>
           </p:cNvPr>
@@ -10475,7 +10475,7 @@
           <p:cNvPr id="12" name="">
             <a:extLst xmlns:a="http://schemas.openxmlformats.org/drawingml/2006/main">
               <a:ext uri="{FF2B5EF4-FFF2-40B4-BE49-F238E27FC236}">
-                <a16:creationId xmlns:a16="http://schemas.microsoft.com/office/drawing/2014/main" id="{3153A479-80E3-4138-AA1C-6D4724194FED}"/>
+                <a16:creationId xmlns:a16="http://schemas.microsoft.com/office/drawing/2014/main" id="{FC2EACC7-650B-4D7A-AACE-1C63ADDADBC6}"/>
               </a:ext>
             </a:extLst>
           </p:cNvPr>
@@ -10539,7 +10539,7 @@
           <p:cNvPr id="13" name="">
             <a:extLst xmlns:a="http://schemas.openxmlformats.org/drawingml/2006/main">
               <a:ext uri="{FF2B5EF4-FFF2-40B4-BE49-F238E27FC236}">
-                <a16:creationId xmlns:a16="http://schemas.microsoft.com/office/drawing/2014/main" id="{81DCB2D6-FEA6-4405-9CAC-E8102DE7D54D}"/>
+                <a16:creationId xmlns:a16="http://schemas.microsoft.com/office/drawing/2014/main" id="{E36EB666-E50F-479A-9813-D71CE845BFB8}"/>
               </a:ext>
             </a:extLst>
           </p:cNvPr>
@@ -10572,7 +10572,7 @@
           <p:cNvPr id="14" name="">
             <a:extLst xmlns:a="http://schemas.openxmlformats.org/drawingml/2006/main">
               <a:ext uri="{FF2B5EF4-FFF2-40B4-BE49-F238E27FC236}">
-                <a16:creationId xmlns:a16="http://schemas.microsoft.com/office/drawing/2014/main" id="{743DBD19-59D0-469F-9525-3A189CE2B65F}"/>
+                <a16:creationId xmlns:a16="http://schemas.microsoft.com/office/drawing/2014/main" id="{F1AABCAC-0FB2-4EB2-8C8C-80BCDAD3CC2A}"/>
               </a:ext>
             </a:extLst>
           </p:cNvPr>
@@ -10636,7 +10636,7 @@
           <p:cNvPr id="15" name="">
             <a:extLst xmlns:a="http://schemas.openxmlformats.org/drawingml/2006/main">
               <a:ext uri="{FF2B5EF4-FFF2-40B4-BE49-F238E27FC236}">
-                <a16:creationId xmlns:a16="http://schemas.microsoft.com/office/drawing/2014/main" id="{DDE80389-A7A1-4C96-9485-B391B7A2E366}"/>
+                <a16:creationId xmlns:a16="http://schemas.microsoft.com/office/drawing/2014/main" id="{CAA806B1-2CB7-48B2-BD5B-55F67C8B1C43}"/>
               </a:ext>
             </a:extLst>
           </p:cNvPr>
@@ -10669,7 +10669,7 @@
           <p:cNvPr id="16" name="">
             <a:extLst xmlns:a="http://schemas.openxmlformats.org/drawingml/2006/main">
               <a:ext uri="{FF2B5EF4-FFF2-40B4-BE49-F238E27FC236}">
-                <a16:creationId xmlns:a16="http://schemas.microsoft.com/office/drawing/2014/main" id="{06007640-ABA5-443A-ADF7-69E653E3BB0F}"/>
+                <a16:creationId xmlns:a16="http://schemas.microsoft.com/office/drawing/2014/main" id="{F18B2BC2-9515-4449-BA34-79B73D61EB36}"/>
               </a:ext>
             </a:extLst>
           </p:cNvPr>
@@ -10733,7 +10733,7 @@
           <p:cNvPr id="17" name="">
             <a:extLst xmlns:a="http://schemas.openxmlformats.org/drawingml/2006/main">
               <a:ext uri="{FF2B5EF4-FFF2-40B4-BE49-F238E27FC236}">
-                <a16:creationId xmlns:a16="http://schemas.microsoft.com/office/drawing/2014/main" id="{4243F039-EE18-4436-A6DF-C1C5B3ABC3CB}"/>
+                <a16:creationId xmlns:a16="http://schemas.microsoft.com/office/drawing/2014/main" id="{C2A962A0-99AC-417D-978F-85C5C033422D}"/>
               </a:ext>
             </a:extLst>
           </p:cNvPr>
@@ -10766,7 +10766,7 @@
           <p:cNvPr id="18" name="">
             <a:extLst xmlns:a="http://schemas.openxmlformats.org/drawingml/2006/main">
               <a:ext uri="{FF2B5EF4-FFF2-40B4-BE49-F238E27FC236}">
-                <a16:creationId xmlns:a16="http://schemas.microsoft.com/office/drawing/2014/main" id="{B9CFF583-D902-400C-A7AB-AA2220404C9C}"/>
+                <a16:creationId xmlns:a16="http://schemas.microsoft.com/office/drawing/2014/main" id="{6034F1FA-1114-4ADA-AC6F-E9CF5FE2DCD5}"/>
               </a:ext>
             </a:extLst>
           </p:cNvPr>
@@ -10830,7 +10830,7 @@
           <p:cNvPr id="19" name="">
             <a:extLst xmlns:a="http://schemas.openxmlformats.org/drawingml/2006/main">
               <a:ext uri="{FF2B5EF4-FFF2-40B4-BE49-F238E27FC236}">
-                <a16:creationId xmlns:a16="http://schemas.microsoft.com/office/drawing/2014/main" id="{8069F54E-5900-4103-A76E-5D0EEB9DDC9A}"/>
+                <a16:creationId xmlns:a16="http://schemas.microsoft.com/office/drawing/2014/main" id="{2BD46A9A-49F5-4743-9AF8-EF5DBC914D68}"/>
               </a:ext>
             </a:extLst>
           </p:cNvPr>
@@ -10863,7 +10863,7 @@
           <p:cNvPr id="20" name="">
             <a:extLst xmlns:a="http://schemas.openxmlformats.org/drawingml/2006/main">
               <a:ext uri="{FF2B5EF4-FFF2-40B4-BE49-F238E27FC236}">
-                <a16:creationId xmlns:a16="http://schemas.microsoft.com/office/drawing/2014/main" id="{61F11DBD-9649-4889-9CE4-108C30532665}"/>
+                <a16:creationId xmlns:a16="http://schemas.microsoft.com/office/drawing/2014/main" id="{B2C303F4-327A-4A91-852D-CC07FCDC2917}"/>
               </a:ext>
             </a:extLst>
           </p:cNvPr>
@@ -10927,7 +10927,7 @@
           <p:cNvPr id="21" name="">
             <a:extLst xmlns:a="http://schemas.openxmlformats.org/drawingml/2006/main">
               <a:ext uri="{FF2B5EF4-FFF2-40B4-BE49-F238E27FC236}">
-                <a16:creationId xmlns:a16="http://schemas.microsoft.com/office/drawing/2014/main" id="{6A635E70-9A81-4BA5-B9C2-EF53057E3992}"/>
+                <a16:creationId xmlns:a16="http://schemas.microsoft.com/office/drawing/2014/main" id="{84BD06F5-07A5-45EA-BCB2-AB197FA1375A}"/>
               </a:ext>
             </a:extLst>
           </p:cNvPr>
@@ -10960,7 +10960,7 @@
           <p:cNvPr id="22" name="">
             <a:extLst xmlns:a="http://schemas.openxmlformats.org/drawingml/2006/main">
               <a:ext uri="{FF2B5EF4-FFF2-40B4-BE49-F238E27FC236}">
-                <a16:creationId xmlns:a16="http://schemas.microsoft.com/office/drawing/2014/main" id="{70A1DDA9-F713-4CB0-A85D-2915C73D19BB}"/>
+                <a16:creationId xmlns:a16="http://schemas.microsoft.com/office/drawing/2014/main" id="{99850234-965E-4475-A48E-293C0EC48FF6}"/>
               </a:ext>
             </a:extLst>
           </p:cNvPr>
@@ -11024,7 +11024,7 @@
           <p:cNvPr id="23" name="">
             <a:extLst xmlns:a="http://schemas.openxmlformats.org/drawingml/2006/main">
               <a:ext uri="{FF2B5EF4-FFF2-40B4-BE49-F238E27FC236}">
-                <a16:creationId xmlns:a16="http://schemas.microsoft.com/office/drawing/2014/main" id="{BE61DD8E-3023-4655-A65C-77F1DAD25D32}"/>
+                <a16:creationId xmlns:a16="http://schemas.microsoft.com/office/drawing/2014/main" id="{2A079226-4EFE-49B4-9339-7F0BBDA2DA5C}"/>
               </a:ext>
             </a:extLst>
           </p:cNvPr>
@@ -11057,7 +11057,7 @@
           <p:cNvPr id="24" name="">
             <a:extLst xmlns:a="http://schemas.openxmlformats.org/drawingml/2006/main">
               <a:ext uri="{FF2B5EF4-FFF2-40B4-BE49-F238E27FC236}">
-                <a16:creationId xmlns:a16="http://schemas.microsoft.com/office/drawing/2014/main" id="{42E57CA7-97D7-43A5-9F16-651D7E0610CA}"/>
+                <a16:creationId xmlns:a16="http://schemas.microsoft.com/office/drawing/2014/main" id="{92C75C42-8276-4CE9-AB38-AEC43E44624E}"/>
               </a:ext>
             </a:extLst>
           </p:cNvPr>
@@ -11121,7 +11121,7 @@
           <p:cNvPr id="25" name="">
             <a:extLst xmlns:a="http://schemas.openxmlformats.org/drawingml/2006/main">
               <a:ext uri="{FF2B5EF4-FFF2-40B4-BE49-F238E27FC236}">
-                <a16:creationId xmlns:a16="http://schemas.microsoft.com/office/drawing/2014/main" id="{E04A40A9-9F50-40CA-BF0F-C8036E5DAD4D}"/>
+                <a16:creationId xmlns:a16="http://schemas.microsoft.com/office/drawing/2014/main" id="{391E71F3-D4A7-439A-A796-4A6E243BD9FA}"/>
               </a:ext>
             </a:extLst>
           </p:cNvPr>
@@ -11154,7 +11154,7 @@
           <p:cNvPr id="26" name="">
             <a:extLst xmlns:a="http://schemas.openxmlformats.org/drawingml/2006/main">
               <a:ext uri="{FF2B5EF4-FFF2-40B4-BE49-F238E27FC236}">
-                <a16:creationId xmlns:a16="http://schemas.microsoft.com/office/drawing/2014/main" id="{8A3F703F-2834-47A5-9451-B8B40AE00D4C}"/>
+                <a16:creationId xmlns:a16="http://schemas.microsoft.com/office/drawing/2014/main" id="{3A5C6A46-3BE7-40B1-9B4D-B720016B53F0}"/>
               </a:ext>
             </a:extLst>
           </p:cNvPr>
@@ -11218,7 +11218,7 @@
           <p:cNvPr id="27" name="">
             <a:extLst xmlns:a="http://schemas.openxmlformats.org/drawingml/2006/main">
               <a:ext uri="{FF2B5EF4-FFF2-40B4-BE49-F238E27FC236}">
-                <a16:creationId xmlns:a16="http://schemas.microsoft.com/office/drawing/2014/main" id="{303CD530-AB4C-492D-9BB1-5991DD4BB7AD}"/>
+                <a16:creationId xmlns:a16="http://schemas.microsoft.com/office/drawing/2014/main" id="{5B8F9CDE-5DFF-4B85-88E5-8893A7F7AD04}"/>
               </a:ext>
             </a:extLst>
           </p:cNvPr>
@@ -11251,7 +11251,7 @@
           <p:cNvPr id="28" name="">
             <a:extLst xmlns:a="http://schemas.openxmlformats.org/drawingml/2006/main">
               <a:ext uri="{FF2B5EF4-FFF2-40B4-BE49-F238E27FC236}">
-                <a16:creationId xmlns:a16="http://schemas.microsoft.com/office/drawing/2014/main" id="{717D7208-4CC6-426D-A97E-5DCD4EDB8C63}"/>
+                <a16:creationId xmlns:a16="http://schemas.microsoft.com/office/drawing/2014/main" id="{7B8A3692-E05F-4B80-8079-EC0F0C0ECB73}"/>
               </a:ext>
             </a:extLst>
           </p:cNvPr>
@@ -11315,7 +11315,7 @@
           <p:cNvPr id="29" name="">
             <a:extLst xmlns:a="http://schemas.openxmlformats.org/drawingml/2006/main">
               <a:ext uri="{FF2B5EF4-FFF2-40B4-BE49-F238E27FC236}">
-                <a16:creationId xmlns:a16="http://schemas.microsoft.com/office/drawing/2014/main" id="{81BB5D96-72CF-4616-9602-32181E70F9A8}"/>
+                <a16:creationId xmlns:a16="http://schemas.microsoft.com/office/drawing/2014/main" id="{E64C28AC-15FD-4A37-8463-E6C521D8F809}"/>
               </a:ext>
             </a:extLst>
           </p:cNvPr>
@@ -11379,7 +11379,7 @@
           <p:cNvPr id="30" name="">
             <a:extLst xmlns:a="http://schemas.openxmlformats.org/drawingml/2006/main">
               <a:ext uri="{FF2B5EF4-FFF2-40B4-BE49-F238E27FC236}">
-                <a16:creationId xmlns:a16="http://schemas.microsoft.com/office/drawing/2014/main" id="{75877531-8150-492F-AC39-4455D95F943A}"/>
+                <a16:creationId xmlns:a16="http://schemas.microsoft.com/office/drawing/2014/main" id="{449F5BA5-05E4-4613-B326-FAF94A3EA263}"/>
               </a:ext>
             </a:extLst>
           </p:cNvPr>
@@ -11441,7 +11441,7 @@
     </p:spTree>
     <p:extLst>
       <p:ext uri="{BB962C8B-B14F-4D97-AF65-F5344CB8AC3E}">
-        <p14:creationId xmlns:p14="http://schemas.microsoft.com/office/powerpoint/2010/main" val="1144765023"/>
+        <p14:creationId xmlns:p14="http://schemas.microsoft.com/office/powerpoint/2010/main" val="980805766"/>
       </p:ext>
     </p:extLst>
   </p:cSld>
@@ -11465,7 +11465,7 @@
           <p:cNvPr id="1" name="">
             <a:extLst xmlns:a="http://schemas.openxmlformats.org/drawingml/2006/main">
               <a:ext uri="{FF2B5EF4-FFF2-40B4-BE49-F238E27FC236}">
-                <a16:creationId xmlns:a16="http://schemas.microsoft.com/office/drawing/2014/main" id="{634D0207-06D6-4F48-8DDD-C0A62D5691F6}"/>
+                <a16:creationId xmlns:a16="http://schemas.microsoft.com/office/drawing/2014/main" id="{52529C33-8A9B-4267-8555-CB19EA329E7B}"/>
               </a:ext>
             </a:extLst>
           </p:cNvPr>
@@ -11498,7 +11498,7 @@
           <p:cNvPr id="2" name="">
             <a:extLst xmlns:a="http://schemas.openxmlformats.org/drawingml/2006/main">
               <a:ext uri="{FF2B5EF4-FFF2-40B4-BE49-F238E27FC236}">
-                <a16:creationId xmlns:a16="http://schemas.microsoft.com/office/drawing/2014/main" id="{D404C094-7248-443F-BA5A-057CE7542BFF}"/>
+                <a16:creationId xmlns:a16="http://schemas.microsoft.com/office/drawing/2014/main" id="{C344A755-E07C-4495-820A-F4A40A05F4BD}"/>
               </a:ext>
             </a:extLst>
           </p:cNvPr>
@@ -11531,7 +11531,7 @@
           <p:cNvPr id="3" name="">
             <a:extLst xmlns:a="http://schemas.openxmlformats.org/drawingml/2006/main">
               <a:ext uri="{FF2B5EF4-FFF2-40B4-BE49-F238E27FC236}">
-                <a16:creationId xmlns:a16="http://schemas.microsoft.com/office/drawing/2014/main" id="{36B18975-70D6-419C-B516-4CDE8F983596}"/>
+                <a16:creationId xmlns:a16="http://schemas.microsoft.com/office/drawing/2014/main" id="{72DDA950-0863-4D0C-9088-1351338FE815}"/>
               </a:ext>
             </a:extLst>
           </p:cNvPr>
@@ -11595,7 +11595,7 @@
           <p:cNvPr id="4" name="">
             <a:extLst xmlns:a="http://schemas.openxmlformats.org/drawingml/2006/main">
               <a:ext uri="{FF2B5EF4-FFF2-40B4-BE49-F238E27FC236}">
-                <a16:creationId xmlns:a16="http://schemas.microsoft.com/office/drawing/2014/main" id="{B5211404-7529-4088-A75B-FD5F7B36DBC8}"/>
+                <a16:creationId xmlns:a16="http://schemas.microsoft.com/office/drawing/2014/main" id="{8EDCC147-6C4C-424C-BE96-DF33B3C5E427}"/>
               </a:ext>
             </a:extLst>
           </p:cNvPr>
@@ -11659,7 +11659,7 @@
           <p:cNvPr id="5" name="">
             <a:extLst xmlns:a="http://schemas.openxmlformats.org/drawingml/2006/main">
               <a:ext uri="{FF2B5EF4-FFF2-40B4-BE49-F238E27FC236}">
-                <a16:creationId xmlns:a16="http://schemas.microsoft.com/office/drawing/2014/main" id="{DD19B2DF-ED50-46A1-9453-F109107763FE}"/>
+                <a16:creationId xmlns:a16="http://schemas.microsoft.com/office/drawing/2014/main" id="{BC11F4C8-1A71-47D9-9CEB-ED185E8B010E}"/>
               </a:ext>
             </a:extLst>
           </p:cNvPr>
@@ -11692,7 +11692,7 @@
           <p:cNvPr id="6" name="">
             <a:extLst xmlns:a="http://schemas.openxmlformats.org/drawingml/2006/main">
               <a:ext uri="{FF2B5EF4-FFF2-40B4-BE49-F238E27FC236}">
-                <a16:creationId xmlns:a16="http://schemas.microsoft.com/office/drawing/2014/main" id="{06DEF662-9DB2-412E-B0C8-E6C9183FAD4C}"/>
+                <a16:creationId xmlns:a16="http://schemas.microsoft.com/office/drawing/2014/main" id="{F488AC9F-A65C-4227-BE69-E29763A8A217}"/>
               </a:ext>
             </a:extLst>
           </p:cNvPr>
@@ -11756,7 +11756,7 @@
           <p:cNvPr id="7" name="">
             <a:extLst xmlns:a="http://schemas.openxmlformats.org/drawingml/2006/main">
               <a:ext uri="{FF2B5EF4-FFF2-40B4-BE49-F238E27FC236}">
-                <a16:creationId xmlns:a16="http://schemas.microsoft.com/office/drawing/2014/main" id="{1F6DB9BD-A02D-4955-80E7-8CE72283F4BD}"/>
+                <a16:creationId xmlns:a16="http://schemas.microsoft.com/office/drawing/2014/main" id="{DCF9FCBD-6CC8-4077-8309-914F30AC7C7C}"/>
               </a:ext>
             </a:extLst>
           </p:cNvPr>
@@ -11820,7 +11820,7 @@
           <p:cNvPr id="8" name="">
             <a:extLst xmlns:a="http://schemas.openxmlformats.org/drawingml/2006/main">
               <a:ext uri="{FF2B5EF4-FFF2-40B4-BE49-F238E27FC236}">
-                <a16:creationId xmlns:a16="http://schemas.microsoft.com/office/drawing/2014/main" id="{C3E3652A-D0CF-43F1-B5C5-7A0399E094B8}"/>
+                <a16:creationId xmlns:a16="http://schemas.microsoft.com/office/drawing/2014/main" id="{BE7F0A06-21FE-43E1-95B9-FE73EEEECA1A}"/>
               </a:ext>
             </a:extLst>
           </p:cNvPr>
@@ -11884,7 +11884,7 @@
           <p:cNvPr id="9" name="">
             <a:extLst xmlns:a="http://schemas.openxmlformats.org/drawingml/2006/main">
               <a:ext uri="{FF2B5EF4-FFF2-40B4-BE49-F238E27FC236}">
-                <a16:creationId xmlns:a16="http://schemas.microsoft.com/office/drawing/2014/main" id="{DE620A96-3742-482D-8173-8793731D744A}"/>
+                <a16:creationId xmlns:a16="http://schemas.microsoft.com/office/drawing/2014/main" id="{822DF2ED-1927-4F47-BE3B-15CB2D01E2F8}"/>
               </a:ext>
             </a:extLst>
           </p:cNvPr>
@@ -11948,7 +11948,7 @@
           <p:cNvPr id="10" name="">
             <a:extLst xmlns:a="http://schemas.openxmlformats.org/drawingml/2006/main">
               <a:ext uri="{FF2B5EF4-FFF2-40B4-BE49-F238E27FC236}">
-                <a16:creationId xmlns:a16="http://schemas.microsoft.com/office/drawing/2014/main" id="{D2905850-4C9B-4742-B8D6-55108F3118BE}"/>
+                <a16:creationId xmlns:a16="http://schemas.microsoft.com/office/drawing/2014/main" id="{E640E080-5296-47D4-A4FD-084C354908B5}"/>
               </a:ext>
             </a:extLst>
           </p:cNvPr>
@@ -11981,7 +11981,7 @@
           <p:cNvPr id="11" name="">
             <a:extLst xmlns:a="http://schemas.openxmlformats.org/drawingml/2006/main">
               <a:ext uri="{FF2B5EF4-FFF2-40B4-BE49-F238E27FC236}">
-                <a16:creationId xmlns:a16="http://schemas.microsoft.com/office/drawing/2014/main" id="{BFFF8295-4FA6-4FF0-B60A-D33836D065A5}"/>
+                <a16:creationId xmlns:a16="http://schemas.microsoft.com/office/drawing/2014/main" id="{AD6F4677-D80B-42AF-A8AF-87353ED434BA}"/>
               </a:ext>
             </a:extLst>
           </p:cNvPr>
@@ -12045,7 +12045,7 @@
           <p:cNvPr id="12" name="">
             <a:extLst xmlns:a="http://schemas.openxmlformats.org/drawingml/2006/main">
               <a:ext uri="{FF2B5EF4-FFF2-40B4-BE49-F238E27FC236}">
-                <a16:creationId xmlns:a16="http://schemas.microsoft.com/office/drawing/2014/main" id="{5B69680F-AD2C-46DA-B986-21173A6ABDA7}"/>
+                <a16:creationId xmlns:a16="http://schemas.microsoft.com/office/drawing/2014/main" id="{5E38D647-04E0-4B8C-ABDA-61F0D7266F32}"/>
               </a:ext>
             </a:extLst>
           </p:cNvPr>
@@ -12109,7 +12109,7 @@
           <p:cNvPr id="13" name="">
             <a:extLst xmlns:a="http://schemas.openxmlformats.org/drawingml/2006/main">
               <a:ext uri="{FF2B5EF4-FFF2-40B4-BE49-F238E27FC236}">
-                <a16:creationId xmlns:a16="http://schemas.microsoft.com/office/drawing/2014/main" id="{EDE06BCB-65CD-4959-BAD0-6AF1238B4E15}"/>
+                <a16:creationId xmlns:a16="http://schemas.microsoft.com/office/drawing/2014/main" id="{FF647E40-2256-44E9-9F83-77AB055BF1FE}"/>
               </a:ext>
             </a:extLst>
           </p:cNvPr>
@@ -12173,7 +12173,7 @@
           <p:cNvPr id="14" name="">
             <a:extLst xmlns:a="http://schemas.openxmlformats.org/drawingml/2006/main">
               <a:ext uri="{FF2B5EF4-FFF2-40B4-BE49-F238E27FC236}">
-                <a16:creationId xmlns:a16="http://schemas.microsoft.com/office/drawing/2014/main" id="{31008947-8575-4D44-B364-E880DB952D48}"/>
+                <a16:creationId xmlns:a16="http://schemas.microsoft.com/office/drawing/2014/main" id="{10DCC0B8-0E67-48C6-A795-98484127A464}"/>
               </a:ext>
             </a:extLst>
           </p:cNvPr>
@@ -12237,7 +12237,7 @@
           <p:cNvPr id="15" name="">
             <a:extLst xmlns:a="http://schemas.openxmlformats.org/drawingml/2006/main">
               <a:ext uri="{FF2B5EF4-FFF2-40B4-BE49-F238E27FC236}">
-                <a16:creationId xmlns:a16="http://schemas.microsoft.com/office/drawing/2014/main" id="{7B021DE9-53E2-4F2A-B73B-F746C9BC0780}"/>
+                <a16:creationId xmlns:a16="http://schemas.microsoft.com/office/drawing/2014/main" id="{EE77ECF7-E914-41DA-A009-478F929FE438}"/>
               </a:ext>
             </a:extLst>
           </p:cNvPr>
@@ -12301,7 +12301,7 @@
           <p:cNvPr id="16" name="">
             <a:extLst xmlns:a="http://schemas.openxmlformats.org/drawingml/2006/main">
               <a:ext uri="{FF2B5EF4-FFF2-40B4-BE49-F238E27FC236}">
-                <a16:creationId xmlns:a16="http://schemas.microsoft.com/office/drawing/2014/main" id="{1D816CC7-D99B-40CE-A434-C3083B180310}"/>
+                <a16:creationId xmlns:a16="http://schemas.microsoft.com/office/drawing/2014/main" id="{2D674A16-83F2-452C-A788-E2B2BDA8AB6F}"/>
               </a:ext>
             </a:extLst>
           </p:cNvPr>
@@ -12365,7 +12365,7 @@
           <p:cNvPr id="17" name="">
             <a:extLst xmlns:a="http://schemas.openxmlformats.org/drawingml/2006/main">
               <a:ext uri="{FF2B5EF4-FFF2-40B4-BE49-F238E27FC236}">
-                <a16:creationId xmlns:a16="http://schemas.microsoft.com/office/drawing/2014/main" id="{5DEDACB4-A71D-4821-878F-5583FF91BA91}"/>
+                <a16:creationId xmlns:a16="http://schemas.microsoft.com/office/drawing/2014/main" id="{C31A4B4B-AB2A-4721-ACA8-546671E14B3B}"/>
               </a:ext>
             </a:extLst>
           </p:cNvPr>
@@ -12398,7 +12398,7 @@
           <p:cNvPr id="18" name="">
             <a:extLst xmlns:a="http://schemas.openxmlformats.org/drawingml/2006/main">
               <a:ext uri="{FF2B5EF4-FFF2-40B4-BE49-F238E27FC236}">
-                <a16:creationId xmlns:a16="http://schemas.microsoft.com/office/drawing/2014/main" id="{E9F806ED-D134-476F-829F-8A0EB3CA2DB0}"/>
+                <a16:creationId xmlns:a16="http://schemas.microsoft.com/office/drawing/2014/main" id="{1E9B6EB5-01B3-4BED-B5CC-45CBA90705F7}"/>
               </a:ext>
             </a:extLst>
           </p:cNvPr>
@@ -12462,7 +12462,7 @@
           <p:cNvPr id="19" name="">
             <a:extLst xmlns:a="http://schemas.openxmlformats.org/drawingml/2006/main">
               <a:ext uri="{FF2B5EF4-FFF2-40B4-BE49-F238E27FC236}">
-                <a16:creationId xmlns:a16="http://schemas.microsoft.com/office/drawing/2014/main" id="{B8CACB56-6B31-4C9B-905C-DB8A5AA5C3FE}"/>
+                <a16:creationId xmlns:a16="http://schemas.microsoft.com/office/drawing/2014/main" id="{DA786768-6350-40A5-9790-512194F0933B}"/>
               </a:ext>
             </a:extLst>
           </p:cNvPr>
@@ -12526,7 +12526,7 @@
           <p:cNvPr id="20" name="">
             <a:extLst xmlns:a="http://schemas.openxmlformats.org/drawingml/2006/main">
               <a:ext uri="{FF2B5EF4-FFF2-40B4-BE49-F238E27FC236}">
-                <a16:creationId xmlns:a16="http://schemas.microsoft.com/office/drawing/2014/main" id="{9807AAED-2D01-428C-8155-109DAA49F037}"/>
+                <a16:creationId xmlns:a16="http://schemas.microsoft.com/office/drawing/2014/main" id="{43253CD0-98D7-4779-B76C-895DFEFE78BB}"/>
               </a:ext>
             </a:extLst>
           </p:cNvPr>
@@ -12590,7 +12590,7 @@
           <p:cNvPr id="21" name="">
             <a:extLst xmlns:a="http://schemas.openxmlformats.org/drawingml/2006/main">
               <a:ext uri="{FF2B5EF4-FFF2-40B4-BE49-F238E27FC236}">
-                <a16:creationId xmlns:a16="http://schemas.microsoft.com/office/drawing/2014/main" id="{8C994E60-EA2E-4DFC-9C7B-E5F2740C6602}"/>
+                <a16:creationId xmlns:a16="http://schemas.microsoft.com/office/drawing/2014/main" id="{541624B7-DEC0-470F-81B0-88C2CCCC3333}"/>
               </a:ext>
             </a:extLst>
           </p:cNvPr>
@@ -12654,7 +12654,7 @@
           <p:cNvPr id="22" name="">
             <a:extLst xmlns:a="http://schemas.openxmlformats.org/drawingml/2006/main">
               <a:ext uri="{FF2B5EF4-FFF2-40B4-BE49-F238E27FC236}">
-                <a16:creationId xmlns:a16="http://schemas.microsoft.com/office/drawing/2014/main" id="{8435F685-0BC6-49DE-AE46-BE6E74A71065}"/>
+                <a16:creationId xmlns:a16="http://schemas.microsoft.com/office/drawing/2014/main" id="{8CE43614-13B2-4A8B-8299-FDB174DB3AE7}"/>
               </a:ext>
             </a:extLst>
           </p:cNvPr>
@@ -12718,7 +12718,7 @@
           <p:cNvPr id="23" name="">
             <a:extLst xmlns:a="http://schemas.openxmlformats.org/drawingml/2006/main">
               <a:ext uri="{FF2B5EF4-FFF2-40B4-BE49-F238E27FC236}">
-                <a16:creationId xmlns:a16="http://schemas.microsoft.com/office/drawing/2014/main" id="{5B6BBFA3-AC06-46C8-9B09-F56635483865}"/>
+                <a16:creationId xmlns:a16="http://schemas.microsoft.com/office/drawing/2014/main" id="{3E81C8A2-124B-4611-8476-3CCA8F937A37}"/>
               </a:ext>
             </a:extLst>
           </p:cNvPr>
@@ -12782,7 +12782,7 @@
           <p:cNvPr id="24" name="">
             <a:extLst xmlns:a="http://schemas.openxmlformats.org/drawingml/2006/main">
               <a:ext uri="{FF2B5EF4-FFF2-40B4-BE49-F238E27FC236}">
-                <a16:creationId xmlns:a16="http://schemas.microsoft.com/office/drawing/2014/main" id="{3764B6D3-CE83-439F-AD99-FAB19DE917FC}"/>
+                <a16:creationId xmlns:a16="http://schemas.microsoft.com/office/drawing/2014/main" id="{EC8A017C-CE2F-4308-93D8-9E1C4F201B4C}"/>
               </a:ext>
             </a:extLst>
           </p:cNvPr>
@@ -12815,7 +12815,7 @@
           <p:cNvPr id="25" name="">
             <a:extLst xmlns:a="http://schemas.openxmlformats.org/drawingml/2006/main">
               <a:ext uri="{FF2B5EF4-FFF2-40B4-BE49-F238E27FC236}">
-                <a16:creationId xmlns:a16="http://schemas.microsoft.com/office/drawing/2014/main" id="{87582179-1652-4005-B611-5A2D4E822A22}"/>
+                <a16:creationId xmlns:a16="http://schemas.microsoft.com/office/drawing/2014/main" id="{6FC1D320-8B3D-49DA-8FCD-1A99646FFEB6}"/>
               </a:ext>
             </a:extLst>
           </p:cNvPr>
@@ -12879,7 +12879,7 @@
           <p:cNvPr id="26" name="">
             <a:extLst xmlns:a="http://schemas.openxmlformats.org/drawingml/2006/main">
               <a:ext uri="{FF2B5EF4-FFF2-40B4-BE49-F238E27FC236}">
-                <a16:creationId xmlns:a16="http://schemas.microsoft.com/office/drawing/2014/main" id="{F2DA4DE4-0480-45D3-B5DC-090B15935DD3}"/>
+                <a16:creationId xmlns:a16="http://schemas.microsoft.com/office/drawing/2014/main" id="{15271816-54CF-4C48-8EB3-E86C8E848C53}"/>
               </a:ext>
             </a:extLst>
           </p:cNvPr>
@@ -12943,7 +12943,7 @@
           <p:cNvPr id="27" name="">
             <a:extLst xmlns:a="http://schemas.openxmlformats.org/drawingml/2006/main">
               <a:ext uri="{FF2B5EF4-FFF2-40B4-BE49-F238E27FC236}">
-                <a16:creationId xmlns:a16="http://schemas.microsoft.com/office/drawing/2014/main" id="{34750086-2D67-45BB-ACAD-92B2F6D66C20}"/>
+                <a16:creationId xmlns:a16="http://schemas.microsoft.com/office/drawing/2014/main" id="{6645A8BE-7A0F-46B2-8F0F-648EBF31DA02}"/>
               </a:ext>
             </a:extLst>
           </p:cNvPr>
@@ -13007,7 +13007,7 @@
           <p:cNvPr id="28" name="">
             <a:extLst xmlns:a="http://schemas.openxmlformats.org/drawingml/2006/main">
               <a:ext uri="{FF2B5EF4-FFF2-40B4-BE49-F238E27FC236}">
-                <a16:creationId xmlns:a16="http://schemas.microsoft.com/office/drawing/2014/main" id="{68A499EC-C309-486A-A85E-093812CDF59E}"/>
+                <a16:creationId xmlns:a16="http://schemas.microsoft.com/office/drawing/2014/main" id="{F74ED454-2B41-4DED-80DD-D74D2C309493}"/>
               </a:ext>
             </a:extLst>
           </p:cNvPr>
@@ -13071,7 +13071,7 @@
           <p:cNvPr id="29" name="">
             <a:extLst xmlns:a="http://schemas.openxmlformats.org/drawingml/2006/main">
               <a:ext uri="{FF2B5EF4-FFF2-40B4-BE49-F238E27FC236}">
-                <a16:creationId xmlns:a16="http://schemas.microsoft.com/office/drawing/2014/main" id="{4EBED2B4-2506-4207-A86A-4B0F921864CA}"/>
+                <a16:creationId xmlns:a16="http://schemas.microsoft.com/office/drawing/2014/main" id="{13C3EA22-D656-4C8D-8561-522B34D833A6}"/>
               </a:ext>
             </a:extLst>
           </p:cNvPr>
@@ -13135,7 +13135,7 @@
           <p:cNvPr id="30" name="">
             <a:extLst xmlns:a="http://schemas.openxmlformats.org/drawingml/2006/main">
               <a:ext uri="{FF2B5EF4-FFF2-40B4-BE49-F238E27FC236}">
-                <a16:creationId xmlns:a16="http://schemas.microsoft.com/office/drawing/2014/main" id="{1AF190AD-43C7-45C3-9304-044B89B722C5}"/>
+                <a16:creationId xmlns:a16="http://schemas.microsoft.com/office/drawing/2014/main" id="{FB76E11F-BBC3-40FF-956B-760F857D5284}"/>
               </a:ext>
             </a:extLst>
           </p:cNvPr>
@@ -13199,7 +13199,7 @@
           <p:cNvPr id="31" name="">
             <a:extLst xmlns:a="http://schemas.openxmlformats.org/drawingml/2006/main">
               <a:ext uri="{FF2B5EF4-FFF2-40B4-BE49-F238E27FC236}">
-                <a16:creationId xmlns:a16="http://schemas.microsoft.com/office/drawing/2014/main" id="{339C0B0F-CD38-4178-A2A0-289482B5F488}"/>
+                <a16:creationId xmlns:a16="http://schemas.microsoft.com/office/drawing/2014/main" id="{8B276325-B9D4-4D4B-B8BC-252536D0A1AF}"/>
               </a:ext>
             </a:extLst>
           </p:cNvPr>
@@ -13232,7 +13232,7 @@
           <p:cNvPr id="32" name="">
             <a:extLst xmlns:a="http://schemas.openxmlformats.org/drawingml/2006/main">
               <a:ext uri="{FF2B5EF4-FFF2-40B4-BE49-F238E27FC236}">
-                <a16:creationId xmlns:a16="http://schemas.microsoft.com/office/drawing/2014/main" id="{E19EA79B-FDF8-4388-832F-936037C270B3}"/>
+                <a16:creationId xmlns:a16="http://schemas.microsoft.com/office/drawing/2014/main" id="{C83D0046-799F-4723-8FC3-F0ABF6404036}"/>
               </a:ext>
             </a:extLst>
           </p:cNvPr>
@@ -13296,7 +13296,7 @@
           <p:cNvPr id="33" name="">
             <a:extLst xmlns:a="http://schemas.openxmlformats.org/drawingml/2006/main">
               <a:ext uri="{FF2B5EF4-FFF2-40B4-BE49-F238E27FC236}">
-                <a16:creationId xmlns:a16="http://schemas.microsoft.com/office/drawing/2014/main" id="{59253601-2C69-4EAA-B2D0-D97EF8DC82BF}"/>
+                <a16:creationId xmlns:a16="http://schemas.microsoft.com/office/drawing/2014/main" id="{A274C3B1-75D8-4BA3-82EC-2F2AD88B1FA2}"/>
               </a:ext>
             </a:extLst>
           </p:cNvPr>
@@ -13360,7 +13360,7 @@
           <p:cNvPr id="34" name="">
             <a:extLst xmlns:a="http://schemas.openxmlformats.org/drawingml/2006/main">
               <a:ext uri="{FF2B5EF4-FFF2-40B4-BE49-F238E27FC236}">
-                <a16:creationId xmlns:a16="http://schemas.microsoft.com/office/drawing/2014/main" id="{69754AFA-45E1-4941-B4FF-18C069392E52}"/>
+                <a16:creationId xmlns:a16="http://schemas.microsoft.com/office/drawing/2014/main" id="{2928A161-A7D7-4BB8-9B73-558AD885C8BF}"/>
               </a:ext>
             </a:extLst>
           </p:cNvPr>
@@ -13424,7 +13424,7 @@
           <p:cNvPr id="35" name="">
             <a:extLst xmlns:a="http://schemas.openxmlformats.org/drawingml/2006/main">
               <a:ext uri="{FF2B5EF4-FFF2-40B4-BE49-F238E27FC236}">
-                <a16:creationId xmlns:a16="http://schemas.microsoft.com/office/drawing/2014/main" id="{58B405C2-C878-45AB-B36F-67291F20944F}"/>
+                <a16:creationId xmlns:a16="http://schemas.microsoft.com/office/drawing/2014/main" id="{600E91F5-50C0-4A35-87E4-B94D5D49C81F}"/>
               </a:ext>
             </a:extLst>
           </p:cNvPr>
@@ -13457,7 +13457,7 @@
           <p:cNvPr id="36" name="">
             <a:extLst xmlns:a="http://schemas.openxmlformats.org/drawingml/2006/main">
               <a:ext uri="{FF2B5EF4-FFF2-40B4-BE49-F238E27FC236}">
-                <a16:creationId xmlns:a16="http://schemas.microsoft.com/office/drawing/2014/main" id="{695158EE-1D4F-452D-8D7E-9562BC0E91CD}"/>
+                <a16:creationId xmlns:a16="http://schemas.microsoft.com/office/drawing/2014/main" id="{001186FD-318C-41F7-A112-A8987AC1CF33}"/>
               </a:ext>
             </a:extLst>
           </p:cNvPr>
@@ -13521,7 +13521,7 @@
           <p:cNvPr id="37" name="">
             <a:extLst xmlns:a="http://schemas.openxmlformats.org/drawingml/2006/main">
               <a:ext uri="{FF2B5EF4-FFF2-40B4-BE49-F238E27FC236}">
-                <a16:creationId xmlns:a16="http://schemas.microsoft.com/office/drawing/2014/main" id="{F1AF0303-AF27-4C7C-97C4-A5E77AB92534}"/>
+                <a16:creationId xmlns:a16="http://schemas.microsoft.com/office/drawing/2014/main" id="{BC0845C0-FA8D-4DCC-8E44-5B0776B971B2}"/>
               </a:ext>
             </a:extLst>
           </p:cNvPr>
@@ -13585,7 +13585,7 @@
           <p:cNvPr id="38" name="">
             <a:extLst xmlns:a="http://schemas.openxmlformats.org/drawingml/2006/main">
               <a:ext uri="{FF2B5EF4-FFF2-40B4-BE49-F238E27FC236}">
-                <a16:creationId xmlns:a16="http://schemas.microsoft.com/office/drawing/2014/main" id="{9409F084-1E10-419C-8D6A-FEFA30F2D9AC}"/>
+                <a16:creationId xmlns:a16="http://schemas.microsoft.com/office/drawing/2014/main" id="{7F5798A7-3FE1-43B0-8699-0C3118111F55}"/>
               </a:ext>
             </a:extLst>
           </p:cNvPr>
@@ -13647,7 +13647,7 @@
     </p:spTree>
     <p:extLst>
       <p:ext uri="{BB962C8B-B14F-4D97-AF65-F5344CB8AC3E}">
-        <p14:creationId xmlns:p14="http://schemas.microsoft.com/office/powerpoint/2010/main" val="1183797270"/>
+        <p14:creationId xmlns:p14="http://schemas.microsoft.com/office/powerpoint/2010/main" val="1487001801"/>
       </p:ext>
     </p:extLst>
   </p:cSld>
@@ -13671,7 +13671,7 @@
           <p:cNvPr id="1" name="">
             <a:extLst xmlns:a="http://schemas.openxmlformats.org/drawingml/2006/main">
               <a:ext uri="{FF2B5EF4-FFF2-40B4-BE49-F238E27FC236}">
-                <a16:creationId xmlns:a16="http://schemas.microsoft.com/office/drawing/2014/main" id="{8AE4EDB8-503C-41DF-8642-F5713831E339}"/>
+                <a16:creationId xmlns:a16="http://schemas.microsoft.com/office/drawing/2014/main" id="{07CAB8BF-CF23-40FE-962F-FA9070408150}"/>
               </a:ext>
             </a:extLst>
           </p:cNvPr>
@@ -13704,7 +13704,7 @@
           <p:cNvPr id="2" name="">
             <a:extLst xmlns:a="http://schemas.openxmlformats.org/drawingml/2006/main">
               <a:ext uri="{FF2B5EF4-FFF2-40B4-BE49-F238E27FC236}">
-                <a16:creationId xmlns:a16="http://schemas.microsoft.com/office/drawing/2014/main" id="{EFD1EC34-B074-4BD4-8BC7-236B3DE1D163}"/>
+                <a16:creationId xmlns:a16="http://schemas.microsoft.com/office/drawing/2014/main" id="{4553DF6F-4519-4F99-B345-009290527752}"/>
               </a:ext>
             </a:extLst>
           </p:cNvPr>
@@ -13737,7 +13737,7 @@
           <p:cNvPr id="3" name="">
             <a:extLst xmlns:a="http://schemas.openxmlformats.org/drawingml/2006/main">
               <a:ext uri="{FF2B5EF4-FFF2-40B4-BE49-F238E27FC236}">
-                <a16:creationId xmlns:a16="http://schemas.microsoft.com/office/drawing/2014/main" id="{247582A3-4817-43E6-9C7A-C877A4085C8C}"/>
+                <a16:creationId xmlns:a16="http://schemas.microsoft.com/office/drawing/2014/main" id="{09276720-DE87-4850-978B-6ACC4A80A576}"/>
               </a:ext>
             </a:extLst>
           </p:cNvPr>
@@ -13801,7 +13801,7 @@
           <p:cNvPr id="4" name="">
             <a:extLst xmlns:a="http://schemas.openxmlformats.org/drawingml/2006/main">
               <a:ext uri="{FF2B5EF4-FFF2-40B4-BE49-F238E27FC236}">
-                <a16:creationId xmlns:a16="http://schemas.microsoft.com/office/drawing/2014/main" id="{4D95909D-B4CE-44B8-B11D-666D0D6320DA}"/>
+                <a16:creationId xmlns:a16="http://schemas.microsoft.com/office/drawing/2014/main" id="{45CF8382-7872-482D-830A-7A43EAF4F894}"/>
               </a:ext>
             </a:extLst>
           </p:cNvPr>
@@ -13865,7 +13865,7 @@
           <p:cNvPr id="5" name="">
             <a:extLst xmlns:a="http://schemas.openxmlformats.org/drawingml/2006/main">
               <a:ext uri="{FF2B5EF4-FFF2-40B4-BE49-F238E27FC236}">
-                <a16:creationId xmlns:a16="http://schemas.microsoft.com/office/drawing/2014/main" id="{E6874788-1A28-40AB-BBF6-66EC03835D5A}"/>
+                <a16:creationId xmlns:a16="http://schemas.microsoft.com/office/drawing/2014/main" id="{8D90BEB2-8862-447C-A653-1C9BA560F151}"/>
               </a:ext>
             </a:extLst>
           </p:cNvPr>
@@ -13898,7 +13898,7 @@
           <p:cNvPr id="6" name="">
             <a:extLst xmlns:a="http://schemas.openxmlformats.org/drawingml/2006/main">
               <a:ext uri="{FF2B5EF4-FFF2-40B4-BE49-F238E27FC236}">
-                <a16:creationId xmlns:a16="http://schemas.microsoft.com/office/drawing/2014/main" id="{1111BF07-1C9C-491C-9430-5AF776E90F6B}"/>
+                <a16:creationId xmlns:a16="http://schemas.microsoft.com/office/drawing/2014/main" id="{B757732D-2733-4488-A0E2-14ECC1F4177D}"/>
               </a:ext>
             </a:extLst>
           </p:cNvPr>
@@ -13931,7 +13931,7 @@
           <p:cNvPr id="7" name="">
             <a:extLst xmlns:a="http://schemas.openxmlformats.org/drawingml/2006/main">
               <a:ext uri="{FF2B5EF4-FFF2-40B4-BE49-F238E27FC236}">
-                <a16:creationId xmlns:a16="http://schemas.microsoft.com/office/drawing/2014/main" id="{A44BE19E-7640-4ACB-9CD5-49BF53DA0841}"/>
+                <a16:creationId xmlns:a16="http://schemas.microsoft.com/office/drawing/2014/main" id="{1CED0A63-27DC-467B-80FE-3FF6DD1CCA28}"/>
               </a:ext>
             </a:extLst>
           </p:cNvPr>
@@ -13995,7 +13995,7 @@
           <p:cNvPr id="8" name="">
             <a:extLst xmlns:a="http://schemas.openxmlformats.org/drawingml/2006/main">
               <a:ext uri="{FF2B5EF4-FFF2-40B4-BE49-F238E27FC236}">
-                <a16:creationId xmlns:a16="http://schemas.microsoft.com/office/drawing/2014/main" id="{BB79BE31-A847-4DD6-8CAB-9DFD6E7C73E3}"/>
+                <a16:creationId xmlns:a16="http://schemas.microsoft.com/office/drawing/2014/main" id="{756D6385-EEC4-4686-8D37-F4B8218175F2}"/>
               </a:ext>
             </a:extLst>
           </p:cNvPr>
@@ -14059,7 +14059,7 @@
           <p:cNvPr id="9" name="">
             <a:extLst xmlns:a="http://schemas.openxmlformats.org/drawingml/2006/main">
               <a:ext uri="{FF2B5EF4-FFF2-40B4-BE49-F238E27FC236}">
-                <a16:creationId xmlns:a16="http://schemas.microsoft.com/office/drawing/2014/main" id="{6E434F2C-9E54-47D3-B56F-601842C1B08A}"/>
+                <a16:creationId xmlns:a16="http://schemas.microsoft.com/office/drawing/2014/main" id="{3980A1F0-171B-4F90-9E6E-2CC1C3F7513F}"/>
               </a:ext>
             </a:extLst>
           </p:cNvPr>
@@ -14123,7 +14123,7 @@
           <p:cNvPr id="10" name="">
             <a:extLst xmlns:a="http://schemas.openxmlformats.org/drawingml/2006/main">
               <a:ext uri="{FF2B5EF4-FFF2-40B4-BE49-F238E27FC236}">
-                <a16:creationId xmlns:a16="http://schemas.microsoft.com/office/drawing/2014/main" id="{2442AC90-5DF3-4839-BBD8-BA699EDECB3C}"/>
+                <a16:creationId xmlns:a16="http://schemas.microsoft.com/office/drawing/2014/main" id="{FD4DF9A2-8AD8-479B-9B3C-8F4A7D7949E6}"/>
               </a:ext>
             </a:extLst>
           </p:cNvPr>
@@ -14156,7 +14156,7 @@
           <p:cNvPr id="11" name="">
             <a:extLst xmlns:a="http://schemas.openxmlformats.org/drawingml/2006/main">
               <a:ext uri="{FF2B5EF4-FFF2-40B4-BE49-F238E27FC236}">
-                <a16:creationId xmlns:a16="http://schemas.microsoft.com/office/drawing/2014/main" id="{2958EC02-B7D0-402E-A025-39858CF3CB03}"/>
+                <a16:creationId xmlns:a16="http://schemas.microsoft.com/office/drawing/2014/main" id="{890DA7CA-4AD6-445B-A80D-3ED9D3298907}"/>
               </a:ext>
             </a:extLst>
           </p:cNvPr>
@@ -14189,7 +14189,7 @@
           <p:cNvPr id="12" name="">
             <a:extLst xmlns:a="http://schemas.openxmlformats.org/drawingml/2006/main">
               <a:ext uri="{FF2B5EF4-FFF2-40B4-BE49-F238E27FC236}">
-                <a16:creationId xmlns:a16="http://schemas.microsoft.com/office/drawing/2014/main" id="{032302D9-AE22-4170-9906-89AC62457890}"/>
+                <a16:creationId xmlns:a16="http://schemas.microsoft.com/office/drawing/2014/main" id="{3EAD34A1-D4F4-4C92-9206-6473A1CE8FD9}"/>
               </a:ext>
             </a:extLst>
           </p:cNvPr>
@@ -14253,7 +14253,7 @@
           <p:cNvPr id="13" name="">
             <a:extLst xmlns:a="http://schemas.openxmlformats.org/drawingml/2006/main">
               <a:ext uri="{FF2B5EF4-FFF2-40B4-BE49-F238E27FC236}">
-                <a16:creationId xmlns:a16="http://schemas.microsoft.com/office/drawing/2014/main" id="{06DAC772-5EDA-41C1-9CF9-995C4C8BD3B3}"/>
+                <a16:creationId xmlns:a16="http://schemas.microsoft.com/office/drawing/2014/main" id="{8536E7B4-A371-42BF-BDC5-3BF95ADEBFC1}"/>
               </a:ext>
             </a:extLst>
           </p:cNvPr>
@@ -14317,7 +14317,7 @@
           <p:cNvPr id="14" name="">
             <a:extLst xmlns:a="http://schemas.openxmlformats.org/drawingml/2006/main">
               <a:ext uri="{FF2B5EF4-FFF2-40B4-BE49-F238E27FC236}">
-                <a16:creationId xmlns:a16="http://schemas.microsoft.com/office/drawing/2014/main" id="{8E958809-49AB-4832-A183-7EDCC255BC06}"/>
+                <a16:creationId xmlns:a16="http://schemas.microsoft.com/office/drawing/2014/main" id="{570B4C0D-29FA-43DF-B5CD-753C7C652D17}"/>
               </a:ext>
             </a:extLst>
           </p:cNvPr>
@@ -14381,7 +14381,7 @@
           <p:cNvPr id="15" name="">
             <a:extLst xmlns:a="http://schemas.openxmlformats.org/drawingml/2006/main">
               <a:ext uri="{FF2B5EF4-FFF2-40B4-BE49-F238E27FC236}">
-                <a16:creationId xmlns:a16="http://schemas.microsoft.com/office/drawing/2014/main" id="{8DF8A9A3-5ACC-49CC-A67D-85EE95514556}"/>
+                <a16:creationId xmlns:a16="http://schemas.microsoft.com/office/drawing/2014/main" id="{682A2DEC-7B40-41F1-868C-3B31E4850422}"/>
               </a:ext>
             </a:extLst>
           </p:cNvPr>
@@ -14414,7 +14414,7 @@
           <p:cNvPr id="16" name="">
             <a:extLst xmlns:a="http://schemas.openxmlformats.org/drawingml/2006/main">
               <a:ext uri="{FF2B5EF4-FFF2-40B4-BE49-F238E27FC236}">
-                <a16:creationId xmlns:a16="http://schemas.microsoft.com/office/drawing/2014/main" id="{07CD7525-F22C-48CC-AB77-F054B8D43B0C}"/>
+                <a16:creationId xmlns:a16="http://schemas.microsoft.com/office/drawing/2014/main" id="{8C804615-9F16-4823-9C92-6A4D44B6728F}"/>
               </a:ext>
             </a:extLst>
           </p:cNvPr>
@@ -14447,7 +14447,7 @@
           <p:cNvPr id="17" name="">
             <a:extLst xmlns:a="http://schemas.openxmlformats.org/drawingml/2006/main">
               <a:ext uri="{FF2B5EF4-FFF2-40B4-BE49-F238E27FC236}">
-                <a16:creationId xmlns:a16="http://schemas.microsoft.com/office/drawing/2014/main" id="{063DFB64-4FB0-48EB-AF5A-80A7B277AC42}"/>
+                <a16:creationId xmlns:a16="http://schemas.microsoft.com/office/drawing/2014/main" id="{AA0FD38C-1D9E-4E75-B728-525B6C3CF80D}"/>
               </a:ext>
             </a:extLst>
           </p:cNvPr>
@@ -14511,7 +14511,7 @@
           <p:cNvPr id="18" name="">
             <a:extLst xmlns:a="http://schemas.openxmlformats.org/drawingml/2006/main">
               <a:ext uri="{FF2B5EF4-FFF2-40B4-BE49-F238E27FC236}">
-                <a16:creationId xmlns:a16="http://schemas.microsoft.com/office/drawing/2014/main" id="{4914FC59-E5B3-4656-9242-B3EC2D1D41BF}"/>
+                <a16:creationId xmlns:a16="http://schemas.microsoft.com/office/drawing/2014/main" id="{38448B90-87AA-4A41-9ECD-680014A2D3F8}"/>
               </a:ext>
             </a:extLst>
           </p:cNvPr>
@@ -14575,7 +14575,7 @@
           <p:cNvPr id="19" name="">
             <a:extLst xmlns:a="http://schemas.openxmlformats.org/drawingml/2006/main">
               <a:ext uri="{FF2B5EF4-FFF2-40B4-BE49-F238E27FC236}">
-                <a16:creationId xmlns:a16="http://schemas.microsoft.com/office/drawing/2014/main" id="{CC94781C-E597-4B97-BFD8-8FD03D600F2B}"/>
+                <a16:creationId xmlns:a16="http://schemas.microsoft.com/office/drawing/2014/main" id="{705AE547-4DFE-4D5D-B779-1165F377F893}"/>
               </a:ext>
             </a:extLst>
           </p:cNvPr>
@@ -14639,7 +14639,7 @@
           <p:cNvPr id="20" name="">
             <a:extLst xmlns:a="http://schemas.openxmlformats.org/drawingml/2006/main">
               <a:ext uri="{FF2B5EF4-FFF2-40B4-BE49-F238E27FC236}">
-                <a16:creationId xmlns:a16="http://schemas.microsoft.com/office/drawing/2014/main" id="{7B22F8F1-D450-4BBD-99BE-9BA1F5494B95}"/>
+                <a16:creationId xmlns:a16="http://schemas.microsoft.com/office/drawing/2014/main" id="{A5B16588-C228-438C-999C-B8388E652434}"/>
               </a:ext>
             </a:extLst>
           </p:cNvPr>
@@ -14672,7 +14672,7 @@
           <p:cNvPr id="21" name="">
             <a:extLst xmlns:a="http://schemas.openxmlformats.org/drawingml/2006/main">
               <a:ext uri="{FF2B5EF4-FFF2-40B4-BE49-F238E27FC236}">
-                <a16:creationId xmlns:a16="http://schemas.microsoft.com/office/drawing/2014/main" id="{2D5EB702-3129-4EEC-BBBC-61C9D84152E5}"/>
+                <a16:creationId xmlns:a16="http://schemas.microsoft.com/office/drawing/2014/main" id="{EBBCF5C8-FF64-4C74-988F-426FD4AA48EB}"/>
               </a:ext>
             </a:extLst>
           </p:cNvPr>
@@ -14736,7 +14736,7 @@
           <p:cNvPr id="22" name="">
             <a:extLst xmlns:a="http://schemas.openxmlformats.org/drawingml/2006/main">
               <a:ext uri="{FF2B5EF4-FFF2-40B4-BE49-F238E27FC236}">
-                <a16:creationId xmlns:a16="http://schemas.microsoft.com/office/drawing/2014/main" id="{00772C54-2189-4CBC-948F-4128AFF340F6}"/>
+                <a16:creationId xmlns:a16="http://schemas.microsoft.com/office/drawing/2014/main" id="{7607D4E3-9E12-4F0D-B2FA-8B0F29821DE0}"/>
               </a:ext>
             </a:extLst>
           </p:cNvPr>
@@ -14800,7 +14800,7 @@
           <p:cNvPr id="23" name="">
             <a:extLst xmlns:a="http://schemas.openxmlformats.org/drawingml/2006/main">
               <a:ext uri="{FF2B5EF4-FFF2-40B4-BE49-F238E27FC236}">
-                <a16:creationId xmlns:a16="http://schemas.microsoft.com/office/drawing/2014/main" id="{1DA39E90-8E7F-48A4-BEC5-26B6102A8FEC}"/>
+                <a16:creationId xmlns:a16="http://schemas.microsoft.com/office/drawing/2014/main" id="{35A39C89-8416-4D7F-8F10-8A02F8CF66C1}"/>
               </a:ext>
             </a:extLst>
           </p:cNvPr>
@@ -14862,7 +14862,7 @@
     </p:spTree>
     <p:extLst>
       <p:ext uri="{BB962C8B-B14F-4D97-AF65-F5344CB8AC3E}">
-        <p14:creationId xmlns:p14="http://schemas.microsoft.com/office/powerpoint/2010/main" val="672832085"/>
+        <p14:creationId xmlns:p14="http://schemas.microsoft.com/office/powerpoint/2010/main" val="1648375040"/>
       </p:ext>
     </p:extLst>
   </p:cSld>
@@ -14890,7 +14890,7 @@
           <p:nvPr/>
         </p:nvPicPr>
         <p:blipFill>
-          <a:blip xmlns:r="http://schemas.openxmlformats.org/officeDocument/2006/relationships" xmlns:a="http://schemas.openxmlformats.org/drawingml/2006/main" r:embed="Rcd73e893992f4aaf"/>
+          <a:blip xmlns:r="http://schemas.openxmlformats.org/officeDocument/2006/relationships" xmlns:a="http://schemas.openxmlformats.org/drawingml/2006/main" r:embed="R6df72b58b30249b5"/>
           <a:srcRect xmlns:a="http://schemas.openxmlformats.org/drawingml/2006/main" l="0" t="27" r="0" b="27"/>
           <a:stretch xmlns:a="http://schemas.openxmlformats.org/drawingml/2006/main">
             <a:fillRect l="0" t="0" r="0" b="0"/>
@@ -14911,7 +14911,7 @@
           <p:cNvPr id="2" name="">
             <a:extLst xmlns:a="http://schemas.openxmlformats.org/drawingml/2006/main">
               <a:ext uri="{FF2B5EF4-FFF2-40B4-BE49-F238E27FC236}">
-                <a16:creationId xmlns:a16="http://schemas.microsoft.com/office/drawing/2014/main" id="{E08A77CD-044B-4949-86E6-B3B4C5197D3B}"/>
+                <a16:creationId xmlns:a16="http://schemas.microsoft.com/office/drawing/2014/main" id="{6A99C74C-094B-4BB8-A3F8-08C6E319C67C}"/>
               </a:ext>
             </a:extLst>
           </p:cNvPr>
@@ -14948,7 +14948,7 @@
           <p:cNvPr id="3" name="">
             <a:extLst xmlns:a="http://schemas.openxmlformats.org/drawingml/2006/main">
               <a:ext uri="{FF2B5EF4-FFF2-40B4-BE49-F238E27FC236}">
-                <a16:creationId xmlns:a16="http://schemas.microsoft.com/office/drawing/2014/main" id="{1B0B001A-29C0-44B5-ACA7-D412DB8E5F9E}"/>
+                <a16:creationId xmlns:a16="http://schemas.microsoft.com/office/drawing/2014/main" id="{3606A461-8FDD-4CBB-83AC-5D6FC40457A2}"/>
               </a:ext>
             </a:extLst>
           </p:cNvPr>
@@ -15012,7 +15012,7 @@
           <p:cNvPr id="4" name="">
             <a:extLst xmlns:a="http://schemas.openxmlformats.org/drawingml/2006/main">
               <a:ext uri="{FF2B5EF4-FFF2-40B4-BE49-F238E27FC236}">
-                <a16:creationId xmlns:a16="http://schemas.microsoft.com/office/drawing/2014/main" id="{C3FB9C77-50A5-43BF-BA38-521289BA376B}"/>
+                <a16:creationId xmlns:a16="http://schemas.microsoft.com/office/drawing/2014/main" id="{D65C3A71-D2AF-4970-B219-434C2486633B}"/>
               </a:ext>
             </a:extLst>
           </p:cNvPr>
@@ -15076,7 +15076,7 @@
           <p:cNvPr id="5" name="">
             <a:extLst xmlns:a="http://schemas.openxmlformats.org/drawingml/2006/main">
               <a:ext uri="{FF2B5EF4-FFF2-40B4-BE49-F238E27FC236}">
-                <a16:creationId xmlns:a16="http://schemas.microsoft.com/office/drawing/2014/main" id="{70B4B75B-FAA9-4CA5-B43A-DB5F134A4496}"/>
+                <a16:creationId xmlns:a16="http://schemas.microsoft.com/office/drawing/2014/main" id="{C8CB653E-B4B4-4F3B-934B-062A707DBBB5}"/>
               </a:ext>
             </a:extLst>
           </p:cNvPr>
@@ -15140,7 +15140,7 @@
           <p:cNvPr id="6" name="">
             <a:extLst xmlns:a="http://schemas.openxmlformats.org/drawingml/2006/main">
               <a:ext uri="{FF2B5EF4-FFF2-40B4-BE49-F238E27FC236}">
-                <a16:creationId xmlns:a16="http://schemas.microsoft.com/office/drawing/2014/main" id="{3E8B7D8A-B4AC-4CEB-94C7-D4504BAA6DEA}"/>
+                <a16:creationId xmlns:a16="http://schemas.microsoft.com/office/drawing/2014/main" id="{FBF9CC36-52C0-4FAE-BF8B-F53DF4A5E6AA}"/>
               </a:ext>
             </a:extLst>
           </p:cNvPr>
@@ -15204,7 +15204,7 @@
           <p:cNvPr id="7" name="">
             <a:extLst xmlns:a="http://schemas.openxmlformats.org/drawingml/2006/main">
               <a:ext uri="{FF2B5EF4-FFF2-40B4-BE49-F238E27FC236}">
-                <a16:creationId xmlns:a16="http://schemas.microsoft.com/office/drawing/2014/main" id="{5A70F40A-BA47-4FF2-9882-4E6BAEC039B5}"/>
+                <a16:creationId xmlns:a16="http://schemas.microsoft.com/office/drawing/2014/main" id="{F03F3122-116C-45DC-8064-649E18D8626A}"/>
               </a:ext>
             </a:extLst>
           </p:cNvPr>
@@ -15268,7 +15268,7 @@
           <p:cNvPr id="8" name="">
             <a:extLst xmlns:a="http://schemas.openxmlformats.org/drawingml/2006/main">
               <a:ext uri="{FF2B5EF4-FFF2-40B4-BE49-F238E27FC236}">
-                <a16:creationId xmlns:a16="http://schemas.microsoft.com/office/drawing/2014/main" id="{1069241D-E3BF-4020-8F67-2D29BD737DA3}"/>
+                <a16:creationId xmlns:a16="http://schemas.microsoft.com/office/drawing/2014/main" id="{E4854881-FE17-49CC-8121-879A4379E540}"/>
               </a:ext>
             </a:extLst>
           </p:cNvPr>
@@ -15330,7 +15330,7 @@
     </p:spTree>
     <p:extLst>
       <p:ext uri="{BB962C8B-B14F-4D97-AF65-F5344CB8AC3E}">
-        <p14:creationId xmlns:p14="http://schemas.microsoft.com/office/powerpoint/2010/main" val="1644359960"/>
+        <p14:creationId xmlns:p14="http://schemas.microsoft.com/office/powerpoint/2010/main" val="836428822"/>
       </p:ext>
     </p:extLst>
   </p:cSld>

--- a/El Eterno Retorno/El-Eterno-Retorno.pptx
+++ b/El Eterno Retorno/El-Eterno-Retorno.pptx
@@ -2,21 +2,22 @@
 <file path=ppt/presentation.xml><?xml version="1.0" encoding="utf-8"?>
 <p:presentation xmlns:p="http://schemas.openxmlformats.org/presentationml/2006/main">
   <p:sldMasterIdLst>
-    <p:sldMasterId xmlns:r="http://schemas.openxmlformats.org/officeDocument/2006/relationships" id="2147483648" r:id="Re8aa14443c214660"/>
+    <p:sldMasterId xmlns:r="http://schemas.openxmlformats.org/officeDocument/2006/relationships" id="2147483648" r:id="R1f0660d58f0c4b99"/>
   </p:sldMasterIdLst>
   <p:notesMasterIdLst>
-    <p:notesMasterId xmlns:r="http://schemas.openxmlformats.org/officeDocument/2006/relationships" r:id="R1739b050b23f4ca7"/>
+    <p:notesMasterId xmlns:r="http://schemas.openxmlformats.org/officeDocument/2006/relationships" r:id="R8479a33114bc4590"/>
   </p:notesMasterIdLst>
   <p:sldIdLst>
-    <p:sldId xmlns:r="http://schemas.openxmlformats.org/officeDocument/2006/relationships" id="256" r:id="R799bcf3d911d4f03"/>
-    <p:sldId xmlns:r="http://schemas.openxmlformats.org/officeDocument/2006/relationships" id="257" r:id="R1a62dc4f6fb5459e"/>
-    <p:sldId xmlns:r="http://schemas.openxmlformats.org/officeDocument/2006/relationships" id="258" r:id="R8c3d5631c95b4148"/>
-    <p:sldId xmlns:r="http://schemas.openxmlformats.org/officeDocument/2006/relationships" id="259" r:id="Rb0a15ed87cc34233"/>
-    <p:sldId xmlns:r="http://schemas.openxmlformats.org/officeDocument/2006/relationships" id="260" r:id="Rf937326cf2ca4c92"/>
-    <p:sldId xmlns:r="http://schemas.openxmlformats.org/officeDocument/2006/relationships" id="261" r:id="R20df1cd6fef34f48"/>
-    <p:sldId xmlns:r="http://schemas.openxmlformats.org/officeDocument/2006/relationships" id="262" r:id="Rb564721663e54edc"/>
-    <p:sldId xmlns:r="http://schemas.openxmlformats.org/officeDocument/2006/relationships" id="263" r:id="Rb424520c057e49df"/>
-    <p:sldId xmlns:r="http://schemas.openxmlformats.org/officeDocument/2006/relationships" id="264" r:id="R4f7b7e90936047b9"/>
+    <p:sldId xmlns:r="http://schemas.openxmlformats.org/officeDocument/2006/relationships" id="256" r:id="Rb11054af1d0540e8"/>
+    <p:sldId xmlns:r="http://schemas.openxmlformats.org/officeDocument/2006/relationships" id="257" r:id="R419393be853c4c53"/>
+    <p:sldId xmlns:r="http://schemas.openxmlformats.org/officeDocument/2006/relationships" id="258" r:id="R87ab8bed4d6940d5"/>
+    <p:sldId xmlns:r="http://schemas.openxmlformats.org/officeDocument/2006/relationships" id="259" r:id="R7a686989a4034bce"/>
+    <p:sldId xmlns:r="http://schemas.openxmlformats.org/officeDocument/2006/relationships" id="260" r:id="R35fdfd1ec9ce43a7"/>
+    <p:sldId xmlns:r="http://schemas.openxmlformats.org/officeDocument/2006/relationships" id="261" r:id="R10851be166504953"/>
+    <p:sldId xmlns:r="http://schemas.openxmlformats.org/officeDocument/2006/relationships" id="262" r:id="R6df5a6899a0343fb"/>
+    <p:sldId xmlns:r="http://schemas.openxmlformats.org/officeDocument/2006/relationships" id="263" r:id="R42cfa499d1ab4a8d"/>
+    <p:sldId xmlns:r="http://schemas.openxmlformats.org/officeDocument/2006/relationships" id="264" r:id="R517608cb90494922"/>
+    <p:sldId xmlns:r="http://schemas.openxmlformats.org/officeDocument/2006/relationships" id="265" r:id="Re80951c6f53e4061"/>
   </p:sldIdLst>
   <p:sldSz cx="12192000" cy="6858000"/>
   <p:notesSz cx="6858000" cy="9144000"/>
@@ -525,6 +526,72 @@
 </p:notes>
 </file>
 
+<file path=ppt/notesSlides/notesSlide10.xml><?xml version="1.0" encoding="utf-8"?>
+<p:notes xmlns:p="http://schemas.openxmlformats.org/presentationml/2006/main">
+  <p:cSld>
+    <p:spTree>
+      <p:nvGrpSpPr>
+        <p:cNvPr id="1" name=""/>
+        <p:cNvGrpSpPr/>
+        <p:nvPr/>
+      </p:nvGrpSpPr>
+      <p:grpSpPr>
+        <a:xfrm xmlns:a="http://schemas.openxmlformats.org/drawingml/2006/main"/>
+      </p:grpSpPr>
+      <p:sp>
+        <p:nvSpPr>
+          <p:cNvPr id="2" name="Slide Image Placeholder 1"/>
+          <p:cNvSpPr>
+            <a:spLocks xmlns:a="http://schemas.openxmlformats.org/drawingml/2006/main" noGrp="1"/>
+          </p:cNvSpPr>
+          <p:nvPr>
+            <p:ph type="sldImg" idx="0"/>
+          </p:nvPr>
+        </p:nvSpPr>
+        <p:spPr/>
+      </p:sp>
+      <p:sp>
+        <p:nvSpPr>
+          <p:cNvPr id="3" name="Notes Placeholder 2"/>
+          <p:cNvSpPr>
+            <a:spLocks xmlns:a="http://schemas.openxmlformats.org/drawingml/2006/main" noGrp="1"/>
+          </p:cNvSpPr>
+          <p:nvPr>
+            <p:ph type="body" idx="1"/>
+          </p:nvPr>
+        </p:nvSpPr>
+        <p:spPr/>
+        <p:txBody>
+          <a:bodyPr xmlns:a="http://schemas.openxmlformats.org/drawingml/2006/main"/>
+          <a:lstStyle xmlns:a="http://schemas.openxmlformats.org/drawingml/2006/main"/>
+          <a:p xmlns:a="http://schemas.openxmlformats.org/drawingml/2006/main"/>
+        </p:txBody>
+      </p:sp>
+      <p:sp>
+        <p:nvSpPr>
+          <p:cNvPr id="4" name="Slide Number Placeholder 3"/>
+          <p:cNvSpPr>
+            <a:spLocks xmlns:a="http://schemas.openxmlformats.org/drawingml/2006/main" noGrp="1"/>
+          </p:cNvSpPr>
+          <p:nvPr>
+            <p:ph type="sldNum" idx="5"/>
+          </p:nvPr>
+        </p:nvSpPr>
+        <p:spPr/>
+        <p:txBody>
+          <a:bodyPr xmlns:a="http://schemas.openxmlformats.org/drawingml/2006/main"/>
+          <a:lstStyle xmlns:a="http://schemas.openxmlformats.org/drawingml/2006/main"/>
+          <a:p xmlns:a="http://schemas.openxmlformats.org/drawingml/2006/main"/>
+        </p:txBody>
+      </p:sp>
+    </p:spTree>
+  </p:cSld>
+  <p:clrMapOvr>
+    <a:masterClrMapping xmlns:a="http://schemas.openxmlformats.org/drawingml/2006/main"/>
+  </p:clrMapOvr>
+</p:notes>
+</file>
+
 <file path=ppt/notesSlides/notesSlide2.xml><?xml version="1.0" encoding="utf-8"?>
 <p:notes xmlns:p="http://schemas.openxmlformats.org/presentationml/2006/main">
   <p:cSld>
@@ -1091,7 +1158,7 @@
   </p:cSld>
   <p:clrMap bg1="lt1" tx1="dk1" bg2="lt2" tx2="dk2" accent1="accent1" accent2="accent2" accent3="accent3" accent4="accent4" accent5="accent5" accent6="accent6" hlink="hlink" folHlink="folHlink"/>
   <p:sldLayoutIdLst>
-    <p:sldLayoutId xmlns:r="http://schemas.openxmlformats.org/officeDocument/2006/relationships" id="2147483649" r:id="R8ca3e369624a4f08"/>
+    <p:sldLayoutId xmlns:r="http://schemas.openxmlformats.org/officeDocument/2006/relationships" id="2147483649" r:id="Rde1c09875a894efd"/>
   </p:sldLayoutIdLst>
   <p:txStyles>
     <p:titleStyle>
@@ -1589,7 +1656,7 @@
           <p:cNvPr id="1" name="">
             <a:extLst xmlns:a="http://schemas.openxmlformats.org/drawingml/2006/main">
               <a:ext uri="{FF2B5EF4-FFF2-40B4-BE49-F238E27FC236}">
-                <a16:creationId xmlns:a16="http://schemas.microsoft.com/office/drawing/2014/main" id="{D6242897-9DC4-4F82-BF9F-A51D00E0C772}"/>
+                <a16:creationId xmlns:a16="http://schemas.microsoft.com/office/drawing/2014/main" id="{0B0866B3-E12C-447B-B5BA-052CB59360D0}"/>
               </a:ext>
             </a:extLst>
           </p:cNvPr>
@@ -1622,7 +1689,7 @@
           <p:cNvPr id="2" name="">
             <a:extLst xmlns:a="http://schemas.openxmlformats.org/drawingml/2006/main">
               <a:ext uri="{FF2B5EF4-FFF2-40B4-BE49-F238E27FC236}">
-                <a16:creationId xmlns:a16="http://schemas.microsoft.com/office/drawing/2014/main" id="{379691E5-A3ED-4895-8342-CD900AE99355}"/>
+                <a16:creationId xmlns:a16="http://schemas.microsoft.com/office/drawing/2014/main" id="{13048EE5-1DD6-485B-A995-AC77E25EA7F8}"/>
               </a:ext>
             </a:extLst>
           </p:cNvPr>
@@ -1655,7 +1722,7 @@
           <p:cNvPr id="3" name="">
             <a:extLst xmlns:a="http://schemas.openxmlformats.org/drawingml/2006/main">
               <a:ext uri="{FF2B5EF4-FFF2-40B4-BE49-F238E27FC236}">
-                <a16:creationId xmlns:a16="http://schemas.microsoft.com/office/drawing/2014/main" id="{0FF7AF21-59E7-4251-9B47-7EF3A6FF581B}"/>
+                <a16:creationId xmlns:a16="http://schemas.microsoft.com/office/drawing/2014/main" id="{08EF8D98-8F01-4BD7-ADA2-47A028949D03}"/>
               </a:ext>
             </a:extLst>
           </p:cNvPr>
@@ -1719,7 +1786,7 @@
           <p:cNvPr id="4" name="">
             <a:extLst xmlns:a="http://schemas.openxmlformats.org/drawingml/2006/main">
               <a:ext uri="{FF2B5EF4-FFF2-40B4-BE49-F238E27FC236}">
-                <a16:creationId xmlns:a16="http://schemas.microsoft.com/office/drawing/2014/main" id="{7D6D539A-F7FA-480E-9EBA-7DAF67AC9AC2}"/>
+                <a16:creationId xmlns:a16="http://schemas.microsoft.com/office/drawing/2014/main" id="{BE5DBD64-DAEE-4222-97DB-D947A1405046}"/>
               </a:ext>
             </a:extLst>
           </p:cNvPr>
@@ -1829,7 +1896,7 @@
           <p:cNvPr id="5" name="">
             <a:extLst xmlns:a="http://schemas.openxmlformats.org/drawingml/2006/main">
               <a:ext uri="{FF2B5EF4-FFF2-40B4-BE49-F238E27FC236}">
-                <a16:creationId xmlns:a16="http://schemas.microsoft.com/office/drawing/2014/main" id="{DDE4796A-6531-45B3-8B56-ECEBED0D5197}"/>
+                <a16:creationId xmlns:a16="http://schemas.microsoft.com/office/drawing/2014/main" id="{838E244C-ACF7-4D6D-85BC-CD5CF2417AC4}"/>
               </a:ext>
             </a:extLst>
           </p:cNvPr>
@@ -1883,7 +1950,7 @@
                 <a:ea typeface="Aptos"/>
                 <a:cs typeface="Aptos"/>
               </a:rPr>
-              <a:t>Los LLMs estan reabriendo una pregunta que la nube parecia haber cerrado: donde conviene correr la inteligencia cuando el costo por token se dispara.</a:t>
+              <a:t>Los LLMs están reabriendo una pregunta que la nube parecía haber cerrado: dónde conviene correr la inteligencia cuando el costo por token se dispara.</a:t>
             </a:r>
           </a:p>
         </p:txBody>
@@ -1893,7 +1960,7 @@
           <p:cNvPr id="6" name="">
             <a:extLst xmlns:a="http://schemas.openxmlformats.org/drawingml/2006/main">
               <a:ext uri="{FF2B5EF4-FFF2-40B4-BE49-F238E27FC236}">
-                <a16:creationId xmlns:a16="http://schemas.microsoft.com/office/drawing/2014/main" id="{E67F8AD2-6475-4B09-8848-F8CC53512D60}"/>
+                <a16:creationId xmlns:a16="http://schemas.microsoft.com/office/drawing/2014/main" id="{4F426CDC-080E-48CB-92E9-A11B11FD5172}"/>
               </a:ext>
             </a:extLst>
           </p:cNvPr>
@@ -1926,7 +1993,7 @@
           <p:cNvPr id="7" name="">
             <a:extLst xmlns:a="http://schemas.openxmlformats.org/drawingml/2006/main">
               <a:ext uri="{FF2B5EF4-FFF2-40B4-BE49-F238E27FC236}">
-                <a16:creationId xmlns:a16="http://schemas.microsoft.com/office/drawing/2014/main" id="{9BA74BC5-B05A-4D92-9AEA-7CBEB607B7A1}"/>
+                <a16:creationId xmlns:a16="http://schemas.microsoft.com/office/drawing/2014/main" id="{EF1FDD06-3ABC-4986-8CA0-6481B2CE1EFC}"/>
               </a:ext>
             </a:extLst>
           </p:cNvPr>
@@ -1990,7 +2057,7 @@
           <p:cNvPr id="8" name="">
             <a:extLst xmlns:a="http://schemas.openxmlformats.org/drawingml/2006/main">
               <a:ext uri="{FF2B5EF4-FFF2-40B4-BE49-F238E27FC236}">
-                <a16:creationId xmlns:a16="http://schemas.microsoft.com/office/drawing/2014/main" id="{BF7B94A9-CF49-453F-8165-68770AB74D84}"/>
+                <a16:creationId xmlns:a16="http://schemas.microsoft.com/office/drawing/2014/main" id="{E161F8D5-A5B5-471B-83D3-609D40603245}"/>
               </a:ext>
             </a:extLst>
           </p:cNvPr>
@@ -2044,7 +2111,7 @@
                 <a:ea typeface="Aptos Display"/>
                 <a:cs typeface="Aptos Display"/>
               </a:rPr>
-              <a:t>No porque la nube haya fallado, sino porque la economia de los LLMs esta obligando a revisar la arquitectura.</a:t>
+              <a:t>No porque la nube haya fallado, sino porque la economía de los LLMs está obligando a revisar la arquitectura.</a:t>
             </a:r>
           </a:p>
         </p:txBody>
@@ -2054,7 +2121,7 @@
           <p:cNvPr id="9" name="">
             <a:extLst xmlns:a="http://schemas.openxmlformats.org/drawingml/2006/main">
               <a:ext uri="{FF2B5EF4-FFF2-40B4-BE49-F238E27FC236}">
-                <a16:creationId xmlns:a16="http://schemas.microsoft.com/office/drawing/2014/main" id="{6BE1571A-D140-460B-AE0E-F2C98C8F3BF7}"/>
+                <a16:creationId xmlns:a16="http://schemas.microsoft.com/office/drawing/2014/main" id="{E33FDF61-91E8-450E-A6E5-6706170F09B1}"/>
               </a:ext>
             </a:extLst>
           </p:cNvPr>
@@ -2066,7 +2133,7 @@
         <p:spPr>
           <a:xfrm xmlns:a="http://schemas.openxmlformats.org/drawingml/2006/main">
             <a:off x="7581900" y="3543300"/>
-            <a:ext cx="1143000" cy="323850"/>
+            <a:ext cx="1028700" cy="323850"/>
           </a:xfrm>
           <a:prstGeom xmlns:a="http://schemas.openxmlformats.org/drawingml/2006/main" prst="rect">
             <a:avLst/>
@@ -2118,7 +2185,7 @@
           <p:cNvPr id="10" name="">
             <a:extLst xmlns:a="http://schemas.openxmlformats.org/drawingml/2006/main">
               <a:ext uri="{FF2B5EF4-FFF2-40B4-BE49-F238E27FC236}">
-                <a16:creationId xmlns:a16="http://schemas.microsoft.com/office/drawing/2014/main" id="{E38E491B-1035-4DE5-965B-C4C1EE9CDA55}"/>
+                <a16:creationId xmlns:a16="http://schemas.microsoft.com/office/drawing/2014/main" id="{AF28A0C8-6AF3-46EB-8E78-FA568B4D7036}"/>
               </a:ext>
             </a:extLst>
           </p:cNvPr>
@@ -2130,7 +2197,7 @@
         <p:spPr>
           <a:xfrm xmlns:a="http://schemas.openxmlformats.org/drawingml/2006/main">
             <a:off x="7581900" y="3867150"/>
-            <a:ext cx="1809750" cy="190500"/>
+            <a:ext cx="1028700" cy="323850"/>
           </a:xfrm>
           <a:prstGeom xmlns:a="http://schemas.openxmlformats.org/drawingml/2006/main" prst="rect">
             <a:avLst/>
@@ -2154,7 +2221,7 @@
           <a:lstStyle xmlns:a="http://schemas.openxmlformats.org/drawingml/2006/main"/>
           <a:p xmlns:a="http://schemas.openxmlformats.org/drawingml/2006/main">
             <a:pPr algn="l">
-              <a:defRPr sz="975" b="0">
+              <a:defRPr sz="900" b="0">
                 <a:solidFill>
                   <a:srgbClr val="D9E2EC"/>
                 </a:solidFill>
@@ -2164,7 +2231,7 @@
               </a:defRPr>
             </a:pPr>
             <a:r>
-              <a:rPr sz="975" b="0">
+              <a:rPr sz="900" b="0">
                 <a:solidFill>
                   <a:srgbClr val="D9E2EC"/>
                 </a:solidFill>
@@ -2172,7 +2239,7 @@
                 <a:ea typeface="Aptos Mono"/>
                 <a:cs typeface="Aptos Mono"/>
               </a:rPr>
-              <a:t>anos de hegemonia cloud</a:t>
+              <a:t>años de hegemonía</a:t>
             </a:r>
           </a:p>
         </p:txBody>
@@ -2182,19 +2249,19 @@
           <p:cNvPr id="11" name="">
             <a:extLst xmlns:a="http://schemas.openxmlformats.org/drawingml/2006/main">
               <a:ext uri="{FF2B5EF4-FFF2-40B4-BE49-F238E27FC236}">
-                <a16:creationId xmlns:a16="http://schemas.microsoft.com/office/drawing/2014/main" id="{6A25898E-DF0A-4641-9B03-F31AEFCE0FED}"/>
-              </a:ext>
-            </a:extLst>
-          </p:cNvPr>
-          <p:cNvSpPr>
-            <a:spLocks xmlns:a="http://schemas.openxmlformats.org/drawingml/2006/main" noGrp="1"/>
-          </p:cNvSpPr>
-          <p:nvPr/>
-        </p:nvSpPr>
-        <p:spPr>
-          <a:xfrm xmlns:a="http://schemas.openxmlformats.org/drawingml/2006/main">
-            <a:off x="9334500" y="3543300"/>
-            <a:ext cx="1143000" cy="323850"/>
+                <a16:creationId xmlns:a16="http://schemas.microsoft.com/office/drawing/2014/main" id="{C41365A3-1DF7-4100-8DE5-B2375849A31E}"/>
+              </a:ext>
+            </a:extLst>
+          </p:cNvPr>
+          <p:cNvSpPr>
+            <a:spLocks xmlns:a="http://schemas.openxmlformats.org/drawingml/2006/main" noGrp="1"/>
+          </p:cNvSpPr>
+          <p:nvPr/>
+        </p:nvSpPr>
+        <p:spPr>
+          <a:xfrm xmlns:a="http://schemas.openxmlformats.org/drawingml/2006/main">
+            <a:off x="8782050" y="3543300"/>
+            <a:ext cx="1028700" cy="323850"/>
           </a:xfrm>
           <a:prstGeom xmlns:a="http://schemas.openxmlformats.org/drawingml/2006/main" prst="rect">
             <a:avLst/>
@@ -2246,19 +2313,19 @@
           <p:cNvPr id="12" name="">
             <a:extLst xmlns:a="http://schemas.openxmlformats.org/drawingml/2006/main">
               <a:ext uri="{FF2B5EF4-FFF2-40B4-BE49-F238E27FC236}">
-                <a16:creationId xmlns:a16="http://schemas.microsoft.com/office/drawing/2014/main" id="{6C41D989-796E-4099-AF4F-B12847DED10B}"/>
-              </a:ext>
-            </a:extLst>
-          </p:cNvPr>
-          <p:cNvSpPr>
-            <a:spLocks xmlns:a="http://schemas.openxmlformats.org/drawingml/2006/main" noGrp="1"/>
-          </p:cNvSpPr>
-          <p:nvPr/>
-        </p:nvSpPr>
-        <p:spPr>
-          <a:xfrm xmlns:a="http://schemas.openxmlformats.org/drawingml/2006/main">
-            <a:off x="9334500" y="3867150"/>
-            <a:ext cx="1809750" cy="190500"/>
+                <a16:creationId xmlns:a16="http://schemas.microsoft.com/office/drawing/2014/main" id="{2C3A9869-FDA0-45A6-8658-BD7175107304}"/>
+              </a:ext>
+            </a:extLst>
+          </p:cNvPr>
+          <p:cNvSpPr>
+            <a:spLocks xmlns:a="http://schemas.openxmlformats.org/drawingml/2006/main" noGrp="1"/>
+          </p:cNvSpPr>
+          <p:nvPr/>
+        </p:nvSpPr>
+        <p:spPr>
+          <a:xfrm xmlns:a="http://schemas.openxmlformats.org/drawingml/2006/main">
+            <a:off x="8782050" y="3867150"/>
+            <a:ext cx="1028700" cy="323850"/>
           </a:xfrm>
           <a:prstGeom xmlns:a="http://schemas.openxmlformats.org/drawingml/2006/main" prst="rect">
             <a:avLst/>
@@ -2282,7 +2349,7 @@
           <a:lstStyle xmlns:a="http://schemas.openxmlformats.org/drawingml/2006/main"/>
           <a:p xmlns:a="http://schemas.openxmlformats.org/drawingml/2006/main">
             <a:pPr algn="l">
-              <a:defRPr sz="975" b="0">
+              <a:defRPr sz="900" b="0">
                 <a:solidFill>
                   <a:srgbClr val="D9E2EC"/>
                 </a:solidFill>
@@ -2292,7 +2359,7 @@
               </a:defRPr>
             </a:pPr>
             <a:r>
-              <a:rPr sz="975" b="0">
+              <a:rPr sz="900" b="0">
                 <a:solidFill>
                   <a:srgbClr val="D9E2EC"/>
                 </a:solidFill>
@@ -2300,7 +2367,7 @@
                 <a:ea typeface="Aptos Mono"/>
                 <a:cs typeface="Aptos Mono"/>
               </a:rPr>
-              <a:t>fuerzas en tension</a:t>
+              <a:t>fuerzas en tensión</a:t>
             </a:r>
           </a:p>
         </p:txBody>
@@ -2310,19 +2377,19 @@
           <p:cNvPr id="13" name="">
             <a:extLst xmlns:a="http://schemas.openxmlformats.org/drawingml/2006/main">
               <a:ext uri="{FF2B5EF4-FFF2-40B4-BE49-F238E27FC236}">
-                <a16:creationId xmlns:a16="http://schemas.microsoft.com/office/drawing/2014/main" id="{895555BB-7995-439F-828F-1B19FE2F8820}"/>
-              </a:ext>
-            </a:extLst>
-          </p:cNvPr>
-          <p:cNvSpPr>
-            <a:spLocks xmlns:a="http://schemas.openxmlformats.org/drawingml/2006/main" noGrp="1"/>
-          </p:cNvSpPr>
-          <p:nvPr/>
-        </p:nvSpPr>
-        <p:spPr>
-          <a:xfrm xmlns:a="http://schemas.openxmlformats.org/drawingml/2006/main">
-            <a:off x="10477500" y="3543300"/>
-            <a:ext cx="1143000" cy="323850"/>
+                <a16:creationId xmlns:a16="http://schemas.microsoft.com/office/drawing/2014/main" id="{37CF809F-F62F-4306-8A2C-678DFD8AAA11}"/>
+              </a:ext>
+            </a:extLst>
+          </p:cNvPr>
+          <p:cNvSpPr>
+            <a:spLocks xmlns:a="http://schemas.openxmlformats.org/drawingml/2006/main" noGrp="1"/>
+          </p:cNvSpPr>
+          <p:nvPr/>
+        </p:nvSpPr>
+        <p:spPr>
+          <a:xfrm xmlns:a="http://schemas.openxmlformats.org/drawingml/2006/main">
+            <a:off x="9982200" y="3543300"/>
+            <a:ext cx="1028700" cy="323850"/>
           </a:xfrm>
           <a:prstGeom xmlns:a="http://schemas.openxmlformats.org/drawingml/2006/main" prst="rect">
             <a:avLst/>
@@ -2374,19 +2441,19 @@
           <p:cNvPr id="14" name="">
             <a:extLst xmlns:a="http://schemas.openxmlformats.org/drawingml/2006/main">
               <a:ext uri="{FF2B5EF4-FFF2-40B4-BE49-F238E27FC236}">
-                <a16:creationId xmlns:a16="http://schemas.microsoft.com/office/drawing/2014/main" id="{0D5C1067-BD50-4E7A-A723-254C189BF9E6}"/>
-              </a:ext>
-            </a:extLst>
-          </p:cNvPr>
-          <p:cNvSpPr>
-            <a:spLocks xmlns:a="http://schemas.openxmlformats.org/drawingml/2006/main" noGrp="1"/>
-          </p:cNvSpPr>
-          <p:nvPr/>
-        </p:nvSpPr>
-        <p:spPr>
-          <a:xfrm xmlns:a="http://schemas.openxmlformats.org/drawingml/2006/main">
-            <a:off x="10477500" y="3867150"/>
-            <a:ext cx="1809750" cy="190500"/>
+                <a16:creationId xmlns:a16="http://schemas.microsoft.com/office/drawing/2014/main" id="{E1326FF7-9A4A-4DAE-8805-0DB81DA28CF6}"/>
+              </a:ext>
+            </a:extLst>
+          </p:cNvPr>
+          <p:cNvSpPr>
+            <a:spLocks xmlns:a="http://schemas.openxmlformats.org/drawingml/2006/main" noGrp="1"/>
+          </p:cNvSpPr>
+          <p:nvPr/>
+        </p:nvSpPr>
+        <p:spPr>
+          <a:xfrm xmlns:a="http://schemas.openxmlformats.org/drawingml/2006/main">
+            <a:off x="9982200" y="3867150"/>
+            <a:ext cx="1028700" cy="323850"/>
           </a:xfrm>
           <a:prstGeom xmlns:a="http://schemas.openxmlformats.org/drawingml/2006/main" prst="rect">
             <a:avLst/>
@@ -2410,7 +2477,7 @@
           <a:lstStyle xmlns:a="http://schemas.openxmlformats.org/drawingml/2006/main"/>
           <a:p xmlns:a="http://schemas.openxmlformats.org/drawingml/2006/main">
             <a:pPr algn="l">
-              <a:defRPr sz="975" b="0">
+              <a:defRPr sz="900" b="0">
                 <a:solidFill>
                   <a:srgbClr val="D9E2EC"/>
                 </a:solidFill>
@@ -2420,7 +2487,7 @@
               </a:defRPr>
             </a:pPr>
             <a:r>
-              <a:rPr sz="975" b="0">
+              <a:rPr sz="900" b="0">
                 <a:solidFill>
                   <a:srgbClr val="D9E2EC"/>
                 </a:solidFill>
@@ -2438,7 +2505,7 @@
           <p:cNvPr id="15" name="">
             <a:extLst xmlns:a="http://schemas.openxmlformats.org/drawingml/2006/main">
               <a:ext uri="{FF2B5EF4-FFF2-40B4-BE49-F238E27FC236}">
-                <a16:creationId xmlns:a16="http://schemas.microsoft.com/office/drawing/2014/main" id="{EE0F0EB8-AF68-498B-8CFE-BB977B3AE8E5}"/>
+                <a16:creationId xmlns:a16="http://schemas.microsoft.com/office/drawing/2014/main" id="{B73F69F8-9E9A-4AAC-A727-6825BE67782C}"/>
               </a:ext>
             </a:extLst>
           </p:cNvPr>
@@ -2471,7 +2538,7 @@
           <p:cNvPr id="16" name="">
             <a:extLst xmlns:a="http://schemas.openxmlformats.org/drawingml/2006/main">
               <a:ext uri="{FF2B5EF4-FFF2-40B4-BE49-F238E27FC236}">
-                <a16:creationId xmlns:a16="http://schemas.microsoft.com/office/drawing/2014/main" id="{4AE314F5-4CA7-4111-A7C1-9A58F1DDD5A8}"/>
+                <a16:creationId xmlns:a16="http://schemas.microsoft.com/office/drawing/2014/main" id="{CEAA4A21-D94E-418D-893B-5D4D8FD13AC6}"/>
               </a:ext>
             </a:extLst>
           </p:cNvPr>
@@ -2535,7 +2602,7 @@
           <p:cNvPr id="17" name="">
             <a:extLst xmlns:a="http://schemas.openxmlformats.org/drawingml/2006/main">
               <a:ext uri="{FF2B5EF4-FFF2-40B4-BE49-F238E27FC236}">
-                <a16:creationId xmlns:a16="http://schemas.microsoft.com/office/drawing/2014/main" id="{340FE2E7-84E8-425D-A414-3F9440B6CA7D}"/>
+                <a16:creationId xmlns:a16="http://schemas.microsoft.com/office/drawing/2014/main" id="{D3767A5B-92FD-441C-AACC-0C6375C24D5B}"/>
               </a:ext>
             </a:extLst>
           </p:cNvPr>
@@ -2599,7 +2666,7 @@
           <p:cNvPr id="18" name="">
             <a:extLst xmlns:a="http://schemas.openxmlformats.org/drawingml/2006/main">
               <a:ext uri="{FF2B5EF4-FFF2-40B4-BE49-F238E27FC236}">
-                <a16:creationId xmlns:a16="http://schemas.microsoft.com/office/drawing/2014/main" id="{105625A6-A3A5-4931-98CA-07D28ABCC70F}"/>
+                <a16:creationId xmlns:a16="http://schemas.microsoft.com/office/drawing/2014/main" id="{3DF5DD4D-1A62-49D2-9A02-1DF789F24A5D}"/>
               </a:ext>
             </a:extLst>
           </p:cNvPr>
@@ -2632,7 +2699,7 @@
           <p:cNvPr id="19" name="">
             <a:extLst xmlns:a="http://schemas.openxmlformats.org/drawingml/2006/main">
               <a:ext uri="{FF2B5EF4-FFF2-40B4-BE49-F238E27FC236}">
-                <a16:creationId xmlns:a16="http://schemas.microsoft.com/office/drawing/2014/main" id="{8377696A-FE9D-47C6-9B20-BAB10C6FA04A}"/>
+                <a16:creationId xmlns:a16="http://schemas.microsoft.com/office/drawing/2014/main" id="{9A6CF126-DF89-4695-AD58-77F5C86A8229}"/>
               </a:ext>
             </a:extLst>
           </p:cNvPr>
@@ -2696,7 +2763,7 @@
           <p:cNvPr id="20" name="">
             <a:extLst xmlns:a="http://schemas.openxmlformats.org/drawingml/2006/main">
               <a:ext uri="{FF2B5EF4-FFF2-40B4-BE49-F238E27FC236}">
-                <a16:creationId xmlns:a16="http://schemas.microsoft.com/office/drawing/2014/main" id="{3224AD39-D9F1-4371-A2D0-253DB8178E47}"/>
+                <a16:creationId xmlns:a16="http://schemas.microsoft.com/office/drawing/2014/main" id="{CB2983D0-D68F-41CF-B847-3B050D768C2C}"/>
               </a:ext>
             </a:extLst>
           </p:cNvPr>
@@ -2760,7 +2827,7 @@
           <p:cNvPr id="21" name="">
             <a:extLst xmlns:a="http://schemas.openxmlformats.org/drawingml/2006/main">
               <a:ext uri="{FF2B5EF4-FFF2-40B4-BE49-F238E27FC236}">
-                <a16:creationId xmlns:a16="http://schemas.microsoft.com/office/drawing/2014/main" id="{C5ADDC54-0A2B-41B3-A1FF-78C7642369E5}"/>
+                <a16:creationId xmlns:a16="http://schemas.microsoft.com/office/drawing/2014/main" id="{66E6C918-3BA3-41A2-AFDE-1C33CAC0909A}"/>
               </a:ext>
             </a:extLst>
           </p:cNvPr>
@@ -2793,7 +2860,7 @@
           <p:cNvPr id="22" name="">
             <a:extLst xmlns:a="http://schemas.openxmlformats.org/drawingml/2006/main">
               <a:ext uri="{FF2B5EF4-FFF2-40B4-BE49-F238E27FC236}">
-                <a16:creationId xmlns:a16="http://schemas.microsoft.com/office/drawing/2014/main" id="{E38E6D87-41BD-470C-B2A9-6AAEA856BB46}"/>
+                <a16:creationId xmlns:a16="http://schemas.microsoft.com/office/drawing/2014/main" id="{853597BF-8E15-4A5C-83FB-19C6560F98A4}"/>
               </a:ext>
             </a:extLst>
           </p:cNvPr>
@@ -2857,7 +2924,7 @@
           <p:cNvPr id="23" name="">
             <a:extLst xmlns:a="http://schemas.openxmlformats.org/drawingml/2006/main">
               <a:ext uri="{FF2B5EF4-FFF2-40B4-BE49-F238E27FC236}">
-                <a16:creationId xmlns:a16="http://schemas.microsoft.com/office/drawing/2014/main" id="{9C28DBE7-B8FB-4DD8-B256-D685046DD966}"/>
+                <a16:creationId xmlns:a16="http://schemas.microsoft.com/office/drawing/2014/main" id="{D37269F0-84F5-4AAF-AFEF-BC46B74566E5}"/>
               </a:ext>
             </a:extLst>
           </p:cNvPr>
@@ -2921,7 +2988,7 @@
           <p:cNvPr id="24" name="">
             <a:extLst xmlns:a="http://schemas.openxmlformats.org/drawingml/2006/main">
               <a:ext uri="{FF2B5EF4-FFF2-40B4-BE49-F238E27FC236}">
-                <a16:creationId xmlns:a16="http://schemas.microsoft.com/office/drawing/2014/main" id="{97A59B02-9A6D-4D10-84E3-2BAB0FDF8432}"/>
+                <a16:creationId xmlns:a16="http://schemas.microsoft.com/office/drawing/2014/main" id="{F91DB2A3-E6F3-42B5-902F-69749DB88222}"/>
               </a:ext>
             </a:extLst>
           </p:cNvPr>
@@ -2954,7 +3021,7 @@
           <p:cNvPr id="25" name="">
             <a:extLst xmlns:a="http://schemas.openxmlformats.org/drawingml/2006/main">
               <a:ext uri="{FF2B5EF4-FFF2-40B4-BE49-F238E27FC236}">
-                <a16:creationId xmlns:a16="http://schemas.microsoft.com/office/drawing/2014/main" id="{BA76B028-1913-4D42-B347-89B4CE8AC154}"/>
+                <a16:creationId xmlns:a16="http://schemas.microsoft.com/office/drawing/2014/main" id="{C26B914B-D580-4259-BC01-F4A1D5898AC4}"/>
               </a:ext>
             </a:extLst>
           </p:cNvPr>
@@ -3018,7 +3085,7 @@
           <p:cNvPr id="26" name="">
             <a:extLst xmlns:a="http://schemas.openxmlformats.org/drawingml/2006/main">
               <a:ext uri="{FF2B5EF4-FFF2-40B4-BE49-F238E27FC236}">
-                <a16:creationId xmlns:a16="http://schemas.microsoft.com/office/drawing/2014/main" id="{6840AE79-72FE-46F1-A808-4A07495B55DF}"/>
+                <a16:creationId xmlns:a16="http://schemas.microsoft.com/office/drawing/2014/main" id="{A78DB230-1AE4-4FB2-9B8A-93C6F81843B7}"/>
               </a:ext>
             </a:extLst>
           </p:cNvPr>
@@ -3082,7 +3149,7 @@
           <p:cNvPr id="27" name="">
             <a:extLst xmlns:a="http://schemas.openxmlformats.org/drawingml/2006/main">
               <a:ext uri="{FF2B5EF4-FFF2-40B4-BE49-F238E27FC236}">
-                <a16:creationId xmlns:a16="http://schemas.microsoft.com/office/drawing/2014/main" id="{FCB3309B-6035-43B1-9F70-603D948F815E}"/>
+                <a16:creationId xmlns:a16="http://schemas.microsoft.com/office/drawing/2014/main" id="{168E22CE-497F-4C9E-9584-C814D921A73C}"/>
               </a:ext>
             </a:extLst>
           </p:cNvPr>
@@ -3136,7 +3203,7 @@
                 <a:ea typeface="Aptos"/>
                 <a:cs typeface="Aptos"/>
               </a:rPr>
-              <a:t>Hook central: los LLMs reabren la pregunta de donde conviene correr la inteligencia.</a:t>
+              <a:t>Hook central: los LLMs reabren la pregunta de dónde conviene correr la inteligencia.</a:t>
             </a:r>
           </a:p>
         </p:txBody>
@@ -3146,7 +3213,7 @@
           <p:cNvPr id="28" name="">
             <a:extLst xmlns:a="http://schemas.openxmlformats.org/drawingml/2006/main">
               <a:ext uri="{FF2B5EF4-FFF2-40B4-BE49-F238E27FC236}">
-                <a16:creationId xmlns:a16="http://schemas.microsoft.com/office/drawing/2014/main" id="{B4C56369-8345-4236-BB38-B4DF5A073942}"/>
+                <a16:creationId xmlns:a16="http://schemas.microsoft.com/office/drawing/2014/main" id="{9A96ECCC-E519-4229-ACCC-0FE6BD262D87}"/>
               </a:ext>
             </a:extLst>
           </p:cNvPr>
@@ -3208,7 +3275,475 @@
     </p:spTree>
     <p:extLst>
       <p:ext uri="{BB962C8B-B14F-4D97-AF65-F5344CB8AC3E}">
-        <p14:creationId xmlns:p14="http://schemas.microsoft.com/office/powerpoint/2010/main" val="553231078"/>
+        <p14:creationId xmlns:p14="http://schemas.microsoft.com/office/powerpoint/2010/main" val="1165080730"/>
+      </p:ext>
+    </p:extLst>
+  </p:cSld>
+</p:sld>
+</file>
+
+<file path=ppt/slides/slide10.xml><?xml version="1.0" encoding="utf-8"?>
+<p:sld xmlns:p="http://schemas.openxmlformats.org/presentationml/2006/main">
+  <p:cSld>
+    <p:spTree>
+      <p:nvGrpSpPr>
+        <p:cNvPr id="1" name=""/>
+        <p:cNvGrpSpPr/>
+        <p:nvPr/>
+      </p:nvGrpSpPr>
+      <p:grpSpPr>
+        <a:xfrm xmlns:a="http://schemas.openxmlformats.org/drawingml/2006/main"/>
+      </p:grpSpPr>
+      <p:pic>
+        <p:nvPicPr>
+          <p:cNvPr id="1" name=""/>
+          <p:cNvPicPr>
+            <a:picLocks xmlns:a="http://schemas.openxmlformats.org/drawingml/2006/main" noChangeAspect="1"/>
+          </p:cNvPicPr>
+          <p:nvPr/>
+        </p:nvPicPr>
+        <p:blipFill>
+          <a:blip xmlns:r="http://schemas.openxmlformats.org/officeDocument/2006/relationships" xmlns:a="http://schemas.openxmlformats.org/drawingml/2006/main" r:embed="Rbb7f99b59b224265"/>
+          <a:srcRect xmlns:a="http://schemas.openxmlformats.org/drawingml/2006/main" l="0" t="27" r="0" b="27"/>
+          <a:stretch xmlns:a="http://schemas.openxmlformats.org/drawingml/2006/main">
+            <a:fillRect l="0" t="0" r="0" b="0"/>
+          </a:stretch>
+        </p:blipFill>
+        <p:spPr>
+          <a:xfrm xmlns:a="http://schemas.openxmlformats.org/drawingml/2006/main">
+            <a:off x="0" y="0"/>
+            <a:ext cx="12192000" cy="6858000"/>
+          </a:xfrm>
+          <a:prstGeom xmlns:a="http://schemas.openxmlformats.org/drawingml/2006/main" prst="rect">
+            <a:avLst/>
+          </a:prstGeom>
+        </p:spPr>
+      </p:pic>
+      <p:sp>
+        <p:nvSpPr>
+          <p:cNvPr id="2" name="">
+            <a:extLst xmlns:a="http://schemas.openxmlformats.org/drawingml/2006/main">
+              <a:ext uri="{FF2B5EF4-FFF2-40B4-BE49-F238E27FC236}">
+                <a16:creationId xmlns:a16="http://schemas.microsoft.com/office/drawing/2014/main" id="{3F0D78E4-4ED9-47A9-B4B0-52F6A069BC99}"/>
+              </a:ext>
+            </a:extLst>
+          </p:cNvPr>
+          <p:cNvSpPr>
+            <a:spLocks xmlns:a="http://schemas.openxmlformats.org/drawingml/2006/main" noGrp="1"/>
+          </p:cNvSpPr>
+          <p:nvPr/>
+        </p:nvSpPr>
+        <p:spPr>
+          <a:xfrm xmlns:a="http://schemas.openxmlformats.org/drawingml/2006/main">
+            <a:off x="0" y="0"/>
+            <a:ext cx="6667500" cy="6858000"/>
+          </a:xfrm>
+          <a:prstGeom xmlns:a="http://schemas.openxmlformats.org/drawingml/2006/main" prst="rect">
+            <a:avLst/>
+          </a:prstGeom>
+          <a:solidFill xmlns:a="http://schemas.openxmlformats.org/drawingml/2006/main">
+            <a:srgbClr val="081321">
+              <a:alpha val="80000"/>
+            </a:srgbClr>
+          </a:solidFill>
+          <a:ln xmlns:a="http://schemas.openxmlformats.org/drawingml/2006/main" w="0">
+            <a:solidFill>
+              <a:srgbClr val="081321">
+                <a:alpha val="80000"/>
+              </a:srgbClr>
+            </a:solidFill>
+            <a:prstDash val="solid"/>
+          </a:ln>
+        </p:spPr>
+      </p:sp>
+      <p:sp>
+        <p:nvSpPr>
+          <p:cNvPr id="3" name="">
+            <a:extLst xmlns:a="http://schemas.openxmlformats.org/drawingml/2006/main">
+              <a:ext uri="{FF2B5EF4-FFF2-40B4-BE49-F238E27FC236}">
+                <a16:creationId xmlns:a16="http://schemas.microsoft.com/office/drawing/2014/main" id="{9C3ABDA7-CD68-4F7F-A744-BFDA97AB0BE7}"/>
+              </a:ext>
+            </a:extLst>
+          </p:cNvPr>
+          <p:cNvSpPr>
+            <a:spLocks xmlns:a="http://schemas.openxmlformats.org/drawingml/2006/main" noGrp="1"/>
+          </p:cNvSpPr>
+          <p:nvPr/>
+        </p:nvSpPr>
+        <p:spPr>
+          <a:xfrm xmlns:a="http://schemas.openxmlformats.org/drawingml/2006/main">
+            <a:off x="552450" y="800100"/>
+            <a:ext cx="2476500" cy="209550"/>
+          </a:xfrm>
+          <a:prstGeom xmlns:a="http://schemas.openxmlformats.org/drawingml/2006/main" prst="rect">
+            <a:avLst/>
+          </a:prstGeom>
+          <a:solidFill xmlns:a="http://schemas.openxmlformats.org/drawingml/2006/main">
+            <a:srgbClr val="000000">
+              <a:alpha val="0"/>
+            </a:srgbClr>
+          </a:solidFill>
+          <a:ln xmlns:a="http://schemas.openxmlformats.org/drawingml/2006/main" w="0">
+            <a:solidFill>
+              <a:srgbClr val="000000">
+                <a:alpha val="0"/>
+              </a:srgbClr>
+            </a:solidFill>
+            <a:prstDash val="solid"/>
+          </a:ln>
+        </p:spPr>
+        <p:txBody>
+          <a:bodyPr xmlns:a="http://schemas.openxmlformats.org/drawingml/2006/main" lIns="0" tIns="0" rIns="0" bIns="0" anchor="t"/>
+          <a:lstStyle xmlns:a="http://schemas.openxmlformats.org/drawingml/2006/main"/>
+          <a:p xmlns:a="http://schemas.openxmlformats.org/drawingml/2006/main">
+            <a:pPr algn="l">
+              <a:defRPr sz="1125" b="1">
+                <a:solidFill>
+                  <a:srgbClr val="F3C8B3"/>
+                </a:solidFill>
+                <a:latin typeface="Aptos Mono"/>
+                <a:ea typeface="Aptos Mono"/>
+                <a:cs typeface="Aptos Mono"/>
+              </a:defRPr>
+            </a:pPr>
+            <a:r>
+              <a:rPr sz="1125" b="1">
+                <a:solidFill>
+                  <a:srgbClr val="F3C8B3"/>
+                </a:solidFill>
+                <a:latin typeface="Aptos Mono"/>
+                <a:ea typeface="Aptos Mono"/>
+                <a:cs typeface="Aptos Mono"/>
+              </a:rPr>
+              <a:t>CIERRE</a:t>
+            </a:r>
+          </a:p>
+        </p:txBody>
+      </p:sp>
+      <p:sp>
+        <p:nvSpPr>
+          <p:cNvPr id="4" name="">
+            <a:extLst xmlns:a="http://schemas.openxmlformats.org/drawingml/2006/main">
+              <a:ext uri="{FF2B5EF4-FFF2-40B4-BE49-F238E27FC236}">
+                <a16:creationId xmlns:a16="http://schemas.microsoft.com/office/drawing/2014/main" id="{D02E575A-26F6-4B0B-8D35-367C0299D3B5}"/>
+              </a:ext>
+            </a:extLst>
+          </p:cNvPr>
+          <p:cNvSpPr>
+            <a:spLocks xmlns:a="http://schemas.openxmlformats.org/drawingml/2006/main" noGrp="1"/>
+          </p:cNvSpPr>
+          <p:nvPr/>
+        </p:nvSpPr>
+        <p:spPr>
+          <a:xfrm xmlns:a="http://schemas.openxmlformats.org/drawingml/2006/main">
+            <a:off x="552450" y="1390650"/>
+            <a:ext cx="5334000" cy="1619250"/>
+          </a:xfrm>
+          <a:prstGeom xmlns:a="http://schemas.openxmlformats.org/drawingml/2006/main" prst="rect">
+            <a:avLst/>
+          </a:prstGeom>
+          <a:solidFill xmlns:a="http://schemas.openxmlformats.org/drawingml/2006/main">
+            <a:srgbClr val="000000">
+              <a:alpha val="0"/>
+            </a:srgbClr>
+          </a:solidFill>
+          <a:ln xmlns:a="http://schemas.openxmlformats.org/drawingml/2006/main" w="0">
+            <a:solidFill>
+              <a:srgbClr val="000000">
+                <a:alpha val="0"/>
+              </a:srgbClr>
+            </a:solidFill>
+            <a:prstDash val="solid"/>
+          </a:ln>
+        </p:spPr>
+        <p:txBody>
+          <a:bodyPr xmlns:a="http://schemas.openxmlformats.org/drawingml/2006/main" lIns="0" tIns="0" rIns="0" bIns="0" anchor="t"/>
+          <a:lstStyle xmlns:a="http://schemas.openxmlformats.org/drawingml/2006/main"/>
+          <a:p xmlns:a="http://schemas.openxmlformats.org/drawingml/2006/main">
+            <a:pPr algn="l">
+              <a:defRPr sz="3000" b="1">
+                <a:solidFill>
+                  <a:srgbClr val="FFFDF8"/>
+                </a:solidFill>
+                <a:latin typeface="Aptos Display"/>
+                <a:ea typeface="Aptos Display"/>
+                <a:cs typeface="Aptos Display"/>
+              </a:defRPr>
+            </a:pPr>
+            <a:r>
+              <a:rPr sz="3000" b="1">
+                <a:solidFill>
+                  <a:srgbClr val="FFFDF8"/>
+                </a:solidFill>
+                <a:latin typeface="Aptos Display"/>
+                <a:ea typeface="Aptos Display"/>
+                <a:cs typeface="Aptos Display"/>
+              </a:rPr>
+              <a:t>Cloud is about how computing is done, not where.</a:t>
+            </a:r>
+          </a:p>
+        </p:txBody>
+      </p:sp>
+      <p:sp>
+        <p:nvSpPr>
+          <p:cNvPr id="5" name="">
+            <a:extLst xmlns:a="http://schemas.openxmlformats.org/drawingml/2006/main">
+              <a:ext uri="{FF2B5EF4-FFF2-40B4-BE49-F238E27FC236}">
+                <a16:creationId xmlns:a16="http://schemas.microsoft.com/office/drawing/2014/main" id="{7D9A4B29-0CD9-414B-AA63-47FCF7578B47}"/>
+              </a:ext>
+            </a:extLst>
+          </p:cNvPr>
+          <p:cNvSpPr>
+            <a:spLocks xmlns:a="http://schemas.openxmlformats.org/drawingml/2006/main" noGrp="1"/>
+          </p:cNvSpPr>
+          <p:nvPr/>
+        </p:nvSpPr>
+        <p:spPr>
+          <a:xfrm xmlns:a="http://schemas.openxmlformats.org/drawingml/2006/main">
+            <a:off x="552450" y="3390900"/>
+            <a:ext cx="4953000" cy="1143000"/>
+          </a:xfrm>
+          <a:prstGeom xmlns:a="http://schemas.openxmlformats.org/drawingml/2006/main" prst="rect">
+            <a:avLst/>
+          </a:prstGeom>
+          <a:solidFill xmlns:a="http://schemas.openxmlformats.org/drawingml/2006/main">
+            <a:srgbClr val="000000">
+              <a:alpha val="0"/>
+            </a:srgbClr>
+          </a:solidFill>
+          <a:ln xmlns:a="http://schemas.openxmlformats.org/drawingml/2006/main" w="0">
+            <a:solidFill>
+              <a:srgbClr val="000000">
+                <a:alpha val="0"/>
+              </a:srgbClr>
+            </a:solidFill>
+            <a:prstDash val="solid"/>
+          </a:ln>
+        </p:spPr>
+        <p:txBody>
+          <a:bodyPr xmlns:a="http://schemas.openxmlformats.org/drawingml/2006/main" lIns="0" tIns="0" rIns="0" bIns="0" anchor="t"/>
+          <a:lstStyle xmlns:a="http://schemas.openxmlformats.org/drawingml/2006/main"/>
+          <a:p xmlns:a="http://schemas.openxmlformats.org/drawingml/2006/main">
+            <a:pPr algn="l">
+              <a:defRPr sz="1800" b="0">
+                <a:solidFill>
+                  <a:srgbClr val="D9E2EC"/>
+                </a:solidFill>
+                <a:latin typeface="Aptos"/>
+                <a:ea typeface="Aptos"/>
+                <a:cs typeface="Aptos"/>
+              </a:defRPr>
+            </a:pPr>
+            <a:r>
+              <a:rPr sz="1800" b="0">
+                <a:solidFill>
+                  <a:srgbClr val="D9E2EC"/>
+                </a:solidFill>
+                <a:latin typeface="Aptos"/>
+                <a:ea typeface="Aptos"/>
+                <a:cs typeface="Aptos"/>
+              </a:rPr>
+              <a:t>La conclusión no es nostalgia por el datacenter. La conclusión es que la arquitectura de IA vuelve a ser una decisión económica, no solo tecnológica.</a:t>
+            </a:r>
+          </a:p>
+        </p:txBody>
+      </p:sp>
+      <p:sp>
+        <p:nvSpPr>
+          <p:cNvPr id="6" name="">
+            <a:extLst xmlns:a="http://schemas.openxmlformats.org/drawingml/2006/main">
+              <a:ext uri="{FF2B5EF4-FFF2-40B4-BE49-F238E27FC236}">
+                <a16:creationId xmlns:a16="http://schemas.microsoft.com/office/drawing/2014/main" id="{84937AA9-5C62-474E-91B1-BBFD34E61D61}"/>
+              </a:ext>
+            </a:extLst>
+          </p:cNvPr>
+          <p:cNvSpPr>
+            <a:spLocks xmlns:a="http://schemas.openxmlformats.org/drawingml/2006/main" noGrp="1"/>
+          </p:cNvSpPr>
+          <p:nvPr/>
+        </p:nvSpPr>
+        <p:spPr>
+          <a:xfrm xmlns:a="http://schemas.openxmlformats.org/drawingml/2006/main">
+            <a:off x="552450" y="5143500"/>
+            <a:ext cx="4953000" cy="419100"/>
+          </a:xfrm>
+          <a:prstGeom xmlns:a="http://schemas.openxmlformats.org/drawingml/2006/main" prst="rect">
+            <a:avLst/>
+          </a:prstGeom>
+          <a:solidFill xmlns:a="http://schemas.openxmlformats.org/drawingml/2006/main">
+            <a:srgbClr val="000000">
+              <a:alpha val="0"/>
+            </a:srgbClr>
+          </a:solidFill>
+          <a:ln xmlns:a="http://schemas.openxmlformats.org/drawingml/2006/main" w="0">
+            <a:solidFill>
+              <a:srgbClr val="000000">
+                <a:alpha val="0"/>
+              </a:srgbClr>
+            </a:solidFill>
+            <a:prstDash val="solid"/>
+          </a:ln>
+        </p:spPr>
+        <p:txBody>
+          <a:bodyPr xmlns:a="http://schemas.openxmlformats.org/drawingml/2006/main" lIns="0" tIns="0" rIns="0" bIns="0" anchor="t"/>
+          <a:lstStyle xmlns:a="http://schemas.openxmlformats.org/drawingml/2006/main"/>
+          <a:p xmlns:a="http://schemas.openxmlformats.org/drawingml/2006/main">
+            <a:pPr algn="l">
+              <a:defRPr sz="1200" b="1">
+                <a:solidFill>
+                  <a:srgbClr val="F3C8B3"/>
+                </a:solidFill>
+                <a:latin typeface="Aptos"/>
+                <a:ea typeface="Aptos"/>
+                <a:cs typeface="Aptos"/>
+              </a:defRPr>
+            </a:pPr>
+            <a:r>
+              <a:rPr sz="1200" b="1">
+                <a:solidFill>
+                  <a:srgbClr val="F3C8B3"/>
+                </a:solidFill>
+                <a:latin typeface="Aptos"/>
+                <a:ea typeface="Aptos"/>
+                <a:cs typeface="Aptos"/>
+              </a:rPr>
+              <a:t>Paul Maritz, sobre cloud computing</a:t>
+            </a:r>
+          </a:p>
+        </p:txBody>
+      </p:sp>
+      <p:sp>
+        <p:nvSpPr>
+          <p:cNvPr id="7" name="">
+            <a:extLst xmlns:a="http://schemas.openxmlformats.org/drawingml/2006/main">
+              <a:ext uri="{FF2B5EF4-FFF2-40B4-BE49-F238E27FC236}">
+                <a16:creationId xmlns:a16="http://schemas.microsoft.com/office/drawing/2014/main" id="{EBB9DACD-6854-453E-B0B7-D1782B3CFEE1}"/>
+              </a:ext>
+            </a:extLst>
+          </p:cNvPr>
+          <p:cNvSpPr>
+            <a:spLocks xmlns:a="http://schemas.openxmlformats.org/drawingml/2006/main" noGrp="1"/>
+          </p:cNvSpPr>
+          <p:nvPr/>
+        </p:nvSpPr>
+        <p:spPr>
+          <a:xfrm xmlns:a="http://schemas.openxmlformats.org/drawingml/2006/main">
+            <a:off x="552450" y="6534150"/>
+            <a:ext cx="10477500" cy="171450"/>
+          </a:xfrm>
+          <a:prstGeom xmlns:a="http://schemas.openxmlformats.org/drawingml/2006/main" prst="rect">
+            <a:avLst/>
+          </a:prstGeom>
+          <a:solidFill xmlns:a="http://schemas.openxmlformats.org/drawingml/2006/main">
+            <a:srgbClr val="000000">
+              <a:alpha val="0"/>
+            </a:srgbClr>
+          </a:solidFill>
+          <a:ln xmlns:a="http://schemas.openxmlformats.org/drawingml/2006/main" w="0">
+            <a:solidFill>
+              <a:srgbClr val="000000">
+                <a:alpha val="0"/>
+              </a:srgbClr>
+            </a:solidFill>
+            <a:prstDash val="solid"/>
+          </a:ln>
+        </p:spPr>
+        <p:txBody>
+          <a:bodyPr xmlns:a="http://schemas.openxmlformats.org/drawingml/2006/main" lIns="0" tIns="0" rIns="0" bIns="0" anchor="t"/>
+          <a:lstStyle xmlns:a="http://schemas.openxmlformats.org/drawingml/2006/main"/>
+          <a:p xmlns:a="http://schemas.openxmlformats.org/drawingml/2006/main">
+            <a:pPr algn="l">
+              <a:defRPr sz="825" b="0">
+                <a:solidFill>
+                  <a:srgbClr val="6B7280"/>
+                </a:solidFill>
+                <a:latin typeface="Aptos"/>
+                <a:ea typeface="Aptos"/>
+                <a:cs typeface="Aptos"/>
+              </a:defRPr>
+            </a:pPr>
+            <a:r>
+              <a:rPr sz="825" b="0">
+                <a:solidFill>
+                  <a:srgbClr val="6B7280"/>
+                </a:solidFill>
+                <a:latin typeface="Aptos"/>
+                <a:ea typeface="Aptos"/>
+                <a:cs typeface="Aptos"/>
+              </a:rPr>
+              <a:t>Fuente: VMware Tanzu, 2018-04-29.</a:t>
+            </a:r>
+          </a:p>
+        </p:txBody>
+      </p:sp>
+      <p:sp>
+        <p:nvSpPr>
+          <p:cNvPr id="8" name="">
+            <a:extLst xmlns:a="http://schemas.openxmlformats.org/drawingml/2006/main">
+              <a:ext uri="{FF2B5EF4-FFF2-40B4-BE49-F238E27FC236}">
+                <a16:creationId xmlns:a16="http://schemas.microsoft.com/office/drawing/2014/main" id="{2AF0B974-487D-4FC6-A186-F8BAE7191E79}"/>
+              </a:ext>
+            </a:extLst>
+          </p:cNvPr>
+          <p:cNvSpPr>
+            <a:spLocks xmlns:a="http://schemas.openxmlformats.org/drawingml/2006/main" noGrp="1"/>
+          </p:cNvSpPr>
+          <p:nvPr/>
+        </p:nvSpPr>
+        <p:spPr>
+          <a:xfrm xmlns:a="http://schemas.openxmlformats.org/drawingml/2006/main">
+            <a:off x="11334750" y="6496050"/>
+            <a:ext cx="381000" cy="228600"/>
+          </a:xfrm>
+          <a:prstGeom xmlns:a="http://schemas.openxmlformats.org/drawingml/2006/main" prst="rect">
+            <a:avLst/>
+          </a:prstGeom>
+          <a:solidFill xmlns:a="http://schemas.openxmlformats.org/drawingml/2006/main">
+            <a:srgbClr val="000000">
+              <a:alpha val="0"/>
+            </a:srgbClr>
+          </a:solidFill>
+          <a:ln xmlns:a="http://schemas.openxmlformats.org/drawingml/2006/main" w="0">
+            <a:solidFill>
+              <a:srgbClr val="000000">
+                <a:alpha val="0"/>
+              </a:srgbClr>
+            </a:solidFill>
+            <a:prstDash val="solid"/>
+          </a:ln>
+        </p:spPr>
+        <p:txBody>
+          <a:bodyPr xmlns:a="http://schemas.openxmlformats.org/drawingml/2006/main" lIns="0" tIns="0" rIns="0" bIns="0" anchor="t"/>
+          <a:lstStyle xmlns:a="http://schemas.openxmlformats.org/drawingml/2006/main"/>
+          <a:p xmlns:a="http://schemas.openxmlformats.org/drawingml/2006/main">
+            <a:pPr algn="r">
+              <a:defRPr sz="900" b="1">
+                <a:solidFill>
+                  <a:srgbClr val="C75C2A"/>
+                </a:solidFill>
+                <a:latin typeface="Aptos Mono"/>
+                <a:ea typeface="Aptos Mono"/>
+                <a:cs typeface="Aptos Mono"/>
+              </a:defRPr>
+            </a:pPr>
+            <a:r>
+              <a:rPr sz="900" b="1">
+                <a:solidFill>
+                  <a:srgbClr val="C75C2A"/>
+                </a:solidFill>
+                <a:latin typeface="Aptos Mono"/>
+                <a:ea typeface="Aptos Mono"/>
+                <a:cs typeface="Aptos Mono"/>
+              </a:rPr>
+              <a:t>10</a:t>
+            </a:r>
+          </a:p>
+        </p:txBody>
+      </p:sp>
+    </p:spTree>
+    <p:extLst>
+      <p:ext uri="{BB962C8B-B14F-4D97-AF65-F5344CB8AC3E}">
+        <p14:creationId xmlns:p14="http://schemas.microsoft.com/office/powerpoint/2010/main" val="1989146550"/>
       </p:ext>
     </p:extLst>
   </p:cSld>
@@ -3232,7 +3767,7 @@
           <p:cNvPr id="1" name="">
             <a:extLst xmlns:a="http://schemas.openxmlformats.org/drawingml/2006/main">
               <a:ext uri="{FF2B5EF4-FFF2-40B4-BE49-F238E27FC236}">
-                <a16:creationId xmlns:a16="http://schemas.microsoft.com/office/drawing/2014/main" id="{878002B8-1424-4613-BF3A-0DD45D36A723}"/>
+                <a16:creationId xmlns:a16="http://schemas.microsoft.com/office/drawing/2014/main" id="{026C9185-497F-49C3-B9DF-17794A09BE64}"/>
               </a:ext>
             </a:extLst>
           </p:cNvPr>
@@ -3265,7 +3800,7 @@
           <p:cNvPr id="2" name="">
             <a:extLst xmlns:a="http://schemas.openxmlformats.org/drawingml/2006/main">
               <a:ext uri="{FF2B5EF4-FFF2-40B4-BE49-F238E27FC236}">
-                <a16:creationId xmlns:a16="http://schemas.microsoft.com/office/drawing/2014/main" id="{1EAFB73E-A42C-4801-90A9-BBE574E9093A}"/>
+                <a16:creationId xmlns:a16="http://schemas.microsoft.com/office/drawing/2014/main" id="{43F41A50-4AE8-4787-8F20-5671721D74E3}"/>
               </a:ext>
             </a:extLst>
           </p:cNvPr>
@@ -3298,7 +3833,7 @@
           <p:cNvPr id="3" name="">
             <a:extLst xmlns:a="http://schemas.openxmlformats.org/drawingml/2006/main">
               <a:ext uri="{FF2B5EF4-FFF2-40B4-BE49-F238E27FC236}">
-                <a16:creationId xmlns:a16="http://schemas.microsoft.com/office/drawing/2014/main" id="{C7D8CF90-1687-47A6-A283-98479B712C52}"/>
+                <a16:creationId xmlns:a16="http://schemas.microsoft.com/office/drawing/2014/main" id="{CD694FB4-E87E-4687-905B-229E1671DBEA}"/>
               </a:ext>
             </a:extLst>
           </p:cNvPr>
@@ -3352,7 +3887,7 @@
                 <a:ea typeface="Aptos Mono"/>
                 <a:cs typeface="Aptos Mono"/>
               </a:rPr>
-              <a:t>CONTEXT0</a:t>
+              <a:t>CONTEXTO</a:t>
             </a:r>
           </a:p>
         </p:txBody>
@@ -3362,7 +3897,7 @@
           <p:cNvPr id="4" name="">
             <a:extLst xmlns:a="http://schemas.openxmlformats.org/drawingml/2006/main">
               <a:ext uri="{FF2B5EF4-FFF2-40B4-BE49-F238E27FC236}">
-                <a16:creationId xmlns:a16="http://schemas.microsoft.com/office/drawing/2014/main" id="{264F179E-1112-4FC7-9353-8DC7087F7E6A}"/>
+                <a16:creationId xmlns:a16="http://schemas.microsoft.com/office/drawing/2014/main" id="{3546918D-4BC0-425A-9172-5DEC0A5B7924}"/>
               </a:ext>
             </a:extLst>
           </p:cNvPr>
@@ -3416,7 +3951,7 @@
                 <a:ea typeface="Aptos Display"/>
                 <a:cs typeface="Aptos Display"/>
               </a:rPr>
-              <a:t>La nube gano porque resolvia problemas reales que el datacenter propio hacia mas caros y lentos.</a:t>
+              <a:t>La nube ganó porque resolvía problemas reales que el datacenter propio hacía más caros y lentos.</a:t>
             </a:r>
           </a:p>
         </p:txBody>
@@ -3426,7 +3961,7 @@
           <p:cNvPr id="5" name="">
             <a:extLst xmlns:a="http://schemas.openxmlformats.org/drawingml/2006/main">
               <a:ext uri="{FF2B5EF4-FFF2-40B4-BE49-F238E27FC236}">
-                <a16:creationId xmlns:a16="http://schemas.microsoft.com/office/drawing/2014/main" id="{8381B516-DFE3-4A4A-B110-15F6CE35BA26}"/>
+                <a16:creationId xmlns:a16="http://schemas.microsoft.com/office/drawing/2014/main" id="{40958A15-7E0C-438E-BDE4-326962894A45}"/>
               </a:ext>
             </a:extLst>
           </p:cNvPr>
@@ -3459,7 +3994,7 @@
           <p:cNvPr id="6" name="">
             <a:extLst xmlns:a="http://schemas.openxmlformats.org/drawingml/2006/main">
               <a:ext uri="{FF2B5EF4-FFF2-40B4-BE49-F238E27FC236}">
-                <a16:creationId xmlns:a16="http://schemas.microsoft.com/office/drawing/2014/main" id="{893CF7B2-3620-48BD-8A42-C3E392BD0733}"/>
+                <a16:creationId xmlns:a16="http://schemas.microsoft.com/office/drawing/2014/main" id="{07324EE9-A885-4600-8211-AA3DA9CAD8B2}"/>
               </a:ext>
             </a:extLst>
           </p:cNvPr>
@@ -3513,7 +4048,7 @@
                 <a:ea typeface="Aptos"/>
                 <a:cs typeface="Aptos"/>
               </a:rPr>
-              <a:t>Hace 10 anos</a:t>
+              <a:t>Hace 10 años</a:t>
             </a:r>
           </a:p>
         </p:txBody>
@@ -3523,7 +4058,7 @@
           <p:cNvPr id="7" name="">
             <a:extLst xmlns:a="http://schemas.openxmlformats.org/drawingml/2006/main">
               <a:ext uri="{FF2B5EF4-FFF2-40B4-BE49-F238E27FC236}">
-                <a16:creationId xmlns:a16="http://schemas.microsoft.com/office/drawing/2014/main" id="{F80194DB-DAAA-4B39-8DEE-4EB75BC9CBC7}"/>
+                <a16:creationId xmlns:a16="http://schemas.microsoft.com/office/drawing/2014/main" id="{0241D36E-EED1-4501-BFEF-3AA0FA325EEB}"/>
               </a:ext>
             </a:extLst>
           </p:cNvPr>
@@ -3556,7 +4091,7 @@
           <p:cNvPr id="8" name="">
             <a:extLst xmlns:a="http://schemas.openxmlformats.org/drawingml/2006/main">
               <a:ext uri="{FF2B5EF4-FFF2-40B4-BE49-F238E27FC236}">
-                <a16:creationId xmlns:a16="http://schemas.microsoft.com/office/drawing/2014/main" id="{6EE75960-BC06-4ED2-AF5F-0EC95D72E403}"/>
+                <a16:creationId xmlns:a16="http://schemas.microsoft.com/office/drawing/2014/main" id="{6B5A3497-EE9D-4FCE-892A-ABC49CD36541}"/>
               </a:ext>
             </a:extLst>
           </p:cNvPr>
@@ -3568,7 +4103,7 @@
         <p:spPr>
           <a:xfrm xmlns:a="http://schemas.openxmlformats.org/drawingml/2006/main">
             <a:off x="1009650" y="2724150"/>
-            <a:ext cx="2724150" cy="323850"/>
+            <a:ext cx="2724150" cy="514350"/>
           </a:xfrm>
           <a:prstGeom xmlns:a="http://schemas.openxmlformats.org/drawingml/2006/main" prst="rect">
             <a:avLst/>
@@ -3610,7 +4145,7 @@
                 <a:ea typeface="Aptos"/>
                 <a:cs typeface="Aptos"/>
               </a:rPr>
-              <a:t>Compra y renovacion de hardware.</a:t>
+              <a:t>Compra y renovación de hardware.</a:t>
             </a:r>
           </a:p>
         </p:txBody>
@@ -3620,18 +4155,18 @@
           <p:cNvPr id="9" name="">
             <a:extLst xmlns:a="http://schemas.openxmlformats.org/drawingml/2006/main">
               <a:ext uri="{FF2B5EF4-FFF2-40B4-BE49-F238E27FC236}">
-                <a16:creationId xmlns:a16="http://schemas.microsoft.com/office/drawing/2014/main" id="{498B26ED-84AB-468D-9793-07B5F2BA263A}"/>
-              </a:ext>
-            </a:extLst>
-          </p:cNvPr>
-          <p:cNvSpPr>
-            <a:spLocks xmlns:a="http://schemas.openxmlformats.org/drawingml/2006/main" noGrp="1"/>
-          </p:cNvSpPr>
-          <p:nvPr/>
-        </p:nvSpPr>
-        <p:spPr>
-          <a:xfrm xmlns:a="http://schemas.openxmlformats.org/drawingml/2006/main">
-            <a:off x="800100" y="3124200"/>
+                <a16:creationId xmlns:a16="http://schemas.microsoft.com/office/drawing/2014/main" id="{A9FBF2D2-3765-4409-B4AC-878E6CB84E25}"/>
+              </a:ext>
+            </a:extLst>
+          </p:cNvPr>
+          <p:cNvSpPr>
+            <a:spLocks xmlns:a="http://schemas.openxmlformats.org/drawingml/2006/main" noGrp="1"/>
+          </p:cNvSpPr>
+          <p:nvPr/>
+        </p:nvSpPr>
+        <p:spPr>
+          <a:xfrm xmlns:a="http://schemas.openxmlformats.org/drawingml/2006/main">
+            <a:off x="800100" y="3314700"/>
             <a:ext cx="95250" cy="95250"/>
           </a:xfrm>
           <a:prstGeom xmlns:a="http://schemas.openxmlformats.org/drawingml/2006/main" prst="rect">
@@ -3653,19 +4188,19 @@
           <p:cNvPr id="10" name="">
             <a:extLst xmlns:a="http://schemas.openxmlformats.org/drawingml/2006/main">
               <a:ext uri="{FF2B5EF4-FFF2-40B4-BE49-F238E27FC236}">
-                <a16:creationId xmlns:a16="http://schemas.microsoft.com/office/drawing/2014/main" id="{DD9E608C-3A5C-4DF6-B2D0-01F7237F2C28}"/>
-              </a:ext>
-            </a:extLst>
-          </p:cNvPr>
-          <p:cNvSpPr>
-            <a:spLocks xmlns:a="http://schemas.openxmlformats.org/drawingml/2006/main" noGrp="1"/>
-          </p:cNvSpPr>
-          <p:nvPr/>
-        </p:nvSpPr>
-        <p:spPr>
-          <a:xfrm xmlns:a="http://schemas.openxmlformats.org/drawingml/2006/main">
-            <a:off x="1009650" y="3048000"/>
-            <a:ext cx="2724150" cy="323850"/>
+                <a16:creationId xmlns:a16="http://schemas.microsoft.com/office/drawing/2014/main" id="{215AD9F2-9F40-47CF-94CA-E3EF86F3B502}"/>
+              </a:ext>
+            </a:extLst>
+          </p:cNvPr>
+          <p:cNvSpPr>
+            <a:spLocks xmlns:a="http://schemas.openxmlformats.org/drawingml/2006/main" noGrp="1"/>
+          </p:cNvSpPr>
+          <p:nvPr/>
+        </p:nvSpPr>
+        <p:spPr>
+          <a:xfrm xmlns:a="http://schemas.openxmlformats.org/drawingml/2006/main">
+            <a:off x="1009650" y="3238500"/>
+            <a:ext cx="2724150" cy="514350"/>
           </a:xfrm>
           <a:prstGeom xmlns:a="http://schemas.openxmlformats.org/drawingml/2006/main" prst="rect">
             <a:avLst/>
@@ -3717,18 +4252,18 @@
           <p:cNvPr id="11" name="">
             <a:extLst xmlns:a="http://schemas.openxmlformats.org/drawingml/2006/main">
               <a:ext uri="{FF2B5EF4-FFF2-40B4-BE49-F238E27FC236}">
-                <a16:creationId xmlns:a16="http://schemas.microsoft.com/office/drawing/2014/main" id="{726A416F-308C-4A6D-A855-06A513EA5164}"/>
-              </a:ext>
-            </a:extLst>
-          </p:cNvPr>
-          <p:cNvSpPr>
-            <a:spLocks xmlns:a="http://schemas.openxmlformats.org/drawingml/2006/main" noGrp="1"/>
-          </p:cNvSpPr>
-          <p:nvPr/>
-        </p:nvSpPr>
-        <p:spPr>
-          <a:xfrm xmlns:a="http://schemas.openxmlformats.org/drawingml/2006/main">
-            <a:off x="800100" y="3448050"/>
+                <a16:creationId xmlns:a16="http://schemas.microsoft.com/office/drawing/2014/main" id="{B0437A69-1C30-4403-AE7E-2346C9C687CA}"/>
+              </a:ext>
+            </a:extLst>
+          </p:cNvPr>
+          <p:cNvSpPr>
+            <a:spLocks xmlns:a="http://schemas.openxmlformats.org/drawingml/2006/main" noGrp="1"/>
+          </p:cNvSpPr>
+          <p:nvPr/>
+        </p:nvSpPr>
+        <p:spPr>
+          <a:xfrm xmlns:a="http://schemas.openxmlformats.org/drawingml/2006/main">
+            <a:off x="800100" y="3829050"/>
             <a:ext cx="95250" cy="95250"/>
           </a:xfrm>
           <a:prstGeom xmlns:a="http://schemas.openxmlformats.org/drawingml/2006/main" prst="rect">
@@ -3750,19 +4285,19 @@
           <p:cNvPr id="12" name="">
             <a:extLst xmlns:a="http://schemas.openxmlformats.org/drawingml/2006/main">
               <a:ext uri="{FF2B5EF4-FFF2-40B4-BE49-F238E27FC236}">
-                <a16:creationId xmlns:a16="http://schemas.microsoft.com/office/drawing/2014/main" id="{17B776A6-D8D2-4620-8F34-7EFBD7ED78CD}"/>
-              </a:ext>
-            </a:extLst>
-          </p:cNvPr>
-          <p:cNvSpPr>
-            <a:spLocks xmlns:a="http://schemas.openxmlformats.org/drawingml/2006/main" noGrp="1"/>
-          </p:cNvSpPr>
-          <p:nvPr/>
-        </p:nvSpPr>
-        <p:spPr>
-          <a:xfrm xmlns:a="http://schemas.openxmlformats.org/drawingml/2006/main">
-            <a:off x="1009650" y="3371850"/>
-            <a:ext cx="2724150" cy="323850"/>
+                <a16:creationId xmlns:a16="http://schemas.microsoft.com/office/drawing/2014/main" id="{4C850063-1CA8-42A0-9FD2-879AD94D175A}"/>
+              </a:ext>
+            </a:extLst>
+          </p:cNvPr>
+          <p:cNvSpPr>
+            <a:spLocks xmlns:a="http://schemas.openxmlformats.org/drawingml/2006/main" noGrp="1"/>
+          </p:cNvSpPr>
+          <p:nvPr/>
+        </p:nvSpPr>
+        <p:spPr>
+          <a:xfrm xmlns:a="http://schemas.openxmlformats.org/drawingml/2006/main">
+            <a:off x="1009650" y="3752850"/>
+            <a:ext cx="2724150" cy="514350"/>
           </a:xfrm>
           <a:prstGeom xmlns:a="http://schemas.openxmlformats.org/drawingml/2006/main" prst="rect">
             <a:avLst/>
@@ -3814,18 +4349,18 @@
           <p:cNvPr id="13" name="">
             <a:extLst xmlns:a="http://schemas.openxmlformats.org/drawingml/2006/main">
               <a:ext uri="{FF2B5EF4-FFF2-40B4-BE49-F238E27FC236}">
-                <a16:creationId xmlns:a16="http://schemas.microsoft.com/office/drawing/2014/main" id="{555DEB9A-CE19-450E-B30C-318C388C848A}"/>
-              </a:ext>
-            </a:extLst>
-          </p:cNvPr>
-          <p:cNvSpPr>
-            <a:spLocks xmlns:a="http://schemas.openxmlformats.org/drawingml/2006/main" noGrp="1"/>
-          </p:cNvSpPr>
-          <p:nvPr/>
-        </p:nvSpPr>
-        <p:spPr>
-          <a:xfrm xmlns:a="http://schemas.openxmlformats.org/drawingml/2006/main">
-            <a:off x="800100" y="3771900"/>
+                <a16:creationId xmlns:a16="http://schemas.microsoft.com/office/drawing/2014/main" id="{6A7A2AE4-325D-44D1-A42C-AE90E3AD7115}"/>
+              </a:ext>
+            </a:extLst>
+          </p:cNvPr>
+          <p:cNvSpPr>
+            <a:spLocks xmlns:a="http://schemas.openxmlformats.org/drawingml/2006/main" noGrp="1"/>
+          </p:cNvSpPr>
+          <p:nvPr/>
+        </p:nvSpPr>
+        <p:spPr>
+          <a:xfrm xmlns:a="http://schemas.openxmlformats.org/drawingml/2006/main">
+            <a:off x="800100" y="4343400"/>
             <a:ext cx="95250" cy="95250"/>
           </a:xfrm>
           <a:prstGeom xmlns:a="http://schemas.openxmlformats.org/drawingml/2006/main" prst="rect">
@@ -3847,19 +4382,19 @@
           <p:cNvPr id="14" name="">
             <a:extLst xmlns:a="http://schemas.openxmlformats.org/drawingml/2006/main">
               <a:ext uri="{FF2B5EF4-FFF2-40B4-BE49-F238E27FC236}">
-                <a16:creationId xmlns:a16="http://schemas.microsoft.com/office/drawing/2014/main" id="{B7D4E77D-CB70-4F88-800F-970E84C82552}"/>
-              </a:ext>
-            </a:extLst>
-          </p:cNvPr>
-          <p:cNvSpPr>
-            <a:spLocks xmlns:a="http://schemas.openxmlformats.org/drawingml/2006/main" noGrp="1"/>
-          </p:cNvSpPr>
-          <p:nvPr/>
-        </p:nvSpPr>
-        <p:spPr>
-          <a:xfrm xmlns:a="http://schemas.openxmlformats.org/drawingml/2006/main">
-            <a:off x="1009650" y="3695700"/>
-            <a:ext cx="2724150" cy="323850"/>
+                <a16:creationId xmlns:a16="http://schemas.microsoft.com/office/drawing/2014/main" id="{1B5D6512-14C4-49A9-A717-CAC654190BCC}"/>
+              </a:ext>
+            </a:extLst>
+          </p:cNvPr>
+          <p:cNvSpPr>
+            <a:spLocks xmlns:a="http://schemas.openxmlformats.org/drawingml/2006/main" noGrp="1"/>
+          </p:cNvSpPr>
+          <p:nvPr/>
+        </p:nvSpPr>
+        <p:spPr>
+          <a:xfrm xmlns:a="http://schemas.openxmlformats.org/drawingml/2006/main">
+            <a:off x="1009650" y="4267200"/>
+            <a:ext cx="2724150" cy="514350"/>
           </a:xfrm>
           <a:prstGeom xmlns:a="http://schemas.openxmlformats.org/drawingml/2006/main" prst="rect">
             <a:avLst/>
@@ -3901,7 +4436,7 @@
                 <a:ea typeface="Aptos"/>
                 <a:cs typeface="Aptos"/>
               </a:rPr>
-              <a:t>Escalabilidad mas lenta y disponibilidad mas costosa.</a:t>
+              <a:t>Escalabilidad más lenta y disponibilidad más costosa.</a:t>
             </a:r>
           </a:p>
         </p:txBody>
@@ -3911,7 +4446,7 @@
           <p:cNvPr id="15" name="">
             <a:extLst xmlns:a="http://schemas.openxmlformats.org/drawingml/2006/main">
               <a:ext uri="{FF2B5EF4-FFF2-40B4-BE49-F238E27FC236}">
-                <a16:creationId xmlns:a16="http://schemas.microsoft.com/office/drawing/2014/main" id="{A91D7F8D-8E50-4D92-A7CC-BA01F5BFFFC5}"/>
+                <a16:creationId xmlns:a16="http://schemas.microsoft.com/office/drawing/2014/main" id="{B8009888-6074-468C-8795-82F81979F3F9}"/>
               </a:ext>
             </a:extLst>
           </p:cNvPr>
@@ -3944,7 +4479,7 @@
           <p:cNvPr id="16" name="">
             <a:extLst xmlns:a="http://schemas.openxmlformats.org/drawingml/2006/main">
               <a:ext uri="{FF2B5EF4-FFF2-40B4-BE49-F238E27FC236}">
-                <a16:creationId xmlns:a16="http://schemas.microsoft.com/office/drawing/2014/main" id="{BF268CF9-953D-49D8-93DD-C68E125028A8}"/>
+                <a16:creationId xmlns:a16="http://schemas.microsoft.com/office/drawing/2014/main" id="{652DCFEC-009A-4F11-9425-F33474F0589C}"/>
               </a:ext>
             </a:extLst>
           </p:cNvPr>
@@ -4008,7 +4543,7 @@
           <p:cNvPr id="17" name="">
             <a:extLst xmlns:a="http://schemas.openxmlformats.org/drawingml/2006/main">
               <a:ext uri="{FF2B5EF4-FFF2-40B4-BE49-F238E27FC236}">
-                <a16:creationId xmlns:a16="http://schemas.microsoft.com/office/drawing/2014/main" id="{5151D5A4-A7B7-4684-A393-D54ED3A55A80}"/>
+                <a16:creationId xmlns:a16="http://schemas.microsoft.com/office/drawing/2014/main" id="{21F66282-ACCF-475F-BE52-7D4135DA8351}"/>
               </a:ext>
             </a:extLst>
           </p:cNvPr>
@@ -4041,7 +4576,7 @@
           <p:cNvPr id="18" name="">
             <a:extLst xmlns:a="http://schemas.openxmlformats.org/drawingml/2006/main">
               <a:ext uri="{FF2B5EF4-FFF2-40B4-BE49-F238E27FC236}">
-                <a16:creationId xmlns:a16="http://schemas.microsoft.com/office/drawing/2014/main" id="{7A26C314-39EE-4984-A3A9-9345DD676DAD}"/>
+                <a16:creationId xmlns:a16="http://schemas.microsoft.com/office/drawing/2014/main" id="{A838DF75-2B3A-4D88-A80A-22D7C9280829}"/>
               </a:ext>
             </a:extLst>
           </p:cNvPr>
@@ -4053,7 +4588,7 @@
         <p:spPr>
           <a:xfrm xmlns:a="http://schemas.openxmlformats.org/drawingml/2006/main">
             <a:off x="4705350" y="2724150"/>
-            <a:ext cx="2724150" cy="323850"/>
+            <a:ext cx="2724150" cy="514350"/>
           </a:xfrm>
           <a:prstGeom xmlns:a="http://schemas.openxmlformats.org/drawingml/2006/main" prst="rect">
             <a:avLst/>
@@ -4095,7 +4630,7 @@
                 <a:ea typeface="Aptos"/>
                 <a:cs typeface="Aptos"/>
               </a:rPr>
-              <a:t>Elasticidad y provisioning rapido.</a:t>
+              <a:t>Elasticidad y provisioning rápido.</a:t>
             </a:r>
           </a:p>
         </p:txBody>
@@ -4105,18 +4640,18 @@
           <p:cNvPr id="19" name="">
             <a:extLst xmlns:a="http://schemas.openxmlformats.org/drawingml/2006/main">
               <a:ext uri="{FF2B5EF4-FFF2-40B4-BE49-F238E27FC236}">
-                <a16:creationId xmlns:a16="http://schemas.microsoft.com/office/drawing/2014/main" id="{71C670DE-5722-4DCD-B40E-79ACF1E85109}"/>
-              </a:ext>
-            </a:extLst>
-          </p:cNvPr>
-          <p:cNvSpPr>
-            <a:spLocks xmlns:a="http://schemas.openxmlformats.org/drawingml/2006/main" noGrp="1"/>
-          </p:cNvSpPr>
-          <p:nvPr/>
-        </p:nvSpPr>
-        <p:spPr>
-          <a:xfrm xmlns:a="http://schemas.openxmlformats.org/drawingml/2006/main">
-            <a:off x="4495800" y="3124200"/>
+                <a16:creationId xmlns:a16="http://schemas.microsoft.com/office/drawing/2014/main" id="{BF55D1EB-19D5-42AF-B049-ABFA4A007D2F}"/>
+              </a:ext>
+            </a:extLst>
+          </p:cNvPr>
+          <p:cNvSpPr>
+            <a:spLocks xmlns:a="http://schemas.openxmlformats.org/drawingml/2006/main" noGrp="1"/>
+          </p:cNvSpPr>
+          <p:nvPr/>
+        </p:nvSpPr>
+        <p:spPr>
+          <a:xfrm xmlns:a="http://schemas.openxmlformats.org/drawingml/2006/main">
+            <a:off x="4495800" y="3314700"/>
             <a:ext cx="95250" cy="95250"/>
           </a:xfrm>
           <a:prstGeom xmlns:a="http://schemas.openxmlformats.org/drawingml/2006/main" prst="rect">
@@ -4138,19 +4673,19 @@
           <p:cNvPr id="20" name="">
             <a:extLst xmlns:a="http://schemas.openxmlformats.org/drawingml/2006/main">
               <a:ext uri="{FF2B5EF4-FFF2-40B4-BE49-F238E27FC236}">
-                <a16:creationId xmlns:a16="http://schemas.microsoft.com/office/drawing/2014/main" id="{A4FCC5A6-D4A6-4E37-83C4-16E2DD5C2F9C}"/>
-              </a:ext>
-            </a:extLst>
-          </p:cNvPr>
-          <p:cNvSpPr>
-            <a:spLocks xmlns:a="http://schemas.openxmlformats.org/drawingml/2006/main" noGrp="1"/>
-          </p:cNvSpPr>
-          <p:nvPr/>
-        </p:nvSpPr>
-        <p:spPr>
-          <a:xfrm xmlns:a="http://schemas.openxmlformats.org/drawingml/2006/main">
-            <a:off x="4705350" y="3048000"/>
-            <a:ext cx="2724150" cy="323850"/>
+                <a16:creationId xmlns:a16="http://schemas.microsoft.com/office/drawing/2014/main" id="{43DA2451-ADB6-44AD-B28E-08B92331458D}"/>
+              </a:ext>
+            </a:extLst>
+          </p:cNvPr>
+          <p:cNvSpPr>
+            <a:spLocks xmlns:a="http://schemas.openxmlformats.org/drawingml/2006/main" noGrp="1"/>
+          </p:cNvSpPr>
+          <p:nvPr/>
+        </p:nvSpPr>
+        <p:spPr>
+          <a:xfrm xmlns:a="http://schemas.openxmlformats.org/drawingml/2006/main">
+            <a:off x="4705350" y="3238500"/>
+            <a:ext cx="2724150" cy="514350"/>
           </a:xfrm>
           <a:prstGeom xmlns:a="http://schemas.openxmlformats.org/drawingml/2006/main" prst="rect">
             <a:avLst/>
@@ -4192,7 +4727,7 @@
                 <a:ea typeface="Aptos"/>
                 <a:cs typeface="Aptos"/>
               </a:rPr>
-              <a:t>Menos friccion operativa.</a:t>
+              <a:t>Menos fricción operativa.</a:t>
             </a:r>
           </a:p>
         </p:txBody>
@@ -4202,18 +4737,18 @@
           <p:cNvPr id="21" name="">
             <a:extLst xmlns:a="http://schemas.openxmlformats.org/drawingml/2006/main">
               <a:ext uri="{FF2B5EF4-FFF2-40B4-BE49-F238E27FC236}">
-                <a16:creationId xmlns:a16="http://schemas.microsoft.com/office/drawing/2014/main" id="{650D92C1-9889-4C90-BC0D-F01407FC1A9A}"/>
-              </a:ext>
-            </a:extLst>
-          </p:cNvPr>
-          <p:cNvSpPr>
-            <a:spLocks xmlns:a="http://schemas.openxmlformats.org/drawingml/2006/main" noGrp="1"/>
-          </p:cNvSpPr>
-          <p:nvPr/>
-        </p:nvSpPr>
-        <p:spPr>
-          <a:xfrm xmlns:a="http://schemas.openxmlformats.org/drawingml/2006/main">
-            <a:off x="4495800" y="3448050"/>
+                <a16:creationId xmlns:a16="http://schemas.microsoft.com/office/drawing/2014/main" id="{092EF4DC-CC7D-4B86-88C7-29DA05D901E8}"/>
+              </a:ext>
+            </a:extLst>
+          </p:cNvPr>
+          <p:cNvSpPr>
+            <a:spLocks xmlns:a="http://schemas.openxmlformats.org/drawingml/2006/main" noGrp="1"/>
+          </p:cNvSpPr>
+          <p:nvPr/>
+        </p:nvSpPr>
+        <p:spPr>
+          <a:xfrm xmlns:a="http://schemas.openxmlformats.org/drawingml/2006/main">
+            <a:off x="4495800" y="3829050"/>
             <a:ext cx="95250" cy="95250"/>
           </a:xfrm>
           <a:prstGeom xmlns:a="http://schemas.openxmlformats.org/drawingml/2006/main" prst="rect">
@@ -4235,19 +4770,19 @@
           <p:cNvPr id="22" name="">
             <a:extLst xmlns:a="http://schemas.openxmlformats.org/drawingml/2006/main">
               <a:ext uri="{FF2B5EF4-FFF2-40B4-BE49-F238E27FC236}">
-                <a16:creationId xmlns:a16="http://schemas.microsoft.com/office/drawing/2014/main" id="{180AE352-8833-434D-9E20-CDB4C9070F16}"/>
-              </a:ext>
-            </a:extLst>
-          </p:cNvPr>
-          <p:cNvSpPr>
-            <a:spLocks xmlns:a="http://schemas.openxmlformats.org/drawingml/2006/main" noGrp="1"/>
-          </p:cNvSpPr>
-          <p:nvPr/>
-        </p:nvSpPr>
-        <p:spPr>
-          <a:xfrm xmlns:a="http://schemas.openxmlformats.org/drawingml/2006/main">
-            <a:off x="4705350" y="3371850"/>
-            <a:ext cx="2724150" cy="323850"/>
+                <a16:creationId xmlns:a16="http://schemas.microsoft.com/office/drawing/2014/main" id="{DDD2973A-7CA7-45E6-9553-B0D25ED20CAB}"/>
+              </a:ext>
+            </a:extLst>
+          </p:cNvPr>
+          <p:cNvSpPr>
+            <a:spLocks xmlns:a="http://schemas.openxmlformats.org/drawingml/2006/main" noGrp="1"/>
+          </p:cNvSpPr>
+          <p:nvPr/>
+        </p:nvSpPr>
+        <p:spPr>
+          <a:xfrm xmlns:a="http://schemas.openxmlformats.org/drawingml/2006/main">
+            <a:off x="4705350" y="3752850"/>
+            <a:ext cx="2724150" cy="514350"/>
           </a:xfrm>
           <a:prstGeom xmlns:a="http://schemas.openxmlformats.org/drawingml/2006/main" prst="rect">
             <a:avLst/>
@@ -4299,18 +4834,18 @@
           <p:cNvPr id="23" name="">
             <a:extLst xmlns:a="http://schemas.openxmlformats.org/drawingml/2006/main">
               <a:ext uri="{FF2B5EF4-FFF2-40B4-BE49-F238E27FC236}">
-                <a16:creationId xmlns:a16="http://schemas.microsoft.com/office/drawing/2014/main" id="{C6206334-C91E-41CB-B167-96BE3AC12A18}"/>
-              </a:ext>
-            </a:extLst>
-          </p:cNvPr>
-          <p:cNvSpPr>
-            <a:spLocks xmlns:a="http://schemas.openxmlformats.org/drawingml/2006/main" noGrp="1"/>
-          </p:cNvSpPr>
-          <p:nvPr/>
-        </p:nvSpPr>
-        <p:spPr>
-          <a:xfrm xmlns:a="http://schemas.openxmlformats.org/drawingml/2006/main">
-            <a:off x="4495800" y="3771900"/>
+                <a16:creationId xmlns:a16="http://schemas.microsoft.com/office/drawing/2014/main" id="{CDDE18C2-A16A-4201-B858-05D607E4BDEB}"/>
+              </a:ext>
+            </a:extLst>
+          </p:cNvPr>
+          <p:cNvSpPr>
+            <a:spLocks xmlns:a="http://schemas.openxmlformats.org/drawingml/2006/main" noGrp="1"/>
+          </p:cNvSpPr>
+          <p:nvPr/>
+        </p:nvSpPr>
+        <p:spPr>
+          <a:xfrm xmlns:a="http://schemas.openxmlformats.org/drawingml/2006/main">
+            <a:off x="4495800" y="4343400"/>
             <a:ext cx="95250" cy="95250"/>
           </a:xfrm>
           <a:prstGeom xmlns:a="http://schemas.openxmlformats.org/drawingml/2006/main" prst="rect">
@@ -4332,19 +4867,19 @@
           <p:cNvPr id="24" name="">
             <a:extLst xmlns:a="http://schemas.openxmlformats.org/drawingml/2006/main">
               <a:ext uri="{FF2B5EF4-FFF2-40B4-BE49-F238E27FC236}">
-                <a16:creationId xmlns:a16="http://schemas.microsoft.com/office/drawing/2014/main" id="{1EE07B55-1A24-47D3-9E4C-382F76137370}"/>
-              </a:ext>
-            </a:extLst>
-          </p:cNvPr>
-          <p:cNvSpPr>
-            <a:spLocks xmlns:a="http://schemas.openxmlformats.org/drawingml/2006/main" noGrp="1"/>
-          </p:cNvSpPr>
-          <p:nvPr/>
-        </p:nvSpPr>
-        <p:spPr>
-          <a:xfrm xmlns:a="http://schemas.openxmlformats.org/drawingml/2006/main">
-            <a:off x="4705350" y="3695700"/>
-            <a:ext cx="2724150" cy="323850"/>
+                <a16:creationId xmlns:a16="http://schemas.microsoft.com/office/drawing/2014/main" id="{2D3B4838-1CD2-4B43-902B-DE8DACE5AA80}"/>
+              </a:ext>
+            </a:extLst>
+          </p:cNvPr>
+          <p:cNvSpPr>
+            <a:spLocks xmlns:a="http://schemas.openxmlformats.org/drawingml/2006/main" noGrp="1"/>
+          </p:cNvSpPr>
+          <p:nvPr/>
+        </p:nvSpPr>
+        <p:spPr>
+          <a:xfrm xmlns:a="http://schemas.openxmlformats.org/drawingml/2006/main">
+            <a:off x="4705350" y="4267200"/>
+            <a:ext cx="2724150" cy="514350"/>
           </a:xfrm>
           <a:prstGeom xmlns:a="http://schemas.openxmlformats.org/drawingml/2006/main" prst="rect">
             <a:avLst/>
@@ -4386,7 +4921,7 @@
                 <a:ea typeface="Aptos"/>
                 <a:cs typeface="Aptos"/>
               </a:rPr>
-              <a:t>Costo mas facil de aprobar frente a capex tradicional.</a:t>
+              <a:t>Costo más fácil de aprobar frente a capex tradicional.</a:t>
             </a:r>
           </a:p>
         </p:txBody>
@@ -4396,7 +4931,7 @@
           <p:cNvPr id="25" name="">
             <a:extLst xmlns:a="http://schemas.openxmlformats.org/drawingml/2006/main">
               <a:ext uri="{FF2B5EF4-FFF2-40B4-BE49-F238E27FC236}">
-                <a16:creationId xmlns:a16="http://schemas.microsoft.com/office/drawing/2014/main" id="{543A514E-8166-4A7C-8FC5-466BC8BFAD88}"/>
+                <a16:creationId xmlns:a16="http://schemas.microsoft.com/office/drawing/2014/main" id="{3A06542E-E30B-4061-BA5A-51FE744E449D}"/>
               </a:ext>
             </a:extLst>
           </p:cNvPr>
@@ -4429,7 +4964,7 @@
           <p:cNvPr id="26" name="">
             <a:extLst xmlns:a="http://schemas.openxmlformats.org/drawingml/2006/main">
               <a:ext uri="{FF2B5EF4-FFF2-40B4-BE49-F238E27FC236}">
-                <a16:creationId xmlns:a16="http://schemas.microsoft.com/office/drawing/2014/main" id="{9191C275-87DD-4AC2-8C54-01F3404FD9CC}"/>
+                <a16:creationId xmlns:a16="http://schemas.microsoft.com/office/drawing/2014/main" id="{C452EECE-9A27-4A9F-B8AA-CE314C92CB92}"/>
               </a:ext>
             </a:extLst>
           </p:cNvPr>
@@ -4493,7 +5028,7 @@
           <p:cNvPr id="27" name="">
             <a:extLst xmlns:a="http://schemas.openxmlformats.org/drawingml/2006/main">
               <a:ext uri="{FF2B5EF4-FFF2-40B4-BE49-F238E27FC236}">
-                <a16:creationId xmlns:a16="http://schemas.microsoft.com/office/drawing/2014/main" id="{1C3B3053-5B28-4F46-85CE-99B020B425C1}"/>
+                <a16:creationId xmlns:a16="http://schemas.microsoft.com/office/drawing/2014/main" id="{6D019183-2B66-4E4E-8A1D-95309021DCF0}"/>
               </a:ext>
             </a:extLst>
           </p:cNvPr>
@@ -4575,7 +5110,7 @@
                 <a:ea typeface="Aptos"/>
                 <a:cs typeface="Aptos"/>
               </a:rPr>
-              <a:t>Se impuso porque para muchisimos workloads era mejor en disponibilidad, velocidad y economia operativa.</a:t>
+              <a:t>Se impuso porque para muchísimos workloads era mejor en disponibilidad, velocidad y economía operativa.</a:t>
             </a:r>
           </a:p>
           <a:p xmlns:a="http://schemas.openxmlformats.org/drawingml/2006/main">
@@ -4603,7 +5138,7 @@
                 <a:ea typeface="Aptos"/>
                 <a:cs typeface="Aptos"/>
               </a:rPr>
-              <a:t>La charla no discute eso. Discute si los LLMs cambian la ecuacion para un subconjunto de casos.</a:t>
+              <a:t>La charla no discute eso. Discute si los LLMs cambian la ecuación para un subconjunto de casos.</a:t>
             </a:r>
           </a:p>
         </p:txBody>
@@ -4613,7 +5148,7 @@
           <p:cNvPr id="28" name="">
             <a:extLst xmlns:a="http://schemas.openxmlformats.org/drawingml/2006/main">
               <a:ext uri="{FF2B5EF4-FFF2-40B4-BE49-F238E27FC236}">
-                <a16:creationId xmlns:a16="http://schemas.microsoft.com/office/drawing/2014/main" id="{9D1503BA-64C8-4C4B-B082-9F30008FD15E}"/>
+                <a16:creationId xmlns:a16="http://schemas.microsoft.com/office/drawing/2014/main" id="{364BCAAF-026A-4122-8FBF-17FEC7E5B479}"/>
               </a:ext>
             </a:extLst>
           </p:cNvPr>
@@ -4667,7 +5202,7 @@
                 <a:ea typeface="Aptos"/>
                 <a:cs typeface="Aptos"/>
               </a:rPr>
-              <a:t>Punto de partida: el cloud shift fue racional y sigue siendolo para gran parte del software.</a:t>
+              <a:t>Punto de partida: el cloud shift fue racional y sigue siéndolo para gran parte del software.</a:t>
             </a:r>
           </a:p>
         </p:txBody>
@@ -4677,7 +5212,7 @@
           <p:cNvPr id="29" name="">
             <a:extLst xmlns:a="http://schemas.openxmlformats.org/drawingml/2006/main">
               <a:ext uri="{FF2B5EF4-FFF2-40B4-BE49-F238E27FC236}">
-                <a16:creationId xmlns:a16="http://schemas.microsoft.com/office/drawing/2014/main" id="{C7DF24D4-1CF3-4912-8574-D2D93F3CC50F}"/>
+                <a16:creationId xmlns:a16="http://schemas.microsoft.com/office/drawing/2014/main" id="{C9D92302-58DB-459F-888B-429DCF38FCC2}"/>
               </a:ext>
             </a:extLst>
           </p:cNvPr>
@@ -4739,7 +5274,7 @@
     </p:spTree>
     <p:extLst>
       <p:ext uri="{BB962C8B-B14F-4D97-AF65-F5344CB8AC3E}">
-        <p14:creationId xmlns:p14="http://schemas.microsoft.com/office/powerpoint/2010/main" val="1914164728"/>
+        <p14:creationId xmlns:p14="http://schemas.microsoft.com/office/powerpoint/2010/main" val="2139718219"/>
       </p:ext>
     </p:extLst>
   </p:cSld>
@@ -4763,7 +5298,7 @@
           <p:cNvPr id="1" name="">
             <a:extLst xmlns:a="http://schemas.openxmlformats.org/drawingml/2006/main">
               <a:ext uri="{FF2B5EF4-FFF2-40B4-BE49-F238E27FC236}">
-                <a16:creationId xmlns:a16="http://schemas.microsoft.com/office/drawing/2014/main" id="{CE59BF12-B185-4A2B-9AE9-65DB120B0FC3}"/>
+                <a16:creationId xmlns:a16="http://schemas.microsoft.com/office/drawing/2014/main" id="{294B17DC-BB8E-475C-8CC0-5A1EF2048093}"/>
               </a:ext>
             </a:extLst>
           </p:cNvPr>
@@ -4796,7 +5331,7 @@
           <p:cNvPr id="2" name="">
             <a:extLst xmlns:a="http://schemas.openxmlformats.org/drawingml/2006/main">
               <a:ext uri="{FF2B5EF4-FFF2-40B4-BE49-F238E27FC236}">
-                <a16:creationId xmlns:a16="http://schemas.microsoft.com/office/drawing/2014/main" id="{EFB74879-4BF3-4495-83C7-A2DA489DA08F}"/>
+                <a16:creationId xmlns:a16="http://schemas.microsoft.com/office/drawing/2014/main" id="{95E8B229-2BC9-46E7-B89F-A17861F2C836}"/>
               </a:ext>
             </a:extLst>
           </p:cNvPr>
@@ -4829,7 +5364,7 @@
           <p:cNvPr id="3" name="">
             <a:extLst xmlns:a="http://schemas.openxmlformats.org/drawingml/2006/main">
               <a:ext uri="{FF2B5EF4-FFF2-40B4-BE49-F238E27FC236}">
-                <a16:creationId xmlns:a16="http://schemas.microsoft.com/office/drawing/2014/main" id="{3C298298-AD2D-43D2-8169-B19A6A67E66B}"/>
+                <a16:creationId xmlns:a16="http://schemas.microsoft.com/office/drawing/2014/main" id="{F6B0CD14-2FFA-4060-B539-1AF5501B5558}"/>
               </a:ext>
             </a:extLst>
           </p:cNvPr>
@@ -4893,7 +5428,7 @@
           <p:cNvPr id="4" name="">
             <a:extLst xmlns:a="http://schemas.openxmlformats.org/drawingml/2006/main">
               <a:ext uri="{FF2B5EF4-FFF2-40B4-BE49-F238E27FC236}">
-                <a16:creationId xmlns:a16="http://schemas.microsoft.com/office/drawing/2014/main" id="{632C602F-39B2-48A7-94B8-6F065C58CEFB}"/>
+                <a16:creationId xmlns:a16="http://schemas.microsoft.com/office/drawing/2014/main" id="{CCEC2B44-2E53-4293-A149-534A398BF12E}"/>
               </a:ext>
             </a:extLst>
           </p:cNvPr>
@@ -4947,7 +5482,7 @@
                 <a:ea typeface="Aptos Display"/>
                 <a:cs typeface="Aptos Display"/>
               </a:rPr>
-              <a:t>Los LLMs introducen un gasto distinto: recurrente, probabilistico y facil de inflar sin darse cuenta.</a:t>
+              <a:t>Los LLMs introducen un gasto distinto: recurrente, probabilístico y fácil de inflar sin darse cuenta.</a:t>
             </a:r>
           </a:p>
         </p:txBody>
@@ -4957,7 +5492,7 @@
           <p:cNvPr id="5" name="">
             <a:extLst xmlns:a="http://schemas.openxmlformats.org/drawingml/2006/main">
               <a:ext uri="{FF2B5EF4-FFF2-40B4-BE49-F238E27FC236}">
-                <a16:creationId xmlns:a16="http://schemas.microsoft.com/office/drawing/2014/main" id="{3A8591F7-C26F-4975-907D-109BBC034949}"/>
+                <a16:creationId xmlns:a16="http://schemas.microsoft.com/office/drawing/2014/main" id="{6A01155C-E3DF-4A12-B551-0C798C5EB17D}"/>
               </a:ext>
             </a:extLst>
           </p:cNvPr>
@@ -4990,7 +5525,7 @@
           <p:cNvPr id="6" name="">
             <a:extLst xmlns:a="http://schemas.openxmlformats.org/drawingml/2006/main">
               <a:ext uri="{FF2B5EF4-FFF2-40B4-BE49-F238E27FC236}">
-                <a16:creationId xmlns:a16="http://schemas.microsoft.com/office/drawing/2014/main" id="{3E824FB0-2A17-4F80-A95B-01F117141427}"/>
+                <a16:creationId xmlns:a16="http://schemas.microsoft.com/office/drawing/2014/main" id="{B3333E62-9D46-4024-ACEC-B28CFC927CE3}"/>
               </a:ext>
             </a:extLst>
           </p:cNvPr>
@@ -5054,7 +5589,7 @@
           <p:cNvPr id="7" name="">
             <a:extLst xmlns:a="http://schemas.openxmlformats.org/drawingml/2006/main">
               <a:ext uri="{FF2B5EF4-FFF2-40B4-BE49-F238E27FC236}">
-                <a16:creationId xmlns:a16="http://schemas.microsoft.com/office/drawing/2014/main" id="{CCCC53C9-FC58-4C5B-BD70-8B4CFFC50C4C}"/>
+                <a16:creationId xmlns:a16="http://schemas.microsoft.com/office/drawing/2014/main" id="{2D8B597C-E20A-4B51-87B9-A8D5358F75A9}"/>
               </a:ext>
             </a:extLst>
           </p:cNvPr>
@@ -5118,7 +5653,7 @@
           <p:cNvPr id="8" name="">
             <a:extLst xmlns:a="http://schemas.openxmlformats.org/drawingml/2006/main">
               <a:ext uri="{FF2B5EF4-FFF2-40B4-BE49-F238E27FC236}">
-                <a16:creationId xmlns:a16="http://schemas.microsoft.com/office/drawing/2014/main" id="{A0632227-DAE7-430F-8574-FEB9E2F9298F}"/>
+                <a16:creationId xmlns:a16="http://schemas.microsoft.com/office/drawing/2014/main" id="{92B84271-ED37-4341-8BD7-663B47C87ACC}"/>
               </a:ext>
             </a:extLst>
           </p:cNvPr>
@@ -5182,7 +5717,7 @@
           <p:cNvPr id="9" name="">
             <a:extLst xmlns:a="http://schemas.openxmlformats.org/drawingml/2006/main">
               <a:ext uri="{FF2B5EF4-FFF2-40B4-BE49-F238E27FC236}">
-                <a16:creationId xmlns:a16="http://schemas.microsoft.com/office/drawing/2014/main" id="{410C6ACA-D5BB-45A9-83ED-3C507F1BD3A0}"/>
+                <a16:creationId xmlns:a16="http://schemas.microsoft.com/office/drawing/2014/main" id="{5BEF7B6B-79B2-457A-BFCD-A9FA628BD24E}"/>
               </a:ext>
             </a:extLst>
           </p:cNvPr>
@@ -5246,7 +5781,7 @@
           <p:cNvPr id="10" name="">
             <a:extLst xmlns:a="http://schemas.openxmlformats.org/drawingml/2006/main">
               <a:ext uri="{FF2B5EF4-FFF2-40B4-BE49-F238E27FC236}">
-                <a16:creationId xmlns:a16="http://schemas.microsoft.com/office/drawing/2014/main" id="{EEFE552D-8D62-495F-AAE4-27CBFEC122EB}"/>
+                <a16:creationId xmlns:a16="http://schemas.microsoft.com/office/drawing/2014/main" id="{EC0EC635-0FA0-487D-B6AF-DCF06F26D7EE}"/>
               </a:ext>
             </a:extLst>
           </p:cNvPr>
@@ -5310,7 +5845,7 @@
           <p:cNvPr id="11" name="">
             <a:extLst xmlns:a="http://schemas.openxmlformats.org/drawingml/2006/main">
               <a:ext uri="{FF2B5EF4-FFF2-40B4-BE49-F238E27FC236}">
-                <a16:creationId xmlns:a16="http://schemas.microsoft.com/office/drawing/2014/main" id="{D04832EC-772B-49EE-A8AB-5B3077B6842B}"/>
+                <a16:creationId xmlns:a16="http://schemas.microsoft.com/office/drawing/2014/main" id="{4D5E72FE-06B6-4EDA-BBF2-DE866C72C85A}"/>
               </a:ext>
             </a:extLst>
           </p:cNvPr>
@@ -5343,7 +5878,7 @@
           <p:cNvPr id="12" name="">
             <a:extLst xmlns:a="http://schemas.openxmlformats.org/drawingml/2006/main">
               <a:ext uri="{FF2B5EF4-FFF2-40B4-BE49-F238E27FC236}">
-                <a16:creationId xmlns:a16="http://schemas.microsoft.com/office/drawing/2014/main" id="{543895DA-49CA-4B80-B4F7-AD58E02F1B05}"/>
+                <a16:creationId xmlns:a16="http://schemas.microsoft.com/office/drawing/2014/main" id="{2C91069D-7EC4-4C66-B84C-BE10918BCEE0}"/>
               </a:ext>
             </a:extLst>
           </p:cNvPr>
@@ -5407,7 +5942,7 @@
           <p:cNvPr id="13" name="">
             <a:extLst xmlns:a="http://schemas.openxmlformats.org/drawingml/2006/main">
               <a:ext uri="{FF2B5EF4-FFF2-40B4-BE49-F238E27FC236}">
-                <a16:creationId xmlns:a16="http://schemas.microsoft.com/office/drawing/2014/main" id="{B0ABC8DE-F24A-4AE5-A2D8-1A23045C18E9}"/>
+                <a16:creationId xmlns:a16="http://schemas.microsoft.com/office/drawing/2014/main" id="{D467CC4E-6517-48B4-BA3A-4D612AF15B59}"/>
               </a:ext>
             </a:extLst>
           </p:cNvPr>
@@ -5471,7 +6006,7 @@
           <p:cNvPr id="14" name="">
             <a:extLst xmlns:a="http://schemas.openxmlformats.org/drawingml/2006/main">
               <a:ext uri="{FF2B5EF4-FFF2-40B4-BE49-F238E27FC236}">
-                <a16:creationId xmlns:a16="http://schemas.microsoft.com/office/drawing/2014/main" id="{2DA71928-E29A-4432-BEA4-B7DB023B2FCB}"/>
+                <a16:creationId xmlns:a16="http://schemas.microsoft.com/office/drawing/2014/main" id="{F4457BA3-A474-490F-9397-89CE3B45589C}"/>
               </a:ext>
             </a:extLst>
           </p:cNvPr>
@@ -5535,7 +6070,7 @@
           <p:cNvPr id="15" name="">
             <a:extLst xmlns:a="http://schemas.openxmlformats.org/drawingml/2006/main">
               <a:ext uri="{FF2B5EF4-FFF2-40B4-BE49-F238E27FC236}">
-                <a16:creationId xmlns:a16="http://schemas.microsoft.com/office/drawing/2014/main" id="{FB589FE7-48D0-4F10-A5D6-1A119B9DF9C6}"/>
+                <a16:creationId xmlns:a16="http://schemas.microsoft.com/office/drawing/2014/main" id="{73916CD0-CFE1-4AC6-A325-3E9CF93DEBB8}"/>
               </a:ext>
             </a:extLst>
           </p:cNvPr>
@@ -5599,7 +6134,7 @@
           <p:cNvPr id="16" name="">
             <a:extLst xmlns:a="http://schemas.openxmlformats.org/drawingml/2006/main">
               <a:ext uri="{FF2B5EF4-FFF2-40B4-BE49-F238E27FC236}">
-                <a16:creationId xmlns:a16="http://schemas.microsoft.com/office/drawing/2014/main" id="{E76CCDFA-60F8-4A2D-82D1-EA6F04D10CF3}"/>
+                <a16:creationId xmlns:a16="http://schemas.microsoft.com/office/drawing/2014/main" id="{5937759C-3003-4402-98D2-1AEF2D22B654}"/>
               </a:ext>
             </a:extLst>
           </p:cNvPr>
@@ -5663,7 +6198,7 @@
           <p:cNvPr id="17" name="">
             <a:extLst xmlns:a="http://schemas.openxmlformats.org/drawingml/2006/main">
               <a:ext uri="{FF2B5EF4-FFF2-40B4-BE49-F238E27FC236}">
-                <a16:creationId xmlns:a16="http://schemas.microsoft.com/office/drawing/2014/main" id="{202B5BD9-C037-4028-9E03-AE849CF05560}"/>
+                <a16:creationId xmlns:a16="http://schemas.microsoft.com/office/drawing/2014/main" id="{AC71C6CB-B81A-4659-84B9-768784195A5B}"/>
               </a:ext>
             </a:extLst>
           </p:cNvPr>
@@ -5727,7 +6262,7 @@
           <p:cNvPr id="18" name="">
             <a:extLst xmlns:a="http://schemas.openxmlformats.org/drawingml/2006/main">
               <a:ext uri="{FF2B5EF4-FFF2-40B4-BE49-F238E27FC236}">
-                <a16:creationId xmlns:a16="http://schemas.microsoft.com/office/drawing/2014/main" id="{343EBC73-70AC-45CD-A0F5-291BBEC216C3}"/>
+                <a16:creationId xmlns:a16="http://schemas.microsoft.com/office/drawing/2014/main" id="{B9F78265-95EE-478D-B87D-A83227F49D8C}"/>
               </a:ext>
             </a:extLst>
           </p:cNvPr>
@@ -5791,7 +6326,7 @@
           <p:cNvPr id="19" name="">
             <a:extLst xmlns:a="http://schemas.openxmlformats.org/drawingml/2006/main">
               <a:ext uri="{FF2B5EF4-FFF2-40B4-BE49-F238E27FC236}">
-                <a16:creationId xmlns:a16="http://schemas.microsoft.com/office/drawing/2014/main" id="{EC7BBD21-1E3A-4651-A37D-92163D00B760}"/>
+                <a16:creationId xmlns:a16="http://schemas.microsoft.com/office/drawing/2014/main" id="{6BFCC29F-1565-4215-8181-54E165C325F6}"/>
               </a:ext>
             </a:extLst>
           </p:cNvPr>
@@ -5845,7 +6380,7 @@
                 <a:ea typeface="Aptos"/>
                 <a:cs typeface="Aptos"/>
               </a:rPr>
-              <a:t>mas barato, pero sigue siendo premium</a:t>
+              <a:t>más barato, pero sigue siendo premium</a:t>
             </a:r>
           </a:p>
         </p:txBody>
@@ -5855,7 +6390,7 @@
           <p:cNvPr id="20" name="">
             <a:extLst xmlns:a="http://schemas.openxmlformats.org/drawingml/2006/main">
               <a:ext uri="{FF2B5EF4-FFF2-40B4-BE49-F238E27FC236}">
-                <a16:creationId xmlns:a16="http://schemas.microsoft.com/office/drawing/2014/main" id="{60D4B820-DA59-48B3-82EE-84638313A925}"/>
+                <a16:creationId xmlns:a16="http://schemas.microsoft.com/office/drawing/2014/main" id="{F9A3BD4E-C1DF-4737-A031-561EC0046330}"/>
               </a:ext>
             </a:extLst>
           </p:cNvPr>
@@ -5888,7 +6423,7 @@
           <p:cNvPr id="21" name="">
             <a:extLst xmlns:a="http://schemas.openxmlformats.org/drawingml/2006/main">
               <a:ext uri="{FF2B5EF4-FFF2-40B4-BE49-F238E27FC236}">
-                <a16:creationId xmlns:a16="http://schemas.microsoft.com/office/drawing/2014/main" id="{88585A89-282C-410F-A229-02196FCF6F2A}"/>
+                <a16:creationId xmlns:a16="http://schemas.microsoft.com/office/drawing/2014/main" id="{D48BE2FA-0776-47D2-B360-C6CD0B5E6289}"/>
               </a:ext>
             </a:extLst>
           </p:cNvPr>
@@ -5952,7 +6487,7 @@
           <p:cNvPr id="22" name="">
             <a:extLst xmlns:a="http://schemas.openxmlformats.org/drawingml/2006/main">
               <a:ext uri="{FF2B5EF4-FFF2-40B4-BE49-F238E27FC236}">
-                <a16:creationId xmlns:a16="http://schemas.microsoft.com/office/drawing/2014/main" id="{75C761A2-D55F-4642-8CEC-778AE3F52E2A}"/>
+                <a16:creationId xmlns:a16="http://schemas.microsoft.com/office/drawing/2014/main" id="{C5EE530E-866C-455B-B4E8-9BC318275F72}"/>
               </a:ext>
             </a:extLst>
           </p:cNvPr>
@@ -6016,7 +6551,7 @@
           <p:cNvPr id="23" name="">
             <a:extLst xmlns:a="http://schemas.openxmlformats.org/drawingml/2006/main">
               <a:ext uri="{FF2B5EF4-FFF2-40B4-BE49-F238E27FC236}">
-                <a16:creationId xmlns:a16="http://schemas.microsoft.com/office/drawing/2014/main" id="{B05564D8-4BA9-45B9-AA3B-E3C9A3E424DB}"/>
+                <a16:creationId xmlns:a16="http://schemas.microsoft.com/office/drawing/2014/main" id="{86F6255F-EAA5-4DBD-B9B8-AC81DC3FC393}"/>
               </a:ext>
             </a:extLst>
           </p:cNvPr>
@@ -6080,7 +6615,7 @@
           <p:cNvPr id="24" name="">
             <a:extLst xmlns:a="http://schemas.openxmlformats.org/drawingml/2006/main">
               <a:ext uri="{FF2B5EF4-FFF2-40B4-BE49-F238E27FC236}">
-                <a16:creationId xmlns:a16="http://schemas.microsoft.com/office/drawing/2014/main" id="{05D0CE60-BCC7-453B-A792-3F8DCC52A1AD}"/>
+                <a16:creationId xmlns:a16="http://schemas.microsoft.com/office/drawing/2014/main" id="{4FC16278-CAD7-42A9-9FE5-498D88E26C2B}"/>
               </a:ext>
             </a:extLst>
           </p:cNvPr>
@@ -6144,7 +6679,7 @@
           <p:cNvPr id="25" name="">
             <a:extLst xmlns:a="http://schemas.openxmlformats.org/drawingml/2006/main">
               <a:ext uri="{FF2B5EF4-FFF2-40B4-BE49-F238E27FC236}">
-                <a16:creationId xmlns:a16="http://schemas.microsoft.com/office/drawing/2014/main" id="{10632914-22CB-490C-9926-E55AA6086143}"/>
+                <a16:creationId xmlns:a16="http://schemas.microsoft.com/office/drawing/2014/main" id="{A29E0BEF-66D8-4D36-9136-2C3571DE3FB4}"/>
               </a:ext>
             </a:extLst>
           </p:cNvPr>
@@ -6208,7 +6743,7 @@
           <p:cNvPr id="26" name="">
             <a:extLst xmlns:a="http://schemas.openxmlformats.org/drawingml/2006/main">
               <a:ext uri="{FF2B5EF4-FFF2-40B4-BE49-F238E27FC236}">
-                <a16:creationId xmlns:a16="http://schemas.microsoft.com/office/drawing/2014/main" id="{30D82E72-173D-4A80-8D38-D69FE59BB9E8}"/>
+                <a16:creationId xmlns:a16="http://schemas.microsoft.com/office/drawing/2014/main" id="{24EEA6B1-737F-41A5-A79A-007B39FCF261}"/>
               </a:ext>
             </a:extLst>
           </p:cNvPr>
@@ -6272,7 +6807,7 @@
           <p:cNvPr id="27" name="">
             <a:extLst xmlns:a="http://schemas.openxmlformats.org/drawingml/2006/main">
               <a:ext uri="{FF2B5EF4-FFF2-40B4-BE49-F238E27FC236}">
-                <a16:creationId xmlns:a16="http://schemas.microsoft.com/office/drawing/2014/main" id="{9B0B65EC-E936-4D04-9FF5-F48B8AF13E1C}"/>
+                <a16:creationId xmlns:a16="http://schemas.microsoft.com/office/drawing/2014/main" id="{10151CAF-A5A6-4D08-8AF3-D54A61825861}"/>
               </a:ext>
             </a:extLst>
           </p:cNvPr>
@@ -6336,7 +6871,7 @@
           <p:cNvPr id="28" name="">
             <a:extLst xmlns:a="http://schemas.openxmlformats.org/drawingml/2006/main">
               <a:ext uri="{FF2B5EF4-FFF2-40B4-BE49-F238E27FC236}">
-                <a16:creationId xmlns:a16="http://schemas.microsoft.com/office/drawing/2014/main" id="{DAE8AC7B-5EE9-496A-BD6B-70F1384A8322}"/>
+                <a16:creationId xmlns:a16="http://schemas.microsoft.com/office/drawing/2014/main" id="{E95D1784-081C-4FA0-86D1-B91E254AB576}"/>
               </a:ext>
             </a:extLst>
           </p:cNvPr>
@@ -6390,7 +6925,7 @@
                 <a:ea typeface="Aptos"/>
                 <a:cs typeface="Aptos"/>
               </a:rPr>
-              <a:t>ruta intermedia mas razonable</a:t>
+              <a:t>ruta intermedia más razonable</a:t>
             </a:r>
           </a:p>
         </p:txBody>
@@ -6400,7 +6935,7 @@
           <p:cNvPr id="29" name="">
             <a:extLst xmlns:a="http://schemas.openxmlformats.org/drawingml/2006/main">
               <a:ext uri="{FF2B5EF4-FFF2-40B4-BE49-F238E27FC236}">
-                <a16:creationId xmlns:a16="http://schemas.microsoft.com/office/drawing/2014/main" id="{C5A13194-F3C1-4191-8AE2-58E514CCF393}"/>
+                <a16:creationId xmlns:a16="http://schemas.microsoft.com/office/drawing/2014/main" id="{D2A69CDC-483D-4B8E-BAF8-9F8A1DFD2361}"/>
               </a:ext>
             </a:extLst>
           </p:cNvPr>
@@ -6433,7 +6968,7 @@
           <p:cNvPr id="30" name="">
             <a:extLst xmlns:a="http://schemas.openxmlformats.org/drawingml/2006/main">
               <a:ext uri="{FF2B5EF4-FFF2-40B4-BE49-F238E27FC236}">
-                <a16:creationId xmlns:a16="http://schemas.microsoft.com/office/drawing/2014/main" id="{965030C9-B24F-428C-A519-F6CD957E606A}"/>
+                <a16:creationId xmlns:a16="http://schemas.microsoft.com/office/drawing/2014/main" id="{A63EB5FF-668A-4656-BB72-2A553E15E1FA}"/>
               </a:ext>
             </a:extLst>
           </p:cNvPr>
@@ -6497,7 +7032,7 @@
           <p:cNvPr id="31" name="">
             <a:extLst xmlns:a="http://schemas.openxmlformats.org/drawingml/2006/main">
               <a:ext uri="{FF2B5EF4-FFF2-40B4-BE49-F238E27FC236}">
-                <a16:creationId xmlns:a16="http://schemas.microsoft.com/office/drawing/2014/main" id="{98150460-C005-4EC4-B9FB-DC464C7D409B}"/>
+                <a16:creationId xmlns:a16="http://schemas.microsoft.com/office/drawing/2014/main" id="{72003A6D-69A1-48B7-B11B-90D3936B357A}"/>
               </a:ext>
             </a:extLst>
           </p:cNvPr>
@@ -6561,7 +7096,7 @@
           <p:cNvPr id="32" name="">
             <a:extLst xmlns:a="http://schemas.openxmlformats.org/drawingml/2006/main">
               <a:ext uri="{FF2B5EF4-FFF2-40B4-BE49-F238E27FC236}">
-                <a16:creationId xmlns:a16="http://schemas.microsoft.com/office/drawing/2014/main" id="{8D79E99F-0E06-47FB-B0BA-79D7EC1D7F3C}"/>
+                <a16:creationId xmlns:a16="http://schemas.microsoft.com/office/drawing/2014/main" id="{1189272A-EEE3-4CDD-AB31-DA8E4E5FEC61}"/>
               </a:ext>
             </a:extLst>
           </p:cNvPr>
@@ -6625,7 +7160,7 @@
           <p:cNvPr id="33" name="">
             <a:extLst xmlns:a="http://schemas.openxmlformats.org/drawingml/2006/main">
               <a:ext uri="{FF2B5EF4-FFF2-40B4-BE49-F238E27FC236}">
-                <a16:creationId xmlns:a16="http://schemas.microsoft.com/office/drawing/2014/main" id="{B874A14E-07FE-4A3E-A0D1-8441A7D86C25}"/>
+                <a16:creationId xmlns:a16="http://schemas.microsoft.com/office/drawing/2014/main" id="{D94ED513-7770-483B-86A6-AAD42BC21043}"/>
               </a:ext>
             </a:extLst>
           </p:cNvPr>
@@ -6679,7 +7214,7 @@
                 <a:ea typeface="Aptos"/>
                 <a:cs typeface="Aptos"/>
               </a:rPr>
-              <a:t>mucho mas economico para tareas ligeras</a:t>
+              <a:t>mucho más económico para tareas ligeras</a:t>
             </a:r>
           </a:p>
         </p:txBody>
@@ -6689,7 +7224,7 @@
           <p:cNvPr id="34" name="">
             <a:extLst xmlns:a="http://schemas.openxmlformats.org/drawingml/2006/main">
               <a:ext uri="{FF2B5EF4-FFF2-40B4-BE49-F238E27FC236}">
-                <a16:creationId xmlns:a16="http://schemas.microsoft.com/office/drawing/2014/main" id="{D7D60689-FB02-4525-821D-2DF74EEC3267}"/>
+                <a16:creationId xmlns:a16="http://schemas.microsoft.com/office/drawing/2014/main" id="{D18E3EB6-2695-4B6A-B954-699DAEE4D59C}"/>
               </a:ext>
             </a:extLst>
           </p:cNvPr>
@@ -6753,7 +7288,7 @@
           <p:cNvPr id="35" name="">
             <a:extLst xmlns:a="http://schemas.openxmlformats.org/drawingml/2006/main">
               <a:ext uri="{FF2B5EF4-FFF2-40B4-BE49-F238E27FC236}">
-                <a16:creationId xmlns:a16="http://schemas.microsoft.com/office/drawing/2014/main" id="{F711E9FE-5C0E-46E3-9E39-0A6361DA599E}"/>
+                <a16:creationId xmlns:a16="http://schemas.microsoft.com/office/drawing/2014/main" id="{DD0C499B-B42B-404B-902D-F21AA5704087}"/>
               </a:ext>
             </a:extLst>
           </p:cNvPr>
@@ -6765,7 +7300,7 @@
         <p:spPr>
           <a:xfrm xmlns:a="http://schemas.openxmlformats.org/drawingml/2006/main">
             <a:off x="800100" y="5467350"/>
-            <a:ext cx="2190750" cy="190500"/>
+            <a:ext cx="2190750" cy="304800"/>
           </a:xfrm>
           <a:prstGeom xmlns:a="http://schemas.openxmlformats.org/drawingml/2006/main" prst="rect">
             <a:avLst/>
@@ -6817,7 +7352,7 @@
           <p:cNvPr id="36" name="">
             <a:extLst xmlns:a="http://schemas.openxmlformats.org/drawingml/2006/main">
               <a:ext uri="{FF2B5EF4-FFF2-40B4-BE49-F238E27FC236}">
-                <a16:creationId xmlns:a16="http://schemas.microsoft.com/office/drawing/2014/main" id="{E268AF0C-B49D-4835-9EA3-9DAA45F6106C}"/>
+                <a16:creationId xmlns:a16="http://schemas.microsoft.com/office/drawing/2014/main" id="{50D6222A-B8BB-47F3-9659-06343E0100DD}"/>
               </a:ext>
             </a:extLst>
           </p:cNvPr>
@@ -6881,7 +7416,7 @@
           <p:cNvPr id="37" name="">
             <a:extLst xmlns:a="http://schemas.openxmlformats.org/drawingml/2006/main">
               <a:ext uri="{FF2B5EF4-FFF2-40B4-BE49-F238E27FC236}">
-                <a16:creationId xmlns:a16="http://schemas.microsoft.com/office/drawing/2014/main" id="{D3987437-03C1-4D28-BFA5-0AEF5B6DD51E}"/>
+                <a16:creationId xmlns:a16="http://schemas.microsoft.com/office/drawing/2014/main" id="{0F4C3060-F1C1-4348-84CD-D22874BFEF41}"/>
               </a:ext>
             </a:extLst>
           </p:cNvPr>
@@ -6893,7 +7428,7 @@
         <p:spPr>
           <a:xfrm xmlns:a="http://schemas.openxmlformats.org/drawingml/2006/main">
             <a:off x="3657600" y="5467350"/>
-            <a:ext cx="2476500" cy="190500"/>
+            <a:ext cx="2476500" cy="304800"/>
           </a:xfrm>
           <a:prstGeom xmlns:a="http://schemas.openxmlformats.org/drawingml/2006/main" prst="rect">
             <a:avLst/>
@@ -6945,7 +7480,7 @@
           <p:cNvPr id="38" name="">
             <a:extLst xmlns:a="http://schemas.openxmlformats.org/drawingml/2006/main">
               <a:ext uri="{FF2B5EF4-FFF2-40B4-BE49-F238E27FC236}">
-                <a16:creationId xmlns:a16="http://schemas.microsoft.com/office/drawing/2014/main" id="{1491C753-0F02-486C-86B2-4EF5E6767D31}"/>
+                <a16:creationId xmlns:a16="http://schemas.microsoft.com/office/drawing/2014/main" id="{61063C65-30F0-4F42-9B51-EE8D3E1F6B35}"/>
               </a:ext>
             </a:extLst>
           </p:cNvPr>
@@ -7009,7 +7544,7 @@
           <p:cNvPr id="39" name="">
             <a:extLst xmlns:a="http://schemas.openxmlformats.org/drawingml/2006/main">
               <a:ext uri="{FF2B5EF4-FFF2-40B4-BE49-F238E27FC236}">
-                <a16:creationId xmlns:a16="http://schemas.microsoft.com/office/drawing/2014/main" id="{DAABBE36-D2BE-4393-8C9A-0011FBE740B1}"/>
+                <a16:creationId xmlns:a16="http://schemas.microsoft.com/office/drawing/2014/main" id="{81CB30D9-CBE3-4E58-AD83-3FD3DD4B2BEA}"/>
               </a:ext>
             </a:extLst>
           </p:cNvPr>
@@ -7021,7 +7556,7 @@
         <p:spPr>
           <a:xfrm xmlns:a="http://schemas.openxmlformats.org/drawingml/2006/main">
             <a:off x="7334250" y="5467350"/>
-            <a:ext cx="2095500" cy="190500"/>
+            <a:ext cx="2095500" cy="304800"/>
           </a:xfrm>
           <a:prstGeom xmlns:a="http://schemas.openxmlformats.org/drawingml/2006/main" prst="rect">
             <a:avLst/>
@@ -7073,7 +7608,7 @@
           <p:cNvPr id="40" name="">
             <a:extLst xmlns:a="http://schemas.openxmlformats.org/drawingml/2006/main">
               <a:ext uri="{FF2B5EF4-FFF2-40B4-BE49-F238E27FC236}">
-                <a16:creationId xmlns:a16="http://schemas.microsoft.com/office/drawing/2014/main" id="{244FB5B6-ECE2-4FFB-940E-71B62300AC18}"/>
+                <a16:creationId xmlns:a16="http://schemas.microsoft.com/office/drawing/2014/main" id="{363C9EB6-DAD5-4AB6-BE0F-B2F60B7A35E9}"/>
               </a:ext>
             </a:extLst>
           </p:cNvPr>
@@ -7137,7 +7672,7 @@
           <p:cNvPr id="41" name="">
             <a:extLst xmlns:a="http://schemas.openxmlformats.org/drawingml/2006/main">
               <a:ext uri="{FF2B5EF4-FFF2-40B4-BE49-F238E27FC236}">
-                <a16:creationId xmlns:a16="http://schemas.microsoft.com/office/drawing/2014/main" id="{1F680144-BA04-4D8F-9D1D-EEDBBE42FAF1}"/>
+                <a16:creationId xmlns:a16="http://schemas.microsoft.com/office/drawing/2014/main" id="{753CE158-D6B7-4B6E-85C6-1D911C144E9C}"/>
               </a:ext>
             </a:extLst>
           </p:cNvPr>
@@ -7199,7 +7734,7 @@
     </p:spTree>
     <p:extLst>
       <p:ext uri="{BB962C8B-B14F-4D97-AF65-F5344CB8AC3E}">
-        <p14:creationId xmlns:p14="http://schemas.microsoft.com/office/powerpoint/2010/main" val="1242797617"/>
+        <p14:creationId xmlns:p14="http://schemas.microsoft.com/office/powerpoint/2010/main" val="321084499"/>
       </p:ext>
     </p:extLst>
   </p:cSld>
@@ -7223,7 +7758,7 @@
           <p:cNvPr id="1" name="">
             <a:extLst xmlns:a="http://schemas.openxmlformats.org/drawingml/2006/main">
               <a:ext uri="{FF2B5EF4-FFF2-40B4-BE49-F238E27FC236}">
-                <a16:creationId xmlns:a16="http://schemas.microsoft.com/office/drawing/2014/main" id="{E340837A-DC47-4B63-84FC-1074FE93D61A}"/>
+                <a16:creationId xmlns:a16="http://schemas.microsoft.com/office/drawing/2014/main" id="{C8998A83-84E1-473D-BC36-53BFA25FC8C5}"/>
               </a:ext>
             </a:extLst>
           </p:cNvPr>
@@ -7256,7 +7791,7 @@
           <p:cNvPr id="2" name="">
             <a:extLst xmlns:a="http://schemas.openxmlformats.org/drawingml/2006/main">
               <a:ext uri="{FF2B5EF4-FFF2-40B4-BE49-F238E27FC236}">
-                <a16:creationId xmlns:a16="http://schemas.microsoft.com/office/drawing/2014/main" id="{1DC84FF2-831A-4906-B03A-CC256F033C6E}"/>
+                <a16:creationId xmlns:a16="http://schemas.microsoft.com/office/drawing/2014/main" id="{C410A1C3-61F5-4554-9461-29062FC1EDD4}"/>
               </a:ext>
             </a:extLst>
           </p:cNvPr>
@@ -7289,7 +7824,7 @@
           <p:cNvPr id="3" name="">
             <a:extLst xmlns:a="http://schemas.openxmlformats.org/drawingml/2006/main">
               <a:ext uri="{FF2B5EF4-FFF2-40B4-BE49-F238E27FC236}">
-                <a16:creationId xmlns:a16="http://schemas.microsoft.com/office/drawing/2014/main" id="{3E7BB1EA-B0EB-4647-8123-C148DB93FA27}"/>
+                <a16:creationId xmlns:a16="http://schemas.microsoft.com/office/drawing/2014/main" id="{387437E8-B725-41C3-896C-F7539230844D}"/>
               </a:ext>
             </a:extLst>
           </p:cNvPr>
@@ -7353,7 +7888,7 @@
           <p:cNvPr id="4" name="">
             <a:extLst xmlns:a="http://schemas.openxmlformats.org/drawingml/2006/main">
               <a:ext uri="{FF2B5EF4-FFF2-40B4-BE49-F238E27FC236}">
-                <a16:creationId xmlns:a16="http://schemas.microsoft.com/office/drawing/2014/main" id="{2F46B515-2CF1-4223-9E09-FDEFB0A7EDBA}"/>
+                <a16:creationId xmlns:a16="http://schemas.microsoft.com/office/drawing/2014/main" id="{5126552C-C0F5-4D67-8B39-24261211931F}"/>
               </a:ext>
             </a:extLst>
           </p:cNvPr>
@@ -7407,7 +7942,7 @@
                 <a:ea typeface="Aptos Display"/>
                 <a:cs typeface="Aptos Display"/>
               </a:rPr>
-              <a:t>La preocupacion por costos ya no es teorica: hay casos documentados de presupuestos agotados, licencias recortadas y uso gamificado.</a:t>
+              <a:t>La preocupación por costos ya no es teórica: hay casos documentados de presupuestos agotados, licencias recortadas y uso gamificado.</a:t>
             </a:r>
           </a:p>
         </p:txBody>
@@ -7417,7 +7952,7 @@
           <p:cNvPr id="5" name="">
             <a:extLst xmlns:a="http://schemas.openxmlformats.org/drawingml/2006/main">
               <a:ext uri="{FF2B5EF4-FFF2-40B4-BE49-F238E27FC236}">
-                <a16:creationId xmlns:a16="http://schemas.microsoft.com/office/drawing/2014/main" id="{EF42ECF5-B049-4B84-A695-A5BD9406D1CC}"/>
+                <a16:creationId xmlns:a16="http://schemas.microsoft.com/office/drawing/2014/main" id="{552B9762-1CCB-46F1-8E4E-DE0323705AD4}"/>
               </a:ext>
             </a:extLst>
           </p:cNvPr>
@@ -7450,7 +7985,7 @@
           <p:cNvPr id="6" name="">
             <a:extLst xmlns:a="http://schemas.openxmlformats.org/drawingml/2006/main">
               <a:ext uri="{FF2B5EF4-FFF2-40B4-BE49-F238E27FC236}">
-                <a16:creationId xmlns:a16="http://schemas.microsoft.com/office/drawing/2014/main" id="{4CDA21AE-D713-49F1-B661-6E1FE5703BEC}"/>
+                <a16:creationId xmlns:a16="http://schemas.microsoft.com/office/drawing/2014/main" id="{EABD8EF5-BB3C-48CE-B28C-74B8DCEED937}"/>
               </a:ext>
             </a:extLst>
           </p:cNvPr>
@@ -7514,7 +8049,7 @@
           <p:cNvPr id="7" name="">
             <a:extLst xmlns:a="http://schemas.openxmlformats.org/drawingml/2006/main">
               <a:ext uri="{FF2B5EF4-FFF2-40B4-BE49-F238E27FC236}">
-                <a16:creationId xmlns:a16="http://schemas.microsoft.com/office/drawing/2014/main" id="{A66AB1AD-CB67-417F-8612-94FD7EBEA554}"/>
+                <a16:creationId xmlns:a16="http://schemas.microsoft.com/office/drawing/2014/main" id="{10A8793D-5E96-4650-8236-CD0A7D1571AF}"/>
               </a:ext>
             </a:extLst>
           </p:cNvPr>
@@ -7578,7 +8113,7 @@
           <p:cNvPr id="8" name="">
             <a:extLst xmlns:a="http://schemas.openxmlformats.org/drawingml/2006/main">
               <a:ext uri="{FF2B5EF4-FFF2-40B4-BE49-F238E27FC236}">
-                <a16:creationId xmlns:a16="http://schemas.microsoft.com/office/drawing/2014/main" id="{E23462A4-F315-41CE-8889-D45A6A17EB57}"/>
+                <a16:creationId xmlns:a16="http://schemas.microsoft.com/office/drawing/2014/main" id="{2E0B25CA-7E5F-49A3-8778-1BA28A4A2C14}"/>
               </a:ext>
             </a:extLst>
           </p:cNvPr>
@@ -7632,7 +8167,7 @@
                 <a:ea typeface="Aptos"/>
                 <a:cs typeface="Aptos"/>
               </a:rPr>
-              <a:t>Habia consumido su presupuesto anual de IA en cuatro meses y el gasto se volvia mas dificil de justificar.</a:t>
+              <a:t>Había consumido su presupuesto anual de IA en cuatro meses y el gasto se volvía más difícil de justificar.</a:t>
             </a:r>
           </a:p>
         </p:txBody>
@@ -7642,7 +8177,7 @@
           <p:cNvPr id="9" name="">
             <a:extLst xmlns:a="http://schemas.openxmlformats.org/drawingml/2006/main">
               <a:ext uri="{FF2B5EF4-FFF2-40B4-BE49-F238E27FC236}">
-                <a16:creationId xmlns:a16="http://schemas.microsoft.com/office/drawing/2014/main" id="{8A5C6984-C78E-4C6F-98BB-BCA1834D8FD4}"/>
+                <a16:creationId xmlns:a16="http://schemas.microsoft.com/office/drawing/2014/main" id="{7FA8D4A3-30E3-4BE9-9BE9-BF4B720A3F68}"/>
               </a:ext>
             </a:extLst>
           </p:cNvPr>
@@ -7675,7 +8210,7 @@
           <p:cNvPr id="10" name="">
             <a:extLst xmlns:a="http://schemas.openxmlformats.org/drawingml/2006/main">
               <a:ext uri="{FF2B5EF4-FFF2-40B4-BE49-F238E27FC236}">
-                <a16:creationId xmlns:a16="http://schemas.microsoft.com/office/drawing/2014/main" id="{92ED5100-4AFD-49F9-BC9D-3339651370D9}"/>
+                <a16:creationId xmlns:a16="http://schemas.microsoft.com/office/drawing/2014/main" id="{9CC60A39-B7F2-4B21-BAB0-8905C9CBE3BB}"/>
               </a:ext>
             </a:extLst>
           </p:cNvPr>
@@ -7739,7 +8274,7 @@
           <p:cNvPr id="11" name="">
             <a:extLst xmlns:a="http://schemas.openxmlformats.org/drawingml/2006/main">
               <a:ext uri="{FF2B5EF4-FFF2-40B4-BE49-F238E27FC236}">
-                <a16:creationId xmlns:a16="http://schemas.microsoft.com/office/drawing/2014/main" id="{561DD5A9-6384-4A4B-9A30-3A6DF2E249BC}"/>
+                <a16:creationId xmlns:a16="http://schemas.microsoft.com/office/drawing/2014/main" id="{D8E5C607-595D-4059-8E38-0440F00CB885}"/>
               </a:ext>
             </a:extLst>
           </p:cNvPr>
@@ -7803,7 +8338,7 @@
           <p:cNvPr id="12" name="">
             <a:extLst xmlns:a="http://schemas.openxmlformats.org/drawingml/2006/main">
               <a:ext uri="{FF2B5EF4-FFF2-40B4-BE49-F238E27FC236}">
-                <a16:creationId xmlns:a16="http://schemas.microsoft.com/office/drawing/2014/main" id="{A4C58FED-BA20-4A81-A8BE-C4EBE50E979D}"/>
+                <a16:creationId xmlns:a16="http://schemas.microsoft.com/office/drawing/2014/main" id="{47611D9A-3CAF-4F82-83ED-E723B3646A94}"/>
               </a:ext>
             </a:extLst>
           </p:cNvPr>
@@ -7857,7 +8392,7 @@
                 <a:ea typeface="Aptos"/>
                 <a:cs typeface="Aptos"/>
               </a:rPr>
-              <a:t>Gasto 500 millones de dolares en un solo mes por no poner limites de uso sobre Claude.</a:t>
+              <a:t>Gastó 500 millones de dólares en un solo mes por no poner límites de uso sobre Claude.</a:t>
             </a:r>
           </a:p>
         </p:txBody>
@@ -7867,7 +8402,7 @@
           <p:cNvPr id="13" name="">
             <a:extLst xmlns:a="http://schemas.openxmlformats.org/drawingml/2006/main">
               <a:ext uri="{FF2B5EF4-FFF2-40B4-BE49-F238E27FC236}">
-                <a16:creationId xmlns:a16="http://schemas.microsoft.com/office/drawing/2014/main" id="{7C368A71-6D27-48A6-A1EC-3AD8FD48E611}"/>
+                <a16:creationId xmlns:a16="http://schemas.microsoft.com/office/drawing/2014/main" id="{33789A71-43A0-4DA3-895E-E8209187B5FD}"/>
               </a:ext>
             </a:extLst>
           </p:cNvPr>
@@ -7900,7 +8435,7 @@
           <p:cNvPr id="14" name="">
             <a:extLst xmlns:a="http://schemas.openxmlformats.org/drawingml/2006/main">
               <a:ext uri="{FF2B5EF4-FFF2-40B4-BE49-F238E27FC236}">
-                <a16:creationId xmlns:a16="http://schemas.microsoft.com/office/drawing/2014/main" id="{9E939B0C-B920-495C-9BF8-68D2224E6DDC}"/>
+                <a16:creationId xmlns:a16="http://schemas.microsoft.com/office/drawing/2014/main" id="{CBEB02EC-4431-4BD5-AAE1-BA2071D681AD}"/>
               </a:ext>
             </a:extLst>
           </p:cNvPr>
@@ -7964,7 +8499,7 @@
           <p:cNvPr id="15" name="">
             <a:extLst xmlns:a="http://schemas.openxmlformats.org/drawingml/2006/main">
               <a:ext uri="{FF2B5EF4-FFF2-40B4-BE49-F238E27FC236}">
-                <a16:creationId xmlns:a16="http://schemas.microsoft.com/office/drawing/2014/main" id="{608A0C8E-D217-4FDE-9B41-A17524E81441}"/>
+                <a16:creationId xmlns:a16="http://schemas.microsoft.com/office/drawing/2014/main" id="{6184ABCE-9004-4658-A215-EA4CCB932B4F}"/>
               </a:ext>
             </a:extLst>
           </p:cNvPr>
@@ -8028,7 +8563,7 @@
           <p:cNvPr id="16" name="">
             <a:extLst xmlns:a="http://schemas.openxmlformats.org/drawingml/2006/main">
               <a:ext uri="{FF2B5EF4-FFF2-40B4-BE49-F238E27FC236}">
-                <a16:creationId xmlns:a16="http://schemas.microsoft.com/office/drawing/2014/main" id="{CE9E5CC8-ABD5-47EB-AEE5-94C2805717E0}"/>
+                <a16:creationId xmlns:a16="http://schemas.microsoft.com/office/drawing/2014/main" id="{3F4A46AE-9BEE-4F77-9599-82B172991FAE}"/>
               </a:ext>
             </a:extLst>
           </p:cNvPr>
@@ -8082,7 +8617,7 @@
                 <a:ea typeface="Aptos"/>
                 <a:cs typeface="Aptos"/>
               </a:rPr>
-              <a:t>Cancelo la mayoria de sus licencias internas de Claude Code, en parte por costos, citando a The Verge.</a:t>
+              <a:t>Canceló la mayoría de sus licencias internas de Claude Code, en parte por costos, citando a The Verge.</a:t>
             </a:r>
           </a:p>
         </p:txBody>
@@ -8092,7 +8627,7 @@
           <p:cNvPr id="17" name="">
             <a:extLst xmlns:a="http://schemas.openxmlformats.org/drawingml/2006/main">
               <a:ext uri="{FF2B5EF4-FFF2-40B4-BE49-F238E27FC236}">
-                <a16:creationId xmlns:a16="http://schemas.microsoft.com/office/drawing/2014/main" id="{037245FB-30BB-4489-9061-5B8913BB8D35}"/>
+                <a16:creationId xmlns:a16="http://schemas.microsoft.com/office/drawing/2014/main" id="{899D21A9-3EAA-46F7-9227-E2B3854BB557}"/>
               </a:ext>
             </a:extLst>
           </p:cNvPr>
@@ -8125,7 +8660,7 @@
           <p:cNvPr id="18" name="">
             <a:extLst xmlns:a="http://schemas.openxmlformats.org/drawingml/2006/main">
               <a:ext uri="{FF2B5EF4-FFF2-40B4-BE49-F238E27FC236}">
-                <a16:creationId xmlns:a16="http://schemas.microsoft.com/office/drawing/2014/main" id="{B5BF7015-A196-4347-8A66-727595116A23}"/>
+                <a16:creationId xmlns:a16="http://schemas.microsoft.com/office/drawing/2014/main" id="{48546DC7-C966-4DF8-8A73-EE2FEA29EC56}"/>
               </a:ext>
             </a:extLst>
           </p:cNvPr>
@@ -8189,7 +8724,7 @@
           <p:cNvPr id="19" name="">
             <a:extLst xmlns:a="http://schemas.openxmlformats.org/drawingml/2006/main">
               <a:ext uri="{FF2B5EF4-FFF2-40B4-BE49-F238E27FC236}">
-                <a16:creationId xmlns:a16="http://schemas.microsoft.com/office/drawing/2014/main" id="{D8C7DC00-E280-4138-B226-18ECE4E1E9FB}"/>
+                <a16:creationId xmlns:a16="http://schemas.microsoft.com/office/drawing/2014/main" id="{5BC9F18B-30FA-497D-8C3A-E59D4790F380}"/>
               </a:ext>
             </a:extLst>
           </p:cNvPr>
@@ -8253,7 +8788,7 @@
           <p:cNvPr id="20" name="">
             <a:extLst xmlns:a="http://schemas.openxmlformats.org/drawingml/2006/main">
               <a:ext uri="{FF2B5EF4-FFF2-40B4-BE49-F238E27FC236}">
-                <a16:creationId xmlns:a16="http://schemas.microsoft.com/office/drawing/2014/main" id="{763F8528-A360-486C-AA60-DDA78A588031}"/>
+                <a16:creationId xmlns:a16="http://schemas.microsoft.com/office/drawing/2014/main" id="{F514FA4A-8073-4495-9FC1-187D1101B837}"/>
               </a:ext>
             </a:extLst>
           </p:cNvPr>
@@ -8317,7 +8852,7 @@
           <p:cNvPr id="21" name="">
             <a:extLst xmlns:a="http://schemas.openxmlformats.org/drawingml/2006/main">
               <a:ext uri="{FF2B5EF4-FFF2-40B4-BE49-F238E27FC236}">
-                <a16:creationId xmlns:a16="http://schemas.microsoft.com/office/drawing/2014/main" id="{734B8D55-F061-4162-B337-8FBE5E5ECF69}"/>
+                <a16:creationId xmlns:a16="http://schemas.microsoft.com/office/drawing/2014/main" id="{C719475C-3B40-43E9-BD0D-0541136342CD}"/>
               </a:ext>
             </a:extLst>
           </p:cNvPr>
@@ -8371,7 +8906,7 @@
                 <a:ea typeface="Aptos"/>
                 <a:cs typeface="Aptos"/>
               </a:rPr>
-              <a:t>Las senales no prueban un retorno masivo, pero si prueban presion economica real.</a:t>
+              <a:t>Las señales no prueban un retorno masivo, pero sí prueban presión económica real.</a:t>
             </a:r>
           </a:p>
         </p:txBody>
@@ -8381,7 +8916,7 @@
           <p:cNvPr id="22" name="">
             <a:extLst xmlns:a="http://schemas.openxmlformats.org/drawingml/2006/main">
               <a:ext uri="{FF2B5EF4-FFF2-40B4-BE49-F238E27FC236}">
-                <a16:creationId xmlns:a16="http://schemas.microsoft.com/office/drawing/2014/main" id="{89BE4880-C8C0-4BF0-9623-B6DCDED9C937}"/>
+                <a16:creationId xmlns:a16="http://schemas.microsoft.com/office/drawing/2014/main" id="{92A99753-1B89-45EB-A0DF-9BD1E5D62259}"/>
               </a:ext>
             </a:extLst>
           </p:cNvPr>
@@ -8443,7 +8978,7 @@
     </p:spTree>
     <p:extLst>
       <p:ext uri="{BB962C8B-B14F-4D97-AF65-F5344CB8AC3E}">
-        <p14:creationId xmlns:p14="http://schemas.microsoft.com/office/powerpoint/2010/main" val="2129688972"/>
+        <p14:creationId xmlns:p14="http://schemas.microsoft.com/office/powerpoint/2010/main" val="867617981"/>
       </p:ext>
     </p:extLst>
   </p:cSld>
@@ -8467,7 +9002,7 @@
           <p:cNvPr id="1" name="">
             <a:extLst xmlns:a="http://schemas.openxmlformats.org/drawingml/2006/main">
               <a:ext uri="{FF2B5EF4-FFF2-40B4-BE49-F238E27FC236}">
-                <a16:creationId xmlns:a16="http://schemas.microsoft.com/office/drawing/2014/main" id="{A1F3B9D8-EF29-48EB-88E0-1C9872C3C801}"/>
+                <a16:creationId xmlns:a16="http://schemas.microsoft.com/office/drawing/2014/main" id="{96CE7A21-D7A1-404B-90B4-628955ED3CED}"/>
               </a:ext>
             </a:extLst>
           </p:cNvPr>
@@ -8500,7 +9035,7 @@
           <p:cNvPr id="2" name="">
             <a:extLst xmlns:a="http://schemas.openxmlformats.org/drawingml/2006/main">
               <a:ext uri="{FF2B5EF4-FFF2-40B4-BE49-F238E27FC236}">
-                <a16:creationId xmlns:a16="http://schemas.microsoft.com/office/drawing/2014/main" id="{21C90DE0-C4AF-4DD2-AC95-0F50B2219869}"/>
+                <a16:creationId xmlns:a16="http://schemas.microsoft.com/office/drawing/2014/main" id="{43967F66-941C-42B8-B985-FBF2D85AEB21}"/>
               </a:ext>
             </a:extLst>
           </p:cNvPr>
@@ -8533,7 +9068,7 @@
           <p:cNvPr id="3" name="">
             <a:extLst xmlns:a="http://schemas.openxmlformats.org/drawingml/2006/main">
               <a:ext uri="{FF2B5EF4-FFF2-40B4-BE49-F238E27FC236}">
-                <a16:creationId xmlns:a16="http://schemas.microsoft.com/office/drawing/2014/main" id="{FC5F056C-70BC-4978-978B-75042B5B27ED}"/>
+                <a16:creationId xmlns:a16="http://schemas.microsoft.com/office/drawing/2014/main" id="{CBD6D876-283A-4E3B-8114-8FDD7222E3B2}"/>
               </a:ext>
             </a:extLst>
           </p:cNvPr>
@@ -8597,7 +9132,7 @@
           <p:cNvPr id="4" name="">
             <a:extLst xmlns:a="http://schemas.openxmlformats.org/drawingml/2006/main">
               <a:ext uri="{FF2B5EF4-FFF2-40B4-BE49-F238E27FC236}">
-                <a16:creationId xmlns:a16="http://schemas.microsoft.com/office/drawing/2014/main" id="{98CB08EC-AC75-4933-9FAB-617F7D94DF91}"/>
+                <a16:creationId xmlns:a16="http://schemas.microsoft.com/office/drawing/2014/main" id="{684642C1-94FC-457F-A9A6-F0DEE0ADB78A}"/>
               </a:ext>
             </a:extLst>
           </p:cNvPr>
@@ -8651,7 +9186,7 @@
                 <a:ea typeface="Aptos Display"/>
                 <a:cs typeface="Aptos Display"/>
               </a:rPr>
-              <a:t>Con pocos usuarios la nube sigue ganando. Con uso intensivo y recurrente, la pregunta on-premise deja de sonar exotica.</a:t>
+              <a:t>Con pocos usuarios la nube sigue ganando. Con uso intensivo y recurrente, la pregunta on-premise deja de sonar exótica.</a:t>
             </a:r>
           </a:p>
         </p:txBody>
@@ -8661,7 +9196,7 @@
           <p:cNvPr id="5" name="">
             <a:extLst xmlns:a="http://schemas.openxmlformats.org/drawingml/2006/main">
               <a:ext uri="{FF2B5EF4-FFF2-40B4-BE49-F238E27FC236}">
-                <a16:creationId xmlns:a16="http://schemas.microsoft.com/office/drawing/2014/main" id="{431041A5-057F-4AC8-B7C5-53C60A25CEB0}"/>
+                <a16:creationId xmlns:a16="http://schemas.microsoft.com/office/drawing/2014/main" id="{6CD2D280-CC47-45D1-9F65-DF96A283B641}"/>
               </a:ext>
             </a:extLst>
           </p:cNvPr>
@@ -8694,7 +9229,7 @@
           <p:cNvPr id="6" name="">
             <a:extLst xmlns:a="http://schemas.openxmlformats.org/drawingml/2006/main">
               <a:ext uri="{FF2B5EF4-FFF2-40B4-BE49-F238E27FC236}">
-                <a16:creationId xmlns:a16="http://schemas.microsoft.com/office/drawing/2014/main" id="{B054BA4D-0D18-45EF-9AF9-D0BCA199B5F8}"/>
+                <a16:creationId xmlns:a16="http://schemas.microsoft.com/office/drawing/2014/main" id="{5166F11B-42EA-4769-ADA8-DB4155DE0157}"/>
               </a:ext>
             </a:extLst>
           </p:cNvPr>
@@ -8758,7 +9293,7 @@
           <p:cNvPr id="7" name="">
             <a:extLst xmlns:a="http://schemas.openxmlformats.org/drawingml/2006/main">
               <a:ext uri="{FF2B5EF4-FFF2-40B4-BE49-F238E27FC236}">
-                <a16:creationId xmlns:a16="http://schemas.microsoft.com/office/drawing/2014/main" id="{BF1A93A8-000C-4404-849F-8F4B4307EC0B}"/>
+                <a16:creationId xmlns:a16="http://schemas.microsoft.com/office/drawing/2014/main" id="{621FFC03-94BE-4C3E-B1BD-EC8BA3398007}"/>
               </a:ext>
             </a:extLst>
           </p:cNvPr>
@@ -8822,7 +9357,7 @@
           <p:cNvPr id="8" name="">
             <a:extLst xmlns:a="http://schemas.openxmlformats.org/drawingml/2006/main">
               <a:ext uri="{FF2B5EF4-FFF2-40B4-BE49-F238E27FC236}">
-                <a16:creationId xmlns:a16="http://schemas.microsoft.com/office/drawing/2014/main" id="{AC156085-3AE3-4D5A-8367-26F1096909AC}"/>
+                <a16:creationId xmlns:a16="http://schemas.microsoft.com/office/drawing/2014/main" id="{65FF280B-818C-418C-8248-1A3EB1264EAE}"/>
               </a:ext>
             </a:extLst>
           </p:cNvPr>
@@ -8834,7 +9369,7 @@
         <p:spPr>
           <a:xfrm xmlns:a="http://schemas.openxmlformats.org/drawingml/2006/main">
             <a:off x="800100" y="3200400"/>
-            <a:ext cx="1428750" cy="190500"/>
+            <a:ext cx="1428750" cy="304800"/>
           </a:xfrm>
           <a:prstGeom xmlns:a="http://schemas.openxmlformats.org/drawingml/2006/main" prst="rect">
             <a:avLst/>
@@ -8886,7 +9421,7 @@
           <p:cNvPr id="9" name="">
             <a:extLst xmlns:a="http://schemas.openxmlformats.org/drawingml/2006/main">
               <a:ext uri="{FF2B5EF4-FFF2-40B4-BE49-F238E27FC236}">
-                <a16:creationId xmlns:a16="http://schemas.microsoft.com/office/drawing/2014/main" id="{EB6DDD0E-9A17-4ED2-9C1A-8E2DE348D561}"/>
+                <a16:creationId xmlns:a16="http://schemas.microsoft.com/office/drawing/2014/main" id="{660EE260-FE85-4644-8AFA-9F00E2D2C4C8}"/>
               </a:ext>
             </a:extLst>
           </p:cNvPr>
@@ -8950,7 +9485,7 @@
           <p:cNvPr id="10" name="">
             <a:extLst xmlns:a="http://schemas.openxmlformats.org/drawingml/2006/main">
               <a:ext uri="{FF2B5EF4-FFF2-40B4-BE49-F238E27FC236}">
-                <a16:creationId xmlns:a16="http://schemas.microsoft.com/office/drawing/2014/main" id="{7C78C464-0E4F-41F9-86E3-3F91A8E66241}"/>
+                <a16:creationId xmlns:a16="http://schemas.microsoft.com/office/drawing/2014/main" id="{5888B18B-7738-47D2-92FD-C1CC93870FB9}"/>
               </a:ext>
             </a:extLst>
           </p:cNvPr>
@@ -8962,7 +9497,7 @@
         <p:spPr>
           <a:xfrm xmlns:a="http://schemas.openxmlformats.org/drawingml/2006/main">
             <a:off x="2419350" y="3200400"/>
-            <a:ext cx="1428750" cy="190500"/>
+            <a:ext cx="1428750" cy="304800"/>
           </a:xfrm>
           <a:prstGeom xmlns:a="http://schemas.openxmlformats.org/drawingml/2006/main" prst="rect">
             <a:avLst/>
@@ -9014,7 +9549,7 @@
           <p:cNvPr id="11" name="">
             <a:extLst xmlns:a="http://schemas.openxmlformats.org/drawingml/2006/main">
               <a:ext uri="{FF2B5EF4-FFF2-40B4-BE49-F238E27FC236}">
-                <a16:creationId xmlns:a16="http://schemas.microsoft.com/office/drawing/2014/main" id="{B7D935E9-6D59-42B7-88BD-AB1CFEF39075}"/>
+                <a16:creationId xmlns:a16="http://schemas.microsoft.com/office/drawing/2014/main" id="{3A5DAD72-7745-4ABA-9F4E-4667E761E76A}"/>
               </a:ext>
             </a:extLst>
           </p:cNvPr>
@@ -9078,7 +9613,7 @@
           <p:cNvPr id="12" name="">
             <a:extLst xmlns:a="http://schemas.openxmlformats.org/drawingml/2006/main">
               <a:ext uri="{FF2B5EF4-FFF2-40B4-BE49-F238E27FC236}">
-                <a16:creationId xmlns:a16="http://schemas.microsoft.com/office/drawing/2014/main" id="{E1D55278-3F83-49B3-B491-22493C354630}"/>
+                <a16:creationId xmlns:a16="http://schemas.microsoft.com/office/drawing/2014/main" id="{BE17AD24-105E-444E-93D7-7B41E95534FD}"/>
               </a:ext>
             </a:extLst>
           </p:cNvPr>
@@ -9090,7 +9625,7 @@
         <p:spPr>
           <a:xfrm xmlns:a="http://schemas.openxmlformats.org/drawingml/2006/main">
             <a:off x="3943350" y="3200400"/>
-            <a:ext cx="1428750" cy="190500"/>
+            <a:ext cx="1428750" cy="304800"/>
           </a:xfrm>
           <a:prstGeom xmlns:a="http://schemas.openxmlformats.org/drawingml/2006/main" prst="rect">
             <a:avLst/>
@@ -9142,7 +9677,7 @@
           <p:cNvPr id="13" name="">
             <a:extLst xmlns:a="http://schemas.openxmlformats.org/drawingml/2006/main">
               <a:ext uri="{FF2B5EF4-FFF2-40B4-BE49-F238E27FC236}">
-                <a16:creationId xmlns:a16="http://schemas.microsoft.com/office/drawing/2014/main" id="{0D1B05E5-7A9D-4058-B3CE-84C796C2AE30}"/>
+                <a16:creationId xmlns:a16="http://schemas.microsoft.com/office/drawing/2014/main" id="{07679E43-87E7-4A0E-A2A7-E2B1AF49BBD9}"/>
               </a:ext>
             </a:extLst>
           </p:cNvPr>
@@ -9224,7 +9759,7 @@
                 <a:ea typeface="Aptos"/>
                 <a:cs typeface="Aptos"/>
               </a:rPr>
-              <a:t>Ya es un gasto visible, pero en muchos casos todavia no compensa traer hardware, serving y operacion dentro de casa. La nube sigue siendo la opcion mas simple.</a:t>
+              <a:t>Ya es un gasto visible, pero en muchos casos todavía no compensa traer hardware, serving y operación dentro de casa. La nube sigue siendo la opción más simple.</a:t>
             </a:r>
           </a:p>
         </p:txBody>
@@ -9234,7 +9769,7 @@
           <p:cNvPr id="14" name="">
             <a:extLst xmlns:a="http://schemas.openxmlformats.org/drawingml/2006/main">
               <a:ext uri="{FF2B5EF4-FFF2-40B4-BE49-F238E27FC236}">
-                <a16:creationId xmlns:a16="http://schemas.microsoft.com/office/drawing/2014/main" id="{C5904239-2226-47AE-962D-5F6B67ECBE8D}"/>
+                <a16:creationId xmlns:a16="http://schemas.microsoft.com/office/drawing/2014/main" id="{8254BB19-63FC-4BA9-A568-2A97494214B9}"/>
               </a:ext>
             </a:extLst>
           </p:cNvPr>
@@ -9267,7 +9802,7 @@
           <p:cNvPr id="15" name="">
             <a:extLst xmlns:a="http://schemas.openxmlformats.org/drawingml/2006/main">
               <a:ext uri="{FF2B5EF4-FFF2-40B4-BE49-F238E27FC236}">
-                <a16:creationId xmlns:a16="http://schemas.microsoft.com/office/drawing/2014/main" id="{1107A5AE-BE99-455D-9825-31702C728F10}"/>
+                <a16:creationId xmlns:a16="http://schemas.microsoft.com/office/drawing/2014/main" id="{FF31E953-7D36-49B3-A6B6-80D4BC486BB3}"/>
               </a:ext>
             </a:extLst>
           </p:cNvPr>
@@ -9331,7 +9866,7 @@
           <p:cNvPr id="16" name="">
             <a:extLst xmlns:a="http://schemas.openxmlformats.org/drawingml/2006/main">
               <a:ext uri="{FF2B5EF4-FFF2-40B4-BE49-F238E27FC236}">
-                <a16:creationId xmlns:a16="http://schemas.microsoft.com/office/drawing/2014/main" id="{91446918-80A9-496A-9FCF-6ECC052BE2BB}"/>
+                <a16:creationId xmlns:a16="http://schemas.microsoft.com/office/drawing/2014/main" id="{FD4444A2-8FF6-459D-8F57-3AE2A37400E0}"/>
               </a:ext>
             </a:extLst>
           </p:cNvPr>
@@ -9395,7 +9930,7 @@
           <p:cNvPr id="17" name="">
             <a:extLst xmlns:a="http://schemas.openxmlformats.org/drawingml/2006/main">
               <a:ext uri="{FF2B5EF4-FFF2-40B4-BE49-F238E27FC236}">
-                <a16:creationId xmlns:a16="http://schemas.microsoft.com/office/drawing/2014/main" id="{6F2283AB-28B2-402B-B834-0E417D23FA6B}"/>
+                <a16:creationId xmlns:a16="http://schemas.microsoft.com/office/drawing/2014/main" id="{7F2DE605-8A9F-4D7E-8CCB-339B7651280D}"/>
               </a:ext>
             </a:extLst>
           </p:cNvPr>
@@ -9407,7 +9942,7 @@
         <p:spPr>
           <a:xfrm xmlns:a="http://schemas.openxmlformats.org/drawingml/2006/main">
             <a:off x="6248400" y="3200400"/>
-            <a:ext cx="1524000" cy="190500"/>
+            <a:ext cx="1524000" cy="304800"/>
           </a:xfrm>
           <a:prstGeom xmlns:a="http://schemas.openxmlformats.org/drawingml/2006/main" prst="rect">
             <a:avLst/>
@@ -9459,7 +9994,7 @@
           <p:cNvPr id="18" name="">
             <a:extLst xmlns:a="http://schemas.openxmlformats.org/drawingml/2006/main">
               <a:ext uri="{FF2B5EF4-FFF2-40B4-BE49-F238E27FC236}">
-                <a16:creationId xmlns:a16="http://schemas.microsoft.com/office/drawing/2014/main" id="{4837D973-E452-4538-907B-C9F3D3715184}"/>
+                <a16:creationId xmlns:a16="http://schemas.microsoft.com/office/drawing/2014/main" id="{92DCCF2F-40AB-45C7-A19B-5055BF903256}"/>
               </a:ext>
             </a:extLst>
           </p:cNvPr>
@@ -9523,7 +10058,7 @@
           <p:cNvPr id="19" name="">
             <a:extLst xmlns:a="http://schemas.openxmlformats.org/drawingml/2006/main">
               <a:ext uri="{FF2B5EF4-FFF2-40B4-BE49-F238E27FC236}">
-                <a16:creationId xmlns:a16="http://schemas.microsoft.com/office/drawing/2014/main" id="{76842B50-B378-440F-B7AE-D6332C41D3E7}"/>
+                <a16:creationId xmlns:a16="http://schemas.microsoft.com/office/drawing/2014/main" id="{1F25B09E-64C4-470E-8A73-B860EF8FB927}"/>
               </a:ext>
             </a:extLst>
           </p:cNvPr>
@@ -9535,7 +10070,7 @@
         <p:spPr>
           <a:xfrm xmlns:a="http://schemas.openxmlformats.org/drawingml/2006/main">
             <a:off x="8020050" y="3200400"/>
-            <a:ext cx="1524000" cy="190500"/>
+            <a:ext cx="1524000" cy="304800"/>
           </a:xfrm>
           <a:prstGeom xmlns:a="http://schemas.openxmlformats.org/drawingml/2006/main" prst="rect">
             <a:avLst/>
@@ -9587,7 +10122,7 @@
           <p:cNvPr id="20" name="">
             <a:extLst xmlns:a="http://schemas.openxmlformats.org/drawingml/2006/main">
               <a:ext uri="{FF2B5EF4-FFF2-40B4-BE49-F238E27FC236}">
-                <a16:creationId xmlns:a16="http://schemas.microsoft.com/office/drawing/2014/main" id="{217E62A2-9E93-4175-B384-03B6FBE02332}"/>
+                <a16:creationId xmlns:a16="http://schemas.microsoft.com/office/drawing/2014/main" id="{B540CFD7-A4E1-48C7-B9B9-D3B5399ADB91}"/>
               </a:ext>
             </a:extLst>
           </p:cNvPr>
@@ -9651,7 +10186,7 @@
           <p:cNvPr id="21" name="">
             <a:extLst xmlns:a="http://schemas.openxmlformats.org/drawingml/2006/main">
               <a:ext uri="{FF2B5EF4-FFF2-40B4-BE49-F238E27FC236}">
-                <a16:creationId xmlns:a16="http://schemas.microsoft.com/office/drawing/2014/main" id="{7228343B-B590-4EBA-8DF6-4AD1266EF40D}"/>
+                <a16:creationId xmlns:a16="http://schemas.microsoft.com/office/drawing/2014/main" id="{F8C24AB4-71E5-41CA-AB0B-4B00BF23FD16}"/>
               </a:ext>
             </a:extLst>
           </p:cNvPr>
@@ -9663,7 +10198,7 @@
         <p:spPr>
           <a:xfrm xmlns:a="http://schemas.openxmlformats.org/drawingml/2006/main">
             <a:off x="9810750" y="3200400"/>
-            <a:ext cx="1524000" cy="190500"/>
+            <a:ext cx="1524000" cy="304800"/>
           </a:xfrm>
           <a:prstGeom xmlns:a="http://schemas.openxmlformats.org/drawingml/2006/main" prst="rect">
             <a:avLst/>
@@ -9715,7 +10250,7 @@
           <p:cNvPr id="22" name="">
             <a:extLst xmlns:a="http://schemas.openxmlformats.org/drawingml/2006/main">
               <a:ext uri="{FF2B5EF4-FFF2-40B4-BE49-F238E27FC236}">
-                <a16:creationId xmlns:a16="http://schemas.microsoft.com/office/drawing/2014/main" id="{DD8C19E5-2C7F-4906-87F3-4B104A232EDF}"/>
+                <a16:creationId xmlns:a16="http://schemas.microsoft.com/office/drawing/2014/main" id="{953376E6-B847-4CC8-BB30-1E4BD7D08E9C}"/>
               </a:ext>
             </a:extLst>
           </p:cNvPr>
@@ -9797,7 +10332,7 @@
                 <a:ea typeface="Aptos"/>
                 <a:cs typeface="Aptos"/>
               </a:rPr>
-              <a:t>A este nivel, la empresa ya deberia comparar seriamente el gasto recurrente por tokens contra alternativas privadas o hibridas. No porque cloud sea mala, sino porque la escala cambia la ecuacion.</a:t>
+              <a:t>A este nivel, la empresa ya debería comparar seriamente el gasto recurrente por tokens contra alternativas privadas o híbridas. No porque cloud sea mala, sino porque la escala cambia la ecuación.</a:t>
             </a:r>
           </a:p>
         </p:txBody>
@@ -9807,7 +10342,7 @@
           <p:cNvPr id="23" name="">
             <a:extLst xmlns:a="http://schemas.openxmlformats.org/drawingml/2006/main">
               <a:ext uri="{FF2B5EF4-FFF2-40B4-BE49-F238E27FC236}">
-                <a16:creationId xmlns:a16="http://schemas.microsoft.com/office/drawing/2014/main" id="{7582D3B2-D7C9-4E6E-81E7-9E14AE4FD4F6}"/>
+                <a16:creationId xmlns:a16="http://schemas.microsoft.com/office/drawing/2014/main" id="{E510D036-9717-4C80-BDB6-A3ED8A5B2ABE}"/>
               </a:ext>
             </a:extLst>
           </p:cNvPr>
@@ -9871,7 +10406,7 @@
           <p:cNvPr id="24" name="">
             <a:extLst xmlns:a="http://schemas.openxmlformats.org/drawingml/2006/main">
               <a:ext uri="{FF2B5EF4-FFF2-40B4-BE49-F238E27FC236}">
-                <a16:creationId xmlns:a16="http://schemas.microsoft.com/office/drawing/2014/main" id="{A50FD900-0AF6-4C22-8B1C-89A54C0B3C92}"/>
+                <a16:creationId xmlns:a16="http://schemas.microsoft.com/office/drawing/2014/main" id="{AECD2C23-993C-4252-B624-0233A4A6CFB8}"/>
               </a:ext>
             </a:extLst>
           </p:cNvPr>
@@ -9933,7 +10468,7 @@
     </p:spTree>
     <p:extLst>
       <p:ext uri="{BB962C8B-B14F-4D97-AF65-F5344CB8AC3E}">
-        <p14:creationId xmlns:p14="http://schemas.microsoft.com/office/powerpoint/2010/main" val="133439590"/>
+        <p14:creationId xmlns:p14="http://schemas.microsoft.com/office/powerpoint/2010/main" val="1094773955"/>
       </p:ext>
     </p:extLst>
   </p:cSld>
@@ -9957,7 +10492,7 @@
           <p:cNvPr id="1" name="">
             <a:extLst xmlns:a="http://schemas.openxmlformats.org/drawingml/2006/main">
               <a:ext uri="{FF2B5EF4-FFF2-40B4-BE49-F238E27FC236}">
-                <a16:creationId xmlns:a16="http://schemas.microsoft.com/office/drawing/2014/main" id="{4895A92C-7D5D-41E9-A6AA-A3E92B7D8877}"/>
+                <a16:creationId xmlns:a16="http://schemas.microsoft.com/office/drawing/2014/main" id="{F9BC6730-8A3C-4CD3-A84E-B22A9A2F7508}"/>
               </a:ext>
             </a:extLst>
           </p:cNvPr>
@@ -9990,7 +10525,7 @@
           <p:cNvPr id="2" name="">
             <a:extLst xmlns:a="http://schemas.openxmlformats.org/drawingml/2006/main">
               <a:ext uri="{FF2B5EF4-FFF2-40B4-BE49-F238E27FC236}">
-                <a16:creationId xmlns:a16="http://schemas.microsoft.com/office/drawing/2014/main" id="{270CE68F-1DD7-4ACB-8E23-72367BD899EE}"/>
+                <a16:creationId xmlns:a16="http://schemas.microsoft.com/office/drawing/2014/main" id="{C478B7B8-27EA-48A9-BF7D-AD03182314EB}"/>
               </a:ext>
             </a:extLst>
           </p:cNvPr>
@@ -10023,7 +10558,7 @@
           <p:cNvPr id="3" name="">
             <a:extLst xmlns:a="http://schemas.openxmlformats.org/drawingml/2006/main">
               <a:ext uri="{FF2B5EF4-FFF2-40B4-BE49-F238E27FC236}">
-                <a16:creationId xmlns:a16="http://schemas.microsoft.com/office/drawing/2014/main" id="{DE654524-EE27-42EF-B475-371F36CA474F}"/>
+                <a16:creationId xmlns:a16="http://schemas.microsoft.com/office/drawing/2014/main" id="{62CB84B5-F77F-450E-9B5F-8EA4637AD635}"/>
               </a:ext>
             </a:extLst>
           </p:cNvPr>
@@ -10087,7 +10622,7 @@
           <p:cNvPr id="4" name="">
             <a:extLst xmlns:a="http://schemas.openxmlformats.org/drawingml/2006/main">
               <a:ext uri="{FF2B5EF4-FFF2-40B4-BE49-F238E27FC236}">
-                <a16:creationId xmlns:a16="http://schemas.microsoft.com/office/drawing/2014/main" id="{DF1F77A9-6D46-41F5-B81B-436965E7D398}"/>
+                <a16:creationId xmlns:a16="http://schemas.microsoft.com/office/drawing/2014/main" id="{B6D4F332-9289-4DB7-9009-D795DF8A0F9D}"/>
               </a:ext>
             </a:extLst>
           </p:cNvPr>
@@ -10151,7 +10686,7 @@
           <p:cNvPr id="5" name="">
             <a:extLst xmlns:a="http://schemas.openxmlformats.org/drawingml/2006/main">
               <a:ext uri="{FF2B5EF4-FFF2-40B4-BE49-F238E27FC236}">
-                <a16:creationId xmlns:a16="http://schemas.microsoft.com/office/drawing/2014/main" id="{2A3781AD-EE05-476B-B788-A1B5E7B93D7F}"/>
+                <a16:creationId xmlns:a16="http://schemas.microsoft.com/office/drawing/2014/main" id="{43FF3E8A-FB3A-4E87-B26D-16CCF9C90330}"/>
               </a:ext>
             </a:extLst>
           </p:cNvPr>
@@ -10184,7 +10719,7 @@
           <p:cNvPr id="6" name="">
             <a:extLst xmlns:a="http://schemas.openxmlformats.org/drawingml/2006/main">
               <a:ext uri="{FF2B5EF4-FFF2-40B4-BE49-F238E27FC236}">
-                <a16:creationId xmlns:a16="http://schemas.microsoft.com/office/drawing/2014/main" id="{C5F74263-0192-460C-9356-6A1BBE79B3F1}"/>
+                <a16:creationId xmlns:a16="http://schemas.microsoft.com/office/drawing/2014/main" id="{FA6E22F5-BA2D-4D60-BD13-6F53F5D98908}"/>
               </a:ext>
             </a:extLst>
           </p:cNvPr>
@@ -10238,7 +10773,7 @@
                 <a:ea typeface="Aptos"/>
                 <a:cs typeface="Aptos"/>
               </a:rPr>
-              <a:t>Lo que tendria que ser cierto</a:t>
+              <a:t>Lo que tendría que ser cierto</a:t>
             </a:r>
           </a:p>
         </p:txBody>
@@ -10248,7 +10783,7 @@
           <p:cNvPr id="7" name="">
             <a:extLst xmlns:a="http://schemas.openxmlformats.org/drawingml/2006/main">
               <a:ext uri="{FF2B5EF4-FFF2-40B4-BE49-F238E27FC236}">
-                <a16:creationId xmlns:a16="http://schemas.microsoft.com/office/drawing/2014/main" id="{0EA8C352-1806-4FE2-BB54-B96FAC9C9DF4}"/>
+                <a16:creationId xmlns:a16="http://schemas.microsoft.com/office/drawing/2014/main" id="{ED86A628-C781-4423-8788-7E1DF7ED7FCA}"/>
               </a:ext>
             </a:extLst>
           </p:cNvPr>
@@ -10281,7 +10816,7 @@
           <p:cNvPr id="8" name="">
             <a:extLst xmlns:a="http://schemas.openxmlformats.org/drawingml/2006/main">
               <a:ext uri="{FF2B5EF4-FFF2-40B4-BE49-F238E27FC236}">
-                <a16:creationId xmlns:a16="http://schemas.microsoft.com/office/drawing/2014/main" id="{DF4778C3-9EBD-4098-A692-52594866A9B1}"/>
+                <a16:creationId xmlns:a16="http://schemas.microsoft.com/office/drawing/2014/main" id="{01055154-F1BD-45A6-B807-938EDA387039}"/>
               </a:ext>
             </a:extLst>
           </p:cNvPr>
@@ -10345,7 +10880,7 @@
           <p:cNvPr id="9" name="">
             <a:extLst xmlns:a="http://schemas.openxmlformats.org/drawingml/2006/main">
               <a:ext uri="{FF2B5EF4-FFF2-40B4-BE49-F238E27FC236}">
-                <a16:creationId xmlns:a16="http://schemas.microsoft.com/office/drawing/2014/main" id="{4AA96ECC-2946-43E7-B652-1F23041115CF}"/>
+                <a16:creationId xmlns:a16="http://schemas.microsoft.com/office/drawing/2014/main" id="{4D81A5D9-4DD4-4B03-9A43-E771AAFF5111}"/>
               </a:ext>
             </a:extLst>
           </p:cNvPr>
@@ -10378,7 +10913,7 @@
           <p:cNvPr id="10" name="">
             <a:extLst xmlns:a="http://schemas.openxmlformats.org/drawingml/2006/main">
               <a:ext uri="{FF2B5EF4-FFF2-40B4-BE49-F238E27FC236}">
-                <a16:creationId xmlns:a16="http://schemas.microsoft.com/office/drawing/2014/main" id="{4DC6424B-8F44-437E-866C-99C8D70B457B}"/>
+                <a16:creationId xmlns:a16="http://schemas.microsoft.com/office/drawing/2014/main" id="{C72154FF-485D-4497-84E8-20F89AE54E73}"/>
               </a:ext>
             </a:extLst>
           </p:cNvPr>
@@ -10442,7 +10977,7 @@
           <p:cNvPr id="11" name="">
             <a:extLst xmlns:a="http://schemas.openxmlformats.org/drawingml/2006/main">
               <a:ext uri="{FF2B5EF4-FFF2-40B4-BE49-F238E27FC236}">
-                <a16:creationId xmlns:a16="http://schemas.microsoft.com/office/drawing/2014/main" id="{DBD366D5-E2E6-44EB-B893-574E8CD7B7A3}"/>
+                <a16:creationId xmlns:a16="http://schemas.microsoft.com/office/drawing/2014/main" id="{FF06514A-15C6-466D-9E89-5DFA26B7EEE2}"/>
               </a:ext>
             </a:extLst>
           </p:cNvPr>
@@ -10475,7 +11010,7 @@
           <p:cNvPr id="12" name="">
             <a:extLst xmlns:a="http://schemas.openxmlformats.org/drawingml/2006/main">
               <a:ext uri="{FF2B5EF4-FFF2-40B4-BE49-F238E27FC236}">
-                <a16:creationId xmlns:a16="http://schemas.microsoft.com/office/drawing/2014/main" id="{FC2EACC7-650B-4D7A-AACE-1C63ADDADBC6}"/>
+                <a16:creationId xmlns:a16="http://schemas.microsoft.com/office/drawing/2014/main" id="{EF7D103C-FB94-4EA4-9F9E-0815C4439742}"/>
               </a:ext>
             </a:extLst>
           </p:cNvPr>
@@ -10539,7 +11074,7 @@
           <p:cNvPr id="13" name="">
             <a:extLst xmlns:a="http://schemas.openxmlformats.org/drawingml/2006/main">
               <a:ext uri="{FF2B5EF4-FFF2-40B4-BE49-F238E27FC236}">
-                <a16:creationId xmlns:a16="http://schemas.microsoft.com/office/drawing/2014/main" id="{E36EB666-E50F-479A-9813-D71CE845BFB8}"/>
+                <a16:creationId xmlns:a16="http://schemas.microsoft.com/office/drawing/2014/main" id="{28974801-76CD-4F5B-BF1B-837DD26FE937}"/>
               </a:ext>
             </a:extLst>
           </p:cNvPr>
@@ -10572,7 +11107,7 @@
           <p:cNvPr id="14" name="">
             <a:extLst xmlns:a="http://schemas.openxmlformats.org/drawingml/2006/main">
               <a:ext uri="{FF2B5EF4-FFF2-40B4-BE49-F238E27FC236}">
-                <a16:creationId xmlns:a16="http://schemas.microsoft.com/office/drawing/2014/main" id="{F1AABCAC-0FB2-4EB2-8C8C-80BCDAD3CC2A}"/>
+                <a16:creationId xmlns:a16="http://schemas.microsoft.com/office/drawing/2014/main" id="{8E21B98D-ED55-4693-9480-4F8C90EE0967}"/>
               </a:ext>
             </a:extLst>
           </p:cNvPr>
@@ -10636,7 +11171,7 @@
           <p:cNvPr id="15" name="">
             <a:extLst xmlns:a="http://schemas.openxmlformats.org/drawingml/2006/main">
               <a:ext uri="{FF2B5EF4-FFF2-40B4-BE49-F238E27FC236}">
-                <a16:creationId xmlns:a16="http://schemas.microsoft.com/office/drawing/2014/main" id="{CAA806B1-2CB7-48B2-BD5B-55F67C8B1C43}"/>
+                <a16:creationId xmlns:a16="http://schemas.microsoft.com/office/drawing/2014/main" id="{0EAB80FA-112F-4074-A8BD-87EA0E0ED501}"/>
               </a:ext>
             </a:extLst>
           </p:cNvPr>
@@ -10669,7 +11204,7 @@
           <p:cNvPr id="16" name="">
             <a:extLst xmlns:a="http://schemas.openxmlformats.org/drawingml/2006/main">
               <a:ext uri="{FF2B5EF4-FFF2-40B4-BE49-F238E27FC236}">
-                <a16:creationId xmlns:a16="http://schemas.microsoft.com/office/drawing/2014/main" id="{F18B2BC2-9515-4449-BA34-79B73D61EB36}"/>
+                <a16:creationId xmlns:a16="http://schemas.microsoft.com/office/drawing/2014/main" id="{6F94C2F4-CB92-4409-B95E-992CDF7247CB}"/>
               </a:ext>
             </a:extLst>
           </p:cNvPr>
@@ -10733,7 +11268,7 @@
           <p:cNvPr id="17" name="">
             <a:extLst xmlns:a="http://schemas.openxmlformats.org/drawingml/2006/main">
               <a:ext uri="{FF2B5EF4-FFF2-40B4-BE49-F238E27FC236}">
-                <a16:creationId xmlns:a16="http://schemas.microsoft.com/office/drawing/2014/main" id="{C2A962A0-99AC-417D-978F-85C5C033422D}"/>
+                <a16:creationId xmlns:a16="http://schemas.microsoft.com/office/drawing/2014/main" id="{85345A16-1C41-406F-8B06-3A24BECD4A06}"/>
               </a:ext>
             </a:extLst>
           </p:cNvPr>
@@ -10766,7 +11301,7 @@
           <p:cNvPr id="18" name="">
             <a:extLst xmlns:a="http://schemas.openxmlformats.org/drawingml/2006/main">
               <a:ext uri="{FF2B5EF4-FFF2-40B4-BE49-F238E27FC236}">
-                <a16:creationId xmlns:a16="http://schemas.microsoft.com/office/drawing/2014/main" id="{6034F1FA-1114-4ADA-AC6F-E9CF5FE2DCD5}"/>
+                <a16:creationId xmlns:a16="http://schemas.microsoft.com/office/drawing/2014/main" id="{89B697FB-F191-4CDD-851A-3D012AE205BA}"/>
               </a:ext>
             </a:extLst>
           </p:cNvPr>
@@ -10830,7 +11365,7 @@
           <p:cNvPr id="19" name="">
             <a:extLst xmlns:a="http://schemas.openxmlformats.org/drawingml/2006/main">
               <a:ext uri="{FF2B5EF4-FFF2-40B4-BE49-F238E27FC236}">
-                <a16:creationId xmlns:a16="http://schemas.microsoft.com/office/drawing/2014/main" id="{2BD46A9A-49F5-4743-9AF8-EF5DBC914D68}"/>
+                <a16:creationId xmlns:a16="http://schemas.microsoft.com/office/drawing/2014/main" id="{AAA85CB7-6A00-4F98-A5DB-D7AC5F091027}"/>
               </a:ext>
             </a:extLst>
           </p:cNvPr>
@@ -10863,7 +11398,7 @@
           <p:cNvPr id="20" name="">
             <a:extLst xmlns:a="http://schemas.openxmlformats.org/drawingml/2006/main">
               <a:ext uri="{FF2B5EF4-FFF2-40B4-BE49-F238E27FC236}">
-                <a16:creationId xmlns:a16="http://schemas.microsoft.com/office/drawing/2014/main" id="{B2C303F4-327A-4A91-852D-CC07FCDC2917}"/>
+                <a16:creationId xmlns:a16="http://schemas.microsoft.com/office/drawing/2014/main" id="{ED036C57-A7C8-4BF7-B485-4887AC5B5762}"/>
               </a:ext>
             </a:extLst>
           </p:cNvPr>
@@ -10927,7 +11462,7 @@
           <p:cNvPr id="21" name="">
             <a:extLst xmlns:a="http://schemas.openxmlformats.org/drawingml/2006/main">
               <a:ext uri="{FF2B5EF4-FFF2-40B4-BE49-F238E27FC236}">
-                <a16:creationId xmlns:a16="http://schemas.microsoft.com/office/drawing/2014/main" id="{84BD06F5-07A5-45EA-BCB2-AB197FA1375A}"/>
+                <a16:creationId xmlns:a16="http://schemas.microsoft.com/office/drawing/2014/main" id="{AE731FB1-15C0-4D66-B320-1F0A9D0E4DBA}"/>
               </a:ext>
             </a:extLst>
           </p:cNvPr>
@@ -10960,7 +11495,7 @@
           <p:cNvPr id="22" name="">
             <a:extLst xmlns:a="http://schemas.openxmlformats.org/drawingml/2006/main">
               <a:ext uri="{FF2B5EF4-FFF2-40B4-BE49-F238E27FC236}">
-                <a16:creationId xmlns:a16="http://schemas.microsoft.com/office/drawing/2014/main" id="{99850234-965E-4475-A48E-293C0EC48FF6}"/>
+                <a16:creationId xmlns:a16="http://schemas.microsoft.com/office/drawing/2014/main" id="{A1389DE4-2D80-4ACF-B5BA-CC611865EFED}"/>
               </a:ext>
             </a:extLst>
           </p:cNvPr>
@@ -11024,7 +11559,7 @@
           <p:cNvPr id="23" name="">
             <a:extLst xmlns:a="http://schemas.openxmlformats.org/drawingml/2006/main">
               <a:ext uri="{FF2B5EF4-FFF2-40B4-BE49-F238E27FC236}">
-                <a16:creationId xmlns:a16="http://schemas.microsoft.com/office/drawing/2014/main" id="{2A079226-4EFE-49B4-9339-7F0BBDA2DA5C}"/>
+                <a16:creationId xmlns:a16="http://schemas.microsoft.com/office/drawing/2014/main" id="{666CD153-E2E8-4B34-9108-064EF1F2FB96}"/>
               </a:ext>
             </a:extLst>
           </p:cNvPr>
@@ -11057,7 +11592,7 @@
           <p:cNvPr id="24" name="">
             <a:extLst xmlns:a="http://schemas.openxmlformats.org/drawingml/2006/main">
               <a:ext uri="{FF2B5EF4-FFF2-40B4-BE49-F238E27FC236}">
-                <a16:creationId xmlns:a16="http://schemas.microsoft.com/office/drawing/2014/main" id="{92C75C42-8276-4CE9-AB38-AEC43E44624E}"/>
+                <a16:creationId xmlns:a16="http://schemas.microsoft.com/office/drawing/2014/main" id="{697DD1AC-43B1-4007-B530-77562E3C771B}"/>
               </a:ext>
             </a:extLst>
           </p:cNvPr>
@@ -11121,7 +11656,7 @@
           <p:cNvPr id="25" name="">
             <a:extLst xmlns:a="http://schemas.openxmlformats.org/drawingml/2006/main">
               <a:ext uri="{FF2B5EF4-FFF2-40B4-BE49-F238E27FC236}">
-                <a16:creationId xmlns:a16="http://schemas.microsoft.com/office/drawing/2014/main" id="{391E71F3-D4A7-439A-A796-4A6E243BD9FA}"/>
+                <a16:creationId xmlns:a16="http://schemas.microsoft.com/office/drawing/2014/main" id="{A53C3CB9-A91B-4DCF-9312-68CBC2351A23}"/>
               </a:ext>
             </a:extLst>
           </p:cNvPr>
@@ -11154,7 +11689,7 @@
           <p:cNvPr id="26" name="">
             <a:extLst xmlns:a="http://schemas.openxmlformats.org/drawingml/2006/main">
               <a:ext uri="{FF2B5EF4-FFF2-40B4-BE49-F238E27FC236}">
-                <a16:creationId xmlns:a16="http://schemas.microsoft.com/office/drawing/2014/main" id="{3A5C6A46-3BE7-40B1-9B4D-B720016B53F0}"/>
+                <a16:creationId xmlns:a16="http://schemas.microsoft.com/office/drawing/2014/main" id="{FE44F421-A0B8-48F1-AAF0-CA048DA81F4A}"/>
               </a:ext>
             </a:extLst>
           </p:cNvPr>
@@ -11218,7 +11753,7 @@
           <p:cNvPr id="27" name="">
             <a:extLst xmlns:a="http://schemas.openxmlformats.org/drawingml/2006/main">
               <a:ext uri="{FF2B5EF4-FFF2-40B4-BE49-F238E27FC236}">
-                <a16:creationId xmlns:a16="http://schemas.microsoft.com/office/drawing/2014/main" id="{5B8F9CDE-5DFF-4B85-88E5-8893A7F7AD04}"/>
+                <a16:creationId xmlns:a16="http://schemas.microsoft.com/office/drawing/2014/main" id="{CCED230B-4BB3-46E7-B909-C5441A2DB381}"/>
               </a:ext>
             </a:extLst>
           </p:cNvPr>
@@ -11251,7 +11786,7 @@
           <p:cNvPr id="28" name="">
             <a:extLst xmlns:a="http://schemas.openxmlformats.org/drawingml/2006/main">
               <a:ext uri="{FF2B5EF4-FFF2-40B4-BE49-F238E27FC236}">
-                <a16:creationId xmlns:a16="http://schemas.microsoft.com/office/drawing/2014/main" id="{7B8A3692-E05F-4B80-8079-EC0F0C0ECB73}"/>
+                <a16:creationId xmlns:a16="http://schemas.microsoft.com/office/drawing/2014/main" id="{6AC67F1E-EF0C-4BD8-A427-28C6FDA7C6AC}"/>
               </a:ext>
             </a:extLst>
           </p:cNvPr>
@@ -11305,7 +11840,7 @@
                 <a:ea typeface="Aptos"/>
                 <a:cs typeface="Aptos"/>
               </a:rPr>
-              <a:t>Necesidad de plataforma y MLOps mas fuerte.</a:t>
+              <a:t>Necesidad de plataforma y MLOps más fuerte.</a:t>
             </a:r>
           </a:p>
         </p:txBody>
@@ -11315,7 +11850,7 @@
           <p:cNvPr id="29" name="">
             <a:extLst xmlns:a="http://schemas.openxmlformats.org/drawingml/2006/main">
               <a:ext uri="{FF2B5EF4-FFF2-40B4-BE49-F238E27FC236}">
-                <a16:creationId xmlns:a16="http://schemas.microsoft.com/office/drawing/2014/main" id="{E64C28AC-15FD-4A37-8463-E6C521D8F809}"/>
+                <a16:creationId xmlns:a16="http://schemas.microsoft.com/office/drawing/2014/main" id="{7C026892-BD38-437C-B31E-08AEB6E7C56A}"/>
               </a:ext>
             </a:extLst>
           </p:cNvPr>
@@ -11379,7 +11914,7 @@
           <p:cNvPr id="30" name="">
             <a:extLst xmlns:a="http://schemas.openxmlformats.org/drawingml/2006/main">
               <a:ext uri="{FF2B5EF4-FFF2-40B4-BE49-F238E27FC236}">
-                <a16:creationId xmlns:a16="http://schemas.microsoft.com/office/drawing/2014/main" id="{449F5BA5-05E4-4613-B326-FAF94A3EA263}"/>
+                <a16:creationId xmlns:a16="http://schemas.microsoft.com/office/drawing/2014/main" id="{EBBE4D2A-889D-474D-B569-0EA08D9D0C89}"/>
               </a:ext>
             </a:extLst>
           </p:cNvPr>
@@ -11441,7 +11976,7 @@
     </p:spTree>
     <p:extLst>
       <p:ext uri="{BB962C8B-B14F-4D97-AF65-F5344CB8AC3E}">
-        <p14:creationId xmlns:p14="http://schemas.microsoft.com/office/powerpoint/2010/main" val="980805766"/>
+        <p14:creationId xmlns:p14="http://schemas.microsoft.com/office/powerpoint/2010/main" val="544737700"/>
       </p:ext>
     </p:extLst>
   </p:cSld>
@@ -11465,7 +12000,7 @@
           <p:cNvPr id="1" name="">
             <a:extLst xmlns:a="http://schemas.openxmlformats.org/drawingml/2006/main">
               <a:ext uri="{FF2B5EF4-FFF2-40B4-BE49-F238E27FC236}">
-                <a16:creationId xmlns:a16="http://schemas.microsoft.com/office/drawing/2014/main" id="{52529C33-8A9B-4267-8555-CB19EA329E7B}"/>
+                <a16:creationId xmlns:a16="http://schemas.microsoft.com/office/drawing/2014/main" id="{B7E2CE48-18FC-4925-AE5E-8C52E415373E}"/>
               </a:ext>
             </a:extLst>
           </p:cNvPr>
@@ -11498,7 +12033,7 @@
           <p:cNvPr id="2" name="">
             <a:extLst xmlns:a="http://schemas.openxmlformats.org/drawingml/2006/main">
               <a:ext uri="{FF2B5EF4-FFF2-40B4-BE49-F238E27FC236}">
-                <a16:creationId xmlns:a16="http://schemas.microsoft.com/office/drawing/2014/main" id="{C344A755-E07C-4495-820A-F4A40A05F4BD}"/>
+                <a16:creationId xmlns:a16="http://schemas.microsoft.com/office/drawing/2014/main" id="{2A7D7EB6-2D58-4882-8464-D360C4172FCE}"/>
               </a:ext>
             </a:extLst>
           </p:cNvPr>
@@ -11531,7 +12066,7 @@
           <p:cNvPr id="3" name="">
             <a:extLst xmlns:a="http://schemas.openxmlformats.org/drawingml/2006/main">
               <a:ext uri="{FF2B5EF4-FFF2-40B4-BE49-F238E27FC236}">
-                <a16:creationId xmlns:a16="http://schemas.microsoft.com/office/drawing/2014/main" id="{72DDA950-0863-4D0C-9088-1351338FE815}"/>
+                <a16:creationId xmlns:a16="http://schemas.microsoft.com/office/drawing/2014/main" id="{34AC3E2E-3BAA-4993-BED6-239834C59EBE}"/>
               </a:ext>
             </a:extLst>
           </p:cNvPr>
@@ -11595,7 +12130,7 @@
           <p:cNvPr id="4" name="">
             <a:extLst xmlns:a="http://schemas.openxmlformats.org/drawingml/2006/main">
               <a:ext uri="{FF2B5EF4-FFF2-40B4-BE49-F238E27FC236}">
-                <a16:creationId xmlns:a16="http://schemas.microsoft.com/office/drawing/2014/main" id="{8EDCC147-6C4C-424C-BE96-DF33B3C5E427}"/>
+                <a16:creationId xmlns:a16="http://schemas.microsoft.com/office/drawing/2014/main" id="{D504DCE7-8C4F-423E-908F-F419FD168400}"/>
               </a:ext>
             </a:extLst>
           </p:cNvPr>
@@ -11649,7 +12184,7 @@
                 <a:ea typeface="Aptos Display"/>
                 <a:cs typeface="Aptos Display"/>
               </a:rPr>
-              <a:t>La decision correcta no es cloud versus on-premise en abstracto. Es que workload merece cada una.</a:t>
+              <a:t>La decisión correcta no es cloud versus on-premise en abstracto. Es qué workload merece cada una.</a:t>
             </a:r>
           </a:p>
         </p:txBody>
@@ -11659,7 +12194,7 @@
           <p:cNvPr id="5" name="">
             <a:extLst xmlns:a="http://schemas.openxmlformats.org/drawingml/2006/main">
               <a:ext uri="{FF2B5EF4-FFF2-40B4-BE49-F238E27FC236}">
-                <a16:creationId xmlns:a16="http://schemas.microsoft.com/office/drawing/2014/main" id="{BC11F4C8-1A71-47D9-9CEB-ED185E8B010E}"/>
+                <a16:creationId xmlns:a16="http://schemas.microsoft.com/office/drawing/2014/main" id="{4291ED3C-A165-433E-9B6F-59F7FE85B19E}"/>
               </a:ext>
             </a:extLst>
           </p:cNvPr>
@@ -11692,7 +12227,7 @@
           <p:cNvPr id="6" name="">
             <a:extLst xmlns:a="http://schemas.openxmlformats.org/drawingml/2006/main">
               <a:ext uri="{FF2B5EF4-FFF2-40B4-BE49-F238E27FC236}">
-                <a16:creationId xmlns:a16="http://schemas.microsoft.com/office/drawing/2014/main" id="{F488AC9F-A65C-4227-BE69-E29763A8A217}"/>
+                <a16:creationId xmlns:a16="http://schemas.microsoft.com/office/drawing/2014/main" id="{0F5B566C-86F0-487F-9ADF-DA661C18D42D}"/>
               </a:ext>
             </a:extLst>
           </p:cNvPr>
@@ -11746,7 +12281,7 @@
                 <a:ea typeface="Aptos"/>
                 <a:cs typeface="Aptos"/>
               </a:rPr>
-              <a:t>Comparacion ejecutiva</a:t>
+              <a:t>Comparación ejecutiva</a:t>
             </a:r>
           </a:p>
         </p:txBody>
@@ -11756,7 +12291,7 @@
           <p:cNvPr id="7" name="">
             <a:extLst xmlns:a="http://schemas.openxmlformats.org/drawingml/2006/main">
               <a:ext uri="{FF2B5EF4-FFF2-40B4-BE49-F238E27FC236}">
-                <a16:creationId xmlns:a16="http://schemas.microsoft.com/office/drawing/2014/main" id="{DCF9FCBD-6CC8-4077-8309-914F30AC7C7C}"/>
+                <a16:creationId xmlns:a16="http://schemas.microsoft.com/office/drawing/2014/main" id="{551EF2B4-8DAA-4AA5-8A95-6DA6D4FBEEF6}"/>
               </a:ext>
             </a:extLst>
           </p:cNvPr>
@@ -11810,7 +12345,7 @@
                 <a:ea typeface="Aptos Mono"/>
                 <a:cs typeface="Aptos Mono"/>
               </a:rPr>
-              <a:t>Dimension</a:t>
+              <a:t>Dimensión</a:t>
             </a:r>
           </a:p>
         </p:txBody>
@@ -11820,7 +12355,7 @@
           <p:cNvPr id="8" name="">
             <a:extLst xmlns:a="http://schemas.openxmlformats.org/drawingml/2006/main">
               <a:ext uri="{FF2B5EF4-FFF2-40B4-BE49-F238E27FC236}">
-                <a16:creationId xmlns:a16="http://schemas.microsoft.com/office/drawing/2014/main" id="{BE7F0A06-21FE-43E1-95B9-FE73EEEECA1A}"/>
+                <a16:creationId xmlns:a16="http://schemas.microsoft.com/office/drawing/2014/main" id="{36EB4077-0414-4FB7-A3E9-CB4735EB1774}"/>
               </a:ext>
             </a:extLst>
           </p:cNvPr>
@@ -11884,7 +12419,7 @@
           <p:cNvPr id="9" name="">
             <a:extLst xmlns:a="http://schemas.openxmlformats.org/drawingml/2006/main">
               <a:ext uri="{FF2B5EF4-FFF2-40B4-BE49-F238E27FC236}">
-                <a16:creationId xmlns:a16="http://schemas.microsoft.com/office/drawing/2014/main" id="{822DF2ED-1927-4F47-BE3B-15CB2D01E2F8}"/>
+                <a16:creationId xmlns:a16="http://schemas.microsoft.com/office/drawing/2014/main" id="{AC9F08B1-66B6-4B24-852D-9FA82E3989B9}"/>
               </a:ext>
             </a:extLst>
           </p:cNvPr>
@@ -11948,7 +12483,7 @@
           <p:cNvPr id="10" name="">
             <a:extLst xmlns:a="http://schemas.openxmlformats.org/drawingml/2006/main">
               <a:ext uri="{FF2B5EF4-FFF2-40B4-BE49-F238E27FC236}">
-                <a16:creationId xmlns:a16="http://schemas.microsoft.com/office/drawing/2014/main" id="{E640E080-5296-47D4-A4FD-084C354908B5}"/>
+                <a16:creationId xmlns:a16="http://schemas.microsoft.com/office/drawing/2014/main" id="{C0997E04-5DB7-4E39-82CF-4E3FBEA908B6}"/>
               </a:ext>
             </a:extLst>
           </p:cNvPr>
@@ -11981,7 +12516,7 @@
           <p:cNvPr id="11" name="">
             <a:extLst xmlns:a="http://schemas.openxmlformats.org/drawingml/2006/main">
               <a:ext uri="{FF2B5EF4-FFF2-40B4-BE49-F238E27FC236}">
-                <a16:creationId xmlns:a16="http://schemas.microsoft.com/office/drawing/2014/main" id="{AD6F4677-D80B-42AF-A8AF-87353ED434BA}"/>
+                <a16:creationId xmlns:a16="http://schemas.microsoft.com/office/drawing/2014/main" id="{6225BA63-4ADF-4BEA-A948-E7202E8B8D6A}"/>
               </a:ext>
             </a:extLst>
           </p:cNvPr>
@@ -12045,7 +12580,7 @@
           <p:cNvPr id="12" name="">
             <a:extLst xmlns:a="http://schemas.openxmlformats.org/drawingml/2006/main">
               <a:ext uri="{FF2B5EF4-FFF2-40B4-BE49-F238E27FC236}">
-                <a16:creationId xmlns:a16="http://schemas.microsoft.com/office/drawing/2014/main" id="{5E38D647-04E0-4B8C-ABDA-61F0D7266F32}"/>
+                <a16:creationId xmlns:a16="http://schemas.microsoft.com/office/drawing/2014/main" id="{F75E120F-4DFA-41D7-A6CB-AF5CFEEA6239}"/>
               </a:ext>
             </a:extLst>
           </p:cNvPr>
@@ -12109,7 +12644,7 @@
           <p:cNvPr id="13" name="">
             <a:extLst xmlns:a="http://schemas.openxmlformats.org/drawingml/2006/main">
               <a:ext uri="{FF2B5EF4-FFF2-40B4-BE49-F238E27FC236}">
-                <a16:creationId xmlns:a16="http://schemas.microsoft.com/office/drawing/2014/main" id="{FF647E40-2256-44E9-9F83-77AB055BF1FE}"/>
+                <a16:creationId xmlns:a16="http://schemas.microsoft.com/office/drawing/2014/main" id="{32772AF3-BE68-48A1-A12C-0C63ADF1D452}"/>
               </a:ext>
             </a:extLst>
           </p:cNvPr>
@@ -12173,7 +12708,7 @@
           <p:cNvPr id="14" name="">
             <a:extLst xmlns:a="http://schemas.openxmlformats.org/drawingml/2006/main">
               <a:ext uri="{FF2B5EF4-FFF2-40B4-BE49-F238E27FC236}">
-                <a16:creationId xmlns:a16="http://schemas.microsoft.com/office/drawing/2014/main" id="{10DCC0B8-0E67-48C6-A795-98484127A464}"/>
+                <a16:creationId xmlns:a16="http://schemas.microsoft.com/office/drawing/2014/main" id="{F7004E70-630A-4B22-8F27-38D51824124F}"/>
               </a:ext>
             </a:extLst>
           </p:cNvPr>
@@ -12237,7 +12772,7 @@
           <p:cNvPr id="15" name="">
             <a:extLst xmlns:a="http://schemas.openxmlformats.org/drawingml/2006/main">
               <a:ext uri="{FF2B5EF4-FFF2-40B4-BE49-F238E27FC236}">
-                <a16:creationId xmlns:a16="http://schemas.microsoft.com/office/drawing/2014/main" id="{EE77ECF7-E914-41DA-A009-478F929FE438}"/>
+                <a16:creationId xmlns:a16="http://schemas.microsoft.com/office/drawing/2014/main" id="{35F64EAE-3B5A-492D-9238-D077D51DF392}"/>
               </a:ext>
             </a:extLst>
           </p:cNvPr>
@@ -12301,7 +12836,7 @@
           <p:cNvPr id="16" name="">
             <a:extLst xmlns:a="http://schemas.openxmlformats.org/drawingml/2006/main">
               <a:ext uri="{FF2B5EF4-FFF2-40B4-BE49-F238E27FC236}">
-                <a16:creationId xmlns:a16="http://schemas.microsoft.com/office/drawing/2014/main" id="{2D674A16-83F2-452C-A788-E2B2BDA8AB6F}"/>
+                <a16:creationId xmlns:a16="http://schemas.microsoft.com/office/drawing/2014/main" id="{E753F91F-E22B-4EDD-8BB7-AA5E64C2AFCD}"/>
               </a:ext>
             </a:extLst>
           </p:cNvPr>
@@ -12365,7 +12900,7 @@
           <p:cNvPr id="17" name="">
             <a:extLst xmlns:a="http://schemas.openxmlformats.org/drawingml/2006/main">
               <a:ext uri="{FF2B5EF4-FFF2-40B4-BE49-F238E27FC236}">
-                <a16:creationId xmlns:a16="http://schemas.microsoft.com/office/drawing/2014/main" id="{C31A4B4B-AB2A-4721-ACA8-546671E14B3B}"/>
+                <a16:creationId xmlns:a16="http://schemas.microsoft.com/office/drawing/2014/main" id="{4BDA2991-8D41-433B-A5C5-10ED6CD36659}"/>
               </a:ext>
             </a:extLst>
           </p:cNvPr>
@@ -12398,7 +12933,7 @@
           <p:cNvPr id="18" name="">
             <a:extLst xmlns:a="http://schemas.openxmlformats.org/drawingml/2006/main">
               <a:ext uri="{FF2B5EF4-FFF2-40B4-BE49-F238E27FC236}">
-                <a16:creationId xmlns:a16="http://schemas.microsoft.com/office/drawing/2014/main" id="{1E9B6EB5-01B3-4BED-B5CC-45CBA90705F7}"/>
+                <a16:creationId xmlns:a16="http://schemas.microsoft.com/office/drawing/2014/main" id="{DD02F072-5F81-4317-BC38-887227896881}"/>
               </a:ext>
             </a:extLst>
           </p:cNvPr>
@@ -12462,7 +12997,7 @@
           <p:cNvPr id="19" name="">
             <a:extLst xmlns:a="http://schemas.openxmlformats.org/drawingml/2006/main">
               <a:ext uri="{FF2B5EF4-FFF2-40B4-BE49-F238E27FC236}">
-                <a16:creationId xmlns:a16="http://schemas.microsoft.com/office/drawing/2014/main" id="{DA786768-6350-40A5-9790-512194F0933B}"/>
+                <a16:creationId xmlns:a16="http://schemas.microsoft.com/office/drawing/2014/main" id="{7B37BEC7-D641-4F69-9EEB-D3BF56296009}"/>
               </a:ext>
             </a:extLst>
           </p:cNvPr>
@@ -12526,7 +13061,7 @@
           <p:cNvPr id="20" name="">
             <a:extLst xmlns:a="http://schemas.openxmlformats.org/drawingml/2006/main">
               <a:ext uri="{FF2B5EF4-FFF2-40B4-BE49-F238E27FC236}">
-                <a16:creationId xmlns:a16="http://schemas.microsoft.com/office/drawing/2014/main" id="{43253CD0-98D7-4779-B76C-895DFEFE78BB}"/>
+                <a16:creationId xmlns:a16="http://schemas.microsoft.com/office/drawing/2014/main" id="{AB5654BE-13A3-46DE-9294-E9D9AC350937}"/>
               </a:ext>
             </a:extLst>
           </p:cNvPr>
@@ -12590,7 +13125,7 @@
           <p:cNvPr id="21" name="">
             <a:extLst xmlns:a="http://schemas.openxmlformats.org/drawingml/2006/main">
               <a:ext uri="{FF2B5EF4-FFF2-40B4-BE49-F238E27FC236}">
-                <a16:creationId xmlns:a16="http://schemas.microsoft.com/office/drawing/2014/main" id="{541624B7-DEC0-470F-81B0-88C2CCCC3333}"/>
+                <a16:creationId xmlns:a16="http://schemas.microsoft.com/office/drawing/2014/main" id="{EDF39CA3-2774-4160-834A-FA2412B7001E}"/>
               </a:ext>
             </a:extLst>
           </p:cNvPr>
@@ -12654,7 +13189,7 @@
           <p:cNvPr id="22" name="">
             <a:extLst xmlns:a="http://schemas.openxmlformats.org/drawingml/2006/main">
               <a:ext uri="{FF2B5EF4-FFF2-40B4-BE49-F238E27FC236}">
-                <a16:creationId xmlns:a16="http://schemas.microsoft.com/office/drawing/2014/main" id="{8CE43614-13B2-4A8B-8299-FDB174DB3AE7}"/>
+                <a16:creationId xmlns:a16="http://schemas.microsoft.com/office/drawing/2014/main" id="{3B771458-9E32-4F69-84D7-70837327D2AE}"/>
               </a:ext>
             </a:extLst>
           </p:cNvPr>
@@ -12718,7 +13253,7 @@
           <p:cNvPr id="23" name="">
             <a:extLst xmlns:a="http://schemas.openxmlformats.org/drawingml/2006/main">
               <a:ext uri="{FF2B5EF4-FFF2-40B4-BE49-F238E27FC236}">
-                <a16:creationId xmlns:a16="http://schemas.microsoft.com/office/drawing/2014/main" id="{3E81C8A2-124B-4611-8476-3CCA8F937A37}"/>
+                <a16:creationId xmlns:a16="http://schemas.microsoft.com/office/drawing/2014/main" id="{004E39AC-455C-4153-AD8F-82C7AF0479DD}"/>
               </a:ext>
             </a:extLst>
           </p:cNvPr>
@@ -12782,7 +13317,7 @@
           <p:cNvPr id="24" name="">
             <a:extLst xmlns:a="http://schemas.openxmlformats.org/drawingml/2006/main">
               <a:ext uri="{FF2B5EF4-FFF2-40B4-BE49-F238E27FC236}">
-                <a16:creationId xmlns:a16="http://schemas.microsoft.com/office/drawing/2014/main" id="{EC8A017C-CE2F-4308-93D8-9E1C4F201B4C}"/>
+                <a16:creationId xmlns:a16="http://schemas.microsoft.com/office/drawing/2014/main" id="{E7591C17-EEE7-47D9-86A0-ED502555BB28}"/>
               </a:ext>
             </a:extLst>
           </p:cNvPr>
@@ -12815,7 +13350,7 @@
           <p:cNvPr id="25" name="">
             <a:extLst xmlns:a="http://schemas.openxmlformats.org/drawingml/2006/main">
               <a:ext uri="{FF2B5EF4-FFF2-40B4-BE49-F238E27FC236}">
-                <a16:creationId xmlns:a16="http://schemas.microsoft.com/office/drawing/2014/main" id="{6FC1D320-8B3D-49DA-8FCD-1A99646FFEB6}"/>
+                <a16:creationId xmlns:a16="http://schemas.microsoft.com/office/drawing/2014/main" id="{C13EF430-97EA-426B-9F32-D0FA580184B4}"/>
               </a:ext>
             </a:extLst>
           </p:cNvPr>
@@ -12869,7 +13404,7 @@
                 <a:ea typeface="Aptos"/>
                 <a:cs typeface="Aptos"/>
               </a:rPr>
-              <a:t>Operacion</a:t>
+              <a:t>Operación</a:t>
             </a:r>
           </a:p>
         </p:txBody>
@@ -12879,7 +13414,7 @@
           <p:cNvPr id="26" name="">
             <a:extLst xmlns:a="http://schemas.openxmlformats.org/drawingml/2006/main">
               <a:ext uri="{FF2B5EF4-FFF2-40B4-BE49-F238E27FC236}">
-                <a16:creationId xmlns:a16="http://schemas.microsoft.com/office/drawing/2014/main" id="{15271816-54CF-4C48-8EB3-E86C8E848C53}"/>
+                <a16:creationId xmlns:a16="http://schemas.microsoft.com/office/drawing/2014/main" id="{3C4836C5-863E-4125-A00B-275C61340EFB}"/>
               </a:ext>
             </a:extLst>
           </p:cNvPr>
@@ -12943,7 +13478,7 @@
           <p:cNvPr id="27" name="">
             <a:extLst xmlns:a="http://schemas.openxmlformats.org/drawingml/2006/main">
               <a:ext uri="{FF2B5EF4-FFF2-40B4-BE49-F238E27FC236}">
-                <a16:creationId xmlns:a16="http://schemas.microsoft.com/office/drawing/2014/main" id="{6645A8BE-7A0F-46B2-8F0F-648EBF31DA02}"/>
+                <a16:creationId xmlns:a16="http://schemas.microsoft.com/office/drawing/2014/main" id="{ED985BB2-E488-427F-86D7-C6E51E814C38}"/>
               </a:ext>
             </a:extLst>
           </p:cNvPr>
@@ -13007,7 +13542,7 @@
           <p:cNvPr id="28" name="">
             <a:extLst xmlns:a="http://schemas.openxmlformats.org/drawingml/2006/main">
               <a:ext uri="{FF2B5EF4-FFF2-40B4-BE49-F238E27FC236}">
-                <a16:creationId xmlns:a16="http://schemas.microsoft.com/office/drawing/2014/main" id="{F74ED454-2B41-4DED-80DD-D74D2C309493}"/>
+                <a16:creationId xmlns:a16="http://schemas.microsoft.com/office/drawing/2014/main" id="{EAB206C9-4D49-4740-B1FF-E95AA8F91ED8}"/>
               </a:ext>
             </a:extLst>
           </p:cNvPr>
@@ -13071,7 +13606,7 @@
           <p:cNvPr id="29" name="">
             <a:extLst xmlns:a="http://schemas.openxmlformats.org/drawingml/2006/main">
               <a:ext uri="{FF2B5EF4-FFF2-40B4-BE49-F238E27FC236}">
-                <a16:creationId xmlns:a16="http://schemas.microsoft.com/office/drawing/2014/main" id="{13C3EA22-D656-4C8D-8561-522B34D833A6}"/>
+                <a16:creationId xmlns:a16="http://schemas.microsoft.com/office/drawing/2014/main" id="{0A550A48-94A4-44E0-8184-21DCA92488CE}"/>
               </a:ext>
             </a:extLst>
           </p:cNvPr>
@@ -13135,7 +13670,7 @@
           <p:cNvPr id="30" name="">
             <a:extLst xmlns:a="http://schemas.openxmlformats.org/drawingml/2006/main">
               <a:ext uri="{FF2B5EF4-FFF2-40B4-BE49-F238E27FC236}">
-                <a16:creationId xmlns:a16="http://schemas.microsoft.com/office/drawing/2014/main" id="{FB76E11F-BBC3-40FF-956B-760F857D5284}"/>
+                <a16:creationId xmlns:a16="http://schemas.microsoft.com/office/drawing/2014/main" id="{049FDBB8-7A7C-4AB0-BF73-AAB9B3AEFCF5}"/>
               </a:ext>
             </a:extLst>
           </p:cNvPr>
@@ -13199,7 +13734,7 @@
           <p:cNvPr id="31" name="">
             <a:extLst xmlns:a="http://schemas.openxmlformats.org/drawingml/2006/main">
               <a:ext uri="{FF2B5EF4-FFF2-40B4-BE49-F238E27FC236}">
-                <a16:creationId xmlns:a16="http://schemas.microsoft.com/office/drawing/2014/main" id="{8B276325-B9D4-4D4B-B8BC-252536D0A1AF}"/>
+                <a16:creationId xmlns:a16="http://schemas.microsoft.com/office/drawing/2014/main" id="{19BF1738-E954-4551-9A52-EFB94D144BBD}"/>
               </a:ext>
             </a:extLst>
           </p:cNvPr>
@@ -13232,7 +13767,7 @@
           <p:cNvPr id="32" name="">
             <a:extLst xmlns:a="http://schemas.openxmlformats.org/drawingml/2006/main">
               <a:ext uri="{FF2B5EF4-FFF2-40B4-BE49-F238E27FC236}">
-                <a16:creationId xmlns:a16="http://schemas.microsoft.com/office/drawing/2014/main" id="{C83D0046-799F-4723-8FC3-F0ABF6404036}"/>
+                <a16:creationId xmlns:a16="http://schemas.microsoft.com/office/drawing/2014/main" id="{D6911309-3089-4C6C-82BC-39621C6F403C}"/>
               </a:ext>
             </a:extLst>
           </p:cNvPr>
@@ -13296,7 +13831,7 @@
           <p:cNvPr id="33" name="">
             <a:extLst xmlns:a="http://schemas.openxmlformats.org/drawingml/2006/main">
               <a:ext uri="{FF2B5EF4-FFF2-40B4-BE49-F238E27FC236}">
-                <a16:creationId xmlns:a16="http://schemas.microsoft.com/office/drawing/2014/main" id="{A274C3B1-75D8-4BA3-82EC-2F2AD88B1FA2}"/>
+                <a16:creationId xmlns:a16="http://schemas.microsoft.com/office/drawing/2014/main" id="{EAF00BEE-9AF2-4C12-A1A7-9E07B6DFDC54}"/>
               </a:ext>
             </a:extLst>
           </p:cNvPr>
@@ -13360,7 +13895,7 @@
           <p:cNvPr id="34" name="">
             <a:extLst xmlns:a="http://schemas.openxmlformats.org/drawingml/2006/main">
               <a:ext uri="{FF2B5EF4-FFF2-40B4-BE49-F238E27FC236}">
-                <a16:creationId xmlns:a16="http://schemas.microsoft.com/office/drawing/2014/main" id="{2928A161-A7D7-4BB8-9B73-558AD885C8BF}"/>
+                <a16:creationId xmlns:a16="http://schemas.microsoft.com/office/drawing/2014/main" id="{B1ACB954-4700-43E3-B16F-4F61D4F64D29}"/>
               </a:ext>
             </a:extLst>
           </p:cNvPr>
@@ -13424,7 +13959,7 @@
           <p:cNvPr id="35" name="">
             <a:extLst xmlns:a="http://schemas.openxmlformats.org/drawingml/2006/main">
               <a:ext uri="{FF2B5EF4-FFF2-40B4-BE49-F238E27FC236}">
-                <a16:creationId xmlns:a16="http://schemas.microsoft.com/office/drawing/2014/main" id="{600E91F5-50C0-4A35-87E4-B94D5D49C81F}"/>
+                <a16:creationId xmlns:a16="http://schemas.microsoft.com/office/drawing/2014/main" id="{0C54E3FE-8B55-4E8F-AD93-73E0067CE1E7}"/>
               </a:ext>
             </a:extLst>
           </p:cNvPr>
@@ -13457,7 +13992,7 @@
           <p:cNvPr id="36" name="">
             <a:extLst xmlns:a="http://schemas.openxmlformats.org/drawingml/2006/main">
               <a:ext uri="{FF2B5EF4-FFF2-40B4-BE49-F238E27FC236}">
-                <a16:creationId xmlns:a16="http://schemas.microsoft.com/office/drawing/2014/main" id="{001186FD-318C-41F7-A112-A8987AC1CF33}"/>
+                <a16:creationId xmlns:a16="http://schemas.microsoft.com/office/drawing/2014/main" id="{69940512-1C92-4B72-BF3D-A2F290D4342D}"/>
               </a:ext>
             </a:extLst>
           </p:cNvPr>
@@ -13511,7 +14046,7 @@
                 <a:ea typeface="Aptos"/>
                 <a:cs typeface="Aptos"/>
               </a:rPr>
-              <a:t>El retorno no es al pasado: es a una arquitectura mas segmentada por costo, riesgo y calidad requerida.</a:t>
+              <a:t>El retorno no es al pasado: es a una arquitectura más segmentada por costo, riesgo y calidad requerida.</a:t>
             </a:r>
           </a:p>
         </p:txBody>
@@ -13521,7 +14056,7 @@
           <p:cNvPr id="37" name="">
             <a:extLst xmlns:a="http://schemas.openxmlformats.org/drawingml/2006/main">
               <a:ext uri="{FF2B5EF4-FFF2-40B4-BE49-F238E27FC236}">
-                <a16:creationId xmlns:a16="http://schemas.microsoft.com/office/drawing/2014/main" id="{BC0845C0-FA8D-4DCC-8E44-5B0776B971B2}"/>
+                <a16:creationId xmlns:a16="http://schemas.microsoft.com/office/drawing/2014/main" id="{370D0442-EB5C-4C4F-A297-42EB9E28F6D9}"/>
               </a:ext>
             </a:extLst>
           </p:cNvPr>
@@ -13575,7 +14110,7 @@
                 <a:ea typeface="Aptos"/>
                 <a:cs typeface="Aptos"/>
               </a:rPr>
-              <a:t>La unidad de decision no es la empresa completa: es cada workload.</a:t>
+              <a:t>La unidad de decisión no es la empresa completa: es cada workload.</a:t>
             </a:r>
           </a:p>
         </p:txBody>
@@ -13585,7 +14120,7 @@
           <p:cNvPr id="38" name="">
             <a:extLst xmlns:a="http://schemas.openxmlformats.org/drawingml/2006/main">
               <a:ext uri="{FF2B5EF4-FFF2-40B4-BE49-F238E27FC236}">
-                <a16:creationId xmlns:a16="http://schemas.microsoft.com/office/drawing/2014/main" id="{7F5798A7-3FE1-43B0-8699-0C3118111F55}"/>
+                <a16:creationId xmlns:a16="http://schemas.microsoft.com/office/drawing/2014/main" id="{A401CEA3-C486-482F-BB22-884D5866CA9C}"/>
               </a:ext>
             </a:extLst>
           </p:cNvPr>
@@ -13647,7 +14182,7 @@
     </p:spTree>
     <p:extLst>
       <p:ext uri="{BB962C8B-B14F-4D97-AF65-F5344CB8AC3E}">
-        <p14:creationId xmlns:p14="http://schemas.microsoft.com/office/powerpoint/2010/main" val="1487001801"/>
+        <p14:creationId xmlns:p14="http://schemas.microsoft.com/office/powerpoint/2010/main" val="933598380"/>
       </p:ext>
     </p:extLst>
   </p:cSld>
@@ -13671,7 +14206,7 @@
           <p:cNvPr id="1" name="">
             <a:extLst xmlns:a="http://schemas.openxmlformats.org/drawingml/2006/main">
               <a:ext uri="{FF2B5EF4-FFF2-40B4-BE49-F238E27FC236}">
-                <a16:creationId xmlns:a16="http://schemas.microsoft.com/office/drawing/2014/main" id="{07CAB8BF-CF23-40FE-962F-FA9070408150}"/>
+                <a16:creationId xmlns:a16="http://schemas.microsoft.com/office/drawing/2014/main" id="{DA72AF7D-AA44-4071-A73E-072FAA7336B5}"/>
               </a:ext>
             </a:extLst>
           </p:cNvPr>
@@ -13704,7 +14239,7 @@
           <p:cNvPr id="2" name="">
             <a:extLst xmlns:a="http://schemas.openxmlformats.org/drawingml/2006/main">
               <a:ext uri="{FF2B5EF4-FFF2-40B4-BE49-F238E27FC236}">
-                <a16:creationId xmlns:a16="http://schemas.microsoft.com/office/drawing/2014/main" id="{4553DF6F-4519-4F99-B345-009290527752}"/>
+                <a16:creationId xmlns:a16="http://schemas.microsoft.com/office/drawing/2014/main" id="{267CC20E-19C2-4359-880A-C7013830DC5D}"/>
               </a:ext>
             </a:extLst>
           </p:cNvPr>
@@ -13737,7 +14272,7 @@
           <p:cNvPr id="3" name="">
             <a:extLst xmlns:a="http://schemas.openxmlformats.org/drawingml/2006/main">
               <a:ext uri="{FF2B5EF4-FFF2-40B4-BE49-F238E27FC236}">
-                <a16:creationId xmlns:a16="http://schemas.microsoft.com/office/drawing/2014/main" id="{09276720-DE87-4850-978B-6ACC4A80A576}"/>
+                <a16:creationId xmlns:a16="http://schemas.microsoft.com/office/drawing/2014/main" id="{0B6EB4D9-AF9A-45C6-ABBF-D4591EE2E07A}"/>
               </a:ext>
             </a:extLst>
           </p:cNvPr>
@@ -13791,7 +14326,7 @@
                 <a:ea typeface="Aptos Mono"/>
                 <a:cs typeface="Aptos Mono"/>
               </a:rPr>
-              <a:t>CONCLUSION</a:t>
+              <a:t>NUEVA FRONTERA</a:t>
             </a:r>
           </a:p>
         </p:txBody>
@@ -13801,7 +14336,7 @@
           <p:cNvPr id="4" name="">
             <a:extLst xmlns:a="http://schemas.openxmlformats.org/drawingml/2006/main">
               <a:ext uri="{FF2B5EF4-FFF2-40B4-BE49-F238E27FC236}">
-                <a16:creationId xmlns:a16="http://schemas.microsoft.com/office/drawing/2014/main" id="{45CF8382-7872-482D-830A-7A43EAF4F894}"/>
+                <a16:creationId xmlns:a16="http://schemas.microsoft.com/office/drawing/2014/main" id="{8741CB17-0E5A-4EA3-BE52-EE497DF9B0DB}"/>
               </a:ext>
             </a:extLst>
           </p:cNvPr>
@@ -13813,7 +14348,7 @@
         <p:spPr>
           <a:xfrm xmlns:a="http://schemas.openxmlformats.org/drawingml/2006/main">
             <a:off x="552450" y="895350"/>
-            <a:ext cx="8763000" cy="1238250"/>
+            <a:ext cx="10763250" cy="895350"/>
           </a:xfrm>
           <a:prstGeom xmlns:a="http://schemas.openxmlformats.org/drawingml/2006/main" prst="rect">
             <a:avLst/>
@@ -13837,7 +14372,7 @@
           <a:lstStyle xmlns:a="http://schemas.openxmlformats.org/drawingml/2006/main"/>
           <a:p xmlns:a="http://schemas.openxmlformats.org/drawingml/2006/main">
             <a:pPr algn="l">
-              <a:defRPr sz="2550" b="1">
+              <a:defRPr sz="2400" b="1">
                 <a:solidFill>
                   <a:srgbClr val="0F172A"/>
                 </a:solidFill>
@@ -13847,7 +14382,7 @@
               </a:defRPr>
             </a:pPr>
             <a:r>
-              <a:rPr sz="2550" b="1">
+              <a:rPr sz="2400" b="1">
                 <a:solidFill>
                   <a:srgbClr val="0F172A"/>
                 </a:solidFill>
@@ -13855,7 +14390,7 @@
                 <a:ea typeface="Aptos Display"/>
                 <a:cs typeface="Aptos Display"/>
               </a:rPr>
-              <a:t>La respuesta madura no es volver completamente a on-premise. Es redisenar la arquitectura para no pagar de mas por inteligencia.</a:t>
+              <a:t>Cuando la inteligencia cabe en tu laptop, la nube deja de ser el destino obligatorio de cada prompt.</a:t>
             </a:r>
           </a:p>
         </p:txBody>
@@ -13865,29 +14400,29 @@
           <p:cNvPr id="5" name="">
             <a:extLst xmlns:a="http://schemas.openxmlformats.org/drawingml/2006/main">
               <a:ext uri="{FF2B5EF4-FFF2-40B4-BE49-F238E27FC236}">
-                <a16:creationId xmlns:a16="http://schemas.microsoft.com/office/drawing/2014/main" id="{8D90BEB2-8862-447C-A653-1C9BA560F151}"/>
-              </a:ext>
-            </a:extLst>
-          </p:cNvPr>
-          <p:cNvSpPr>
-            <a:spLocks xmlns:a="http://schemas.openxmlformats.org/drawingml/2006/main" noGrp="1"/>
-          </p:cNvSpPr>
-          <p:nvPr/>
-        </p:nvSpPr>
-        <p:spPr>
-          <a:xfrm xmlns:a="http://schemas.openxmlformats.org/drawingml/2006/main">
-            <a:off x="552450" y="2286000"/>
-            <a:ext cx="3295650" cy="3048000"/>
-          </a:xfrm>
-          <a:prstGeom xmlns:a="http://schemas.openxmlformats.org/drawingml/2006/main" prst="rect">
-            <a:avLst/>
-          </a:prstGeom>
-          <a:solidFill xmlns:a="http://schemas.openxmlformats.org/drawingml/2006/main">
-            <a:srgbClr val="FFFDF8"/>
-          </a:solidFill>
-          <a:ln xmlns:a="http://schemas.openxmlformats.org/drawingml/2006/main" w="11430">
-            <a:solidFill>
-              <a:srgbClr val="DDD3C2"/>
+                <a16:creationId xmlns:a16="http://schemas.microsoft.com/office/drawing/2014/main" id="{9238316B-787D-45A5-BD90-DFEB651F50B3}"/>
+              </a:ext>
+            </a:extLst>
+          </p:cNvPr>
+          <p:cNvSpPr>
+            <a:spLocks xmlns:a="http://schemas.openxmlformats.org/drawingml/2006/main" noGrp="1"/>
+          </p:cNvSpPr>
+          <p:nvPr/>
+        </p:nvSpPr>
+        <p:spPr>
+          <a:xfrm xmlns:a="http://schemas.openxmlformats.org/drawingml/2006/main">
+            <a:off x="4610100" y="1962150"/>
+            <a:ext cx="2971800" cy="781050"/>
+          </a:xfrm>
+          <a:prstGeom xmlns:a="http://schemas.openxmlformats.org/drawingml/2006/main" prst="rect">
+            <a:avLst/>
+          </a:prstGeom>
+          <a:solidFill xmlns:a="http://schemas.openxmlformats.org/drawingml/2006/main">
+            <a:srgbClr val="102A43"/>
+          </a:solidFill>
+          <a:ln xmlns:a="http://schemas.openxmlformats.org/drawingml/2006/main" w="0">
+            <a:solidFill>
+              <a:srgbClr val="102A43"/>
             </a:solidFill>
             <a:prstDash val="solid"/>
           </a:ln>
@@ -13898,52 +14433,19 @@
           <p:cNvPr id="6" name="">
             <a:extLst xmlns:a="http://schemas.openxmlformats.org/drawingml/2006/main">
               <a:ext uri="{FF2B5EF4-FFF2-40B4-BE49-F238E27FC236}">
-                <a16:creationId xmlns:a16="http://schemas.microsoft.com/office/drawing/2014/main" id="{B757732D-2733-4488-A0E2-14ECC1F4177D}"/>
-              </a:ext>
-            </a:extLst>
-          </p:cNvPr>
-          <p:cNvSpPr>
-            <a:spLocks xmlns:a="http://schemas.openxmlformats.org/drawingml/2006/main" noGrp="1"/>
-          </p:cNvSpPr>
-          <p:nvPr/>
-        </p:nvSpPr>
-        <p:spPr>
-          <a:xfrm xmlns:a="http://schemas.openxmlformats.org/drawingml/2006/main">
-            <a:off x="781050" y="2514600"/>
-            <a:ext cx="1047750" cy="266700"/>
-          </a:xfrm>
-          <a:prstGeom xmlns:a="http://schemas.openxmlformats.org/drawingml/2006/main" prst="rect">
-            <a:avLst/>
-          </a:prstGeom>
-          <a:solidFill xmlns:a="http://schemas.openxmlformats.org/drawingml/2006/main">
-            <a:srgbClr val="E07A3F"/>
-          </a:solidFill>
-          <a:ln xmlns:a="http://schemas.openxmlformats.org/drawingml/2006/main" w="0">
-            <a:solidFill>
-              <a:srgbClr val="E07A3F"/>
-            </a:solidFill>
-            <a:prstDash val="solid"/>
-          </a:ln>
-        </p:spPr>
-      </p:sp>
-      <p:sp>
-        <p:nvSpPr>
-          <p:cNvPr id="7" name="">
-            <a:extLst xmlns:a="http://schemas.openxmlformats.org/drawingml/2006/main">
-              <a:ext uri="{FF2B5EF4-FFF2-40B4-BE49-F238E27FC236}">
-                <a16:creationId xmlns:a16="http://schemas.microsoft.com/office/drawing/2014/main" id="{1CED0A63-27DC-467B-80FE-3FF6DD1CCA28}"/>
-              </a:ext>
-            </a:extLst>
-          </p:cNvPr>
-          <p:cNvSpPr>
-            <a:spLocks xmlns:a="http://schemas.openxmlformats.org/drawingml/2006/main" noGrp="1"/>
-          </p:cNvSpPr>
-          <p:nvPr/>
-        </p:nvSpPr>
-        <p:spPr>
-          <a:xfrm xmlns:a="http://schemas.openxmlformats.org/drawingml/2006/main">
-            <a:off x="857250" y="2571750"/>
-            <a:ext cx="895350" cy="152400"/>
+                <a16:creationId xmlns:a16="http://schemas.microsoft.com/office/drawing/2014/main" id="{FEE13B45-7365-446C-A295-79C387C01C15}"/>
+              </a:ext>
+            </a:extLst>
+          </p:cNvPr>
+          <p:cNvSpPr>
+            <a:spLocks xmlns:a="http://schemas.openxmlformats.org/drawingml/2006/main" noGrp="1"/>
+          </p:cNvSpPr>
+          <p:nvPr/>
+        </p:nvSpPr>
+        <p:spPr>
+          <a:xfrm xmlns:a="http://schemas.openxmlformats.org/drawingml/2006/main">
+            <a:off x="4876800" y="2114550"/>
+            <a:ext cx="2438400" cy="238125"/>
           </a:xfrm>
           <a:prstGeom xmlns:a="http://schemas.openxmlformats.org/drawingml/2006/main" prst="rect">
             <a:avLst/>
@@ -13967,9 +14469,9 @@
           <a:lstStyle xmlns:a="http://schemas.openxmlformats.org/drawingml/2006/main"/>
           <a:p xmlns:a="http://schemas.openxmlformats.org/drawingml/2006/main">
             <a:pPr algn="ctr">
-              <a:defRPr sz="900" b="1">
-                <a:solidFill>
-                  <a:srgbClr val="102A43"/>
+              <a:defRPr sz="1500" b="1">
+                <a:solidFill>
+                  <a:srgbClr val="FFFDF8"/>
                 </a:solidFill>
                 <a:latin typeface="Aptos Mono"/>
                 <a:ea typeface="Aptos Mono"/>
@@ -13977,15 +14479,79 @@
               </a:defRPr>
             </a:pPr>
             <a:r>
-              <a:rPr sz="900" b="1">
-                <a:solidFill>
-                  <a:srgbClr val="102A43"/>
+              <a:rPr sz="1500" b="1">
+                <a:solidFill>
+                  <a:srgbClr val="FFFDF8"/>
                 </a:solidFill>
                 <a:latin typeface="Aptos Mono"/>
                 <a:ea typeface="Aptos Mono"/>
                 <a:cs typeface="Aptos Mono"/>
               </a:rPr>
-              <a:t>CLOUD</a:t>
+              <a:t>ORQUESTADOR</a:t>
+            </a:r>
+          </a:p>
+        </p:txBody>
+      </p:sp>
+      <p:sp>
+        <p:nvSpPr>
+          <p:cNvPr id="7" name="">
+            <a:extLst xmlns:a="http://schemas.openxmlformats.org/drawingml/2006/main">
+              <a:ext uri="{FF2B5EF4-FFF2-40B4-BE49-F238E27FC236}">
+                <a16:creationId xmlns:a16="http://schemas.microsoft.com/office/drawing/2014/main" id="{82018C46-1413-48A8-AC71-9EF49BE0376B}"/>
+              </a:ext>
+            </a:extLst>
+          </p:cNvPr>
+          <p:cNvSpPr>
+            <a:spLocks xmlns:a="http://schemas.openxmlformats.org/drawingml/2006/main" noGrp="1"/>
+          </p:cNvSpPr>
+          <p:nvPr/>
+        </p:nvSpPr>
+        <p:spPr>
+          <a:xfrm xmlns:a="http://schemas.openxmlformats.org/drawingml/2006/main">
+            <a:off x="4819650" y="2400300"/>
+            <a:ext cx="2552700" cy="190500"/>
+          </a:xfrm>
+          <a:prstGeom xmlns:a="http://schemas.openxmlformats.org/drawingml/2006/main" prst="rect">
+            <a:avLst/>
+          </a:prstGeom>
+          <a:solidFill xmlns:a="http://schemas.openxmlformats.org/drawingml/2006/main">
+            <a:srgbClr val="000000">
+              <a:alpha val="0"/>
+            </a:srgbClr>
+          </a:solidFill>
+          <a:ln xmlns:a="http://schemas.openxmlformats.org/drawingml/2006/main" w="0">
+            <a:solidFill>
+              <a:srgbClr val="000000">
+                <a:alpha val="0"/>
+              </a:srgbClr>
+            </a:solidFill>
+            <a:prstDash val="solid"/>
+          </a:ln>
+        </p:spPr>
+        <p:txBody>
+          <a:bodyPr xmlns:a="http://schemas.openxmlformats.org/drawingml/2006/main" lIns="0" tIns="0" rIns="0" bIns="0" anchor="t"/>
+          <a:lstStyle xmlns:a="http://schemas.openxmlformats.org/drawingml/2006/main"/>
+          <a:p xmlns:a="http://schemas.openxmlformats.org/drawingml/2006/main">
+            <a:pPr algn="ctr">
+              <a:defRPr sz="1125" b="0">
+                <a:solidFill>
+                  <a:srgbClr val="D9E2EC"/>
+                </a:solidFill>
+                <a:latin typeface="Aptos"/>
+                <a:ea typeface="Aptos"/>
+                <a:cs typeface="Aptos"/>
+              </a:defRPr>
+            </a:pPr>
+            <a:r>
+              <a:rPr sz="1125" b="0">
+                <a:solidFill>
+                  <a:srgbClr val="D9E2EC"/>
+                </a:solidFill>
+                <a:latin typeface="Aptos"/>
+                <a:ea typeface="Aptos"/>
+                <a:cs typeface="Aptos"/>
+              </a:rPr>
+              <a:t>clasifica costo, riesgo y calidad</a:t>
             </a:r>
           </a:p>
         </p:txBody>
@@ -13995,157 +14561,95 @@
           <p:cNvPr id="8" name="">
             <a:extLst xmlns:a="http://schemas.openxmlformats.org/drawingml/2006/main">
               <a:ext uri="{FF2B5EF4-FFF2-40B4-BE49-F238E27FC236}">
-                <a16:creationId xmlns:a16="http://schemas.microsoft.com/office/drawing/2014/main" id="{756D6385-EEC4-4686-8D37-F4B8218175F2}"/>
-              </a:ext>
-            </a:extLst>
-          </p:cNvPr>
-          <p:cNvSpPr>
-            <a:spLocks xmlns:a="http://schemas.openxmlformats.org/drawingml/2006/main" noGrp="1"/>
-          </p:cNvSpPr>
-          <p:nvPr/>
-        </p:nvSpPr>
-        <p:spPr>
-          <a:xfrm xmlns:a="http://schemas.openxmlformats.org/drawingml/2006/main">
-            <a:off x="781050" y="3028950"/>
-            <a:ext cx="2476500" cy="285750"/>
-          </a:xfrm>
-          <a:prstGeom xmlns:a="http://schemas.openxmlformats.org/drawingml/2006/main" prst="rect">
-            <a:avLst/>
-          </a:prstGeom>
-          <a:solidFill xmlns:a="http://schemas.openxmlformats.org/drawingml/2006/main">
-            <a:srgbClr val="000000">
-              <a:alpha val="0"/>
-            </a:srgbClr>
-          </a:solidFill>
-          <a:ln xmlns:a="http://schemas.openxmlformats.org/drawingml/2006/main" w="0">
-            <a:solidFill>
-              <a:srgbClr val="000000">
-                <a:alpha val="0"/>
-              </a:srgbClr>
-            </a:solidFill>
-            <a:prstDash val="solid"/>
-          </a:ln>
-        </p:spPr>
-        <p:txBody>
-          <a:bodyPr xmlns:a="http://schemas.openxmlformats.org/drawingml/2006/main" lIns="0" tIns="0" rIns="0" bIns="0" anchor="t"/>
-          <a:lstStyle xmlns:a="http://schemas.openxmlformats.org/drawingml/2006/main"/>
-          <a:p xmlns:a="http://schemas.openxmlformats.org/drawingml/2006/main">
-            <a:pPr algn="l">
-              <a:defRPr sz="1875" b="1">
-                <a:solidFill>
-                  <a:srgbClr val="0F172A"/>
-                </a:solidFill>
-                <a:latin typeface="Aptos"/>
-                <a:ea typeface="Aptos"/>
-                <a:cs typeface="Aptos"/>
-              </a:defRPr>
-            </a:pPr>
-            <a:r>
-              <a:rPr sz="1875" b="1">
-                <a:solidFill>
-                  <a:srgbClr val="0F172A"/>
-                </a:solidFill>
-                <a:latin typeface="Aptos"/>
-                <a:ea typeface="Aptos"/>
-                <a:cs typeface="Aptos"/>
-              </a:rPr>
-              <a:t>La nube sigue ganando</a:t>
-            </a:r>
-          </a:p>
-        </p:txBody>
+                <a16:creationId xmlns:a16="http://schemas.microsoft.com/office/drawing/2014/main" id="{2B8993B0-CEA0-4293-9B74-84863E8B430C}"/>
+              </a:ext>
+            </a:extLst>
+          </p:cNvPr>
+          <p:cNvSpPr>
+            <a:spLocks xmlns:a="http://schemas.openxmlformats.org/drawingml/2006/main" noGrp="1"/>
+          </p:cNvSpPr>
+          <p:nvPr/>
+        </p:nvSpPr>
+        <p:spPr>
+          <a:xfrm xmlns:a="http://schemas.openxmlformats.org/drawingml/2006/main">
+            <a:off x="6076950" y="2743200"/>
+            <a:ext cx="38100" cy="266700"/>
+          </a:xfrm>
+          <a:prstGeom xmlns:a="http://schemas.openxmlformats.org/drawingml/2006/main" prst="rect">
+            <a:avLst/>
+          </a:prstGeom>
+          <a:solidFill xmlns:a="http://schemas.openxmlformats.org/drawingml/2006/main">
+            <a:srgbClr val="102A43"/>
+          </a:solidFill>
+          <a:ln xmlns:a="http://schemas.openxmlformats.org/drawingml/2006/main" w="0">
+            <a:solidFill>
+              <a:srgbClr val="102A43"/>
+            </a:solidFill>
+            <a:prstDash val="solid"/>
+          </a:ln>
+        </p:spPr>
       </p:sp>
       <p:sp>
         <p:nvSpPr>
           <p:cNvPr id="9" name="">
             <a:extLst xmlns:a="http://schemas.openxmlformats.org/drawingml/2006/main">
               <a:ext uri="{FF2B5EF4-FFF2-40B4-BE49-F238E27FC236}">
-                <a16:creationId xmlns:a16="http://schemas.microsoft.com/office/drawing/2014/main" id="{3980A1F0-171B-4F90-9E6E-2CC1C3F7513F}"/>
-              </a:ext>
-            </a:extLst>
-          </p:cNvPr>
-          <p:cNvSpPr>
-            <a:spLocks xmlns:a="http://schemas.openxmlformats.org/drawingml/2006/main" noGrp="1"/>
-          </p:cNvSpPr>
-          <p:nvPr/>
-        </p:nvSpPr>
-        <p:spPr>
-          <a:xfrm xmlns:a="http://schemas.openxmlformats.org/drawingml/2006/main">
-            <a:off x="781050" y="3638550"/>
-            <a:ext cx="2762250" cy="1143000"/>
-          </a:xfrm>
-          <a:prstGeom xmlns:a="http://schemas.openxmlformats.org/drawingml/2006/main" prst="rect">
-            <a:avLst/>
-          </a:prstGeom>
-          <a:solidFill xmlns:a="http://schemas.openxmlformats.org/drawingml/2006/main">
-            <a:srgbClr val="000000">
-              <a:alpha val="0"/>
-            </a:srgbClr>
-          </a:solidFill>
-          <a:ln xmlns:a="http://schemas.openxmlformats.org/drawingml/2006/main" w="0">
-            <a:solidFill>
-              <a:srgbClr val="000000">
-                <a:alpha val="0"/>
-              </a:srgbClr>
-            </a:solidFill>
-            <a:prstDash val="solid"/>
-          </a:ln>
-        </p:spPr>
-        <p:txBody>
-          <a:bodyPr xmlns:a="http://schemas.openxmlformats.org/drawingml/2006/main" lIns="0" tIns="0" rIns="0" bIns="0" anchor="t"/>
-          <a:lstStyle xmlns:a="http://schemas.openxmlformats.org/drawingml/2006/main"/>
-          <a:p xmlns:a="http://schemas.openxmlformats.org/drawingml/2006/main">
-            <a:pPr algn="l">
-              <a:defRPr sz="1500" b="0">
-                <a:solidFill>
-                  <a:srgbClr val="475569"/>
-                </a:solidFill>
-                <a:latin typeface="Aptos"/>
-                <a:ea typeface="Aptos"/>
-                <a:cs typeface="Aptos"/>
-              </a:defRPr>
-            </a:pPr>
-            <a:r>
-              <a:rPr sz="1500" b="0">
-                <a:solidFill>
-                  <a:srgbClr val="475569"/>
-                </a:solidFill>
-                <a:latin typeface="Aptos"/>
-                <a:ea typeface="Aptos"/>
-                <a:cs typeface="Aptos"/>
-              </a:rPr>
-              <a:t>Para equipos pequenos, demanda variable, experimentacion rapida y frontier models, cloud sigue siendo la mejor opcion.</a:t>
-            </a:r>
-          </a:p>
-        </p:txBody>
+                <a16:creationId xmlns:a16="http://schemas.microsoft.com/office/drawing/2014/main" id="{E5682420-5807-4719-8B63-6A8421C231C3}"/>
+              </a:ext>
+            </a:extLst>
+          </p:cNvPr>
+          <p:cNvSpPr>
+            <a:spLocks xmlns:a="http://schemas.openxmlformats.org/drawingml/2006/main" noGrp="1"/>
+          </p:cNvSpPr>
+          <p:nvPr/>
+        </p:nvSpPr>
+        <p:spPr>
+          <a:xfrm xmlns:a="http://schemas.openxmlformats.org/drawingml/2006/main">
+            <a:off x="2505075" y="2971800"/>
+            <a:ext cx="7181850" cy="38100"/>
+          </a:xfrm>
+          <a:prstGeom xmlns:a="http://schemas.openxmlformats.org/drawingml/2006/main" prst="rect">
+            <a:avLst/>
+          </a:prstGeom>
+          <a:solidFill xmlns:a="http://schemas.openxmlformats.org/drawingml/2006/main">
+            <a:srgbClr val="102A43"/>
+          </a:solidFill>
+          <a:ln xmlns:a="http://schemas.openxmlformats.org/drawingml/2006/main" w="0">
+            <a:solidFill>
+              <a:srgbClr val="102A43"/>
+            </a:solidFill>
+            <a:prstDash val="solid"/>
+          </a:ln>
+        </p:spPr>
       </p:sp>
       <p:sp>
         <p:nvSpPr>
           <p:cNvPr id="10" name="">
             <a:extLst xmlns:a="http://schemas.openxmlformats.org/drawingml/2006/main">
               <a:ext uri="{FF2B5EF4-FFF2-40B4-BE49-F238E27FC236}">
-                <a16:creationId xmlns:a16="http://schemas.microsoft.com/office/drawing/2014/main" id="{FD4DF9A2-8AD8-479B-9B3C-8F4A7D7949E6}"/>
-              </a:ext>
-            </a:extLst>
-          </p:cNvPr>
-          <p:cNvSpPr>
-            <a:spLocks xmlns:a="http://schemas.openxmlformats.org/drawingml/2006/main" noGrp="1"/>
-          </p:cNvSpPr>
-          <p:nvPr/>
-        </p:nvSpPr>
-        <p:spPr>
-          <a:xfrm xmlns:a="http://schemas.openxmlformats.org/drawingml/2006/main">
-            <a:off x="4248150" y="2286000"/>
-            <a:ext cx="3295650" cy="3048000"/>
-          </a:xfrm>
-          <a:prstGeom xmlns:a="http://schemas.openxmlformats.org/drawingml/2006/main" prst="rect">
-            <a:avLst/>
-          </a:prstGeom>
-          <a:solidFill xmlns:a="http://schemas.openxmlformats.org/drawingml/2006/main">
-            <a:srgbClr val="FAF7F1"/>
-          </a:solidFill>
-          <a:ln xmlns:a="http://schemas.openxmlformats.org/drawingml/2006/main" w="11430">
-            <a:solidFill>
-              <a:srgbClr val="DDD3C2"/>
+                <a16:creationId xmlns:a16="http://schemas.microsoft.com/office/drawing/2014/main" id="{59B811FA-5835-45EB-813B-1179048D5FE6}"/>
+              </a:ext>
+            </a:extLst>
+          </p:cNvPr>
+          <p:cNvSpPr>
+            <a:spLocks xmlns:a="http://schemas.openxmlformats.org/drawingml/2006/main" noGrp="1"/>
+          </p:cNvSpPr>
+          <p:nvPr/>
+        </p:nvSpPr>
+        <p:spPr>
+          <a:xfrm xmlns:a="http://schemas.openxmlformats.org/drawingml/2006/main">
+            <a:off x="2505075" y="2971800"/>
+            <a:ext cx="38100" cy="190500"/>
+          </a:xfrm>
+          <a:prstGeom xmlns:a="http://schemas.openxmlformats.org/drawingml/2006/main" prst="rect">
+            <a:avLst/>
+          </a:prstGeom>
+          <a:solidFill xmlns:a="http://schemas.openxmlformats.org/drawingml/2006/main">
+            <a:srgbClr val="102A43"/>
+          </a:solidFill>
+          <a:ln xmlns:a="http://schemas.openxmlformats.org/drawingml/2006/main" w="0">
+            <a:solidFill>
+              <a:srgbClr val="102A43"/>
             </a:solidFill>
             <a:prstDash val="solid"/>
           </a:ln>
@@ -14156,29 +14660,29 @@
           <p:cNvPr id="11" name="">
             <a:extLst xmlns:a="http://schemas.openxmlformats.org/drawingml/2006/main">
               <a:ext uri="{FF2B5EF4-FFF2-40B4-BE49-F238E27FC236}">
-                <a16:creationId xmlns:a16="http://schemas.microsoft.com/office/drawing/2014/main" id="{890DA7CA-4AD6-445B-A80D-3ED9D3298907}"/>
-              </a:ext>
-            </a:extLst>
-          </p:cNvPr>
-          <p:cNvSpPr>
-            <a:spLocks xmlns:a="http://schemas.openxmlformats.org/drawingml/2006/main" noGrp="1"/>
-          </p:cNvSpPr>
-          <p:nvPr/>
-        </p:nvSpPr>
-        <p:spPr>
-          <a:xfrm xmlns:a="http://schemas.openxmlformats.org/drawingml/2006/main">
-            <a:off x="4476750" y="2514600"/>
-            <a:ext cx="1047750" cy="266700"/>
-          </a:xfrm>
-          <a:prstGeom xmlns:a="http://schemas.openxmlformats.org/drawingml/2006/main" prst="rect">
-            <a:avLst/>
-          </a:prstGeom>
-          <a:solidFill xmlns:a="http://schemas.openxmlformats.org/drawingml/2006/main">
-            <a:srgbClr val="B42318"/>
-          </a:solidFill>
-          <a:ln xmlns:a="http://schemas.openxmlformats.org/drawingml/2006/main" w="0">
-            <a:solidFill>
-              <a:srgbClr val="B42318"/>
+                <a16:creationId xmlns:a16="http://schemas.microsoft.com/office/drawing/2014/main" id="{0B4E9DAE-C466-40DE-89D6-6416DBF3EAD6}"/>
+              </a:ext>
+            </a:extLst>
+          </p:cNvPr>
+          <p:cNvSpPr>
+            <a:spLocks xmlns:a="http://schemas.openxmlformats.org/drawingml/2006/main" noGrp="1"/>
+          </p:cNvSpPr>
+          <p:nvPr/>
+        </p:nvSpPr>
+        <p:spPr>
+          <a:xfrm xmlns:a="http://schemas.openxmlformats.org/drawingml/2006/main">
+            <a:off x="9648825" y="2971800"/>
+            <a:ext cx="38100" cy="190500"/>
+          </a:xfrm>
+          <a:prstGeom xmlns:a="http://schemas.openxmlformats.org/drawingml/2006/main" prst="rect">
+            <a:avLst/>
+          </a:prstGeom>
+          <a:solidFill xmlns:a="http://schemas.openxmlformats.org/drawingml/2006/main">
+            <a:srgbClr val="102A43"/>
+          </a:solidFill>
+          <a:ln xmlns:a="http://schemas.openxmlformats.org/drawingml/2006/main" w="0">
+            <a:solidFill>
+              <a:srgbClr val="102A43"/>
             </a:solidFill>
             <a:prstDash val="solid"/>
           </a:ln>
@@ -14189,19 +14693,52 @@
           <p:cNvPr id="12" name="">
             <a:extLst xmlns:a="http://schemas.openxmlformats.org/drawingml/2006/main">
               <a:ext uri="{FF2B5EF4-FFF2-40B4-BE49-F238E27FC236}">
-                <a16:creationId xmlns:a16="http://schemas.microsoft.com/office/drawing/2014/main" id="{3EAD34A1-D4F4-4C92-9206-6473A1CE8FD9}"/>
-              </a:ext>
-            </a:extLst>
-          </p:cNvPr>
-          <p:cNvSpPr>
-            <a:spLocks xmlns:a="http://schemas.openxmlformats.org/drawingml/2006/main" noGrp="1"/>
-          </p:cNvSpPr>
-          <p:nvPr/>
-        </p:nvSpPr>
-        <p:spPr>
-          <a:xfrm xmlns:a="http://schemas.openxmlformats.org/drawingml/2006/main">
-            <a:off x="4552950" y="2571750"/>
-            <a:ext cx="895350" cy="152400"/>
+                <a16:creationId xmlns:a16="http://schemas.microsoft.com/office/drawing/2014/main" id="{DB7235ED-5AB0-4DFA-89A2-665DA8AD2AC6}"/>
+              </a:ext>
+            </a:extLst>
+          </p:cNvPr>
+          <p:cNvSpPr>
+            <a:spLocks xmlns:a="http://schemas.openxmlformats.org/drawingml/2006/main" noGrp="1"/>
+          </p:cNvSpPr>
+          <p:nvPr/>
+        </p:nvSpPr>
+        <p:spPr>
+          <a:xfrm xmlns:a="http://schemas.openxmlformats.org/drawingml/2006/main">
+            <a:off x="552450" y="3162300"/>
+            <a:ext cx="3905250" cy="38100"/>
+          </a:xfrm>
+          <a:prstGeom xmlns:a="http://schemas.openxmlformats.org/drawingml/2006/main" prst="rect">
+            <a:avLst/>
+          </a:prstGeom>
+          <a:solidFill xmlns:a="http://schemas.openxmlformats.org/drawingml/2006/main">
+            <a:srgbClr val="2D6A4F"/>
+          </a:solidFill>
+          <a:ln xmlns:a="http://schemas.openxmlformats.org/drawingml/2006/main" w="0">
+            <a:solidFill>
+              <a:srgbClr val="2D6A4F"/>
+            </a:solidFill>
+            <a:prstDash val="solid"/>
+          </a:ln>
+        </p:spPr>
+      </p:sp>
+      <p:sp>
+        <p:nvSpPr>
+          <p:cNvPr id="13" name="">
+            <a:extLst xmlns:a="http://schemas.openxmlformats.org/drawingml/2006/main">
+              <a:ext uri="{FF2B5EF4-FFF2-40B4-BE49-F238E27FC236}">
+                <a16:creationId xmlns:a16="http://schemas.microsoft.com/office/drawing/2014/main" id="{E4EA8193-A2FE-4F3A-ACA4-49ADE29CB377}"/>
+              </a:ext>
+            </a:extLst>
+          </p:cNvPr>
+          <p:cNvSpPr>
+            <a:spLocks xmlns:a="http://schemas.openxmlformats.org/drawingml/2006/main" noGrp="1"/>
+          </p:cNvSpPr>
+          <p:nvPr/>
+        </p:nvSpPr>
+        <p:spPr>
+          <a:xfrm xmlns:a="http://schemas.openxmlformats.org/drawingml/2006/main">
+            <a:off x="552450" y="3333750"/>
+            <a:ext cx="3905250" cy="266700"/>
           </a:xfrm>
           <a:prstGeom xmlns:a="http://schemas.openxmlformats.org/drawingml/2006/main" prst="rect">
             <a:avLst/>
@@ -14225,9 +14762,9 @@
           <a:lstStyle xmlns:a="http://schemas.openxmlformats.org/drawingml/2006/main"/>
           <a:p xmlns:a="http://schemas.openxmlformats.org/drawingml/2006/main">
             <a:pPr algn="ctr">
-              <a:defRPr sz="900" b="1">
-                <a:solidFill>
-                  <a:srgbClr val="FFFDF8"/>
+              <a:defRPr sz="1650" b="1">
+                <a:solidFill>
+                  <a:srgbClr val="2D6A4F"/>
                 </a:solidFill>
                 <a:latin typeface="Aptos Mono"/>
                 <a:ea typeface="Aptos Mono"/>
@@ -14235,79 +14772,15 @@
               </a:defRPr>
             </a:pPr>
             <a:r>
-              <a:rPr sz="900" b="1">
-                <a:solidFill>
-                  <a:srgbClr val="FFFDF8"/>
+              <a:rPr sz="1650" b="1">
+                <a:solidFill>
+                  <a:srgbClr val="2D6A4F"/>
                 </a:solidFill>
                 <a:latin typeface="Aptos Mono"/>
                 <a:ea typeface="Aptos Mono"/>
                 <a:cs typeface="Aptos Mono"/>
               </a:rPr>
-              <a:t>COSTO</a:t>
-            </a:r>
-          </a:p>
-        </p:txBody>
-      </p:sp>
-      <p:sp>
-        <p:nvSpPr>
-          <p:cNvPr id="13" name="">
-            <a:extLst xmlns:a="http://schemas.openxmlformats.org/drawingml/2006/main">
-              <a:ext uri="{FF2B5EF4-FFF2-40B4-BE49-F238E27FC236}">
-                <a16:creationId xmlns:a16="http://schemas.microsoft.com/office/drawing/2014/main" id="{8536E7B4-A371-42BF-BDC5-3BF95ADEBFC1}"/>
-              </a:ext>
-            </a:extLst>
-          </p:cNvPr>
-          <p:cNvSpPr>
-            <a:spLocks xmlns:a="http://schemas.openxmlformats.org/drawingml/2006/main" noGrp="1"/>
-          </p:cNvSpPr>
-          <p:nvPr/>
-        </p:nvSpPr>
-        <p:spPr>
-          <a:xfrm xmlns:a="http://schemas.openxmlformats.org/drawingml/2006/main">
-            <a:off x="4476750" y="3028950"/>
-            <a:ext cx="2476500" cy="285750"/>
-          </a:xfrm>
-          <a:prstGeom xmlns:a="http://schemas.openxmlformats.org/drawingml/2006/main" prst="rect">
-            <a:avLst/>
-          </a:prstGeom>
-          <a:solidFill xmlns:a="http://schemas.openxmlformats.org/drawingml/2006/main">
-            <a:srgbClr val="000000">
-              <a:alpha val="0"/>
-            </a:srgbClr>
-          </a:solidFill>
-          <a:ln xmlns:a="http://schemas.openxmlformats.org/drawingml/2006/main" w="0">
-            <a:solidFill>
-              <a:srgbClr val="000000">
-                <a:alpha val="0"/>
-              </a:srgbClr>
-            </a:solidFill>
-            <a:prstDash val="solid"/>
-          </a:ln>
-        </p:spPr>
-        <p:txBody>
-          <a:bodyPr xmlns:a="http://schemas.openxmlformats.org/drawingml/2006/main" lIns="0" tIns="0" rIns="0" bIns="0" anchor="t"/>
-          <a:lstStyle xmlns:a="http://schemas.openxmlformats.org/drawingml/2006/main"/>
-          <a:p xmlns:a="http://schemas.openxmlformats.org/drawingml/2006/main">
-            <a:pPr algn="l">
-              <a:defRPr sz="1875" b="1">
-                <a:solidFill>
-                  <a:srgbClr val="0F172A"/>
-                </a:solidFill>
-                <a:latin typeface="Aptos"/>
-                <a:ea typeface="Aptos"/>
-                <a:cs typeface="Aptos"/>
-              </a:defRPr>
-            </a:pPr>
-            <a:r>
-              <a:rPr sz="1875" b="1">
-                <a:solidFill>
-                  <a:srgbClr val="0F172A"/>
-                </a:solidFill>
-                <a:latin typeface="Aptos"/>
-                <a:ea typeface="Aptos"/>
-                <a:cs typeface="Aptos"/>
-              </a:rPr>
-              <a:t>Lo que cambia con LLMs</a:t>
+              <a:t>CAPACIDAD LOCAL</a:t>
             </a:r>
           </a:p>
         </p:txBody>
@@ -14317,43 +14790,43 @@
           <p:cNvPr id="14" name="">
             <a:extLst xmlns:a="http://schemas.openxmlformats.org/drawingml/2006/main">
               <a:ext uri="{FF2B5EF4-FFF2-40B4-BE49-F238E27FC236}">
-                <a16:creationId xmlns:a16="http://schemas.microsoft.com/office/drawing/2014/main" id="{570B4C0D-29FA-43DF-B5CD-753C7C652D17}"/>
-              </a:ext>
-            </a:extLst>
-          </p:cNvPr>
-          <p:cNvSpPr>
-            <a:spLocks xmlns:a="http://schemas.openxmlformats.org/drawingml/2006/main" noGrp="1"/>
-          </p:cNvSpPr>
-          <p:nvPr/>
-        </p:nvSpPr>
-        <p:spPr>
-          <a:xfrm xmlns:a="http://schemas.openxmlformats.org/drawingml/2006/main">
-            <a:off x="4476750" y="3638550"/>
-            <a:ext cx="2762250" cy="1143000"/>
-          </a:xfrm>
-          <a:prstGeom xmlns:a="http://schemas.openxmlformats.org/drawingml/2006/main" prst="rect">
-            <a:avLst/>
-          </a:prstGeom>
-          <a:solidFill xmlns:a="http://schemas.openxmlformats.org/drawingml/2006/main">
-            <a:srgbClr val="000000">
-              <a:alpha val="0"/>
-            </a:srgbClr>
-          </a:solidFill>
-          <a:ln xmlns:a="http://schemas.openxmlformats.org/drawingml/2006/main" w="0">
-            <a:solidFill>
-              <a:srgbClr val="000000">
-                <a:alpha val="0"/>
-              </a:srgbClr>
-            </a:solidFill>
-            <a:prstDash val="solid"/>
-          </a:ln>
-        </p:spPr>
-        <p:txBody>
-          <a:bodyPr xmlns:a="http://schemas.openxmlformats.org/drawingml/2006/main" lIns="0" tIns="0" rIns="0" bIns="0" anchor="t"/>
-          <a:lstStyle xmlns:a="http://schemas.openxmlformats.org/drawingml/2006/main"/>
-          <a:p xmlns:a="http://schemas.openxmlformats.org/drawingml/2006/main">
-            <a:pPr algn="l">
-              <a:defRPr sz="1500" b="0">
+                <a16:creationId xmlns:a16="http://schemas.microsoft.com/office/drawing/2014/main" id="{3F2B59D4-25B8-420A-958A-D67CCD1B6999}"/>
+              </a:ext>
+            </a:extLst>
+          </p:cNvPr>
+          <p:cNvSpPr>
+            <a:spLocks xmlns:a="http://schemas.openxmlformats.org/drawingml/2006/main" noGrp="1"/>
+          </p:cNvSpPr>
+          <p:nvPr/>
+        </p:nvSpPr>
+        <p:spPr>
+          <a:xfrm xmlns:a="http://schemas.openxmlformats.org/drawingml/2006/main">
+            <a:off x="742950" y="3638550"/>
+            <a:ext cx="3524250" cy="400050"/>
+          </a:xfrm>
+          <a:prstGeom xmlns:a="http://schemas.openxmlformats.org/drawingml/2006/main" prst="rect">
+            <a:avLst/>
+          </a:prstGeom>
+          <a:solidFill xmlns:a="http://schemas.openxmlformats.org/drawingml/2006/main">
+            <a:srgbClr val="000000">
+              <a:alpha val="0"/>
+            </a:srgbClr>
+          </a:solidFill>
+          <a:ln xmlns:a="http://schemas.openxmlformats.org/drawingml/2006/main" w="0">
+            <a:solidFill>
+              <a:srgbClr val="000000">
+                <a:alpha val="0"/>
+              </a:srgbClr>
+            </a:solidFill>
+            <a:prstDash val="solid"/>
+          </a:ln>
+        </p:spPr>
+        <p:txBody>
+          <a:bodyPr xmlns:a="http://schemas.openxmlformats.org/drawingml/2006/main" lIns="0" tIns="0" rIns="0" bIns="0" anchor="t"/>
+          <a:lstStyle xmlns:a="http://schemas.openxmlformats.org/drawingml/2006/main"/>
+          <a:p xmlns:a="http://schemas.openxmlformats.org/drawingml/2006/main">
+            <a:pPr algn="ctr">
+              <a:defRPr sz="1350" b="0">
                 <a:solidFill>
                   <a:srgbClr val="475569"/>
                 </a:solidFill>
@@ -14363,7 +14836,7 @@
               </a:defRPr>
             </a:pPr>
             <a:r>
-              <a:rPr sz="1500" b="0">
+              <a:rPr sz="1350" b="0">
                 <a:solidFill>
                   <a:srgbClr val="475569"/>
                 </a:solidFill>
@@ -14371,7 +14844,7 @@
                 <a:ea typeface="Aptos"/>
                 <a:cs typeface="Aptos"/>
               </a:rPr>
-              <a:t>La inferencia intensiva y sin gobierno puede convertir la inteligencia en un gasto recurrente muy dificil de justificar.</a:t>
+              <a:t>RTX Spark + modelos de pesos abiertos</a:t>
             </a:r>
           </a:p>
         </p:txBody>
@@ -14381,29 +14854,29 @@
           <p:cNvPr id="15" name="">
             <a:extLst xmlns:a="http://schemas.openxmlformats.org/drawingml/2006/main">
               <a:ext uri="{FF2B5EF4-FFF2-40B4-BE49-F238E27FC236}">
-                <a16:creationId xmlns:a16="http://schemas.microsoft.com/office/drawing/2014/main" id="{682A2DEC-7B40-41F1-868C-3B31E4850422}"/>
-              </a:ext>
-            </a:extLst>
-          </p:cNvPr>
-          <p:cNvSpPr>
-            <a:spLocks xmlns:a="http://schemas.openxmlformats.org/drawingml/2006/main" noGrp="1"/>
-          </p:cNvSpPr>
-          <p:nvPr/>
-        </p:nvSpPr>
-        <p:spPr>
-          <a:xfrm xmlns:a="http://schemas.openxmlformats.org/drawingml/2006/main">
-            <a:off x="7943850" y="2286000"/>
-            <a:ext cx="3295650" cy="3048000"/>
-          </a:xfrm>
-          <a:prstGeom xmlns:a="http://schemas.openxmlformats.org/drawingml/2006/main" prst="rect">
-            <a:avLst/>
-          </a:prstGeom>
-          <a:solidFill xmlns:a="http://schemas.openxmlformats.org/drawingml/2006/main">
-            <a:srgbClr val="102A43"/>
-          </a:solidFill>
-          <a:ln xmlns:a="http://schemas.openxmlformats.org/drawingml/2006/main" w="11430">
-            <a:solidFill>
-              <a:srgbClr val="35536E"/>
+                <a16:creationId xmlns:a16="http://schemas.microsoft.com/office/drawing/2014/main" id="{49FE9B02-272C-4915-88CF-F7E7B508816B}"/>
+              </a:ext>
+            </a:extLst>
+          </p:cNvPr>
+          <p:cNvSpPr>
+            <a:spLocks xmlns:a="http://schemas.openxmlformats.org/drawingml/2006/main" noGrp="1"/>
+          </p:cNvSpPr>
+          <p:nvPr/>
+        </p:nvSpPr>
+        <p:spPr>
+          <a:xfrm xmlns:a="http://schemas.openxmlformats.org/drawingml/2006/main">
+            <a:off x="7734300" y="3162300"/>
+            <a:ext cx="3905250" cy="38100"/>
+          </a:xfrm>
+          <a:prstGeom xmlns:a="http://schemas.openxmlformats.org/drawingml/2006/main" prst="rect">
+            <a:avLst/>
+          </a:prstGeom>
+          <a:solidFill xmlns:a="http://schemas.openxmlformats.org/drawingml/2006/main">
+            <a:srgbClr val="C75C2A"/>
+          </a:solidFill>
+          <a:ln xmlns:a="http://schemas.openxmlformats.org/drawingml/2006/main" w="0">
+            <a:solidFill>
+              <a:srgbClr val="C75C2A"/>
             </a:solidFill>
             <a:prstDash val="solid"/>
           </a:ln>
@@ -14414,52 +14887,19 @@
           <p:cNvPr id="16" name="">
             <a:extLst xmlns:a="http://schemas.openxmlformats.org/drawingml/2006/main">
               <a:ext uri="{FF2B5EF4-FFF2-40B4-BE49-F238E27FC236}">
-                <a16:creationId xmlns:a16="http://schemas.microsoft.com/office/drawing/2014/main" id="{8C804615-9F16-4823-9C92-6A4D44B6728F}"/>
-              </a:ext>
-            </a:extLst>
-          </p:cNvPr>
-          <p:cNvSpPr>
-            <a:spLocks xmlns:a="http://schemas.openxmlformats.org/drawingml/2006/main" noGrp="1"/>
-          </p:cNvSpPr>
-          <p:nvPr/>
-        </p:nvSpPr>
-        <p:spPr>
-          <a:xfrm xmlns:a="http://schemas.openxmlformats.org/drawingml/2006/main">
-            <a:off x="8172450" y="2514600"/>
-            <a:ext cx="1047750" cy="266700"/>
-          </a:xfrm>
-          <a:prstGeom xmlns:a="http://schemas.openxmlformats.org/drawingml/2006/main" prst="rect">
-            <a:avLst/>
-          </a:prstGeom>
-          <a:solidFill xmlns:a="http://schemas.openxmlformats.org/drawingml/2006/main">
-            <a:srgbClr val="2D6A4F"/>
-          </a:solidFill>
-          <a:ln xmlns:a="http://schemas.openxmlformats.org/drawingml/2006/main" w="0">
-            <a:solidFill>
-              <a:srgbClr val="2D6A4F"/>
-            </a:solidFill>
-            <a:prstDash val="solid"/>
-          </a:ln>
-        </p:spPr>
-      </p:sp>
-      <p:sp>
-        <p:nvSpPr>
-          <p:cNvPr id="17" name="">
-            <a:extLst xmlns:a="http://schemas.openxmlformats.org/drawingml/2006/main">
-              <a:ext uri="{FF2B5EF4-FFF2-40B4-BE49-F238E27FC236}">
-                <a16:creationId xmlns:a16="http://schemas.microsoft.com/office/drawing/2014/main" id="{AA0FD38C-1D9E-4E75-B728-525B6C3CF80D}"/>
-              </a:ext>
-            </a:extLst>
-          </p:cNvPr>
-          <p:cNvSpPr>
-            <a:spLocks xmlns:a="http://schemas.openxmlformats.org/drawingml/2006/main" noGrp="1"/>
-          </p:cNvSpPr>
-          <p:nvPr/>
-        </p:nvSpPr>
-        <p:spPr>
-          <a:xfrm xmlns:a="http://schemas.openxmlformats.org/drawingml/2006/main">
-            <a:off x="8248650" y="2571750"/>
-            <a:ext cx="895350" cy="152400"/>
+                <a16:creationId xmlns:a16="http://schemas.microsoft.com/office/drawing/2014/main" id="{94893D95-4363-4576-BDA2-2C4301F288F2}"/>
+              </a:ext>
+            </a:extLst>
+          </p:cNvPr>
+          <p:cNvSpPr>
+            <a:spLocks xmlns:a="http://schemas.openxmlformats.org/drawingml/2006/main" noGrp="1"/>
+          </p:cNvSpPr>
+          <p:nvPr/>
+        </p:nvSpPr>
+        <p:spPr>
+          <a:xfrm xmlns:a="http://schemas.openxmlformats.org/drawingml/2006/main">
+            <a:off x="7734300" y="3333750"/>
+            <a:ext cx="3905250" cy="266700"/>
           </a:xfrm>
           <a:prstGeom xmlns:a="http://schemas.openxmlformats.org/drawingml/2006/main" prst="rect">
             <a:avLst/>
@@ -14483,9 +14923,9 @@
           <a:lstStyle xmlns:a="http://schemas.openxmlformats.org/drawingml/2006/main"/>
           <a:p xmlns:a="http://schemas.openxmlformats.org/drawingml/2006/main">
             <a:pPr algn="ctr">
-              <a:defRPr sz="900" b="1">
-                <a:solidFill>
-                  <a:srgbClr val="FFFDF8"/>
+              <a:defRPr sz="1650" b="1">
+                <a:solidFill>
+                  <a:srgbClr val="C75C2A"/>
                 </a:solidFill>
                 <a:latin typeface="Aptos Mono"/>
                 <a:ea typeface="Aptos Mono"/>
@@ -14493,15 +14933,79 @@
               </a:defRPr>
             </a:pPr>
             <a:r>
-              <a:rPr sz="900" b="1">
-                <a:solidFill>
-                  <a:srgbClr val="FFFDF8"/>
+              <a:rPr sz="1650" b="1">
+                <a:solidFill>
+                  <a:srgbClr val="C75C2A"/>
                 </a:solidFill>
                 <a:latin typeface="Aptos Mono"/>
                 <a:ea typeface="Aptos Mono"/>
                 <a:cs typeface="Aptos Mono"/>
               </a:rPr>
-              <a:t>HIBRIDO</a:t>
+              <a:t>ESCALA A CLOUD</a:t>
+            </a:r>
+          </a:p>
+        </p:txBody>
+      </p:sp>
+      <p:sp>
+        <p:nvSpPr>
+          <p:cNvPr id="17" name="">
+            <a:extLst xmlns:a="http://schemas.openxmlformats.org/drawingml/2006/main">
+              <a:ext uri="{FF2B5EF4-FFF2-40B4-BE49-F238E27FC236}">
+                <a16:creationId xmlns:a16="http://schemas.microsoft.com/office/drawing/2014/main" id="{25FC60F6-CB37-4D50-8294-D5B10239E6E5}"/>
+              </a:ext>
+            </a:extLst>
+          </p:cNvPr>
+          <p:cNvSpPr>
+            <a:spLocks xmlns:a="http://schemas.openxmlformats.org/drawingml/2006/main" noGrp="1"/>
+          </p:cNvSpPr>
+          <p:nvPr/>
+        </p:nvSpPr>
+        <p:spPr>
+          <a:xfrm xmlns:a="http://schemas.openxmlformats.org/drawingml/2006/main">
+            <a:off x="7924800" y="3638550"/>
+            <a:ext cx="3524250" cy="400050"/>
+          </a:xfrm>
+          <a:prstGeom xmlns:a="http://schemas.openxmlformats.org/drawingml/2006/main" prst="rect">
+            <a:avLst/>
+          </a:prstGeom>
+          <a:solidFill xmlns:a="http://schemas.openxmlformats.org/drawingml/2006/main">
+            <a:srgbClr val="000000">
+              <a:alpha val="0"/>
+            </a:srgbClr>
+          </a:solidFill>
+          <a:ln xmlns:a="http://schemas.openxmlformats.org/drawingml/2006/main" w="0">
+            <a:solidFill>
+              <a:srgbClr val="000000">
+                <a:alpha val="0"/>
+              </a:srgbClr>
+            </a:solidFill>
+            <a:prstDash val="solid"/>
+          </a:ln>
+        </p:spPr>
+        <p:txBody>
+          <a:bodyPr xmlns:a="http://schemas.openxmlformats.org/drawingml/2006/main" lIns="0" tIns="0" rIns="0" bIns="0" anchor="t"/>
+          <a:lstStyle xmlns:a="http://schemas.openxmlformats.org/drawingml/2006/main"/>
+          <a:p xmlns:a="http://schemas.openxmlformats.org/drawingml/2006/main">
+            <a:pPr algn="ctr">
+              <a:defRPr sz="1350" b="0">
+                <a:solidFill>
+                  <a:srgbClr val="475569"/>
+                </a:solidFill>
+                <a:latin typeface="Aptos"/>
+                <a:ea typeface="Aptos"/>
+                <a:cs typeface="Aptos"/>
+              </a:defRPr>
+            </a:pPr>
+            <a:r>
+              <a:rPr sz="1350" b="0">
+                <a:solidFill>
+                  <a:srgbClr val="475569"/>
+                </a:solidFill>
+                <a:latin typeface="Aptos"/>
+                <a:ea typeface="Aptos"/>
+                <a:cs typeface="Aptos"/>
+              </a:rPr>
+              <a:t>suscripción, APIs y frontier models</a:t>
             </a:r>
           </a:p>
         </p:txBody>
@@ -14511,19 +15015,52 @@
           <p:cNvPr id="18" name="">
             <a:extLst xmlns:a="http://schemas.openxmlformats.org/drawingml/2006/main">
               <a:ext uri="{FF2B5EF4-FFF2-40B4-BE49-F238E27FC236}">
-                <a16:creationId xmlns:a16="http://schemas.microsoft.com/office/drawing/2014/main" id="{38448B90-87AA-4A41-9ECD-680014A2D3F8}"/>
-              </a:ext>
-            </a:extLst>
-          </p:cNvPr>
-          <p:cNvSpPr>
-            <a:spLocks xmlns:a="http://schemas.openxmlformats.org/drawingml/2006/main" noGrp="1"/>
-          </p:cNvSpPr>
-          <p:nvPr/>
-        </p:nvSpPr>
-        <p:spPr>
-          <a:xfrm xmlns:a="http://schemas.openxmlformats.org/drawingml/2006/main">
-            <a:off x="8172450" y="3028950"/>
-            <a:ext cx="2476500" cy="285750"/>
+                <a16:creationId xmlns:a16="http://schemas.microsoft.com/office/drawing/2014/main" id="{F9841D15-ADC3-4136-846F-0D7C6BB142C4}"/>
+              </a:ext>
+            </a:extLst>
+          </p:cNvPr>
+          <p:cNvSpPr>
+            <a:spLocks xmlns:a="http://schemas.openxmlformats.org/drawingml/2006/main" noGrp="1"/>
+          </p:cNvSpPr>
+          <p:nvPr/>
+        </p:nvSpPr>
+        <p:spPr>
+          <a:xfrm xmlns:a="http://schemas.openxmlformats.org/drawingml/2006/main">
+            <a:off x="857250" y="4238625"/>
+            <a:ext cx="85725" cy="85725"/>
+          </a:xfrm>
+          <a:prstGeom xmlns:a="http://schemas.openxmlformats.org/drawingml/2006/main" prst="rect">
+            <a:avLst/>
+          </a:prstGeom>
+          <a:solidFill xmlns:a="http://schemas.openxmlformats.org/drawingml/2006/main">
+            <a:srgbClr val="2D6A4F"/>
+          </a:solidFill>
+          <a:ln xmlns:a="http://schemas.openxmlformats.org/drawingml/2006/main" w="0">
+            <a:solidFill>
+              <a:srgbClr val="2D6A4F"/>
+            </a:solidFill>
+            <a:prstDash val="solid"/>
+          </a:ln>
+        </p:spPr>
+      </p:sp>
+      <p:sp>
+        <p:nvSpPr>
+          <p:cNvPr id="19" name="">
+            <a:extLst xmlns:a="http://schemas.openxmlformats.org/drawingml/2006/main">
+              <a:ext uri="{FF2B5EF4-FFF2-40B4-BE49-F238E27FC236}">
+                <a16:creationId xmlns:a16="http://schemas.microsoft.com/office/drawing/2014/main" id="{EFA3DE61-55EF-467A-9285-EA036C52D5FD}"/>
+              </a:ext>
+            </a:extLst>
+          </p:cNvPr>
+          <p:cNvSpPr>
+            <a:spLocks xmlns:a="http://schemas.openxmlformats.org/drawingml/2006/main" noGrp="1"/>
+          </p:cNvSpPr>
+          <p:nvPr/>
+        </p:nvSpPr>
+        <p:spPr>
+          <a:xfrm xmlns:a="http://schemas.openxmlformats.org/drawingml/2006/main">
+            <a:off x="1047750" y="4171950"/>
+            <a:ext cx="3143250" cy="228600"/>
           </a:xfrm>
           <a:prstGeom xmlns:a="http://schemas.openxmlformats.org/drawingml/2006/main" prst="rect">
             <a:avLst/>
@@ -14547,47 +15084,80 @@
           <a:lstStyle xmlns:a="http://schemas.openxmlformats.org/drawingml/2006/main"/>
           <a:p xmlns:a="http://schemas.openxmlformats.org/drawingml/2006/main">
             <a:pPr algn="l">
-              <a:defRPr sz="1875" b="1">
-                <a:solidFill>
-                  <a:srgbClr val="FFFDF8"/>
-                </a:solidFill>
-                <a:latin typeface="Aptos"/>
-                <a:ea typeface="Aptos"/>
-                <a:cs typeface="Aptos"/>
-              </a:defRPr>
-            </a:pPr>
-            <a:r>
-              <a:rPr sz="1875" b="1">
-                <a:solidFill>
-                  <a:srgbClr val="FFFDF8"/>
-                </a:solidFill>
-                <a:latin typeface="Aptos"/>
-                <a:ea typeface="Aptos"/>
-                <a:cs typeface="Aptos"/>
-              </a:rPr>
-              <a:t>La respuesta realista</a:t>
-            </a:r>
-          </a:p>
-        </p:txBody>
-      </p:sp>
-      <p:sp>
-        <p:nvSpPr>
-          <p:cNvPr id="19" name="">
-            <a:extLst xmlns:a="http://schemas.openxmlformats.org/drawingml/2006/main">
-              <a:ext uri="{FF2B5EF4-FFF2-40B4-BE49-F238E27FC236}">
-                <a16:creationId xmlns:a16="http://schemas.microsoft.com/office/drawing/2014/main" id="{705AE547-4DFE-4D5D-B779-1165F377F893}"/>
-              </a:ext>
-            </a:extLst>
-          </p:cNvPr>
-          <p:cNvSpPr>
-            <a:spLocks xmlns:a="http://schemas.openxmlformats.org/drawingml/2006/main" noGrp="1"/>
-          </p:cNvSpPr>
-          <p:nvPr/>
-        </p:nvSpPr>
-        <p:spPr>
-          <a:xfrm xmlns:a="http://schemas.openxmlformats.org/drawingml/2006/main">
-            <a:off x="8172450" y="3638550"/>
-            <a:ext cx="2762250" cy="1143000"/>
+              <a:defRPr sz="1275" b="0">
+                <a:solidFill>
+                  <a:srgbClr val="0F172A"/>
+                </a:solidFill>
+                <a:latin typeface="Aptos"/>
+                <a:ea typeface="Aptos"/>
+                <a:cs typeface="Aptos"/>
+              </a:defRPr>
+            </a:pPr>
+            <a:r>
+              <a:rPr sz="1275" b="0">
+                <a:solidFill>
+                  <a:srgbClr val="0F172A"/>
+                </a:solidFill>
+                <a:latin typeface="Aptos"/>
+                <a:ea typeface="Aptos"/>
+                <a:cs typeface="Aptos"/>
+              </a:rPr>
+              <a:t>volumen frecuente y repetitivo</a:t>
+            </a:r>
+          </a:p>
+        </p:txBody>
+      </p:sp>
+      <p:sp>
+        <p:nvSpPr>
+          <p:cNvPr id="20" name="">
+            <a:extLst xmlns:a="http://schemas.openxmlformats.org/drawingml/2006/main">
+              <a:ext uri="{FF2B5EF4-FFF2-40B4-BE49-F238E27FC236}">
+                <a16:creationId xmlns:a16="http://schemas.microsoft.com/office/drawing/2014/main" id="{C3647590-578A-4FF3-B3A3-59AB56358757}"/>
+              </a:ext>
+            </a:extLst>
+          </p:cNvPr>
+          <p:cNvSpPr>
+            <a:spLocks xmlns:a="http://schemas.openxmlformats.org/drawingml/2006/main" noGrp="1"/>
+          </p:cNvSpPr>
+          <p:nvPr/>
+        </p:nvSpPr>
+        <p:spPr>
+          <a:xfrm xmlns:a="http://schemas.openxmlformats.org/drawingml/2006/main">
+            <a:off x="857250" y="4533900"/>
+            <a:ext cx="85725" cy="85725"/>
+          </a:xfrm>
+          <a:prstGeom xmlns:a="http://schemas.openxmlformats.org/drawingml/2006/main" prst="rect">
+            <a:avLst/>
+          </a:prstGeom>
+          <a:solidFill xmlns:a="http://schemas.openxmlformats.org/drawingml/2006/main">
+            <a:srgbClr val="2D6A4F"/>
+          </a:solidFill>
+          <a:ln xmlns:a="http://schemas.openxmlformats.org/drawingml/2006/main" w="0">
+            <a:solidFill>
+              <a:srgbClr val="2D6A4F"/>
+            </a:solidFill>
+            <a:prstDash val="solid"/>
+          </a:ln>
+        </p:spPr>
+      </p:sp>
+      <p:sp>
+        <p:nvSpPr>
+          <p:cNvPr id="21" name="">
+            <a:extLst xmlns:a="http://schemas.openxmlformats.org/drawingml/2006/main">
+              <a:ext uri="{FF2B5EF4-FFF2-40B4-BE49-F238E27FC236}">
+                <a16:creationId xmlns:a16="http://schemas.microsoft.com/office/drawing/2014/main" id="{E34B1905-E17C-44DC-A877-E65355579F55}"/>
+              </a:ext>
+            </a:extLst>
+          </p:cNvPr>
+          <p:cNvSpPr>
+            <a:spLocks xmlns:a="http://schemas.openxmlformats.org/drawingml/2006/main" noGrp="1"/>
+          </p:cNvSpPr>
+          <p:nvPr/>
+        </p:nvSpPr>
+        <p:spPr>
+          <a:xfrm xmlns:a="http://schemas.openxmlformats.org/drawingml/2006/main">
+            <a:off x="1047750" y="4467225"/>
+            <a:ext cx="3143250" cy="228600"/>
           </a:xfrm>
           <a:prstGeom xmlns:a="http://schemas.openxmlformats.org/drawingml/2006/main" prst="rect">
             <a:avLst/>
@@ -14611,47 +15181,629 @@
           <a:lstStyle xmlns:a="http://schemas.openxmlformats.org/drawingml/2006/main"/>
           <a:p xmlns:a="http://schemas.openxmlformats.org/drawingml/2006/main">
             <a:pPr algn="l">
-              <a:defRPr sz="1500" b="0">
-                <a:solidFill>
-                  <a:srgbClr val="D9E2EC"/>
-                </a:solidFill>
-                <a:latin typeface="Aptos"/>
-                <a:ea typeface="Aptos"/>
-                <a:cs typeface="Aptos"/>
-              </a:defRPr>
-            </a:pPr>
-            <a:r>
-              <a:rPr sz="1500" b="0">
-                <a:solidFill>
-                  <a:srgbClr val="D9E2EC"/>
-                </a:solidFill>
-                <a:latin typeface="Aptos"/>
-                <a:ea typeface="Aptos"/>
-                <a:cs typeface="Aptos"/>
-              </a:rPr>
-              <a:t>Segmentar workloads: cloud para unos casos, infraestructura controlada para otros, con disciplina economica y operativa.</a:t>
-            </a:r>
-          </a:p>
-        </p:txBody>
-      </p:sp>
-      <p:sp>
-        <p:nvSpPr>
-          <p:cNvPr id="20" name="">
-            <a:extLst xmlns:a="http://schemas.openxmlformats.org/drawingml/2006/main">
-              <a:ext uri="{FF2B5EF4-FFF2-40B4-BE49-F238E27FC236}">
-                <a16:creationId xmlns:a16="http://schemas.microsoft.com/office/drawing/2014/main" id="{A5B16588-C228-438C-999C-B8388E652434}"/>
-              </a:ext>
-            </a:extLst>
-          </p:cNvPr>
-          <p:cNvSpPr>
-            <a:spLocks xmlns:a="http://schemas.openxmlformats.org/drawingml/2006/main" noGrp="1"/>
-          </p:cNvSpPr>
-          <p:nvPr/>
-        </p:nvSpPr>
-        <p:spPr>
-          <a:xfrm xmlns:a="http://schemas.openxmlformats.org/drawingml/2006/main">
-            <a:off x="552450" y="5867400"/>
-            <a:ext cx="11068050" cy="438150"/>
+              <a:defRPr sz="1275" b="0">
+                <a:solidFill>
+                  <a:srgbClr val="0F172A"/>
+                </a:solidFill>
+                <a:latin typeface="Aptos"/>
+                <a:ea typeface="Aptos"/>
+                <a:cs typeface="Aptos"/>
+              </a:defRPr>
+            </a:pPr>
+            <a:r>
+              <a:rPr sz="1275" b="0">
+                <a:solidFill>
+                  <a:srgbClr val="0F172A"/>
+                </a:solidFill>
+                <a:latin typeface="Aptos"/>
+                <a:ea typeface="Aptos"/>
+                <a:cs typeface="Aptos"/>
+              </a:rPr>
+              <a:t>agentes persistentes</a:t>
+            </a:r>
+          </a:p>
+        </p:txBody>
+      </p:sp>
+      <p:sp>
+        <p:nvSpPr>
+          <p:cNvPr id="22" name="">
+            <a:extLst xmlns:a="http://schemas.openxmlformats.org/drawingml/2006/main">
+              <a:ext uri="{FF2B5EF4-FFF2-40B4-BE49-F238E27FC236}">
+                <a16:creationId xmlns:a16="http://schemas.microsoft.com/office/drawing/2014/main" id="{1FA9E577-B1C1-4654-AB47-74C25D43AF92}"/>
+              </a:ext>
+            </a:extLst>
+          </p:cNvPr>
+          <p:cNvSpPr>
+            <a:spLocks xmlns:a="http://schemas.openxmlformats.org/drawingml/2006/main" noGrp="1"/>
+          </p:cNvSpPr>
+          <p:nvPr/>
+        </p:nvSpPr>
+        <p:spPr>
+          <a:xfrm xmlns:a="http://schemas.openxmlformats.org/drawingml/2006/main">
+            <a:off x="857250" y="4829175"/>
+            <a:ext cx="85725" cy="85725"/>
+          </a:xfrm>
+          <a:prstGeom xmlns:a="http://schemas.openxmlformats.org/drawingml/2006/main" prst="rect">
+            <a:avLst/>
+          </a:prstGeom>
+          <a:solidFill xmlns:a="http://schemas.openxmlformats.org/drawingml/2006/main">
+            <a:srgbClr val="2D6A4F"/>
+          </a:solidFill>
+          <a:ln xmlns:a="http://schemas.openxmlformats.org/drawingml/2006/main" w="0">
+            <a:solidFill>
+              <a:srgbClr val="2D6A4F"/>
+            </a:solidFill>
+            <a:prstDash val="solid"/>
+          </a:ln>
+        </p:spPr>
+      </p:sp>
+      <p:sp>
+        <p:nvSpPr>
+          <p:cNvPr id="23" name="">
+            <a:extLst xmlns:a="http://schemas.openxmlformats.org/drawingml/2006/main">
+              <a:ext uri="{FF2B5EF4-FFF2-40B4-BE49-F238E27FC236}">
+                <a16:creationId xmlns:a16="http://schemas.microsoft.com/office/drawing/2014/main" id="{380E6566-2172-422D-884E-C7F9C9EFD492}"/>
+              </a:ext>
+            </a:extLst>
+          </p:cNvPr>
+          <p:cNvSpPr>
+            <a:spLocks xmlns:a="http://schemas.openxmlformats.org/drawingml/2006/main" noGrp="1"/>
+          </p:cNvSpPr>
+          <p:nvPr/>
+        </p:nvSpPr>
+        <p:spPr>
+          <a:xfrm xmlns:a="http://schemas.openxmlformats.org/drawingml/2006/main">
+            <a:off x="1047750" y="4762500"/>
+            <a:ext cx="3143250" cy="228600"/>
+          </a:xfrm>
+          <a:prstGeom xmlns:a="http://schemas.openxmlformats.org/drawingml/2006/main" prst="rect">
+            <a:avLst/>
+          </a:prstGeom>
+          <a:solidFill xmlns:a="http://schemas.openxmlformats.org/drawingml/2006/main">
+            <a:srgbClr val="000000">
+              <a:alpha val="0"/>
+            </a:srgbClr>
+          </a:solidFill>
+          <a:ln xmlns:a="http://schemas.openxmlformats.org/drawingml/2006/main" w="0">
+            <a:solidFill>
+              <a:srgbClr val="000000">
+                <a:alpha val="0"/>
+              </a:srgbClr>
+            </a:solidFill>
+            <a:prstDash val="solid"/>
+          </a:ln>
+        </p:spPr>
+        <p:txBody>
+          <a:bodyPr xmlns:a="http://schemas.openxmlformats.org/drawingml/2006/main" lIns="0" tIns="0" rIns="0" bIns="0" anchor="t"/>
+          <a:lstStyle xmlns:a="http://schemas.openxmlformats.org/drawingml/2006/main"/>
+          <a:p xmlns:a="http://schemas.openxmlformats.org/drawingml/2006/main">
+            <a:pPr algn="l">
+              <a:defRPr sz="1275" b="0">
+                <a:solidFill>
+                  <a:srgbClr val="0F172A"/>
+                </a:solidFill>
+                <a:latin typeface="Aptos"/>
+                <a:ea typeface="Aptos"/>
+                <a:cs typeface="Aptos"/>
+              </a:defRPr>
+            </a:pPr>
+            <a:r>
+              <a:rPr sz="1275" b="0">
+                <a:solidFill>
+                  <a:srgbClr val="0F172A"/>
+                </a:solidFill>
+                <a:latin typeface="Aptos"/>
+                <a:ea typeface="Aptos"/>
+                <a:cs typeface="Aptos"/>
+              </a:rPr>
+              <a:t>documentos privados</a:t>
+            </a:r>
+          </a:p>
+        </p:txBody>
+      </p:sp>
+      <p:sp>
+        <p:nvSpPr>
+          <p:cNvPr id="24" name="">
+            <a:extLst xmlns:a="http://schemas.openxmlformats.org/drawingml/2006/main">
+              <a:ext uri="{FF2B5EF4-FFF2-40B4-BE49-F238E27FC236}">
+                <a16:creationId xmlns:a16="http://schemas.microsoft.com/office/drawing/2014/main" id="{87522E69-938B-4677-A4CD-5718E594A6F3}"/>
+              </a:ext>
+            </a:extLst>
+          </p:cNvPr>
+          <p:cNvSpPr>
+            <a:spLocks xmlns:a="http://schemas.openxmlformats.org/drawingml/2006/main" noGrp="1"/>
+          </p:cNvSpPr>
+          <p:nvPr/>
+        </p:nvSpPr>
+        <p:spPr>
+          <a:xfrm xmlns:a="http://schemas.openxmlformats.org/drawingml/2006/main">
+            <a:off x="857250" y="5124450"/>
+            <a:ext cx="85725" cy="85725"/>
+          </a:xfrm>
+          <a:prstGeom xmlns:a="http://schemas.openxmlformats.org/drawingml/2006/main" prst="rect">
+            <a:avLst/>
+          </a:prstGeom>
+          <a:solidFill xmlns:a="http://schemas.openxmlformats.org/drawingml/2006/main">
+            <a:srgbClr val="2D6A4F"/>
+          </a:solidFill>
+          <a:ln xmlns:a="http://schemas.openxmlformats.org/drawingml/2006/main" w="0">
+            <a:solidFill>
+              <a:srgbClr val="2D6A4F"/>
+            </a:solidFill>
+            <a:prstDash val="solid"/>
+          </a:ln>
+        </p:spPr>
+      </p:sp>
+      <p:sp>
+        <p:nvSpPr>
+          <p:cNvPr id="25" name="">
+            <a:extLst xmlns:a="http://schemas.openxmlformats.org/drawingml/2006/main">
+              <a:ext uri="{FF2B5EF4-FFF2-40B4-BE49-F238E27FC236}">
+                <a16:creationId xmlns:a16="http://schemas.microsoft.com/office/drawing/2014/main" id="{97A86811-BEE8-4C0E-8338-3EAA379D5C2F}"/>
+              </a:ext>
+            </a:extLst>
+          </p:cNvPr>
+          <p:cNvSpPr>
+            <a:spLocks xmlns:a="http://schemas.openxmlformats.org/drawingml/2006/main" noGrp="1"/>
+          </p:cNvSpPr>
+          <p:nvPr/>
+        </p:nvSpPr>
+        <p:spPr>
+          <a:xfrm xmlns:a="http://schemas.openxmlformats.org/drawingml/2006/main">
+            <a:off x="1047750" y="5057775"/>
+            <a:ext cx="3143250" cy="228600"/>
+          </a:xfrm>
+          <a:prstGeom xmlns:a="http://schemas.openxmlformats.org/drawingml/2006/main" prst="rect">
+            <a:avLst/>
+          </a:prstGeom>
+          <a:solidFill xmlns:a="http://schemas.openxmlformats.org/drawingml/2006/main">
+            <a:srgbClr val="000000">
+              <a:alpha val="0"/>
+            </a:srgbClr>
+          </a:solidFill>
+          <a:ln xmlns:a="http://schemas.openxmlformats.org/drawingml/2006/main" w="0">
+            <a:solidFill>
+              <a:srgbClr val="000000">
+                <a:alpha val="0"/>
+              </a:srgbClr>
+            </a:solidFill>
+            <a:prstDash val="solid"/>
+          </a:ln>
+        </p:spPr>
+        <p:txBody>
+          <a:bodyPr xmlns:a="http://schemas.openxmlformats.org/drawingml/2006/main" lIns="0" tIns="0" rIns="0" bIns="0" anchor="t"/>
+          <a:lstStyle xmlns:a="http://schemas.openxmlformats.org/drawingml/2006/main"/>
+          <a:p xmlns:a="http://schemas.openxmlformats.org/drawingml/2006/main">
+            <a:pPr algn="l">
+              <a:defRPr sz="1275" b="0">
+                <a:solidFill>
+                  <a:srgbClr val="0F172A"/>
+                </a:solidFill>
+                <a:latin typeface="Aptos"/>
+                <a:ea typeface="Aptos"/>
+                <a:cs typeface="Aptos"/>
+              </a:defRPr>
+            </a:pPr>
+            <a:r>
+              <a:rPr sz="1275" b="0">
+                <a:solidFill>
+                  <a:srgbClr val="0F172A"/>
+                </a:solidFill>
+                <a:latin typeface="Aptos"/>
+                <a:ea typeface="Aptos"/>
+                <a:cs typeface="Aptos"/>
+              </a:rPr>
+              <a:t>tareas intensivas en iteraciones</a:t>
+            </a:r>
+          </a:p>
+        </p:txBody>
+      </p:sp>
+      <p:sp>
+        <p:nvSpPr>
+          <p:cNvPr id="26" name="">
+            <a:extLst xmlns:a="http://schemas.openxmlformats.org/drawingml/2006/main">
+              <a:ext uri="{FF2B5EF4-FFF2-40B4-BE49-F238E27FC236}">
+                <a16:creationId xmlns:a16="http://schemas.microsoft.com/office/drawing/2014/main" id="{33C4B35D-C060-44B7-9492-37BDBC1BF681}"/>
+              </a:ext>
+            </a:extLst>
+          </p:cNvPr>
+          <p:cNvSpPr>
+            <a:spLocks xmlns:a="http://schemas.openxmlformats.org/drawingml/2006/main" noGrp="1"/>
+          </p:cNvSpPr>
+          <p:nvPr/>
+        </p:nvSpPr>
+        <p:spPr>
+          <a:xfrm xmlns:a="http://schemas.openxmlformats.org/drawingml/2006/main">
+            <a:off x="8039100" y="4238625"/>
+            <a:ext cx="85725" cy="85725"/>
+          </a:xfrm>
+          <a:prstGeom xmlns:a="http://schemas.openxmlformats.org/drawingml/2006/main" prst="rect">
+            <a:avLst/>
+          </a:prstGeom>
+          <a:solidFill xmlns:a="http://schemas.openxmlformats.org/drawingml/2006/main">
+            <a:srgbClr val="C75C2A"/>
+          </a:solidFill>
+          <a:ln xmlns:a="http://schemas.openxmlformats.org/drawingml/2006/main" w="0">
+            <a:solidFill>
+              <a:srgbClr val="C75C2A"/>
+            </a:solidFill>
+            <a:prstDash val="solid"/>
+          </a:ln>
+        </p:spPr>
+      </p:sp>
+      <p:sp>
+        <p:nvSpPr>
+          <p:cNvPr id="27" name="">
+            <a:extLst xmlns:a="http://schemas.openxmlformats.org/drawingml/2006/main">
+              <a:ext uri="{FF2B5EF4-FFF2-40B4-BE49-F238E27FC236}">
+                <a16:creationId xmlns:a16="http://schemas.microsoft.com/office/drawing/2014/main" id="{0161E11B-E136-4254-A004-6FB8423EFF92}"/>
+              </a:ext>
+            </a:extLst>
+          </p:cNvPr>
+          <p:cNvSpPr>
+            <a:spLocks xmlns:a="http://schemas.openxmlformats.org/drawingml/2006/main" noGrp="1"/>
+          </p:cNvSpPr>
+          <p:nvPr/>
+        </p:nvSpPr>
+        <p:spPr>
+          <a:xfrm xmlns:a="http://schemas.openxmlformats.org/drawingml/2006/main">
+            <a:off x="8229600" y="4171950"/>
+            <a:ext cx="3143250" cy="228600"/>
+          </a:xfrm>
+          <a:prstGeom xmlns:a="http://schemas.openxmlformats.org/drawingml/2006/main" prst="rect">
+            <a:avLst/>
+          </a:prstGeom>
+          <a:solidFill xmlns:a="http://schemas.openxmlformats.org/drawingml/2006/main">
+            <a:srgbClr val="000000">
+              <a:alpha val="0"/>
+            </a:srgbClr>
+          </a:solidFill>
+          <a:ln xmlns:a="http://schemas.openxmlformats.org/drawingml/2006/main" w="0">
+            <a:solidFill>
+              <a:srgbClr val="000000">
+                <a:alpha val="0"/>
+              </a:srgbClr>
+            </a:solidFill>
+            <a:prstDash val="solid"/>
+          </a:ln>
+        </p:spPr>
+        <p:txBody>
+          <a:bodyPr xmlns:a="http://schemas.openxmlformats.org/drawingml/2006/main" lIns="0" tIns="0" rIns="0" bIns="0" anchor="t"/>
+          <a:lstStyle xmlns:a="http://schemas.openxmlformats.org/drawingml/2006/main"/>
+          <a:p xmlns:a="http://schemas.openxmlformats.org/drawingml/2006/main">
+            <a:pPr algn="l">
+              <a:defRPr sz="1275" b="0">
+                <a:solidFill>
+                  <a:srgbClr val="0F172A"/>
+                </a:solidFill>
+                <a:latin typeface="Aptos"/>
+                <a:ea typeface="Aptos"/>
+                <a:cs typeface="Aptos"/>
+              </a:defRPr>
+            </a:pPr>
+            <a:r>
+              <a:rPr sz="1275" b="0">
+                <a:solidFill>
+                  <a:srgbClr val="0F172A"/>
+                </a:solidFill>
+                <a:latin typeface="Aptos"/>
+                <a:ea typeface="Aptos"/>
+                <a:cs typeface="Aptos"/>
+              </a:rPr>
+              <a:t>planificación compleja</a:t>
+            </a:r>
+          </a:p>
+        </p:txBody>
+      </p:sp>
+      <p:sp>
+        <p:nvSpPr>
+          <p:cNvPr id="28" name="">
+            <a:extLst xmlns:a="http://schemas.openxmlformats.org/drawingml/2006/main">
+              <a:ext uri="{FF2B5EF4-FFF2-40B4-BE49-F238E27FC236}">
+                <a16:creationId xmlns:a16="http://schemas.microsoft.com/office/drawing/2014/main" id="{8EB52AB3-45EE-42C9-9611-C16074754ACD}"/>
+              </a:ext>
+            </a:extLst>
+          </p:cNvPr>
+          <p:cNvSpPr>
+            <a:spLocks xmlns:a="http://schemas.openxmlformats.org/drawingml/2006/main" noGrp="1"/>
+          </p:cNvSpPr>
+          <p:nvPr/>
+        </p:nvSpPr>
+        <p:spPr>
+          <a:xfrm xmlns:a="http://schemas.openxmlformats.org/drawingml/2006/main">
+            <a:off x="8039100" y="4533900"/>
+            <a:ext cx="85725" cy="85725"/>
+          </a:xfrm>
+          <a:prstGeom xmlns:a="http://schemas.openxmlformats.org/drawingml/2006/main" prst="rect">
+            <a:avLst/>
+          </a:prstGeom>
+          <a:solidFill xmlns:a="http://schemas.openxmlformats.org/drawingml/2006/main">
+            <a:srgbClr val="C75C2A"/>
+          </a:solidFill>
+          <a:ln xmlns:a="http://schemas.openxmlformats.org/drawingml/2006/main" w="0">
+            <a:solidFill>
+              <a:srgbClr val="C75C2A"/>
+            </a:solidFill>
+            <a:prstDash val="solid"/>
+          </a:ln>
+        </p:spPr>
+      </p:sp>
+      <p:sp>
+        <p:nvSpPr>
+          <p:cNvPr id="29" name="">
+            <a:extLst xmlns:a="http://schemas.openxmlformats.org/drawingml/2006/main">
+              <a:ext uri="{FF2B5EF4-FFF2-40B4-BE49-F238E27FC236}">
+                <a16:creationId xmlns:a16="http://schemas.microsoft.com/office/drawing/2014/main" id="{263B9E43-B323-40E1-9CC4-5D657041B734}"/>
+              </a:ext>
+            </a:extLst>
+          </p:cNvPr>
+          <p:cNvSpPr>
+            <a:spLocks xmlns:a="http://schemas.openxmlformats.org/drawingml/2006/main" noGrp="1"/>
+          </p:cNvSpPr>
+          <p:nvPr/>
+        </p:nvSpPr>
+        <p:spPr>
+          <a:xfrm xmlns:a="http://schemas.openxmlformats.org/drawingml/2006/main">
+            <a:off x="8229600" y="4467225"/>
+            <a:ext cx="3143250" cy="228600"/>
+          </a:xfrm>
+          <a:prstGeom xmlns:a="http://schemas.openxmlformats.org/drawingml/2006/main" prst="rect">
+            <a:avLst/>
+          </a:prstGeom>
+          <a:solidFill xmlns:a="http://schemas.openxmlformats.org/drawingml/2006/main">
+            <a:srgbClr val="000000">
+              <a:alpha val="0"/>
+            </a:srgbClr>
+          </a:solidFill>
+          <a:ln xmlns:a="http://schemas.openxmlformats.org/drawingml/2006/main" w="0">
+            <a:solidFill>
+              <a:srgbClr val="000000">
+                <a:alpha val="0"/>
+              </a:srgbClr>
+            </a:solidFill>
+            <a:prstDash val="solid"/>
+          </a:ln>
+        </p:spPr>
+        <p:txBody>
+          <a:bodyPr xmlns:a="http://schemas.openxmlformats.org/drawingml/2006/main" lIns="0" tIns="0" rIns="0" bIns="0" anchor="t"/>
+          <a:lstStyle xmlns:a="http://schemas.openxmlformats.org/drawingml/2006/main"/>
+          <a:p xmlns:a="http://schemas.openxmlformats.org/drawingml/2006/main">
+            <a:pPr algn="l">
+              <a:defRPr sz="1275" b="0">
+                <a:solidFill>
+                  <a:srgbClr val="0F172A"/>
+                </a:solidFill>
+                <a:latin typeface="Aptos"/>
+                <a:ea typeface="Aptos"/>
+                <a:cs typeface="Aptos"/>
+              </a:defRPr>
+            </a:pPr>
+            <a:r>
+              <a:rPr sz="1275" b="0">
+                <a:solidFill>
+                  <a:srgbClr val="0F172A"/>
+                </a:solidFill>
+                <a:latin typeface="Aptos"/>
+                <a:ea typeface="Aptos"/>
+                <a:cs typeface="Aptos"/>
+              </a:rPr>
+              <a:t>máxima calidad disponible</a:t>
+            </a:r>
+          </a:p>
+        </p:txBody>
+      </p:sp>
+      <p:sp>
+        <p:nvSpPr>
+          <p:cNvPr id="30" name="">
+            <a:extLst xmlns:a="http://schemas.openxmlformats.org/drawingml/2006/main">
+              <a:ext uri="{FF2B5EF4-FFF2-40B4-BE49-F238E27FC236}">
+                <a16:creationId xmlns:a16="http://schemas.microsoft.com/office/drawing/2014/main" id="{C627D1B1-8BB6-41C9-9067-CA27EA29BDD4}"/>
+              </a:ext>
+            </a:extLst>
+          </p:cNvPr>
+          <p:cNvSpPr>
+            <a:spLocks xmlns:a="http://schemas.openxmlformats.org/drawingml/2006/main" noGrp="1"/>
+          </p:cNvSpPr>
+          <p:nvPr/>
+        </p:nvSpPr>
+        <p:spPr>
+          <a:xfrm xmlns:a="http://schemas.openxmlformats.org/drawingml/2006/main">
+            <a:off x="8039100" y="4829175"/>
+            <a:ext cx="85725" cy="85725"/>
+          </a:xfrm>
+          <a:prstGeom xmlns:a="http://schemas.openxmlformats.org/drawingml/2006/main" prst="rect">
+            <a:avLst/>
+          </a:prstGeom>
+          <a:solidFill xmlns:a="http://schemas.openxmlformats.org/drawingml/2006/main">
+            <a:srgbClr val="C75C2A"/>
+          </a:solidFill>
+          <a:ln xmlns:a="http://schemas.openxmlformats.org/drawingml/2006/main" w="0">
+            <a:solidFill>
+              <a:srgbClr val="C75C2A"/>
+            </a:solidFill>
+            <a:prstDash val="solid"/>
+          </a:ln>
+        </p:spPr>
+      </p:sp>
+      <p:sp>
+        <p:nvSpPr>
+          <p:cNvPr id="31" name="">
+            <a:extLst xmlns:a="http://schemas.openxmlformats.org/drawingml/2006/main">
+              <a:ext uri="{FF2B5EF4-FFF2-40B4-BE49-F238E27FC236}">
+                <a16:creationId xmlns:a16="http://schemas.microsoft.com/office/drawing/2014/main" id="{EF017236-FA23-4EA2-B44A-7E6F2173ACE7}"/>
+              </a:ext>
+            </a:extLst>
+          </p:cNvPr>
+          <p:cNvSpPr>
+            <a:spLocks xmlns:a="http://schemas.openxmlformats.org/drawingml/2006/main" noGrp="1"/>
+          </p:cNvSpPr>
+          <p:nvPr/>
+        </p:nvSpPr>
+        <p:spPr>
+          <a:xfrm xmlns:a="http://schemas.openxmlformats.org/drawingml/2006/main">
+            <a:off x="8229600" y="4762500"/>
+            <a:ext cx="3143250" cy="228600"/>
+          </a:xfrm>
+          <a:prstGeom xmlns:a="http://schemas.openxmlformats.org/drawingml/2006/main" prst="rect">
+            <a:avLst/>
+          </a:prstGeom>
+          <a:solidFill xmlns:a="http://schemas.openxmlformats.org/drawingml/2006/main">
+            <a:srgbClr val="000000">
+              <a:alpha val="0"/>
+            </a:srgbClr>
+          </a:solidFill>
+          <a:ln xmlns:a="http://schemas.openxmlformats.org/drawingml/2006/main" w="0">
+            <a:solidFill>
+              <a:srgbClr val="000000">
+                <a:alpha val="0"/>
+              </a:srgbClr>
+            </a:solidFill>
+            <a:prstDash val="solid"/>
+          </a:ln>
+        </p:spPr>
+        <p:txBody>
+          <a:bodyPr xmlns:a="http://schemas.openxmlformats.org/drawingml/2006/main" lIns="0" tIns="0" rIns="0" bIns="0" anchor="t"/>
+          <a:lstStyle xmlns:a="http://schemas.openxmlformats.org/drawingml/2006/main"/>
+          <a:p xmlns:a="http://schemas.openxmlformats.org/drawingml/2006/main">
+            <a:pPr algn="l">
+              <a:defRPr sz="1275" b="0">
+                <a:solidFill>
+                  <a:srgbClr val="0F172A"/>
+                </a:solidFill>
+                <a:latin typeface="Aptos"/>
+                <a:ea typeface="Aptos"/>
+                <a:cs typeface="Aptos"/>
+              </a:defRPr>
+            </a:pPr>
+            <a:r>
+              <a:rPr sz="1275" b="0">
+                <a:solidFill>
+                  <a:srgbClr val="0F172A"/>
+                </a:solidFill>
+                <a:latin typeface="Aptos"/>
+                <a:ea typeface="Aptos"/>
+                <a:cs typeface="Aptos"/>
+              </a:rPr>
+              <a:t>casos ambiguos o excepcionales</a:t>
+            </a:r>
+          </a:p>
+        </p:txBody>
+      </p:sp>
+      <p:sp>
+        <p:nvSpPr>
+          <p:cNvPr id="32" name="">
+            <a:extLst xmlns:a="http://schemas.openxmlformats.org/drawingml/2006/main">
+              <a:ext uri="{FF2B5EF4-FFF2-40B4-BE49-F238E27FC236}">
+                <a16:creationId xmlns:a16="http://schemas.microsoft.com/office/drawing/2014/main" id="{AC98F1D4-3D00-4064-84F1-880B8428208D}"/>
+              </a:ext>
+            </a:extLst>
+          </p:cNvPr>
+          <p:cNvSpPr>
+            <a:spLocks xmlns:a="http://schemas.openxmlformats.org/drawingml/2006/main" noGrp="1"/>
+          </p:cNvSpPr>
+          <p:nvPr/>
+        </p:nvSpPr>
+        <p:spPr>
+          <a:xfrm xmlns:a="http://schemas.openxmlformats.org/drawingml/2006/main">
+            <a:off x="8039100" y="5124450"/>
+            <a:ext cx="85725" cy="85725"/>
+          </a:xfrm>
+          <a:prstGeom xmlns:a="http://schemas.openxmlformats.org/drawingml/2006/main" prst="rect">
+            <a:avLst/>
+          </a:prstGeom>
+          <a:solidFill xmlns:a="http://schemas.openxmlformats.org/drawingml/2006/main">
+            <a:srgbClr val="C75C2A"/>
+          </a:solidFill>
+          <a:ln xmlns:a="http://schemas.openxmlformats.org/drawingml/2006/main" w="0">
+            <a:solidFill>
+              <a:srgbClr val="C75C2A"/>
+            </a:solidFill>
+            <a:prstDash val="solid"/>
+          </a:ln>
+        </p:spPr>
+      </p:sp>
+      <p:sp>
+        <p:nvSpPr>
+          <p:cNvPr id="33" name="">
+            <a:extLst xmlns:a="http://schemas.openxmlformats.org/drawingml/2006/main">
+              <a:ext uri="{FF2B5EF4-FFF2-40B4-BE49-F238E27FC236}">
+                <a16:creationId xmlns:a16="http://schemas.microsoft.com/office/drawing/2014/main" id="{DE634775-CC90-4171-AD47-F6057473C11C}"/>
+              </a:ext>
+            </a:extLst>
+          </p:cNvPr>
+          <p:cNvSpPr>
+            <a:spLocks xmlns:a="http://schemas.openxmlformats.org/drawingml/2006/main" noGrp="1"/>
+          </p:cNvSpPr>
+          <p:nvPr/>
+        </p:nvSpPr>
+        <p:spPr>
+          <a:xfrm xmlns:a="http://schemas.openxmlformats.org/drawingml/2006/main">
+            <a:off x="8229600" y="5057775"/>
+            <a:ext cx="3143250" cy="228600"/>
+          </a:xfrm>
+          <a:prstGeom xmlns:a="http://schemas.openxmlformats.org/drawingml/2006/main" prst="rect">
+            <a:avLst/>
+          </a:prstGeom>
+          <a:solidFill xmlns:a="http://schemas.openxmlformats.org/drawingml/2006/main">
+            <a:srgbClr val="000000">
+              <a:alpha val="0"/>
+            </a:srgbClr>
+          </a:solidFill>
+          <a:ln xmlns:a="http://schemas.openxmlformats.org/drawingml/2006/main" w="0">
+            <a:solidFill>
+              <a:srgbClr val="000000">
+                <a:alpha val="0"/>
+              </a:srgbClr>
+            </a:solidFill>
+            <a:prstDash val="solid"/>
+          </a:ln>
+        </p:spPr>
+        <p:txBody>
+          <a:bodyPr xmlns:a="http://schemas.openxmlformats.org/drawingml/2006/main" lIns="0" tIns="0" rIns="0" bIns="0" anchor="t"/>
+          <a:lstStyle xmlns:a="http://schemas.openxmlformats.org/drawingml/2006/main"/>
+          <a:p xmlns:a="http://schemas.openxmlformats.org/drawingml/2006/main">
+            <a:pPr algn="l">
+              <a:defRPr sz="1275" b="0">
+                <a:solidFill>
+                  <a:srgbClr val="0F172A"/>
+                </a:solidFill>
+                <a:latin typeface="Aptos"/>
+                <a:ea typeface="Aptos"/>
+                <a:cs typeface="Aptos"/>
+              </a:defRPr>
+            </a:pPr>
+            <a:r>
+              <a:rPr sz="1275" b="0">
+                <a:solidFill>
+                  <a:srgbClr val="0F172A"/>
+                </a:solidFill>
+                <a:latin typeface="Aptos"/>
+                <a:ea typeface="Aptos"/>
+                <a:cs typeface="Aptos"/>
+              </a:rPr>
+              <a:t>picos de demanda y capacidades no locales</a:t>
+            </a:r>
+          </a:p>
+        </p:txBody>
+      </p:sp>
+      <p:sp>
+        <p:nvSpPr>
+          <p:cNvPr id="34" name="">
+            <a:extLst xmlns:a="http://schemas.openxmlformats.org/drawingml/2006/main">
+              <a:ext uri="{FF2B5EF4-FFF2-40B4-BE49-F238E27FC236}">
+                <a16:creationId xmlns:a16="http://schemas.microsoft.com/office/drawing/2014/main" id="{972E4BAD-E42A-450A-9452-EAA9575CE1DF}"/>
+              </a:ext>
+            </a:extLst>
+          </p:cNvPr>
+          <p:cNvSpPr>
+            <a:spLocks xmlns:a="http://schemas.openxmlformats.org/drawingml/2006/main" noGrp="1"/>
+          </p:cNvSpPr>
+          <p:nvPr/>
+        </p:nvSpPr>
+        <p:spPr>
+          <a:xfrm xmlns:a="http://schemas.openxmlformats.org/drawingml/2006/main">
+            <a:off x="4476750" y="4114800"/>
+            <a:ext cx="3238500" cy="1428750"/>
           </a:xfrm>
           <a:prstGeom xmlns:a="http://schemas.openxmlformats.org/drawingml/2006/main" prst="rect">
             <a:avLst/>
@@ -14659,7 +15811,7 @@
           <a:solidFill xmlns:a="http://schemas.openxmlformats.org/drawingml/2006/main">
             <a:srgbClr val="EADBC8"/>
           </a:solidFill>
-          <a:ln xmlns:a="http://schemas.openxmlformats.org/drawingml/2006/main" w="0">
+          <a:ln xmlns:a="http://schemas.openxmlformats.org/drawingml/2006/main" w="11430">
             <a:solidFill>
               <a:srgbClr val="DDD3C2"/>
             </a:solidFill>
@@ -14669,176 +15821,48 @@
       </p:sp>
       <p:sp>
         <p:nvSpPr>
-          <p:cNvPr id="21" name="">
-            <a:extLst xmlns:a="http://schemas.openxmlformats.org/drawingml/2006/main">
-              <a:ext uri="{FF2B5EF4-FFF2-40B4-BE49-F238E27FC236}">
-                <a16:creationId xmlns:a16="http://schemas.microsoft.com/office/drawing/2014/main" id="{EBBCF5C8-FF64-4C74-988F-426FD4AA48EB}"/>
-              </a:ext>
-            </a:extLst>
-          </p:cNvPr>
-          <p:cNvSpPr>
-            <a:spLocks xmlns:a="http://schemas.openxmlformats.org/drawingml/2006/main" noGrp="1"/>
-          </p:cNvSpPr>
-          <p:nvPr/>
-        </p:nvSpPr>
-        <p:spPr>
-          <a:xfrm xmlns:a="http://schemas.openxmlformats.org/drawingml/2006/main">
-            <a:off x="800100" y="5991225"/>
-            <a:ext cx="10572750" cy="209550"/>
-          </a:xfrm>
-          <a:prstGeom xmlns:a="http://schemas.openxmlformats.org/drawingml/2006/main" prst="rect">
-            <a:avLst/>
-          </a:prstGeom>
-          <a:solidFill xmlns:a="http://schemas.openxmlformats.org/drawingml/2006/main">
-            <a:srgbClr val="000000">
-              <a:alpha val="0"/>
-            </a:srgbClr>
-          </a:solidFill>
-          <a:ln xmlns:a="http://schemas.openxmlformats.org/drawingml/2006/main" w="0">
-            <a:solidFill>
-              <a:srgbClr val="000000">
-                <a:alpha val="0"/>
-              </a:srgbClr>
-            </a:solidFill>
-            <a:prstDash val="solid"/>
-          </a:ln>
-        </p:spPr>
-        <p:txBody>
-          <a:bodyPr xmlns:a="http://schemas.openxmlformats.org/drawingml/2006/main" lIns="0" tIns="0" rIns="0" bIns="0" anchor="t"/>
-          <a:lstStyle xmlns:a="http://schemas.openxmlformats.org/drawingml/2006/main"/>
-          <a:p xmlns:a="http://schemas.openxmlformats.org/drawingml/2006/main">
-            <a:pPr algn="l">
-              <a:defRPr sz="1575" b="1">
-                <a:solidFill>
-                  <a:srgbClr val="0F172A"/>
-                </a:solidFill>
-                <a:latin typeface="Aptos Display"/>
-                <a:ea typeface="Aptos Display"/>
-                <a:cs typeface="Aptos Display"/>
-              </a:defRPr>
-            </a:pPr>
-            <a:r>
-              <a:rPr sz="1575" b="1">
-                <a:solidFill>
-                  <a:srgbClr val="0F172A"/>
-                </a:solidFill>
-                <a:latin typeface="Aptos Display"/>
-                <a:ea typeface="Aptos Display"/>
-                <a:cs typeface="Aptos Display"/>
-              </a:rPr>
-              <a:t>Mi recomendacion: antes de hablar de volver a on-premise, midan, segmenten y gobiernen el consumo de IA.</a:t>
-            </a:r>
-          </a:p>
-        </p:txBody>
-      </p:sp>
-      <p:sp>
-        <p:nvSpPr>
-          <p:cNvPr id="22" name="">
-            <a:extLst xmlns:a="http://schemas.openxmlformats.org/drawingml/2006/main">
-              <a:ext uri="{FF2B5EF4-FFF2-40B4-BE49-F238E27FC236}">
-                <a16:creationId xmlns:a16="http://schemas.microsoft.com/office/drawing/2014/main" id="{7607D4E3-9E12-4F0D-B2FA-8B0F29821DE0}"/>
-              </a:ext>
-            </a:extLst>
-          </p:cNvPr>
-          <p:cNvSpPr>
-            <a:spLocks xmlns:a="http://schemas.openxmlformats.org/drawingml/2006/main" noGrp="1"/>
-          </p:cNvSpPr>
-          <p:nvPr/>
-        </p:nvSpPr>
-        <p:spPr>
-          <a:xfrm xmlns:a="http://schemas.openxmlformats.org/drawingml/2006/main">
-            <a:off x="552450" y="6534150"/>
-            <a:ext cx="10477500" cy="171450"/>
-          </a:xfrm>
-          <a:prstGeom xmlns:a="http://schemas.openxmlformats.org/drawingml/2006/main" prst="rect">
-            <a:avLst/>
-          </a:prstGeom>
-          <a:solidFill xmlns:a="http://schemas.openxmlformats.org/drawingml/2006/main">
-            <a:srgbClr val="000000">
-              <a:alpha val="0"/>
-            </a:srgbClr>
-          </a:solidFill>
-          <a:ln xmlns:a="http://schemas.openxmlformats.org/drawingml/2006/main" w="0">
-            <a:solidFill>
-              <a:srgbClr val="000000">
-                <a:alpha val="0"/>
-              </a:srgbClr>
-            </a:solidFill>
-            <a:prstDash val="solid"/>
-          </a:ln>
-        </p:spPr>
-        <p:txBody>
-          <a:bodyPr xmlns:a="http://schemas.openxmlformats.org/drawingml/2006/main" lIns="0" tIns="0" rIns="0" bIns="0" anchor="t"/>
-          <a:lstStyle xmlns:a="http://schemas.openxmlformats.org/drawingml/2006/main"/>
-          <a:p xmlns:a="http://schemas.openxmlformats.org/drawingml/2006/main">
-            <a:pPr algn="l">
-              <a:defRPr sz="825" b="0">
-                <a:solidFill>
-                  <a:srgbClr val="6B7280"/>
-                </a:solidFill>
-                <a:latin typeface="Aptos"/>
-                <a:ea typeface="Aptos"/>
-                <a:cs typeface="Aptos"/>
-              </a:defRPr>
-            </a:pPr>
-            <a:r>
-              <a:rPr sz="825" b="0">
-                <a:solidFill>
-                  <a:srgbClr val="6B7280"/>
-                </a:solidFill>
-                <a:latin typeface="Aptos"/>
-                <a:ea typeface="Aptos"/>
-                <a:cs typeface="Aptos"/>
-              </a:rPr>
-              <a:t>La arquitectura correcta empieza con finops, observabilidad y criterio por workload.</a:t>
-            </a:r>
-          </a:p>
-        </p:txBody>
-      </p:sp>
-      <p:sp>
-        <p:nvSpPr>
-          <p:cNvPr id="23" name="">
-            <a:extLst xmlns:a="http://schemas.openxmlformats.org/drawingml/2006/main">
-              <a:ext uri="{FF2B5EF4-FFF2-40B4-BE49-F238E27FC236}">
-                <a16:creationId xmlns:a16="http://schemas.microsoft.com/office/drawing/2014/main" id="{35A39C89-8416-4D7F-8F10-8A02F8CF66C1}"/>
-              </a:ext>
-            </a:extLst>
-          </p:cNvPr>
-          <p:cNvSpPr>
-            <a:spLocks xmlns:a="http://schemas.openxmlformats.org/drawingml/2006/main" noGrp="1"/>
-          </p:cNvSpPr>
-          <p:nvPr/>
-        </p:nvSpPr>
-        <p:spPr>
-          <a:xfrm xmlns:a="http://schemas.openxmlformats.org/drawingml/2006/main">
-            <a:off x="11334750" y="6496050"/>
-            <a:ext cx="381000" cy="228600"/>
-          </a:xfrm>
-          <a:prstGeom xmlns:a="http://schemas.openxmlformats.org/drawingml/2006/main" prst="rect">
-            <a:avLst/>
-          </a:prstGeom>
-          <a:solidFill xmlns:a="http://schemas.openxmlformats.org/drawingml/2006/main">
-            <a:srgbClr val="000000">
-              <a:alpha val="0"/>
-            </a:srgbClr>
-          </a:solidFill>
-          <a:ln xmlns:a="http://schemas.openxmlformats.org/drawingml/2006/main" w="0">
-            <a:solidFill>
-              <a:srgbClr val="000000">
-                <a:alpha val="0"/>
-              </a:srgbClr>
-            </a:solidFill>
-            <a:prstDash val="solid"/>
-          </a:ln>
-        </p:spPr>
-        <p:txBody>
-          <a:bodyPr xmlns:a="http://schemas.openxmlformats.org/drawingml/2006/main" lIns="0" tIns="0" rIns="0" bIns="0" anchor="t"/>
-          <a:lstStyle xmlns:a="http://schemas.openxmlformats.org/drawingml/2006/main"/>
-          <a:p xmlns:a="http://schemas.openxmlformats.org/drawingml/2006/main">
-            <a:pPr algn="r">
-              <a:defRPr sz="900" b="1">
-                <a:solidFill>
-                  <a:srgbClr val="C75C2A"/>
+          <p:cNvPr id="35" name="">
+            <a:extLst xmlns:a="http://schemas.openxmlformats.org/drawingml/2006/main">
+              <a:ext uri="{FF2B5EF4-FFF2-40B4-BE49-F238E27FC236}">
+                <a16:creationId xmlns:a16="http://schemas.microsoft.com/office/drawing/2014/main" id="{F343518E-2BF1-4F81-A8DC-5B2711A8C0DD}"/>
+              </a:ext>
+            </a:extLst>
+          </p:cNvPr>
+          <p:cNvSpPr>
+            <a:spLocks xmlns:a="http://schemas.openxmlformats.org/drawingml/2006/main" noGrp="1"/>
+          </p:cNvSpPr>
+          <p:nvPr/>
+        </p:nvSpPr>
+        <p:spPr>
+          <a:xfrm xmlns:a="http://schemas.openxmlformats.org/drawingml/2006/main">
+            <a:off x="4705350" y="4286250"/>
+            <a:ext cx="2781300" cy="209550"/>
+          </a:xfrm>
+          <a:prstGeom xmlns:a="http://schemas.openxmlformats.org/drawingml/2006/main" prst="rect">
+            <a:avLst/>
+          </a:prstGeom>
+          <a:solidFill xmlns:a="http://schemas.openxmlformats.org/drawingml/2006/main">
+            <a:srgbClr val="000000">
+              <a:alpha val="0"/>
+            </a:srgbClr>
+          </a:solidFill>
+          <a:ln xmlns:a="http://schemas.openxmlformats.org/drawingml/2006/main" w="0">
+            <a:solidFill>
+              <a:srgbClr val="000000">
+                <a:alpha val="0"/>
+              </a:srgbClr>
+            </a:solidFill>
+            <a:prstDash val="solid"/>
+          </a:ln>
+        </p:spPr>
+        <p:txBody>
+          <a:bodyPr xmlns:a="http://schemas.openxmlformats.org/drawingml/2006/main" lIns="0" tIns="0" rIns="0" bIns="0" anchor="t"/>
+          <a:lstStyle xmlns:a="http://schemas.openxmlformats.org/drawingml/2006/main"/>
+          <a:p xmlns:a="http://schemas.openxmlformats.org/drawingml/2006/main">
+            <a:pPr algn="ctr">
+              <a:defRPr sz="1050" b="1">
+                <a:solidFill>
+                  <a:srgbClr val="102A43"/>
                 </a:solidFill>
                 <a:latin typeface="Aptos Mono"/>
                 <a:ea typeface="Aptos Mono"/>
@@ -14846,14 +15870,372 @@
               </a:defRPr>
             </a:pPr>
             <a:r>
-              <a:rPr sz="900" b="1">
-                <a:solidFill>
-                  <a:srgbClr val="C75C2A"/>
+              <a:rPr sz="1050" b="1">
+                <a:solidFill>
+                  <a:srgbClr val="102A43"/>
                 </a:solidFill>
                 <a:latin typeface="Aptos Mono"/>
                 <a:ea typeface="Aptos Mono"/>
                 <a:cs typeface="Aptos Mono"/>
               </a:rPr>
+              <a:t>RTX SPARK | ANUNCIO 2026-05-31</a:t>
+            </a:r>
+          </a:p>
+        </p:txBody>
+      </p:sp>
+      <p:sp>
+        <p:nvSpPr>
+          <p:cNvPr id="36" name="">
+            <a:extLst xmlns:a="http://schemas.openxmlformats.org/drawingml/2006/main">
+              <a:ext uri="{FF2B5EF4-FFF2-40B4-BE49-F238E27FC236}">
+                <a16:creationId xmlns:a16="http://schemas.microsoft.com/office/drawing/2014/main" id="{7662E7F9-B6E8-4A67-B680-1DAC78CEA020}"/>
+              </a:ext>
+            </a:extLst>
+          </p:cNvPr>
+          <p:cNvSpPr>
+            <a:spLocks xmlns:a="http://schemas.openxmlformats.org/drawingml/2006/main" noGrp="1"/>
+          </p:cNvSpPr>
+          <p:nvPr/>
+        </p:nvSpPr>
+        <p:spPr>
+          <a:xfrm xmlns:a="http://schemas.openxmlformats.org/drawingml/2006/main">
+            <a:off x="4705350" y="4572000"/>
+            <a:ext cx="2781300" cy="723900"/>
+          </a:xfrm>
+          <a:prstGeom xmlns:a="http://schemas.openxmlformats.org/drawingml/2006/main" prst="rect">
+            <a:avLst/>
+          </a:prstGeom>
+          <a:solidFill xmlns:a="http://schemas.openxmlformats.org/drawingml/2006/main">
+            <a:srgbClr val="000000">
+              <a:alpha val="0"/>
+            </a:srgbClr>
+          </a:solidFill>
+          <a:ln xmlns:a="http://schemas.openxmlformats.org/drawingml/2006/main" w="0">
+            <a:solidFill>
+              <a:srgbClr val="000000">
+                <a:alpha val="0"/>
+              </a:srgbClr>
+            </a:solidFill>
+            <a:prstDash val="solid"/>
+          </a:ln>
+        </p:spPr>
+        <p:txBody>
+          <a:bodyPr xmlns:a="http://schemas.openxmlformats.org/drawingml/2006/main" lIns="0" tIns="0" rIns="0" bIns="0" anchor="t"/>
+          <a:lstStyle xmlns:a="http://schemas.openxmlformats.org/drawingml/2006/main"/>
+          <a:p xmlns:a="http://schemas.openxmlformats.org/drawingml/2006/main">
+            <a:pPr algn="ctr">
+              <a:defRPr sz="1125" b="0">
+                <a:solidFill>
+                  <a:srgbClr val="0F172A"/>
+                </a:solidFill>
+                <a:latin typeface="Aptos"/>
+                <a:ea typeface="Aptos"/>
+                <a:cs typeface="Aptos"/>
+              </a:defRPr>
+            </a:pPr>
+            <a:r>
+              <a:rPr sz="1125" b="0">
+                <a:solidFill>
+                  <a:srgbClr val="0F172A"/>
+                </a:solidFill>
+                <a:latin typeface="Aptos"/>
+                <a:ea typeface="Aptos"/>
+                <a:cs typeface="Aptos"/>
+              </a:rPr>
+              <a:t>Hasta 128 GB de memoria unificada</a:t>
+            </a:r>
+          </a:p>
+          <a:p xmlns:a="http://schemas.openxmlformats.org/drawingml/2006/main">
+            <a:pPr algn="ctr">
+              <a:defRPr sz="1125" b="0">
+                <a:solidFill>
+                  <a:srgbClr val="0F172A"/>
+                </a:solidFill>
+                <a:latin typeface="Aptos"/>
+                <a:ea typeface="Aptos"/>
+                <a:cs typeface="Aptos"/>
+              </a:defRPr>
+            </a:pPr>
+            <a:r>
+              <a:rPr sz="1125" b="0">
+                <a:solidFill>
+                  <a:srgbClr val="0F172A"/>
+                </a:solidFill>
+                <a:latin typeface="Aptos"/>
+                <a:ea typeface="Aptos"/>
+                <a:cs typeface="Aptos"/>
+              </a:rPr>
+              <a:t>Hasta 1 petaflop FP4 de AI compute</a:t>
+            </a:r>
+          </a:p>
+          <a:p xmlns:a="http://schemas.openxmlformats.org/drawingml/2006/main">
+            <a:pPr algn="ctr">
+              <a:defRPr sz="1125" b="0">
+                <a:solidFill>
+                  <a:srgbClr val="0F172A"/>
+                </a:solidFill>
+                <a:latin typeface="Aptos"/>
+                <a:ea typeface="Aptos"/>
+                <a:cs typeface="Aptos"/>
+              </a:defRPr>
+            </a:pPr>
+            <a:r>
+              <a:rPr sz="1125" b="0">
+                <a:solidFill>
+                  <a:srgbClr val="0F172A"/>
+                </a:solidFill>
+                <a:latin typeface="Aptos"/>
+                <a:ea typeface="Aptos"/>
+                <a:cs typeface="Aptos"/>
+              </a:rPr>
+              <a:t>LLMs de hasta 120B localmente</a:t>
+            </a:r>
+          </a:p>
+          <a:p xmlns:a="http://schemas.openxmlformats.org/drawingml/2006/main">
+            <a:pPr algn="ctr">
+              <a:defRPr sz="1125" b="0">
+                <a:solidFill>
+                  <a:srgbClr val="0F172A"/>
+                </a:solidFill>
+                <a:latin typeface="Aptos"/>
+                <a:ea typeface="Aptos"/>
+                <a:cs typeface="Aptos"/>
+              </a:defRPr>
+            </a:pPr>
+            <a:r>
+              <a:rPr sz="1125" b="0">
+                <a:solidFill>
+                  <a:srgbClr val="0F172A"/>
+                </a:solidFill>
+                <a:latin typeface="Aptos"/>
+                <a:ea typeface="Aptos"/>
+                <a:cs typeface="Aptos"/>
+              </a:rPr>
+              <a:t>Disponibilidad: otoño de 2026</a:t>
+            </a:r>
+          </a:p>
+        </p:txBody>
+      </p:sp>
+      <p:sp>
+        <p:nvSpPr>
+          <p:cNvPr id="37" name="">
+            <a:extLst xmlns:a="http://schemas.openxmlformats.org/drawingml/2006/main">
+              <a:ext uri="{FF2B5EF4-FFF2-40B4-BE49-F238E27FC236}">
+                <a16:creationId xmlns:a16="http://schemas.microsoft.com/office/drawing/2014/main" id="{3C516FBE-BF80-4E4B-8122-B1C15152A759}"/>
+              </a:ext>
+            </a:extLst>
+          </p:cNvPr>
+          <p:cNvSpPr>
+            <a:spLocks xmlns:a="http://schemas.openxmlformats.org/drawingml/2006/main" noGrp="1"/>
+          </p:cNvSpPr>
+          <p:nvPr/>
+        </p:nvSpPr>
+        <p:spPr>
+          <a:xfrm xmlns:a="http://schemas.openxmlformats.org/drawingml/2006/main">
+            <a:off x="552450" y="5657850"/>
+            <a:ext cx="11068050" cy="647700"/>
+          </a:xfrm>
+          <a:prstGeom xmlns:a="http://schemas.openxmlformats.org/drawingml/2006/main" prst="rect">
+            <a:avLst/>
+          </a:prstGeom>
+          <a:solidFill xmlns:a="http://schemas.openxmlformats.org/drawingml/2006/main">
+            <a:srgbClr val="102A43"/>
+          </a:solidFill>
+          <a:ln xmlns:a="http://schemas.openxmlformats.org/drawingml/2006/main" w="0">
+            <a:solidFill>
+              <a:srgbClr val="102A43"/>
+            </a:solidFill>
+            <a:prstDash val="solid"/>
+          </a:ln>
+        </p:spPr>
+      </p:sp>
+      <p:sp>
+        <p:nvSpPr>
+          <p:cNvPr id="38" name="">
+            <a:extLst xmlns:a="http://schemas.openxmlformats.org/drawingml/2006/main">
+              <a:ext uri="{FF2B5EF4-FFF2-40B4-BE49-F238E27FC236}">
+                <a16:creationId xmlns:a16="http://schemas.microsoft.com/office/drawing/2014/main" id="{54E8756C-A171-4E78-BB6E-A3AAA5617774}"/>
+              </a:ext>
+            </a:extLst>
+          </p:cNvPr>
+          <p:cNvSpPr>
+            <a:spLocks xmlns:a="http://schemas.openxmlformats.org/drawingml/2006/main" noGrp="1"/>
+          </p:cNvSpPr>
+          <p:nvPr/>
+        </p:nvSpPr>
+        <p:spPr>
+          <a:xfrm xmlns:a="http://schemas.openxmlformats.org/drawingml/2006/main">
+            <a:off x="781050" y="5743575"/>
+            <a:ext cx="10610850" cy="476250"/>
+          </a:xfrm>
+          <a:prstGeom xmlns:a="http://schemas.openxmlformats.org/drawingml/2006/main" prst="rect">
+            <a:avLst/>
+          </a:prstGeom>
+          <a:solidFill xmlns:a="http://schemas.openxmlformats.org/drawingml/2006/main">
+            <a:srgbClr val="000000">
+              <a:alpha val="0"/>
+            </a:srgbClr>
+          </a:solidFill>
+          <a:ln xmlns:a="http://schemas.openxmlformats.org/drawingml/2006/main" w="0">
+            <a:solidFill>
+              <a:srgbClr val="000000">
+                <a:alpha val="0"/>
+              </a:srgbClr>
+            </a:solidFill>
+            <a:prstDash val="solid"/>
+          </a:ln>
+        </p:spPr>
+        <p:txBody>
+          <a:bodyPr xmlns:a="http://schemas.openxmlformats.org/drawingml/2006/main" lIns="0" tIns="0" rIns="0" bIns="0" anchor="ctr"/>
+          <a:lstStyle xmlns:a="http://schemas.openxmlformats.org/drawingml/2006/main"/>
+          <a:p xmlns:a="http://schemas.openxmlformats.org/drawingml/2006/main">
+            <a:pPr algn="ctr">
+              <a:defRPr sz="1425" b="1">
+                <a:solidFill>
+                  <a:srgbClr val="FFFDF8"/>
+                </a:solidFill>
+                <a:latin typeface="Aptos"/>
+                <a:ea typeface="Aptos"/>
+                <a:cs typeface="Aptos"/>
+              </a:defRPr>
+            </a:pPr>
+            <a:r>
+              <a:rPr sz="1425" b="1">
+                <a:solidFill>
+                  <a:srgbClr val="FFFDF8"/>
+                </a:solidFill>
+                <a:latin typeface="Aptos"/>
+                <a:ea typeface="Aptos"/>
+                <a:cs typeface="Aptos"/>
+              </a:rPr>
+              <a:t>El modelo local no necesita ser siempre mejor: necesita absorber el volumen y reservar la nube para donde su calidad adicional realmente importa.</a:t>
+            </a:r>
+          </a:p>
+        </p:txBody>
+      </p:sp>
+      <p:sp>
+        <p:nvSpPr>
+          <p:cNvPr id="39" name="">
+            <a:extLst xmlns:a="http://schemas.openxmlformats.org/drawingml/2006/main">
+              <a:ext uri="{FF2B5EF4-FFF2-40B4-BE49-F238E27FC236}">
+                <a16:creationId xmlns:a16="http://schemas.microsoft.com/office/drawing/2014/main" id="{DB2F0AAF-C2B0-4E49-84A8-1CCC4D7C2D60}"/>
+              </a:ext>
+            </a:extLst>
+          </p:cNvPr>
+          <p:cNvSpPr>
+            <a:spLocks xmlns:a="http://schemas.openxmlformats.org/drawingml/2006/main" noGrp="1"/>
+          </p:cNvSpPr>
+          <p:nvPr/>
+        </p:nvSpPr>
+        <p:spPr>
+          <a:xfrm xmlns:a="http://schemas.openxmlformats.org/drawingml/2006/main">
+            <a:off x="552450" y="6534150"/>
+            <a:ext cx="10477500" cy="171450"/>
+          </a:xfrm>
+          <a:prstGeom xmlns:a="http://schemas.openxmlformats.org/drawingml/2006/main" prst="rect">
+            <a:avLst/>
+          </a:prstGeom>
+          <a:solidFill xmlns:a="http://schemas.openxmlformats.org/drawingml/2006/main">
+            <a:srgbClr val="000000">
+              <a:alpha val="0"/>
+            </a:srgbClr>
+          </a:solidFill>
+          <a:ln xmlns:a="http://schemas.openxmlformats.org/drawingml/2006/main" w="0">
+            <a:solidFill>
+              <a:srgbClr val="000000">
+                <a:alpha val="0"/>
+              </a:srgbClr>
+            </a:solidFill>
+            <a:prstDash val="solid"/>
+          </a:ln>
+        </p:spPr>
+        <p:txBody>
+          <a:bodyPr xmlns:a="http://schemas.openxmlformats.org/drawingml/2006/main" lIns="0" tIns="0" rIns="0" bIns="0" anchor="t"/>
+          <a:lstStyle xmlns:a="http://schemas.openxmlformats.org/drawingml/2006/main"/>
+          <a:p xmlns:a="http://schemas.openxmlformats.org/drawingml/2006/main">
+            <a:pPr algn="l">
+              <a:defRPr sz="825" b="0">
+                <a:solidFill>
+                  <a:srgbClr val="6B7280"/>
+                </a:solidFill>
+                <a:latin typeface="Aptos"/>
+                <a:ea typeface="Aptos"/>
+                <a:cs typeface="Aptos"/>
+              </a:defRPr>
+            </a:pPr>
+            <a:r>
+              <a:rPr sz="825" b="0">
+                <a:solidFill>
+                  <a:srgbClr val="6B7280"/>
+                </a:solidFill>
+                <a:latin typeface="Aptos"/>
+                <a:ea typeface="Aptos"/>
+                <a:cs typeface="Aptos"/>
+              </a:rPr>
+              <a:t>Fuente: NVIDIA Newsroom, 2026-05-31. Señal tecnológica; precio, rendimiento real y TCO aún deben validarse.</a:t>
+            </a:r>
+          </a:p>
+        </p:txBody>
+      </p:sp>
+      <p:sp>
+        <p:nvSpPr>
+          <p:cNvPr id="40" name="">
+            <a:extLst xmlns:a="http://schemas.openxmlformats.org/drawingml/2006/main">
+              <a:ext uri="{FF2B5EF4-FFF2-40B4-BE49-F238E27FC236}">
+                <a16:creationId xmlns:a16="http://schemas.microsoft.com/office/drawing/2014/main" id="{4BC92D09-BA01-4105-8D92-5B6A91C79D53}"/>
+              </a:ext>
+            </a:extLst>
+          </p:cNvPr>
+          <p:cNvSpPr>
+            <a:spLocks xmlns:a="http://schemas.openxmlformats.org/drawingml/2006/main" noGrp="1"/>
+          </p:cNvSpPr>
+          <p:nvPr/>
+        </p:nvSpPr>
+        <p:spPr>
+          <a:xfrm xmlns:a="http://schemas.openxmlformats.org/drawingml/2006/main">
+            <a:off x="11334750" y="6496050"/>
+            <a:ext cx="381000" cy="228600"/>
+          </a:xfrm>
+          <a:prstGeom xmlns:a="http://schemas.openxmlformats.org/drawingml/2006/main" prst="rect">
+            <a:avLst/>
+          </a:prstGeom>
+          <a:solidFill xmlns:a="http://schemas.openxmlformats.org/drawingml/2006/main">
+            <a:srgbClr val="000000">
+              <a:alpha val="0"/>
+            </a:srgbClr>
+          </a:solidFill>
+          <a:ln xmlns:a="http://schemas.openxmlformats.org/drawingml/2006/main" w="0">
+            <a:solidFill>
+              <a:srgbClr val="000000">
+                <a:alpha val="0"/>
+              </a:srgbClr>
+            </a:solidFill>
+            <a:prstDash val="solid"/>
+          </a:ln>
+        </p:spPr>
+        <p:txBody>
+          <a:bodyPr xmlns:a="http://schemas.openxmlformats.org/drawingml/2006/main" lIns="0" tIns="0" rIns="0" bIns="0" anchor="t"/>
+          <a:lstStyle xmlns:a="http://schemas.openxmlformats.org/drawingml/2006/main"/>
+          <a:p xmlns:a="http://schemas.openxmlformats.org/drawingml/2006/main">
+            <a:pPr algn="r">
+              <a:defRPr sz="900" b="1">
+                <a:solidFill>
+                  <a:srgbClr val="C75C2A"/>
+                </a:solidFill>
+                <a:latin typeface="Aptos Mono"/>
+                <a:ea typeface="Aptos Mono"/>
+                <a:cs typeface="Aptos Mono"/>
+              </a:defRPr>
+            </a:pPr>
+            <a:r>
+              <a:rPr sz="900" b="1">
+                <a:solidFill>
+                  <a:srgbClr val="C75C2A"/>
+                </a:solidFill>
+                <a:latin typeface="Aptos Mono"/>
+                <a:ea typeface="Aptos Mono"/>
+                <a:cs typeface="Aptos Mono"/>
+              </a:rPr>
               <a:t>8</a:t>
             </a:r>
           </a:p>
@@ -14862,7 +16244,7 @@
     </p:spTree>
     <p:extLst>
       <p:ext uri="{BB962C8B-B14F-4D97-AF65-F5344CB8AC3E}">
-        <p14:creationId xmlns:p14="http://schemas.microsoft.com/office/powerpoint/2010/main" val="1648375040"/>
+        <p14:creationId xmlns:p14="http://schemas.microsoft.com/office/powerpoint/2010/main" val="1041190739"/>
       </p:ext>
     </p:extLst>
   </p:cSld>
@@ -14881,21 +16263,20 @@
       <p:grpSpPr>
         <a:xfrm xmlns:a="http://schemas.openxmlformats.org/drawingml/2006/main"/>
       </p:grpSpPr>
-      <p:pic>
-        <p:nvPicPr>
-          <p:cNvPr id="1" name=""/>
-          <p:cNvPicPr>
-            <a:picLocks xmlns:a="http://schemas.openxmlformats.org/drawingml/2006/main" noChangeAspect="1"/>
-          </p:cNvPicPr>
-          <p:nvPr/>
-        </p:nvPicPr>
-        <p:blipFill>
-          <a:blip xmlns:r="http://schemas.openxmlformats.org/officeDocument/2006/relationships" xmlns:a="http://schemas.openxmlformats.org/drawingml/2006/main" r:embed="R6df72b58b30249b5"/>
-          <a:srcRect xmlns:a="http://schemas.openxmlformats.org/drawingml/2006/main" l="0" t="27" r="0" b="27"/>
-          <a:stretch xmlns:a="http://schemas.openxmlformats.org/drawingml/2006/main">
-            <a:fillRect l="0" t="0" r="0" b="0"/>
-          </a:stretch>
-        </p:blipFill>
+      <p:sp>
+        <p:nvSpPr>
+          <p:cNvPr id="1" name="">
+            <a:extLst xmlns:a="http://schemas.openxmlformats.org/drawingml/2006/main">
+              <a:ext uri="{FF2B5EF4-FFF2-40B4-BE49-F238E27FC236}">
+                <a16:creationId xmlns:a16="http://schemas.microsoft.com/office/drawing/2014/main" id="{915716C1-4C37-4F5C-B6F6-557EBF88C5CE}"/>
+              </a:ext>
+            </a:extLst>
+          </p:cNvPr>
+          <p:cNvSpPr>
+            <a:spLocks xmlns:a="http://schemas.openxmlformats.org/drawingml/2006/main" noGrp="1"/>
+          </p:cNvSpPr>
+          <p:nvPr/>
+        </p:nvSpPr>
         <p:spPr>
           <a:xfrm xmlns:a="http://schemas.openxmlformats.org/drawingml/2006/main">
             <a:off x="0" y="0"/>
@@ -14904,40 +16285,45 @@
           <a:prstGeom xmlns:a="http://schemas.openxmlformats.org/drawingml/2006/main" prst="rect">
             <a:avLst/>
           </a:prstGeom>
-        </p:spPr>
-      </p:pic>
+          <a:solidFill xmlns:a="http://schemas.openxmlformats.org/drawingml/2006/main">
+            <a:srgbClr val="F4F0E8"/>
+          </a:solidFill>
+          <a:ln xmlns:a="http://schemas.openxmlformats.org/drawingml/2006/main" w="0">
+            <a:solidFill>
+              <a:srgbClr val="F4F0E8"/>
+            </a:solidFill>
+            <a:prstDash val="solid"/>
+          </a:ln>
+        </p:spPr>
+      </p:sp>
       <p:sp>
         <p:nvSpPr>
           <p:cNvPr id="2" name="">
             <a:extLst xmlns:a="http://schemas.openxmlformats.org/drawingml/2006/main">
               <a:ext uri="{FF2B5EF4-FFF2-40B4-BE49-F238E27FC236}">
-                <a16:creationId xmlns:a16="http://schemas.microsoft.com/office/drawing/2014/main" id="{6A99C74C-094B-4BB8-A3F8-08C6E319C67C}"/>
-              </a:ext>
-            </a:extLst>
-          </p:cNvPr>
-          <p:cNvSpPr>
-            <a:spLocks xmlns:a="http://schemas.openxmlformats.org/drawingml/2006/main" noGrp="1"/>
-          </p:cNvSpPr>
-          <p:nvPr/>
-        </p:nvSpPr>
-        <p:spPr>
-          <a:xfrm xmlns:a="http://schemas.openxmlformats.org/drawingml/2006/main">
-            <a:off x="0" y="0"/>
-            <a:ext cx="6667500" cy="6858000"/>
-          </a:xfrm>
-          <a:prstGeom xmlns:a="http://schemas.openxmlformats.org/drawingml/2006/main" prst="rect">
-            <a:avLst/>
-          </a:prstGeom>
-          <a:solidFill xmlns:a="http://schemas.openxmlformats.org/drawingml/2006/main">
-            <a:srgbClr val="081321">
-              <a:alpha val="80000"/>
-            </a:srgbClr>
-          </a:solidFill>
-          <a:ln xmlns:a="http://schemas.openxmlformats.org/drawingml/2006/main" w="0">
-            <a:solidFill>
-              <a:srgbClr val="081321">
-                <a:alpha val="80000"/>
-              </a:srgbClr>
+                <a16:creationId xmlns:a16="http://schemas.microsoft.com/office/drawing/2014/main" id="{C4411364-E83B-45BE-91A4-FA5F8222CE9E}"/>
+              </a:ext>
+            </a:extLst>
+          </p:cNvPr>
+          <p:cNvSpPr>
+            <a:spLocks xmlns:a="http://schemas.openxmlformats.org/drawingml/2006/main" noGrp="1"/>
+          </p:cNvSpPr>
+          <p:nvPr/>
+        </p:nvSpPr>
+        <p:spPr>
+          <a:xfrm xmlns:a="http://schemas.openxmlformats.org/drawingml/2006/main">
+            <a:off x="514350" y="438150"/>
+            <a:ext cx="1809750" cy="57150"/>
+          </a:xfrm>
+          <a:prstGeom xmlns:a="http://schemas.openxmlformats.org/drawingml/2006/main" prst="rect">
+            <a:avLst/>
+          </a:prstGeom>
+          <a:solidFill xmlns:a="http://schemas.openxmlformats.org/drawingml/2006/main">
+            <a:srgbClr val="2D6A4F"/>
+          </a:solidFill>
+          <a:ln xmlns:a="http://schemas.openxmlformats.org/drawingml/2006/main" w="0">
+            <a:solidFill>
+              <a:srgbClr val="2D6A4F"/>
             </a:solidFill>
             <a:prstDash val="solid"/>
           </a:ln>
@@ -14948,19 +16334,19 @@
           <p:cNvPr id="3" name="">
             <a:extLst xmlns:a="http://schemas.openxmlformats.org/drawingml/2006/main">
               <a:ext uri="{FF2B5EF4-FFF2-40B4-BE49-F238E27FC236}">
-                <a16:creationId xmlns:a16="http://schemas.microsoft.com/office/drawing/2014/main" id="{3606A461-8FDD-4CBB-83AC-5D6FC40457A2}"/>
-              </a:ext>
-            </a:extLst>
-          </p:cNvPr>
-          <p:cNvSpPr>
-            <a:spLocks xmlns:a="http://schemas.openxmlformats.org/drawingml/2006/main" noGrp="1"/>
-          </p:cNvSpPr>
-          <p:nvPr/>
-        </p:nvSpPr>
-        <p:spPr>
-          <a:xfrm xmlns:a="http://schemas.openxmlformats.org/drawingml/2006/main">
-            <a:off x="552450" y="800100"/>
-            <a:ext cx="2476500" cy="209550"/>
+                <a16:creationId xmlns:a16="http://schemas.microsoft.com/office/drawing/2014/main" id="{937F9B58-D137-4806-A347-637594112F48}"/>
+              </a:ext>
+            </a:extLst>
+          </p:cNvPr>
+          <p:cNvSpPr>
+            <a:spLocks xmlns:a="http://schemas.openxmlformats.org/drawingml/2006/main" noGrp="1"/>
+          </p:cNvSpPr>
+          <p:nvPr/>
+        </p:nvSpPr>
+        <p:spPr>
+          <a:xfrm xmlns:a="http://schemas.openxmlformats.org/drawingml/2006/main">
+            <a:off x="552450" y="590550"/>
+            <a:ext cx="3429000" cy="228600"/>
           </a:xfrm>
           <a:prstGeom xmlns:a="http://schemas.openxmlformats.org/drawingml/2006/main" prst="rect">
             <a:avLst/>
@@ -14984,9 +16370,9 @@
           <a:lstStyle xmlns:a="http://schemas.openxmlformats.org/drawingml/2006/main"/>
           <a:p xmlns:a="http://schemas.openxmlformats.org/drawingml/2006/main">
             <a:pPr algn="l">
-              <a:defRPr sz="1125" b="1">
-                <a:solidFill>
-                  <a:srgbClr val="F3C8B3"/>
+              <a:defRPr sz="1200" b="1">
+                <a:solidFill>
+                  <a:srgbClr val="2D6A4F"/>
                 </a:solidFill>
                 <a:latin typeface="Aptos Mono"/>
                 <a:ea typeface="Aptos Mono"/>
@@ -14994,15 +16380,15 @@
               </a:defRPr>
             </a:pPr>
             <a:r>
-              <a:rPr sz="1125" b="1">
-                <a:solidFill>
-                  <a:srgbClr val="F3C8B3"/>
+              <a:rPr sz="1200" b="1">
+                <a:solidFill>
+                  <a:srgbClr val="2D6A4F"/>
                 </a:solidFill>
                 <a:latin typeface="Aptos Mono"/>
                 <a:ea typeface="Aptos Mono"/>
                 <a:cs typeface="Aptos Mono"/>
               </a:rPr>
-              <a:t>CIERRE</a:t>
+              <a:t>CONCLUSIÓN</a:t>
             </a:r>
           </a:p>
         </p:txBody>
@@ -15012,19 +16398,19 @@
           <p:cNvPr id="4" name="">
             <a:extLst xmlns:a="http://schemas.openxmlformats.org/drawingml/2006/main">
               <a:ext uri="{FF2B5EF4-FFF2-40B4-BE49-F238E27FC236}">
-                <a16:creationId xmlns:a16="http://schemas.microsoft.com/office/drawing/2014/main" id="{D65C3A71-D2AF-4970-B219-434C2486633B}"/>
-              </a:ext>
-            </a:extLst>
-          </p:cNvPr>
-          <p:cNvSpPr>
-            <a:spLocks xmlns:a="http://schemas.openxmlformats.org/drawingml/2006/main" noGrp="1"/>
-          </p:cNvSpPr>
-          <p:nvPr/>
-        </p:nvSpPr>
-        <p:spPr>
-          <a:xfrm xmlns:a="http://schemas.openxmlformats.org/drawingml/2006/main">
-            <a:off x="552450" y="1390650"/>
-            <a:ext cx="5334000" cy="1619250"/>
+                <a16:creationId xmlns:a16="http://schemas.microsoft.com/office/drawing/2014/main" id="{4B311802-021D-43B5-891E-B4EE833F6725}"/>
+              </a:ext>
+            </a:extLst>
+          </p:cNvPr>
+          <p:cNvSpPr>
+            <a:spLocks xmlns:a="http://schemas.openxmlformats.org/drawingml/2006/main" noGrp="1"/>
+          </p:cNvSpPr>
+          <p:nvPr/>
+        </p:nvSpPr>
+        <p:spPr>
+          <a:xfrm xmlns:a="http://schemas.openxmlformats.org/drawingml/2006/main">
+            <a:off x="552450" y="895350"/>
+            <a:ext cx="8763000" cy="1238250"/>
           </a:xfrm>
           <a:prstGeom xmlns:a="http://schemas.openxmlformats.org/drawingml/2006/main" prst="rect">
             <a:avLst/>
@@ -15048,9 +16434,9 @@
           <a:lstStyle xmlns:a="http://schemas.openxmlformats.org/drawingml/2006/main"/>
           <a:p xmlns:a="http://schemas.openxmlformats.org/drawingml/2006/main">
             <a:pPr algn="l">
-              <a:defRPr sz="3000" b="1">
-                <a:solidFill>
-                  <a:srgbClr val="FFFDF8"/>
+              <a:defRPr sz="2550" b="1">
+                <a:solidFill>
+                  <a:srgbClr val="0F172A"/>
                 </a:solidFill>
                 <a:latin typeface="Aptos Display"/>
                 <a:ea typeface="Aptos Display"/>
@@ -15058,15 +16444,15 @@
               </a:defRPr>
             </a:pPr>
             <a:r>
-              <a:rPr sz="3000" b="1">
-                <a:solidFill>
-                  <a:srgbClr val="FFFDF8"/>
+              <a:rPr sz="2550" b="1">
+                <a:solidFill>
+                  <a:srgbClr val="0F172A"/>
                 </a:solidFill>
                 <a:latin typeface="Aptos Display"/>
                 <a:ea typeface="Aptos Display"/>
                 <a:cs typeface="Aptos Display"/>
               </a:rPr>
-              <a:t>The cloud is about how you do computing, not where you do computing.</a:t>
+              <a:t>La respuesta madura no es volver completamente a on-premise. Es rediseñar la arquitectura para no pagar de más por inteligencia.</a:t>
             </a:r>
           </a:p>
         </p:txBody>
@@ -15076,237 +16462,111 @@
           <p:cNvPr id="5" name="">
             <a:extLst xmlns:a="http://schemas.openxmlformats.org/drawingml/2006/main">
               <a:ext uri="{FF2B5EF4-FFF2-40B4-BE49-F238E27FC236}">
-                <a16:creationId xmlns:a16="http://schemas.microsoft.com/office/drawing/2014/main" id="{C8CB653E-B4B4-4F3B-934B-062A707DBBB5}"/>
-              </a:ext>
-            </a:extLst>
-          </p:cNvPr>
-          <p:cNvSpPr>
-            <a:spLocks xmlns:a="http://schemas.openxmlformats.org/drawingml/2006/main" noGrp="1"/>
-          </p:cNvSpPr>
-          <p:nvPr/>
-        </p:nvSpPr>
-        <p:spPr>
-          <a:xfrm xmlns:a="http://schemas.openxmlformats.org/drawingml/2006/main">
-            <a:off x="552450" y="3390900"/>
-            <a:ext cx="4953000" cy="1143000"/>
-          </a:xfrm>
-          <a:prstGeom xmlns:a="http://schemas.openxmlformats.org/drawingml/2006/main" prst="rect">
-            <a:avLst/>
-          </a:prstGeom>
-          <a:solidFill xmlns:a="http://schemas.openxmlformats.org/drawingml/2006/main">
-            <a:srgbClr val="000000">
-              <a:alpha val="0"/>
-            </a:srgbClr>
-          </a:solidFill>
-          <a:ln xmlns:a="http://schemas.openxmlformats.org/drawingml/2006/main" w="0">
-            <a:solidFill>
-              <a:srgbClr val="000000">
-                <a:alpha val="0"/>
-              </a:srgbClr>
-            </a:solidFill>
-            <a:prstDash val="solid"/>
-          </a:ln>
-        </p:spPr>
-        <p:txBody>
-          <a:bodyPr xmlns:a="http://schemas.openxmlformats.org/drawingml/2006/main" lIns="0" tIns="0" rIns="0" bIns="0" anchor="t"/>
-          <a:lstStyle xmlns:a="http://schemas.openxmlformats.org/drawingml/2006/main"/>
-          <a:p xmlns:a="http://schemas.openxmlformats.org/drawingml/2006/main">
-            <a:pPr algn="l">
-              <a:defRPr sz="1800" b="0">
-                <a:solidFill>
-                  <a:srgbClr val="D9E2EC"/>
-                </a:solidFill>
-                <a:latin typeface="Aptos"/>
-                <a:ea typeface="Aptos"/>
-                <a:cs typeface="Aptos"/>
-              </a:defRPr>
-            </a:pPr>
-            <a:r>
-              <a:rPr sz="1800" b="0">
-                <a:solidFill>
-                  <a:srgbClr val="D9E2EC"/>
-                </a:solidFill>
-                <a:latin typeface="Aptos"/>
-                <a:ea typeface="Aptos"/>
-                <a:cs typeface="Aptos"/>
-              </a:rPr>
-              <a:t>La conclusion no es nostalgia por el datacenter. La conclusion es que la arquitectura de IA vuelve a ser una decision economica, no solo tecnologica.</a:t>
-            </a:r>
-          </a:p>
-        </p:txBody>
+                <a16:creationId xmlns:a16="http://schemas.microsoft.com/office/drawing/2014/main" id="{580510BA-46CC-40FD-83CC-3F4E07F76860}"/>
+              </a:ext>
+            </a:extLst>
+          </p:cNvPr>
+          <p:cNvSpPr>
+            <a:spLocks xmlns:a="http://schemas.openxmlformats.org/drawingml/2006/main" noGrp="1"/>
+          </p:cNvSpPr>
+          <p:nvPr/>
+        </p:nvSpPr>
+        <p:spPr>
+          <a:xfrm xmlns:a="http://schemas.openxmlformats.org/drawingml/2006/main">
+            <a:off x="552450" y="2286000"/>
+            <a:ext cx="3295650" cy="3048000"/>
+          </a:xfrm>
+          <a:prstGeom xmlns:a="http://schemas.openxmlformats.org/drawingml/2006/main" prst="rect">
+            <a:avLst/>
+          </a:prstGeom>
+          <a:solidFill xmlns:a="http://schemas.openxmlformats.org/drawingml/2006/main">
+            <a:srgbClr val="FFFDF8"/>
+          </a:solidFill>
+          <a:ln xmlns:a="http://schemas.openxmlformats.org/drawingml/2006/main" w="11430">
+            <a:solidFill>
+              <a:srgbClr val="DDD3C2"/>
+            </a:solidFill>
+            <a:prstDash val="solid"/>
+          </a:ln>
+        </p:spPr>
       </p:sp>
       <p:sp>
         <p:nvSpPr>
           <p:cNvPr id="6" name="">
             <a:extLst xmlns:a="http://schemas.openxmlformats.org/drawingml/2006/main">
               <a:ext uri="{FF2B5EF4-FFF2-40B4-BE49-F238E27FC236}">
-                <a16:creationId xmlns:a16="http://schemas.microsoft.com/office/drawing/2014/main" id="{FBF9CC36-52C0-4FAE-BF8B-F53DF4A5E6AA}"/>
-              </a:ext>
-            </a:extLst>
-          </p:cNvPr>
-          <p:cNvSpPr>
-            <a:spLocks xmlns:a="http://schemas.openxmlformats.org/drawingml/2006/main" noGrp="1"/>
-          </p:cNvSpPr>
-          <p:nvPr/>
-        </p:nvSpPr>
-        <p:spPr>
-          <a:xfrm xmlns:a="http://schemas.openxmlformats.org/drawingml/2006/main">
-            <a:off x="552450" y="5143500"/>
-            <a:ext cx="4953000" cy="419100"/>
-          </a:xfrm>
-          <a:prstGeom xmlns:a="http://schemas.openxmlformats.org/drawingml/2006/main" prst="rect">
-            <a:avLst/>
-          </a:prstGeom>
-          <a:solidFill xmlns:a="http://schemas.openxmlformats.org/drawingml/2006/main">
-            <a:srgbClr val="000000">
-              <a:alpha val="0"/>
-            </a:srgbClr>
-          </a:solidFill>
-          <a:ln xmlns:a="http://schemas.openxmlformats.org/drawingml/2006/main" w="0">
-            <a:solidFill>
-              <a:srgbClr val="000000">
-                <a:alpha val="0"/>
-              </a:srgbClr>
-            </a:solidFill>
-            <a:prstDash val="solid"/>
-          </a:ln>
-        </p:spPr>
-        <p:txBody>
-          <a:bodyPr xmlns:a="http://schemas.openxmlformats.org/drawingml/2006/main" lIns="0" tIns="0" rIns="0" bIns="0" anchor="t"/>
-          <a:lstStyle xmlns:a="http://schemas.openxmlformats.org/drawingml/2006/main"/>
-          <a:p xmlns:a="http://schemas.openxmlformats.org/drawingml/2006/main">
-            <a:pPr algn="l">
-              <a:defRPr sz="1200" b="1">
-                <a:solidFill>
-                  <a:srgbClr val="F3C8B3"/>
-                </a:solidFill>
-                <a:latin typeface="Aptos"/>
-                <a:ea typeface="Aptos"/>
-                <a:cs typeface="Aptos"/>
-              </a:defRPr>
-            </a:pPr>
-            <a:r>
-              <a:rPr sz="1200" b="1">
-                <a:solidFill>
-                  <a:srgbClr val="F3C8B3"/>
-                </a:solidFill>
-                <a:latin typeface="Aptos"/>
-                <a:ea typeface="Aptos"/>
-                <a:cs typeface="Aptos"/>
-              </a:rPr>
-              <a:t>Paul Maritz, sobre cloud computing</a:t>
-            </a:r>
-          </a:p>
-        </p:txBody>
+                <a16:creationId xmlns:a16="http://schemas.microsoft.com/office/drawing/2014/main" id="{39A06249-54CD-4CC2-BD18-DF295FFB5EE3}"/>
+              </a:ext>
+            </a:extLst>
+          </p:cNvPr>
+          <p:cNvSpPr>
+            <a:spLocks xmlns:a="http://schemas.openxmlformats.org/drawingml/2006/main" noGrp="1"/>
+          </p:cNvSpPr>
+          <p:nvPr/>
+        </p:nvSpPr>
+        <p:spPr>
+          <a:xfrm xmlns:a="http://schemas.openxmlformats.org/drawingml/2006/main">
+            <a:off x="781050" y="2514600"/>
+            <a:ext cx="1047750" cy="266700"/>
+          </a:xfrm>
+          <a:prstGeom xmlns:a="http://schemas.openxmlformats.org/drawingml/2006/main" prst="rect">
+            <a:avLst/>
+          </a:prstGeom>
+          <a:solidFill xmlns:a="http://schemas.openxmlformats.org/drawingml/2006/main">
+            <a:srgbClr val="E07A3F"/>
+          </a:solidFill>
+          <a:ln xmlns:a="http://schemas.openxmlformats.org/drawingml/2006/main" w="0">
+            <a:solidFill>
+              <a:srgbClr val="E07A3F"/>
+            </a:solidFill>
+            <a:prstDash val="solid"/>
+          </a:ln>
+        </p:spPr>
       </p:sp>
       <p:sp>
         <p:nvSpPr>
           <p:cNvPr id="7" name="">
             <a:extLst xmlns:a="http://schemas.openxmlformats.org/drawingml/2006/main">
               <a:ext uri="{FF2B5EF4-FFF2-40B4-BE49-F238E27FC236}">
-                <a16:creationId xmlns:a16="http://schemas.microsoft.com/office/drawing/2014/main" id="{F03F3122-116C-45DC-8064-649E18D8626A}"/>
-              </a:ext>
-            </a:extLst>
-          </p:cNvPr>
-          <p:cNvSpPr>
-            <a:spLocks xmlns:a="http://schemas.openxmlformats.org/drawingml/2006/main" noGrp="1"/>
-          </p:cNvSpPr>
-          <p:nvPr/>
-        </p:nvSpPr>
-        <p:spPr>
-          <a:xfrm xmlns:a="http://schemas.openxmlformats.org/drawingml/2006/main">
-            <a:off x="552450" y="6534150"/>
-            <a:ext cx="10477500" cy="171450"/>
-          </a:xfrm>
-          <a:prstGeom xmlns:a="http://schemas.openxmlformats.org/drawingml/2006/main" prst="rect">
-            <a:avLst/>
-          </a:prstGeom>
-          <a:solidFill xmlns:a="http://schemas.openxmlformats.org/drawingml/2006/main">
-            <a:srgbClr val="000000">
-              <a:alpha val="0"/>
-            </a:srgbClr>
-          </a:solidFill>
-          <a:ln xmlns:a="http://schemas.openxmlformats.org/drawingml/2006/main" w="0">
-            <a:solidFill>
-              <a:srgbClr val="000000">
-                <a:alpha val="0"/>
-              </a:srgbClr>
-            </a:solidFill>
-            <a:prstDash val="solid"/>
-          </a:ln>
-        </p:spPr>
-        <p:txBody>
-          <a:bodyPr xmlns:a="http://schemas.openxmlformats.org/drawingml/2006/main" lIns="0" tIns="0" rIns="0" bIns="0" anchor="t"/>
-          <a:lstStyle xmlns:a="http://schemas.openxmlformats.org/drawingml/2006/main"/>
-          <a:p xmlns:a="http://schemas.openxmlformats.org/drawingml/2006/main">
-            <a:pPr algn="l">
-              <a:defRPr sz="825" b="0">
-                <a:solidFill>
-                  <a:srgbClr val="6B7280"/>
-                </a:solidFill>
-                <a:latin typeface="Aptos"/>
-                <a:ea typeface="Aptos"/>
-                <a:cs typeface="Aptos"/>
-              </a:defRPr>
-            </a:pPr>
-            <a:r>
-              <a:rPr sz="825" b="0">
-                <a:solidFill>
-                  <a:srgbClr val="6B7280"/>
-                </a:solidFill>
-                <a:latin typeface="Aptos"/>
-                <a:ea typeface="Aptos"/>
-                <a:cs typeface="Aptos"/>
-              </a:rPr>
-              <a:t>Cita atribuida a Paul Maritz y ampliamente citada en la literatura sobre cloud.</a:t>
-            </a:r>
-          </a:p>
-        </p:txBody>
-      </p:sp>
-      <p:sp>
-        <p:nvSpPr>
-          <p:cNvPr id="8" name="">
-            <a:extLst xmlns:a="http://schemas.openxmlformats.org/drawingml/2006/main">
-              <a:ext uri="{FF2B5EF4-FFF2-40B4-BE49-F238E27FC236}">
-                <a16:creationId xmlns:a16="http://schemas.microsoft.com/office/drawing/2014/main" id="{E4854881-FE17-49CC-8121-879A4379E540}"/>
-              </a:ext>
-            </a:extLst>
-          </p:cNvPr>
-          <p:cNvSpPr>
-            <a:spLocks xmlns:a="http://schemas.openxmlformats.org/drawingml/2006/main" noGrp="1"/>
-          </p:cNvSpPr>
-          <p:nvPr/>
-        </p:nvSpPr>
-        <p:spPr>
-          <a:xfrm xmlns:a="http://schemas.openxmlformats.org/drawingml/2006/main">
-            <a:off x="11334750" y="6496050"/>
-            <a:ext cx="381000" cy="228600"/>
-          </a:xfrm>
-          <a:prstGeom xmlns:a="http://schemas.openxmlformats.org/drawingml/2006/main" prst="rect">
-            <a:avLst/>
-          </a:prstGeom>
-          <a:solidFill xmlns:a="http://schemas.openxmlformats.org/drawingml/2006/main">
-            <a:srgbClr val="000000">
-              <a:alpha val="0"/>
-            </a:srgbClr>
-          </a:solidFill>
-          <a:ln xmlns:a="http://schemas.openxmlformats.org/drawingml/2006/main" w="0">
-            <a:solidFill>
-              <a:srgbClr val="000000">
-                <a:alpha val="0"/>
-              </a:srgbClr>
-            </a:solidFill>
-            <a:prstDash val="solid"/>
-          </a:ln>
-        </p:spPr>
-        <p:txBody>
-          <a:bodyPr xmlns:a="http://schemas.openxmlformats.org/drawingml/2006/main" lIns="0" tIns="0" rIns="0" bIns="0" anchor="t"/>
-          <a:lstStyle xmlns:a="http://schemas.openxmlformats.org/drawingml/2006/main"/>
-          <a:p xmlns:a="http://schemas.openxmlformats.org/drawingml/2006/main">
-            <a:pPr algn="r">
+                <a16:creationId xmlns:a16="http://schemas.microsoft.com/office/drawing/2014/main" id="{BE78CD00-EFE6-4969-97C3-D9B848A5C1C9}"/>
+              </a:ext>
+            </a:extLst>
+          </p:cNvPr>
+          <p:cNvSpPr>
+            <a:spLocks xmlns:a="http://schemas.openxmlformats.org/drawingml/2006/main" noGrp="1"/>
+          </p:cNvSpPr>
+          <p:nvPr/>
+        </p:nvSpPr>
+        <p:spPr>
+          <a:xfrm xmlns:a="http://schemas.openxmlformats.org/drawingml/2006/main">
+            <a:off x="857250" y="2571750"/>
+            <a:ext cx="895350" cy="152400"/>
+          </a:xfrm>
+          <a:prstGeom xmlns:a="http://schemas.openxmlformats.org/drawingml/2006/main" prst="rect">
+            <a:avLst/>
+          </a:prstGeom>
+          <a:solidFill xmlns:a="http://schemas.openxmlformats.org/drawingml/2006/main">
+            <a:srgbClr val="000000">
+              <a:alpha val="0"/>
+            </a:srgbClr>
+          </a:solidFill>
+          <a:ln xmlns:a="http://schemas.openxmlformats.org/drawingml/2006/main" w="0">
+            <a:solidFill>
+              <a:srgbClr val="000000">
+                <a:alpha val="0"/>
+              </a:srgbClr>
+            </a:solidFill>
+            <a:prstDash val="solid"/>
+          </a:ln>
+        </p:spPr>
+        <p:txBody>
+          <a:bodyPr xmlns:a="http://schemas.openxmlformats.org/drawingml/2006/main" lIns="0" tIns="0" rIns="0" bIns="0" anchor="t"/>
+          <a:lstStyle xmlns:a="http://schemas.openxmlformats.org/drawingml/2006/main"/>
+          <a:p xmlns:a="http://schemas.openxmlformats.org/drawingml/2006/main">
+            <a:pPr algn="ctr">
               <a:defRPr sz="900" b="1">
                 <a:solidFill>
-                  <a:srgbClr val="C75C2A"/>
+                  <a:srgbClr val="102A43"/>
                 </a:solidFill>
                 <a:latin typeface="Aptos Mono"/>
                 <a:ea typeface="Aptos Mono"/>
@@ -15316,12 +16576,881 @@
             <a:r>
               <a:rPr sz="900" b="1">
                 <a:solidFill>
-                  <a:srgbClr val="C75C2A"/>
+                  <a:srgbClr val="102A43"/>
                 </a:solidFill>
                 <a:latin typeface="Aptos Mono"/>
                 <a:ea typeface="Aptos Mono"/>
                 <a:cs typeface="Aptos Mono"/>
               </a:rPr>
+              <a:t>CLOUD</a:t>
+            </a:r>
+          </a:p>
+        </p:txBody>
+      </p:sp>
+      <p:sp>
+        <p:nvSpPr>
+          <p:cNvPr id="8" name="">
+            <a:extLst xmlns:a="http://schemas.openxmlformats.org/drawingml/2006/main">
+              <a:ext uri="{FF2B5EF4-FFF2-40B4-BE49-F238E27FC236}">
+                <a16:creationId xmlns:a16="http://schemas.microsoft.com/office/drawing/2014/main" id="{923FAD00-0B69-49AD-BABE-A8369428EA29}"/>
+              </a:ext>
+            </a:extLst>
+          </p:cNvPr>
+          <p:cNvSpPr>
+            <a:spLocks xmlns:a="http://schemas.openxmlformats.org/drawingml/2006/main" noGrp="1"/>
+          </p:cNvSpPr>
+          <p:nvPr/>
+        </p:nvSpPr>
+        <p:spPr>
+          <a:xfrm xmlns:a="http://schemas.openxmlformats.org/drawingml/2006/main">
+            <a:off x="781050" y="3028950"/>
+            <a:ext cx="2476500" cy="285750"/>
+          </a:xfrm>
+          <a:prstGeom xmlns:a="http://schemas.openxmlformats.org/drawingml/2006/main" prst="rect">
+            <a:avLst/>
+          </a:prstGeom>
+          <a:solidFill xmlns:a="http://schemas.openxmlformats.org/drawingml/2006/main">
+            <a:srgbClr val="000000">
+              <a:alpha val="0"/>
+            </a:srgbClr>
+          </a:solidFill>
+          <a:ln xmlns:a="http://schemas.openxmlformats.org/drawingml/2006/main" w="0">
+            <a:solidFill>
+              <a:srgbClr val="000000">
+                <a:alpha val="0"/>
+              </a:srgbClr>
+            </a:solidFill>
+            <a:prstDash val="solid"/>
+          </a:ln>
+        </p:spPr>
+        <p:txBody>
+          <a:bodyPr xmlns:a="http://schemas.openxmlformats.org/drawingml/2006/main" lIns="0" tIns="0" rIns="0" bIns="0" anchor="t"/>
+          <a:lstStyle xmlns:a="http://schemas.openxmlformats.org/drawingml/2006/main"/>
+          <a:p xmlns:a="http://schemas.openxmlformats.org/drawingml/2006/main">
+            <a:pPr algn="l">
+              <a:defRPr sz="1875" b="1">
+                <a:solidFill>
+                  <a:srgbClr val="0F172A"/>
+                </a:solidFill>
+                <a:latin typeface="Aptos"/>
+                <a:ea typeface="Aptos"/>
+                <a:cs typeface="Aptos"/>
+              </a:defRPr>
+            </a:pPr>
+            <a:r>
+              <a:rPr sz="1875" b="1">
+                <a:solidFill>
+                  <a:srgbClr val="0F172A"/>
+                </a:solidFill>
+                <a:latin typeface="Aptos"/>
+                <a:ea typeface="Aptos"/>
+                <a:cs typeface="Aptos"/>
+              </a:rPr>
+              <a:t>La nube sigue ganando</a:t>
+            </a:r>
+          </a:p>
+        </p:txBody>
+      </p:sp>
+      <p:sp>
+        <p:nvSpPr>
+          <p:cNvPr id="9" name="">
+            <a:extLst xmlns:a="http://schemas.openxmlformats.org/drawingml/2006/main">
+              <a:ext uri="{FF2B5EF4-FFF2-40B4-BE49-F238E27FC236}">
+                <a16:creationId xmlns:a16="http://schemas.microsoft.com/office/drawing/2014/main" id="{980EDF4D-68AB-430B-9251-3CAC4133898D}"/>
+              </a:ext>
+            </a:extLst>
+          </p:cNvPr>
+          <p:cNvSpPr>
+            <a:spLocks xmlns:a="http://schemas.openxmlformats.org/drawingml/2006/main" noGrp="1"/>
+          </p:cNvSpPr>
+          <p:nvPr/>
+        </p:nvSpPr>
+        <p:spPr>
+          <a:xfrm xmlns:a="http://schemas.openxmlformats.org/drawingml/2006/main">
+            <a:off x="781050" y="3638550"/>
+            <a:ext cx="2762250" cy="1143000"/>
+          </a:xfrm>
+          <a:prstGeom xmlns:a="http://schemas.openxmlformats.org/drawingml/2006/main" prst="rect">
+            <a:avLst/>
+          </a:prstGeom>
+          <a:solidFill xmlns:a="http://schemas.openxmlformats.org/drawingml/2006/main">
+            <a:srgbClr val="000000">
+              <a:alpha val="0"/>
+            </a:srgbClr>
+          </a:solidFill>
+          <a:ln xmlns:a="http://schemas.openxmlformats.org/drawingml/2006/main" w="0">
+            <a:solidFill>
+              <a:srgbClr val="000000">
+                <a:alpha val="0"/>
+              </a:srgbClr>
+            </a:solidFill>
+            <a:prstDash val="solid"/>
+          </a:ln>
+        </p:spPr>
+        <p:txBody>
+          <a:bodyPr xmlns:a="http://schemas.openxmlformats.org/drawingml/2006/main" lIns="0" tIns="0" rIns="0" bIns="0" anchor="t"/>
+          <a:lstStyle xmlns:a="http://schemas.openxmlformats.org/drawingml/2006/main"/>
+          <a:p xmlns:a="http://schemas.openxmlformats.org/drawingml/2006/main">
+            <a:pPr algn="l">
+              <a:defRPr sz="1500" b="0">
+                <a:solidFill>
+                  <a:srgbClr val="475569"/>
+                </a:solidFill>
+                <a:latin typeface="Aptos"/>
+                <a:ea typeface="Aptos"/>
+                <a:cs typeface="Aptos"/>
+              </a:defRPr>
+            </a:pPr>
+            <a:r>
+              <a:rPr sz="1500" b="0">
+                <a:solidFill>
+                  <a:srgbClr val="475569"/>
+                </a:solidFill>
+                <a:latin typeface="Aptos"/>
+                <a:ea typeface="Aptos"/>
+                <a:cs typeface="Aptos"/>
+              </a:rPr>
+              <a:t>Para equipos pequeños, demanda variable, experimentación rápida y frontier models, cloud sigue siendo la mejor opción.</a:t>
+            </a:r>
+          </a:p>
+        </p:txBody>
+      </p:sp>
+      <p:sp>
+        <p:nvSpPr>
+          <p:cNvPr id="10" name="">
+            <a:extLst xmlns:a="http://schemas.openxmlformats.org/drawingml/2006/main">
+              <a:ext uri="{FF2B5EF4-FFF2-40B4-BE49-F238E27FC236}">
+                <a16:creationId xmlns:a16="http://schemas.microsoft.com/office/drawing/2014/main" id="{10A92B09-9D2A-4EB3-8AFD-EF6FAC0F32B3}"/>
+              </a:ext>
+            </a:extLst>
+          </p:cNvPr>
+          <p:cNvSpPr>
+            <a:spLocks xmlns:a="http://schemas.openxmlformats.org/drawingml/2006/main" noGrp="1"/>
+          </p:cNvSpPr>
+          <p:nvPr/>
+        </p:nvSpPr>
+        <p:spPr>
+          <a:xfrm xmlns:a="http://schemas.openxmlformats.org/drawingml/2006/main">
+            <a:off x="4248150" y="2286000"/>
+            <a:ext cx="3295650" cy="3048000"/>
+          </a:xfrm>
+          <a:prstGeom xmlns:a="http://schemas.openxmlformats.org/drawingml/2006/main" prst="rect">
+            <a:avLst/>
+          </a:prstGeom>
+          <a:solidFill xmlns:a="http://schemas.openxmlformats.org/drawingml/2006/main">
+            <a:srgbClr val="FAF7F1"/>
+          </a:solidFill>
+          <a:ln xmlns:a="http://schemas.openxmlformats.org/drawingml/2006/main" w="11430">
+            <a:solidFill>
+              <a:srgbClr val="DDD3C2"/>
+            </a:solidFill>
+            <a:prstDash val="solid"/>
+          </a:ln>
+        </p:spPr>
+      </p:sp>
+      <p:sp>
+        <p:nvSpPr>
+          <p:cNvPr id="11" name="">
+            <a:extLst xmlns:a="http://schemas.openxmlformats.org/drawingml/2006/main">
+              <a:ext uri="{FF2B5EF4-FFF2-40B4-BE49-F238E27FC236}">
+                <a16:creationId xmlns:a16="http://schemas.microsoft.com/office/drawing/2014/main" id="{D721F018-AE16-4E31-8D38-8B72881B0347}"/>
+              </a:ext>
+            </a:extLst>
+          </p:cNvPr>
+          <p:cNvSpPr>
+            <a:spLocks xmlns:a="http://schemas.openxmlformats.org/drawingml/2006/main" noGrp="1"/>
+          </p:cNvSpPr>
+          <p:nvPr/>
+        </p:nvSpPr>
+        <p:spPr>
+          <a:xfrm xmlns:a="http://schemas.openxmlformats.org/drawingml/2006/main">
+            <a:off x="4476750" y="2514600"/>
+            <a:ext cx="1047750" cy="266700"/>
+          </a:xfrm>
+          <a:prstGeom xmlns:a="http://schemas.openxmlformats.org/drawingml/2006/main" prst="rect">
+            <a:avLst/>
+          </a:prstGeom>
+          <a:solidFill xmlns:a="http://schemas.openxmlformats.org/drawingml/2006/main">
+            <a:srgbClr val="B42318"/>
+          </a:solidFill>
+          <a:ln xmlns:a="http://schemas.openxmlformats.org/drawingml/2006/main" w="0">
+            <a:solidFill>
+              <a:srgbClr val="B42318"/>
+            </a:solidFill>
+            <a:prstDash val="solid"/>
+          </a:ln>
+        </p:spPr>
+      </p:sp>
+      <p:sp>
+        <p:nvSpPr>
+          <p:cNvPr id="12" name="">
+            <a:extLst xmlns:a="http://schemas.openxmlformats.org/drawingml/2006/main">
+              <a:ext uri="{FF2B5EF4-FFF2-40B4-BE49-F238E27FC236}">
+                <a16:creationId xmlns:a16="http://schemas.microsoft.com/office/drawing/2014/main" id="{3B552783-D792-494E-A5C5-FD04FBFE2DB0}"/>
+              </a:ext>
+            </a:extLst>
+          </p:cNvPr>
+          <p:cNvSpPr>
+            <a:spLocks xmlns:a="http://schemas.openxmlformats.org/drawingml/2006/main" noGrp="1"/>
+          </p:cNvSpPr>
+          <p:nvPr/>
+        </p:nvSpPr>
+        <p:spPr>
+          <a:xfrm xmlns:a="http://schemas.openxmlformats.org/drawingml/2006/main">
+            <a:off x="4552950" y="2571750"/>
+            <a:ext cx="895350" cy="152400"/>
+          </a:xfrm>
+          <a:prstGeom xmlns:a="http://schemas.openxmlformats.org/drawingml/2006/main" prst="rect">
+            <a:avLst/>
+          </a:prstGeom>
+          <a:solidFill xmlns:a="http://schemas.openxmlformats.org/drawingml/2006/main">
+            <a:srgbClr val="000000">
+              <a:alpha val="0"/>
+            </a:srgbClr>
+          </a:solidFill>
+          <a:ln xmlns:a="http://schemas.openxmlformats.org/drawingml/2006/main" w="0">
+            <a:solidFill>
+              <a:srgbClr val="000000">
+                <a:alpha val="0"/>
+              </a:srgbClr>
+            </a:solidFill>
+            <a:prstDash val="solid"/>
+          </a:ln>
+        </p:spPr>
+        <p:txBody>
+          <a:bodyPr xmlns:a="http://schemas.openxmlformats.org/drawingml/2006/main" lIns="0" tIns="0" rIns="0" bIns="0" anchor="t"/>
+          <a:lstStyle xmlns:a="http://schemas.openxmlformats.org/drawingml/2006/main"/>
+          <a:p xmlns:a="http://schemas.openxmlformats.org/drawingml/2006/main">
+            <a:pPr algn="ctr">
+              <a:defRPr sz="900" b="1">
+                <a:solidFill>
+                  <a:srgbClr val="FFFDF8"/>
+                </a:solidFill>
+                <a:latin typeface="Aptos Mono"/>
+                <a:ea typeface="Aptos Mono"/>
+                <a:cs typeface="Aptos Mono"/>
+              </a:defRPr>
+            </a:pPr>
+            <a:r>
+              <a:rPr sz="900" b="1">
+                <a:solidFill>
+                  <a:srgbClr val="FFFDF8"/>
+                </a:solidFill>
+                <a:latin typeface="Aptos Mono"/>
+                <a:ea typeface="Aptos Mono"/>
+                <a:cs typeface="Aptos Mono"/>
+              </a:rPr>
+              <a:t>COSTO</a:t>
+            </a:r>
+          </a:p>
+        </p:txBody>
+      </p:sp>
+      <p:sp>
+        <p:nvSpPr>
+          <p:cNvPr id="13" name="">
+            <a:extLst xmlns:a="http://schemas.openxmlformats.org/drawingml/2006/main">
+              <a:ext uri="{FF2B5EF4-FFF2-40B4-BE49-F238E27FC236}">
+                <a16:creationId xmlns:a16="http://schemas.microsoft.com/office/drawing/2014/main" id="{87592E3F-BC58-4611-82C2-1D4C2E79ADD3}"/>
+              </a:ext>
+            </a:extLst>
+          </p:cNvPr>
+          <p:cNvSpPr>
+            <a:spLocks xmlns:a="http://schemas.openxmlformats.org/drawingml/2006/main" noGrp="1"/>
+          </p:cNvSpPr>
+          <p:nvPr/>
+        </p:nvSpPr>
+        <p:spPr>
+          <a:xfrm xmlns:a="http://schemas.openxmlformats.org/drawingml/2006/main">
+            <a:off x="4476750" y="3028950"/>
+            <a:ext cx="2476500" cy="285750"/>
+          </a:xfrm>
+          <a:prstGeom xmlns:a="http://schemas.openxmlformats.org/drawingml/2006/main" prst="rect">
+            <a:avLst/>
+          </a:prstGeom>
+          <a:solidFill xmlns:a="http://schemas.openxmlformats.org/drawingml/2006/main">
+            <a:srgbClr val="000000">
+              <a:alpha val="0"/>
+            </a:srgbClr>
+          </a:solidFill>
+          <a:ln xmlns:a="http://schemas.openxmlformats.org/drawingml/2006/main" w="0">
+            <a:solidFill>
+              <a:srgbClr val="000000">
+                <a:alpha val="0"/>
+              </a:srgbClr>
+            </a:solidFill>
+            <a:prstDash val="solid"/>
+          </a:ln>
+        </p:spPr>
+        <p:txBody>
+          <a:bodyPr xmlns:a="http://schemas.openxmlformats.org/drawingml/2006/main" lIns="0" tIns="0" rIns="0" bIns="0" anchor="t"/>
+          <a:lstStyle xmlns:a="http://schemas.openxmlformats.org/drawingml/2006/main"/>
+          <a:p xmlns:a="http://schemas.openxmlformats.org/drawingml/2006/main">
+            <a:pPr algn="l">
+              <a:defRPr sz="1875" b="1">
+                <a:solidFill>
+                  <a:srgbClr val="0F172A"/>
+                </a:solidFill>
+                <a:latin typeface="Aptos"/>
+                <a:ea typeface="Aptos"/>
+                <a:cs typeface="Aptos"/>
+              </a:defRPr>
+            </a:pPr>
+            <a:r>
+              <a:rPr sz="1875" b="1">
+                <a:solidFill>
+                  <a:srgbClr val="0F172A"/>
+                </a:solidFill>
+                <a:latin typeface="Aptos"/>
+                <a:ea typeface="Aptos"/>
+                <a:cs typeface="Aptos"/>
+              </a:rPr>
+              <a:t>Lo que cambia con LLMs</a:t>
+            </a:r>
+          </a:p>
+        </p:txBody>
+      </p:sp>
+      <p:sp>
+        <p:nvSpPr>
+          <p:cNvPr id="14" name="">
+            <a:extLst xmlns:a="http://schemas.openxmlformats.org/drawingml/2006/main">
+              <a:ext uri="{FF2B5EF4-FFF2-40B4-BE49-F238E27FC236}">
+                <a16:creationId xmlns:a16="http://schemas.microsoft.com/office/drawing/2014/main" id="{B628DCE6-36EF-4F2D-9BE3-F8F2F535C8C2}"/>
+              </a:ext>
+            </a:extLst>
+          </p:cNvPr>
+          <p:cNvSpPr>
+            <a:spLocks xmlns:a="http://schemas.openxmlformats.org/drawingml/2006/main" noGrp="1"/>
+          </p:cNvSpPr>
+          <p:nvPr/>
+        </p:nvSpPr>
+        <p:spPr>
+          <a:xfrm xmlns:a="http://schemas.openxmlformats.org/drawingml/2006/main">
+            <a:off x="4476750" y="3638550"/>
+            <a:ext cx="2762250" cy="1143000"/>
+          </a:xfrm>
+          <a:prstGeom xmlns:a="http://schemas.openxmlformats.org/drawingml/2006/main" prst="rect">
+            <a:avLst/>
+          </a:prstGeom>
+          <a:solidFill xmlns:a="http://schemas.openxmlformats.org/drawingml/2006/main">
+            <a:srgbClr val="000000">
+              <a:alpha val="0"/>
+            </a:srgbClr>
+          </a:solidFill>
+          <a:ln xmlns:a="http://schemas.openxmlformats.org/drawingml/2006/main" w="0">
+            <a:solidFill>
+              <a:srgbClr val="000000">
+                <a:alpha val="0"/>
+              </a:srgbClr>
+            </a:solidFill>
+            <a:prstDash val="solid"/>
+          </a:ln>
+        </p:spPr>
+        <p:txBody>
+          <a:bodyPr xmlns:a="http://schemas.openxmlformats.org/drawingml/2006/main" lIns="0" tIns="0" rIns="0" bIns="0" anchor="t"/>
+          <a:lstStyle xmlns:a="http://schemas.openxmlformats.org/drawingml/2006/main"/>
+          <a:p xmlns:a="http://schemas.openxmlformats.org/drawingml/2006/main">
+            <a:pPr algn="l">
+              <a:defRPr sz="1500" b="0">
+                <a:solidFill>
+                  <a:srgbClr val="475569"/>
+                </a:solidFill>
+                <a:latin typeface="Aptos"/>
+                <a:ea typeface="Aptos"/>
+                <a:cs typeface="Aptos"/>
+              </a:defRPr>
+            </a:pPr>
+            <a:r>
+              <a:rPr sz="1500" b="0">
+                <a:solidFill>
+                  <a:srgbClr val="475569"/>
+                </a:solidFill>
+                <a:latin typeface="Aptos"/>
+                <a:ea typeface="Aptos"/>
+                <a:cs typeface="Aptos"/>
+              </a:rPr>
+              <a:t>La inferencia intensiva y sin gobierno puede convertir la inteligencia en un gasto recurrente muy difícil de justificar.</a:t>
+            </a:r>
+          </a:p>
+        </p:txBody>
+      </p:sp>
+      <p:sp>
+        <p:nvSpPr>
+          <p:cNvPr id="15" name="">
+            <a:extLst xmlns:a="http://schemas.openxmlformats.org/drawingml/2006/main">
+              <a:ext uri="{FF2B5EF4-FFF2-40B4-BE49-F238E27FC236}">
+                <a16:creationId xmlns:a16="http://schemas.microsoft.com/office/drawing/2014/main" id="{D8461592-96F2-4E46-8F85-B31C962B8060}"/>
+              </a:ext>
+            </a:extLst>
+          </p:cNvPr>
+          <p:cNvSpPr>
+            <a:spLocks xmlns:a="http://schemas.openxmlformats.org/drawingml/2006/main" noGrp="1"/>
+          </p:cNvSpPr>
+          <p:nvPr/>
+        </p:nvSpPr>
+        <p:spPr>
+          <a:xfrm xmlns:a="http://schemas.openxmlformats.org/drawingml/2006/main">
+            <a:off x="7943850" y="2286000"/>
+            <a:ext cx="3295650" cy="3048000"/>
+          </a:xfrm>
+          <a:prstGeom xmlns:a="http://schemas.openxmlformats.org/drawingml/2006/main" prst="rect">
+            <a:avLst/>
+          </a:prstGeom>
+          <a:solidFill xmlns:a="http://schemas.openxmlformats.org/drawingml/2006/main">
+            <a:srgbClr val="102A43"/>
+          </a:solidFill>
+          <a:ln xmlns:a="http://schemas.openxmlformats.org/drawingml/2006/main" w="11430">
+            <a:solidFill>
+              <a:srgbClr val="35536E"/>
+            </a:solidFill>
+            <a:prstDash val="solid"/>
+          </a:ln>
+        </p:spPr>
+      </p:sp>
+      <p:sp>
+        <p:nvSpPr>
+          <p:cNvPr id="16" name="">
+            <a:extLst xmlns:a="http://schemas.openxmlformats.org/drawingml/2006/main">
+              <a:ext uri="{FF2B5EF4-FFF2-40B4-BE49-F238E27FC236}">
+                <a16:creationId xmlns:a16="http://schemas.microsoft.com/office/drawing/2014/main" id="{F1132E63-0269-4D2B-B462-BA5161E4A428}"/>
+              </a:ext>
+            </a:extLst>
+          </p:cNvPr>
+          <p:cNvSpPr>
+            <a:spLocks xmlns:a="http://schemas.openxmlformats.org/drawingml/2006/main" noGrp="1"/>
+          </p:cNvSpPr>
+          <p:nvPr/>
+        </p:nvSpPr>
+        <p:spPr>
+          <a:xfrm xmlns:a="http://schemas.openxmlformats.org/drawingml/2006/main">
+            <a:off x="8172450" y="2514600"/>
+            <a:ext cx="1047750" cy="266700"/>
+          </a:xfrm>
+          <a:prstGeom xmlns:a="http://schemas.openxmlformats.org/drawingml/2006/main" prst="rect">
+            <a:avLst/>
+          </a:prstGeom>
+          <a:solidFill xmlns:a="http://schemas.openxmlformats.org/drawingml/2006/main">
+            <a:srgbClr val="2D6A4F"/>
+          </a:solidFill>
+          <a:ln xmlns:a="http://schemas.openxmlformats.org/drawingml/2006/main" w="0">
+            <a:solidFill>
+              <a:srgbClr val="2D6A4F"/>
+            </a:solidFill>
+            <a:prstDash val="solid"/>
+          </a:ln>
+        </p:spPr>
+      </p:sp>
+      <p:sp>
+        <p:nvSpPr>
+          <p:cNvPr id="17" name="">
+            <a:extLst xmlns:a="http://schemas.openxmlformats.org/drawingml/2006/main">
+              <a:ext uri="{FF2B5EF4-FFF2-40B4-BE49-F238E27FC236}">
+                <a16:creationId xmlns:a16="http://schemas.microsoft.com/office/drawing/2014/main" id="{BDC72259-6A89-45A2-A4D2-BC468F2EBE33}"/>
+              </a:ext>
+            </a:extLst>
+          </p:cNvPr>
+          <p:cNvSpPr>
+            <a:spLocks xmlns:a="http://schemas.openxmlformats.org/drawingml/2006/main" noGrp="1"/>
+          </p:cNvSpPr>
+          <p:nvPr/>
+        </p:nvSpPr>
+        <p:spPr>
+          <a:xfrm xmlns:a="http://schemas.openxmlformats.org/drawingml/2006/main">
+            <a:off x="8248650" y="2571750"/>
+            <a:ext cx="895350" cy="152400"/>
+          </a:xfrm>
+          <a:prstGeom xmlns:a="http://schemas.openxmlformats.org/drawingml/2006/main" prst="rect">
+            <a:avLst/>
+          </a:prstGeom>
+          <a:solidFill xmlns:a="http://schemas.openxmlformats.org/drawingml/2006/main">
+            <a:srgbClr val="000000">
+              <a:alpha val="0"/>
+            </a:srgbClr>
+          </a:solidFill>
+          <a:ln xmlns:a="http://schemas.openxmlformats.org/drawingml/2006/main" w="0">
+            <a:solidFill>
+              <a:srgbClr val="000000">
+                <a:alpha val="0"/>
+              </a:srgbClr>
+            </a:solidFill>
+            <a:prstDash val="solid"/>
+          </a:ln>
+        </p:spPr>
+        <p:txBody>
+          <a:bodyPr xmlns:a="http://schemas.openxmlformats.org/drawingml/2006/main" lIns="0" tIns="0" rIns="0" bIns="0" anchor="t"/>
+          <a:lstStyle xmlns:a="http://schemas.openxmlformats.org/drawingml/2006/main"/>
+          <a:p xmlns:a="http://schemas.openxmlformats.org/drawingml/2006/main">
+            <a:pPr algn="ctr">
+              <a:defRPr sz="900" b="1">
+                <a:solidFill>
+                  <a:srgbClr val="FFFDF8"/>
+                </a:solidFill>
+                <a:latin typeface="Aptos Mono"/>
+                <a:ea typeface="Aptos Mono"/>
+                <a:cs typeface="Aptos Mono"/>
+              </a:defRPr>
+            </a:pPr>
+            <a:r>
+              <a:rPr sz="900" b="1">
+                <a:solidFill>
+                  <a:srgbClr val="FFFDF8"/>
+                </a:solidFill>
+                <a:latin typeface="Aptos Mono"/>
+                <a:ea typeface="Aptos Mono"/>
+                <a:cs typeface="Aptos Mono"/>
+              </a:rPr>
+              <a:t>HÍBRIDO</a:t>
+            </a:r>
+          </a:p>
+        </p:txBody>
+      </p:sp>
+      <p:sp>
+        <p:nvSpPr>
+          <p:cNvPr id="18" name="">
+            <a:extLst xmlns:a="http://schemas.openxmlformats.org/drawingml/2006/main">
+              <a:ext uri="{FF2B5EF4-FFF2-40B4-BE49-F238E27FC236}">
+                <a16:creationId xmlns:a16="http://schemas.microsoft.com/office/drawing/2014/main" id="{09326A85-80D7-4D86-8128-06D32EE3972B}"/>
+              </a:ext>
+            </a:extLst>
+          </p:cNvPr>
+          <p:cNvSpPr>
+            <a:spLocks xmlns:a="http://schemas.openxmlformats.org/drawingml/2006/main" noGrp="1"/>
+          </p:cNvSpPr>
+          <p:nvPr/>
+        </p:nvSpPr>
+        <p:spPr>
+          <a:xfrm xmlns:a="http://schemas.openxmlformats.org/drawingml/2006/main">
+            <a:off x="8172450" y="3028950"/>
+            <a:ext cx="2476500" cy="285750"/>
+          </a:xfrm>
+          <a:prstGeom xmlns:a="http://schemas.openxmlformats.org/drawingml/2006/main" prst="rect">
+            <a:avLst/>
+          </a:prstGeom>
+          <a:solidFill xmlns:a="http://schemas.openxmlformats.org/drawingml/2006/main">
+            <a:srgbClr val="000000">
+              <a:alpha val="0"/>
+            </a:srgbClr>
+          </a:solidFill>
+          <a:ln xmlns:a="http://schemas.openxmlformats.org/drawingml/2006/main" w="0">
+            <a:solidFill>
+              <a:srgbClr val="000000">
+                <a:alpha val="0"/>
+              </a:srgbClr>
+            </a:solidFill>
+            <a:prstDash val="solid"/>
+          </a:ln>
+        </p:spPr>
+        <p:txBody>
+          <a:bodyPr xmlns:a="http://schemas.openxmlformats.org/drawingml/2006/main" lIns="0" tIns="0" rIns="0" bIns="0" anchor="t"/>
+          <a:lstStyle xmlns:a="http://schemas.openxmlformats.org/drawingml/2006/main"/>
+          <a:p xmlns:a="http://schemas.openxmlformats.org/drawingml/2006/main">
+            <a:pPr algn="l">
+              <a:defRPr sz="1875" b="1">
+                <a:solidFill>
+                  <a:srgbClr val="FFFDF8"/>
+                </a:solidFill>
+                <a:latin typeface="Aptos"/>
+                <a:ea typeface="Aptos"/>
+                <a:cs typeface="Aptos"/>
+              </a:defRPr>
+            </a:pPr>
+            <a:r>
+              <a:rPr sz="1875" b="1">
+                <a:solidFill>
+                  <a:srgbClr val="FFFDF8"/>
+                </a:solidFill>
+                <a:latin typeface="Aptos"/>
+                <a:ea typeface="Aptos"/>
+                <a:cs typeface="Aptos"/>
+              </a:rPr>
+              <a:t>La respuesta realista</a:t>
+            </a:r>
+          </a:p>
+        </p:txBody>
+      </p:sp>
+      <p:sp>
+        <p:nvSpPr>
+          <p:cNvPr id="19" name="">
+            <a:extLst xmlns:a="http://schemas.openxmlformats.org/drawingml/2006/main">
+              <a:ext uri="{FF2B5EF4-FFF2-40B4-BE49-F238E27FC236}">
+                <a16:creationId xmlns:a16="http://schemas.microsoft.com/office/drawing/2014/main" id="{1C5C3D36-251D-4402-9273-B8EEB6F8FF42}"/>
+              </a:ext>
+            </a:extLst>
+          </p:cNvPr>
+          <p:cNvSpPr>
+            <a:spLocks xmlns:a="http://schemas.openxmlformats.org/drawingml/2006/main" noGrp="1"/>
+          </p:cNvSpPr>
+          <p:nvPr/>
+        </p:nvSpPr>
+        <p:spPr>
+          <a:xfrm xmlns:a="http://schemas.openxmlformats.org/drawingml/2006/main">
+            <a:off x="8172450" y="3638550"/>
+            <a:ext cx="2762250" cy="1143000"/>
+          </a:xfrm>
+          <a:prstGeom xmlns:a="http://schemas.openxmlformats.org/drawingml/2006/main" prst="rect">
+            <a:avLst/>
+          </a:prstGeom>
+          <a:solidFill xmlns:a="http://schemas.openxmlformats.org/drawingml/2006/main">
+            <a:srgbClr val="000000">
+              <a:alpha val="0"/>
+            </a:srgbClr>
+          </a:solidFill>
+          <a:ln xmlns:a="http://schemas.openxmlformats.org/drawingml/2006/main" w="0">
+            <a:solidFill>
+              <a:srgbClr val="000000">
+                <a:alpha val="0"/>
+              </a:srgbClr>
+            </a:solidFill>
+            <a:prstDash val="solid"/>
+          </a:ln>
+        </p:spPr>
+        <p:txBody>
+          <a:bodyPr xmlns:a="http://schemas.openxmlformats.org/drawingml/2006/main" lIns="0" tIns="0" rIns="0" bIns="0" anchor="t"/>
+          <a:lstStyle xmlns:a="http://schemas.openxmlformats.org/drawingml/2006/main"/>
+          <a:p xmlns:a="http://schemas.openxmlformats.org/drawingml/2006/main">
+            <a:pPr algn="l">
+              <a:defRPr sz="1500" b="0">
+                <a:solidFill>
+                  <a:srgbClr val="D9E2EC"/>
+                </a:solidFill>
+                <a:latin typeface="Aptos"/>
+                <a:ea typeface="Aptos"/>
+                <a:cs typeface="Aptos"/>
+              </a:defRPr>
+            </a:pPr>
+            <a:r>
+              <a:rPr sz="1500" b="0">
+                <a:solidFill>
+                  <a:srgbClr val="D9E2EC"/>
+                </a:solidFill>
+                <a:latin typeface="Aptos"/>
+                <a:ea typeface="Aptos"/>
+                <a:cs typeface="Aptos"/>
+              </a:rPr>
+              <a:t>Segmentar workloads: cloud para unos casos, infraestructura controlada para otros, con disciplina económica y operativa.</a:t>
+            </a:r>
+          </a:p>
+        </p:txBody>
+      </p:sp>
+      <p:sp>
+        <p:nvSpPr>
+          <p:cNvPr id="20" name="">
+            <a:extLst xmlns:a="http://schemas.openxmlformats.org/drawingml/2006/main">
+              <a:ext uri="{FF2B5EF4-FFF2-40B4-BE49-F238E27FC236}">
+                <a16:creationId xmlns:a16="http://schemas.microsoft.com/office/drawing/2014/main" id="{1AD28556-2CA3-4C5E-88F8-ED7CC1E29B9F}"/>
+              </a:ext>
+            </a:extLst>
+          </p:cNvPr>
+          <p:cNvSpPr>
+            <a:spLocks xmlns:a="http://schemas.openxmlformats.org/drawingml/2006/main" noGrp="1"/>
+          </p:cNvSpPr>
+          <p:nvPr/>
+        </p:nvSpPr>
+        <p:spPr>
+          <a:xfrm xmlns:a="http://schemas.openxmlformats.org/drawingml/2006/main">
+            <a:off x="552450" y="5867400"/>
+            <a:ext cx="11068050" cy="438150"/>
+          </a:xfrm>
+          <a:prstGeom xmlns:a="http://schemas.openxmlformats.org/drawingml/2006/main" prst="rect">
+            <a:avLst/>
+          </a:prstGeom>
+          <a:solidFill xmlns:a="http://schemas.openxmlformats.org/drawingml/2006/main">
+            <a:srgbClr val="EADBC8"/>
+          </a:solidFill>
+          <a:ln xmlns:a="http://schemas.openxmlformats.org/drawingml/2006/main" w="0">
+            <a:solidFill>
+              <a:srgbClr val="DDD3C2"/>
+            </a:solidFill>
+            <a:prstDash val="solid"/>
+          </a:ln>
+        </p:spPr>
+      </p:sp>
+      <p:sp>
+        <p:nvSpPr>
+          <p:cNvPr id="21" name="">
+            <a:extLst xmlns:a="http://schemas.openxmlformats.org/drawingml/2006/main">
+              <a:ext uri="{FF2B5EF4-FFF2-40B4-BE49-F238E27FC236}">
+                <a16:creationId xmlns:a16="http://schemas.microsoft.com/office/drawing/2014/main" id="{C2CEC3C3-1AB1-4BE2-8353-8CF0AD43388A}"/>
+              </a:ext>
+            </a:extLst>
+          </p:cNvPr>
+          <p:cNvSpPr>
+            <a:spLocks xmlns:a="http://schemas.openxmlformats.org/drawingml/2006/main" noGrp="1"/>
+          </p:cNvSpPr>
+          <p:nvPr/>
+        </p:nvSpPr>
+        <p:spPr>
+          <a:xfrm xmlns:a="http://schemas.openxmlformats.org/drawingml/2006/main">
+            <a:off x="800100" y="5991225"/>
+            <a:ext cx="10572750" cy="209550"/>
+          </a:xfrm>
+          <a:prstGeom xmlns:a="http://schemas.openxmlformats.org/drawingml/2006/main" prst="rect">
+            <a:avLst/>
+          </a:prstGeom>
+          <a:solidFill xmlns:a="http://schemas.openxmlformats.org/drawingml/2006/main">
+            <a:srgbClr val="000000">
+              <a:alpha val="0"/>
+            </a:srgbClr>
+          </a:solidFill>
+          <a:ln xmlns:a="http://schemas.openxmlformats.org/drawingml/2006/main" w="0">
+            <a:solidFill>
+              <a:srgbClr val="000000">
+                <a:alpha val="0"/>
+              </a:srgbClr>
+            </a:solidFill>
+            <a:prstDash val="solid"/>
+          </a:ln>
+        </p:spPr>
+        <p:txBody>
+          <a:bodyPr xmlns:a="http://schemas.openxmlformats.org/drawingml/2006/main" lIns="0" tIns="0" rIns="0" bIns="0" anchor="t"/>
+          <a:lstStyle xmlns:a="http://schemas.openxmlformats.org/drawingml/2006/main"/>
+          <a:p xmlns:a="http://schemas.openxmlformats.org/drawingml/2006/main">
+            <a:pPr algn="l">
+              <a:defRPr sz="1575" b="1">
+                <a:solidFill>
+                  <a:srgbClr val="0F172A"/>
+                </a:solidFill>
+                <a:latin typeface="Aptos Display"/>
+                <a:ea typeface="Aptos Display"/>
+                <a:cs typeface="Aptos Display"/>
+              </a:defRPr>
+            </a:pPr>
+            <a:r>
+              <a:rPr sz="1575" b="1">
+                <a:solidFill>
+                  <a:srgbClr val="0F172A"/>
+                </a:solidFill>
+                <a:latin typeface="Aptos Display"/>
+                <a:ea typeface="Aptos Display"/>
+                <a:cs typeface="Aptos Display"/>
+              </a:rPr>
+              <a:t>Mi recomendación: antes de hablar de volver a on-premise, midan, segmenten y gobiernen el consumo de IA.</a:t>
+            </a:r>
+          </a:p>
+        </p:txBody>
+      </p:sp>
+      <p:sp>
+        <p:nvSpPr>
+          <p:cNvPr id="22" name="">
+            <a:extLst xmlns:a="http://schemas.openxmlformats.org/drawingml/2006/main">
+              <a:ext uri="{FF2B5EF4-FFF2-40B4-BE49-F238E27FC236}">
+                <a16:creationId xmlns:a16="http://schemas.microsoft.com/office/drawing/2014/main" id="{65958BDC-82EB-4071-99AB-A11FF5303A43}"/>
+              </a:ext>
+            </a:extLst>
+          </p:cNvPr>
+          <p:cNvSpPr>
+            <a:spLocks xmlns:a="http://schemas.openxmlformats.org/drawingml/2006/main" noGrp="1"/>
+          </p:cNvSpPr>
+          <p:nvPr/>
+        </p:nvSpPr>
+        <p:spPr>
+          <a:xfrm xmlns:a="http://schemas.openxmlformats.org/drawingml/2006/main">
+            <a:off x="552450" y="6534150"/>
+            <a:ext cx="10477500" cy="171450"/>
+          </a:xfrm>
+          <a:prstGeom xmlns:a="http://schemas.openxmlformats.org/drawingml/2006/main" prst="rect">
+            <a:avLst/>
+          </a:prstGeom>
+          <a:solidFill xmlns:a="http://schemas.openxmlformats.org/drawingml/2006/main">
+            <a:srgbClr val="000000">
+              <a:alpha val="0"/>
+            </a:srgbClr>
+          </a:solidFill>
+          <a:ln xmlns:a="http://schemas.openxmlformats.org/drawingml/2006/main" w="0">
+            <a:solidFill>
+              <a:srgbClr val="000000">
+                <a:alpha val="0"/>
+              </a:srgbClr>
+            </a:solidFill>
+            <a:prstDash val="solid"/>
+          </a:ln>
+        </p:spPr>
+        <p:txBody>
+          <a:bodyPr xmlns:a="http://schemas.openxmlformats.org/drawingml/2006/main" lIns="0" tIns="0" rIns="0" bIns="0" anchor="t"/>
+          <a:lstStyle xmlns:a="http://schemas.openxmlformats.org/drawingml/2006/main"/>
+          <a:p xmlns:a="http://schemas.openxmlformats.org/drawingml/2006/main">
+            <a:pPr algn="l">
+              <a:defRPr sz="825" b="0">
+                <a:solidFill>
+                  <a:srgbClr val="6B7280"/>
+                </a:solidFill>
+                <a:latin typeface="Aptos"/>
+                <a:ea typeface="Aptos"/>
+                <a:cs typeface="Aptos"/>
+              </a:defRPr>
+            </a:pPr>
+            <a:r>
+              <a:rPr sz="825" b="0">
+                <a:solidFill>
+                  <a:srgbClr val="6B7280"/>
+                </a:solidFill>
+                <a:latin typeface="Aptos"/>
+                <a:ea typeface="Aptos"/>
+                <a:cs typeface="Aptos"/>
+              </a:rPr>
+              <a:t>La arquitectura correcta empieza con FinOps, observabilidad y criterio por workload.</a:t>
+            </a:r>
+          </a:p>
+        </p:txBody>
+      </p:sp>
+      <p:sp>
+        <p:nvSpPr>
+          <p:cNvPr id="23" name="">
+            <a:extLst xmlns:a="http://schemas.openxmlformats.org/drawingml/2006/main">
+              <a:ext uri="{FF2B5EF4-FFF2-40B4-BE49-F238E27FC236}">
+                <a16:creationId xmlns:a16="http://schemas.microsoft.com/office/drawing/2014/main" id="{23521C98-164F-4A5C-99BC-1291382FA79C}"/>
+              </a:ext>
+            </a:extLst>
+          </p:cNvPr>
+          <p:cNvSpPr>
+            <a:spLocks xmlns:a="http://schemas.openxmlformats.org/drawingml/2006/main" noGrp="1"/>
+          </p:cNvSpPr>
+          <p:nvPr/>
+        </p:nvSpPr>
+        <p:spPr>
+          <a:xfrm xmlns:a="http://schemas.openxmlformats.org/drawingml/2006/main">
+            <a:off x="11334750" y="6496050"/>
+            <a:ext cx="381000" cy="228600"/>
+          </a:xfrm>
+          <a:prstGeom xmlns:a="http://schemas.openxmlformats.org/drawingml/2006/main" prst="rect">
+            <a:avLst/>
+          </a:prstGeom>
+          <a:solidFill xmlns:a="http://schemas.openxmlformats.org/drawingml/2006/main">
+            <a:srgbClr val="000000">
+              <a:alpha val="0"/>
+            </a:srgbClr>
+          </a:solidFill>
+          <a:ln xmlns:a="http://schemas.openxmlformats.org/drawingml/2006/main" w="0">
+            <a:solidFill>
+              <a:srgbClr val="000000">
+                <a:alpha val="0"/>
+              </a:srgbClr>
+            </a:solidFill>
+            <a:prstDash val="solid"/>
+          </a:ln>
+        </p:spPr>
+        <p:txBody>
+          <a:bodyPr xmlns:a="http://schemas.openxmlformats.org/drawingml/2006/main" lIns="0" tIns="0" rIns="0" bIns="0" anchor="t"/>
+          <a:lstStyle xmlns:a="http://schemas.openxmlformats.org/drawingml/2006/main"/>
+          <a:p xmlns:a="http://schemas.openxmlformats.org/drawingml/2006/main">
+            <a:pPr algn="r">
+              <a:defRPr sz="900" b="1">
+                <a:solidFill>
+                  <a:srgbClr val="C75C2A"/>
+                </a:solidFill>
+                <a:latin typeface="Aptos Mono"/>
+                <a:ea typeface="Aptos Mono"/>
+                <a:cs typeface="Aptos Mono"/>
+              </a:defRPr>
+            </a:pPr>
+            <a:r>
+              <a:rPr sz="900" b="1">
+                <a:solidFill>
+                  <a:srgbClr val="C75C2A"/>
+                </a:solidFill>
+                <a:latin typeface="Aptos Mono"/>
+                <a:ea typeface="Aptos Mono"/>
+                <a:cs typeface="Aptos Mono"/>
+              </a:rPr>
               <a:t>9</a:t>
             </a:r>
           </a:p>
@@ -15330,7 +17459,7 @@
     </p:spTree>
     <p:extLst>
       <p:ext uri="{BB962C8B-B14F-4D97-AF65-F5344CB8AC3E}">
-        <p14:creationId xmlns:p14="http://schemas.microsoft.com/office/powerpoint/2010/main" val="836428822"/>
+        <p14:creationId xmlns:p14="http://schemas.microsoft.com/office/powerpoint/2010/main" val="325838645"/>
       </p:ext>
     </p:extLst>
   </p:cSld>
